--- a/docs/plots/carbo/jx_carbo_linsubhr_egfrdisc_aki2.pptx
+++ b/docs/plots/carbo/jx_carbo_linsubhr_egfrdisc_aki2.pptx
@@ -3003,494 +3003,512 @@
           <p:spPr>
             <a:xfrm>
               <a:off x="1172049" y="2073503"/>
-              <a:ext cx="7090630" cy="3299788"/>
+              <a:ext cx="7090630" cy="3246833"/>
             </a:xfrm>
             <a:custGeom>
               <a:avLst/>
               <a:pathLst>
-                <a:path w="7090630" h="3299788">
+                <a:path w="7090630" h="3246833">
                   <a:moveTo>
-                    <a:pt x="2812410" y="0"/>
+                    <a:pt x="2390939" y="0"/>
                   </a:moveTo>
                   <a:lnTo>
-                    <a:pt x="2864901" y="124254"/>
-                  </a:lnTo>
-                  <a:lnTo>
-                    <a:pt x="2936523" y="285651"/>
-                  </a:lnTo>
-                  <a:lnTo>
-                    <a:pt x="3008146" y="439295"/>
-                  </a:lnTo>
-                  <a:lnTo>
-                    <a:pt x="3079768" y="585557"/>
-                  </a:lnTo>
-                  <a:lnTo>
-                    <a:pt x="3151391" y="724792"/>
-                  </a:lnTo>
-                  <a:lnTo>
-                    <a:pt x="3223013" y="857338"/>
-                  </a:lnTo>
-                  <a:lnTo>
-                    <a:pt x="3294636" y="983516"/>
-                  </a:lnTo>
-                  <a:lnTo>
-                    <a:pt x="3366258" y="1103633"/>
-                  </a:lnTo>
-                  <a:lnTo>
-                    <a:pt x="3437881" y="1217979"/>
-                  </a:lnTo>
-                  <a:lnTo>
-                    <a:pt x="3509503" y="1326831"/>
-                  </a:lnTo>
-                  <a:lnTo>
-                    <a:pt x="3581126" y="1430454"/>
-                  </a:lnTo>
-                  <a:lnTo>
-                    <a:pt x="3652748" y="1529098"/>
-                  </a:lnTo>
-                  <a:lnTo>
-                    <a:pt x="3724371" y="1623004"/>
-                  </a:lnTo>
-                  <a:lnTo>
-                    <a:pt x="3795993" y="1712398"/>
-                  </a:lnTo>
-                  <a:lnTo>
-                    <a:pt x="3867616" y="1797497"/>
-                  </a:lnTo>
-                  <a:lnTo>
-                    <a:pt x="3939238" y="1878508"/>
-                  </a:lnTo>
-                  <a:lnTo>
-                    <a:pt x="4010861" y="1955628"/>
-                  </a:lnTo>
-                  <a:lnTo>
-                    <a:pt x="4082483" y="2029042"/>
-                  </a:lnTo>
-                  <a:lnTo>
-                    <a:pt x="4154106" y="2098929"/>
-                  </a:lnTo>
-                  <a:lnTo>
-                    <a:pt x="4225729" y="2165458"/>
-                  </a:lnTo>
-                  <a:lnTo>
-                    <a:pt x="4297351" y="2228792"/>
-                  </a:lnTo>
-                  <a:lnTo>
-                    <a:pt x="4368974" y="2289083"/>
-                  </a:lnTo>
-                  <a:lnTo>
-                    <a:pt x="4440596" y="2346477"/>
-                  </a:lnTo>
-                  <a:lnTo>
-                    <a:pt x="4512219" y="2401114"/>
-                  </a:lnTo>
-                  <a:lnTo>
-                    <a:pt x="4583841" y="2453126"/>
-                  </a:lnTo>
-                  <a:lnTo>
-                    <a:pt x="4655464" y="2502639"/>
-                  </a:lnTo>
-                  <a:lnTo>
-                    <a:pt x="4727086" y="2549773"/>
-                  </a:lnTo>
-                  <a:lnTo>
-                    <a:pt x="4798709" y="2594644"/>
-                  </a:lnTo>
-                  <a:lnTo>
-                    <a:pt x="4870331" y="2637358"/>
-                  </a:lnTo>
-                  <a:lnTo>
-                    <a:pt x="4941954" y="2654968"/>
-                  </a:lnTo>
-                  <a:lnTo>
-                    <a:pt x="5013576" y="2656127"/>
-                  </a:lnTo>
-                  <a:lnTo>
-                    <a:pt x="5085199" y="2657285"/>
-                  </a:lnTo>
-                  <a:lnTo>
-                    <a:pt x="5156821" y="2658442"/>
-                  </a:lnTo>
-                  <a:lnTo>
-                    <a:pt x="5228444" y="2659596"/>
-                  </a:lnTo>
-                  <a:lnTo>
-                    <a:pt x="5300066" y="2660750"/>
-                  </a:lnTo>
-                  <a:lnTo>
-                    <a:pt x="5371689" y="2661901"/>
-                  </a:lnTo>
-                  <a:lnTo>
-                    <a:pt x="5443311" y="2663051"/>
-                  </a:lnTo>
-                  <a:lnTo>
-                    <a:pt x="5514934" y="2664200"/>
-                  </a:lnTo>
-                  <a:lnTo>
-                    <a:pt x="5586557" y="2665346"/>
-                  </a:lnTo>
-                  <a:lnTo>
-                    <a:pt x="5658179" y="2666491"/>
-                  </a:lnTo>
-                  <a:lnTo>
-                    <a:pt x="5729802" y="2667635"/>
-                  </a:lnTo>
-                  <a:lnTo>
-                    <a:pt x="5801424" y="2668777"/>
-                  </a:lnTo>
-                  <a:lnTo>
-                    <a:pt x="5873047" y="2669917"/>
-                  </a:lnTo>
-                  <a:lnTo>
-                    <a:pt x="5944669" y="2671056"/>
-                  </a:lnTo>
-                  <a:lnTo>
-                    <a:pt x="6016292" y="2672193"/>
-                  </a:lnTo>
-                  <a:lnTo>
-                    <a:pt x="6087914" y="2673329"/>
-                  </a:lnTo>
-                  <a:lnTo>
-                    <a:pt x="6159537" y="2674463"/>
-                  </a:lnTo>
-                  <a:lnTo>
-                    <a:pt x="6231159" y="2675595"/>
-                  </a:lnTo>
-                  <a:lnTo>
-                    <a:pt x="6302782" y="2676726"/>
-                  </a:lnTo>
-                  <a:lnTo>
-                    <a:pt x="6374404" y="2677855"/>
-                  </a:lnTo>
-                  <a:lnTo>
-                    <a:pt x="6446027" y="2678983"/>
-                  </a:lnTo>
-                  <a:lnTo>
-                    <a:pt x="6517649" y="2680109"/>
-                  </a:lnTo>
-                  <a:lnTo>
-                    <a:pt x="6589272" y="2681233"/>
-                  </a:lnTo>
-                  <a:lnTo>
-                    <a:pt x="6660894" y="2682356"/>
-                  </a:lnTo>
-                  <a:lnTo>
-                    <a:pt x="6732517" y="2683478"/>
-                  </a:lnTo>
-                  <a:lnTo>
-                    <a:pt x="6804139" y="2684597"/>
-                  </a:lnTo>
-                  <a:lnTo>
-                    <a:pt x="6875762" y="2685716"/>
-                  </a:lnTo>
-                  <a:lnTo>
-                    <a:pt x="6947385" y="2686832"/>
-                  </a:lnTo>
-                  <a:lnTo>
-                    <a:pt x="7019007" y="2687947"/>
-                  </a:lnTo>
-                  <a:lnTo>
-                    <a:pt x="7090630" y="2689061"/>
-                  </a:lnTo>
-                  <a:lnTo>
-                    <a:pt x="7090630" y="3299788"/>
-                  </a:lnTo>
-                  <a:lnTo>
-                    <a:pt x="7019007" y="3290505"/>
-                  </a:lnTo>
-                  <a:lnTo>
-                    <a:pt x="6947385" y="3280752"/>
-                  </a:lnTo>
-                  <a:lnTo>
-                    <a:pt x="6875762" y="3270508"/>
-                  </a:lnTo>
-                  <a:lnTo>
-                    <a:pt x="6804139" y="3259746"/>
-                  </a:lnTo>
-                  <a:lnTo>
-                    <a:pt x="6732517" y="3248442"/>
-                  </a:lnTo>
-                  <a:lnTo>
-                    <a:pt x="6660894" y="3236567"/>
-                  </a:lnTo>
-                  <a:lnTo>
-                    <a:pt x="6589272" y="3224092"/>
-                  </a:lnTo>
-                  <a:lnTo>
-                    <a:pt x="6517649" y="3210989"/>
-                  </a:lnTo>
-                  <a:lnTo>
-                    <a:pt x="6446027" y="3197223"/>
-                  </a:lnTo>
-                  <a:lnTo>
-                    <a:pt x="6374404" y="3182764"/>
-                  </a:lnTo>
-                  <a:lnTo>
-                    <a:pt x="6302782" y="3167574"/>
-                  </a:lnTo>
-                  <a:lnTo>
-                    <a:pt x="6231159" y="3151618"/>
-                  </a:lnTo>
-                  <a:lnTo>
-                    <a:pt x="6159537" y="3134856"/>
-                  </a:lnTo>
-                  <a:lnTo>
-                    <a:pt x="6087914" y="3117249"/>
-                  </a:lnTo>
-                  <a:lnTo>
-                    <a:pt x="6016292" y="3098753"/>
-                  </a:lnTo>
-                  <a:lnTo>
-                    <a:pt x="5944669" y="3079324"/>
-                  </a:lnTo>
-                  <a:lnTo>
-                    <a:pt x="5873047" y="3058914"/>
-                  </a:lnTo>
-                  <a:lnTo>
-                    <a:pt x="5801424" y="3037474"/>
-                  </a:lnTo>
-                  <a:lnTo>
-                    <a:pt x="5729802" y="3014952"/>
-                  </a:lnTo>
-                  <a:lnTo>
-                    <a:pt x="5658179" y="2991294"/>
-                  </a:lnTo>
-                  <a:lnTo>
-                    <a:pt x="5586557" y="2966441"/>
-                  </a:lnTo>
-                  <a:lnTo>
-                    <a:pt x="5514934" y="2940334"/>
-                  </a:lnTo>
-                  <a:lnTo>
-                    <a:pt x="5443311" y="2912910"/>
-                  </a:lnTo>
-                  <a:lnTo>
-                    <a:pt x="5371689" y="2884102"/>
-                  </a:lnTo>
-                  <a:lnTo>
-                    <a:pt x="5300066" y="2853840"/>
-                  </a:lnTo>
-                  <a:lnTo>
-                    <a:pt x="5228444" y="2822051"/>
-                  </a:lnTo>
-                  <a:lnTo>
-                    <a:pt x="5156821" y="2788657"/>
-                  </a:lnTo>
-                  <a:lnTo>
-                    <a:pt x="5085199" y="2753578"/>
-                  </a:lnTo>
-                  <a:lnTo>
-                    <a:pt x="5013576" y="2716729"/>
-                  </a:lnTo>
-                  <a:lnTo>
-                    <a:pt x="4941954" y="2678020"/>
-                  </a:lnTo>
-                  <a:lnTo>
-                    <a:pt x="4870331" y="2653806"/>
-                  </a:lnTo>
-                  <a:lnTo>
-                    <a:pt x="4798709" y="2652643"/>
-                  </a:lnTo>
-                  <a:lnTo>
-                    <a:pt x="4727086" y="2651479"/>
-                  </a:lnTo>
-                  <a:lnTo>
-                    <a:pt x="4655464" y="2650313"/>
-                  </a:lnTo>
-                  <a:lnTo>
-                    <a:pt x="4583841" y="2649145"/>
-                  </a:lnTo>
-                  <a:lnTo>
-                    <a:pt x="4512219" y="2647975"/>
-                  </a:lnTo>
-                  <a:lnTo>
-                    <a:pt x="4440596" y="2646804"/>
-                  </a:lnTo>
-                  <a:lnTo>
-                    <a:pt x="4368974" y="2645631"/>
-                  </a:lnTo>
-                  <a:lnTo>
-                    <a:pt x="4297351" y="2644457"/>
-                  </a:lnTo>
-                  <a:lnTo>
-                    <a:pt x="4225729" y="2643281"/>
-                  </a:lnTo>
-                  <a:lnTo>
-                    <a:pt x="4154106" y="2642103"/>
-                  </a:lnTo>
-                  <a:lnTo>
-                    <a:pt x="4082483" y="2640924"/>
-                  </a:lnTo>
-                  <a:lnTo>
-                    <a:pt x="4010861" y="2639743"/>
-                  </a:lnTo>
-                  <a:lnTo>
-                    <a:pt x="3939238" y="2638560"/>
-                  </a:lnTo>
-                  <a:lnTo>
-                    <a:pt x="3867616" y="2637376"/>
-                  </a:lnTo>
-                  <a:lnTo>
-                    <a:pt x="3795993" y="2636190"/>
-                  </a:lnTo>
-                  <a:lnTo>
-                    <a:pt x="3724371" y="2635003"/>
-                  </a:lnTo>
-                  <a:lnTo>
-                    <a:pt x="3652748" y="2633813"/>
-                  </a:lnTo>
-                  <a:lnTo>
-                    <a:pt x="3581126" y="2632622"/>
-                  </a:lnTo>
-                  <a:lnTo>
-                    <a:pt x="3509503" y="2631430"/>
-                  </a:lnTo>
-                  <a:lnTo>
-                    <a:pt x="3437881" y="2630236"/>
-                  </a:lnTo>
-                  <a:lnTo>
-                    <a:pt x="3366258" y="2629040"/>
-                  </a:lnTo>
-                  <a:lnTo>
-                    <a:pt x="3294636" y="2627842"/>
-                  </a:lnTo>
-                  <a:lnTo>
-                    <a:pt x="3223013" y="2626643"/>
-                  </a:lnTo>
-                  <a:lnTo>
-                    <a:pt x="3151391" y="2625442"/>
-                  </a:lnTo>
-                  <a:lnTo>
-                    <a:pt x="3079768" y="2624239"/>
-                  </a:lnTo>
-                  <a:lnTo>
-                    <a:pt x="3008146" y="2623035"/>
-                  </a:lnTo>
-                  <a:lnTo>
-                    <a:pt x="2936523" y="2621829"/>
-                  </a:lnTo>
-                  <a:lnTo>
-                    <a:pt x="2864901" y="2620621"/>
-                  </a:lnTo>
-                  <a:lnTo>
-                    <a:pt x="2793278" y="2619411"/>
-                  </a:lnTo>
-                  <a:lnTo>
-                    <a:pt x="2721655" y="2618200"/>
-                  </a:lnTo>
-                  <a:lnTo>
-                    <a:pt x="2650033" y="2616988"/>
-                  </a:lnTo>
-                  <a:lnTo>
-                    <a:pt x="2578410" y="2615773"/>
-                  </a:lnTo>
-                  <a:lnTo>
-                    <a:pt x="2506788" y="2614557"/>
-                  </a:lnTo>
-                  <a:lnTo>
-                    <a:pt x="2435165" y="2613339"/>
-                  </a:lnTo>
-                  <a:lnTo>
-                    <a:pt x="2363543" y="2612119"/>
-                  </a:lnTo>
-                  <a:lnTo>
-                    <a:pt x="2291920" y="2610898"/>
-                  </a:lnTo>
-                  <a:lnTo>
-                    <a:pt x="2220298" y="2609675"/>
-                  </a:lnTo>
-                  <a:lnTo>
-                    <a:pt x="2148675" y="2608450"/>
-                  </a:lnTo>
-                  <a:lnTo>
-                    <a:pt x="2077053" y="2607224"/>
-                  </a:lnTo>
-                  <a:lnTo>
-                    <a:pt x="2005430" y="2605995"/>
-                  </a:lnTo>
-                  <a:lnTo>
-                    <a:pt x="1933808" y="2604766"/>
-                  </a:lnTo>
-                  <a:lnTo>
-                    <a:pt x="1862185" y="2603534"/>
-                  </a:lnTo>
-                  <a:lnTo>
-                    <a:pt x="1790563" y="2602301"/>
-                  </a:lnTo>
-                  <a:lnTo>
-                    <a:pt x="1718940" y="2601065"/>
-                  </a:lnTo>
-                  <a:lnTo>
-                    <a:pt x="1647318" y="2599829"/>
-                  </a:lnTo>
-                  <a:lnTo>
-                    <a:pt x="1575695" y="2598590"/>
-                  </a:lnTo>
-                  <a:lnTo>
-                    <a:pt x="1504073" y="2597350"/>
-                  </a:lnTo>
-                  <a:lnTo>
-                    <a:pt x="1432450" y="2596108"/>
-                  </a:lnTo>
-                  <a:lnTo>
-                    <a:pt x="1360827" y="2594864"/>
-                  </a:lnTo>
-                  <a:lnTo>
-                    <a:pt x="1289205" y="2593618"/>
-                  </a:lnTo>
-                  <a:lnTo>
-                    <a:pt x="1217582" y="2592371"/>
-                  </a:lnTo>
-                  <a:lnTo>
-                    <a:pt x="1145960" y="2591122"/>
-                  </a:lnTo>
-                  <a:lnTo>
-                    <a:pt x="1074337" y="2589871"/>
-                  </a:lnTo>
-                  <a:lnTo>
-                    <a:pt x="1002715" y="2588619"/>
-                  </a:lnTo>
-                  <a:lnTo>
-                    <a:pt x="931092" y="2587365"/>
-                  </a:lnTo>
-                  <a:lnTo>
-                    <a:pt x="859470" y="2586109"/>
-                  </a:lnTo>
-                  <a:lnTo>
-                    <a:pt x="787847" y="2584851"/>
-                  </a:lnTo>
-                  <a:lnTo>
-                    <a:pt x="716225" y="2583591"/>
-                  </a:lnTo>
-                  <a:lnTo>
-                    <a:pt x="644602" y="2582330"/>
-                  </a:lnTo>
-                  <a:lnTo>
-                    <a:pt x="572980" y="2581067"/>
-                  </a:lnTo>
-                  <a:lnTo>
-                    <a:pt x="501357" y="2579802"/>
-                  </a:lnTo>
-                  <a:lnTo>
-                    <a:pt x="429735" y="2578535"/>
-                  </a:lnTo>
-                  <a:lnTo>
-                    <a:pt x="358112" y="2577267"/>
-                  </a:lnTo>
-                  <a:lnTo>
-                    <a:pt x="286490" y="2575997"/>
-                  </a:lnTo>
-                  <a:lnTo>
-                    <a:pt x="214867" y="2574725"/>
-                  </a:lnTo>
-                  <a:lnTo>
-                    <a:pt x="143245" y="2573451"/>
-                  </a:lnTo>
-                  <a:lnTo>
-                    <a:pt x="71622" y="2572176"/>
-                  </a:lnTo>
-                  <a:lnTo>
-                    <a:pt x="0" y="2570898"/>
+                    <a:pt x="2435165" y="87687"/>
+                  </a:lnTo>
+                  <a:lnTo>
+                    <a:pt x="2506788" y="223993"/>
+                  </a:lnTo>
+                  <a:lnTo>
+                    <a:pt x="2578410" y="354829"/>
+                  </a:lnTo>
+                  <a:lnTo>
+                    <a:pt x="2650033" y="480413"/>
+                  </a:lnTo>
+                  <a:lnTo>
+                    <a:pt x="2721655" y="600956"/>
+                  </a:lnTo>
+                  <a:lnTo>
+                    <a:pt x="2793278" y="716662"/>
+                  </a:lnTo>
+                  <a:lnTo>
+                    <a:pt x="2864901" y="827723"/>
+                  </a:lnTo>
+                  <a:lnTo>
+                    <a:pt x="2936523" y="934327"/>
+                  </a:lnTo>
+                  <a:lnTo>
+                    <a:pt x="3008146" y="1036652"/>
+                  </a:lnTo>
+                  <a:lnTo>
+                    <a:pt x="3079768" y="1134870"/>
+                  </a:lnTo>
+                  <a:lnTo>
+                    <a:pt x="3151391" y="1229146"/>
+                  </a:lnTo>
+                  <a:lnTo>
+                    <a:pt x="3223013" y="1319638"/>
+                  </a:lnTo>
+                  <a:lnTo>
+                    <a:pt x="3294636" y="1406498"/>
+                  </a:lnTo>
+                  <a:lnTo>
+                    <a:pt x="3366258" y="1489871"/>
+                  </a:lnTo>
+                  <a:lnTo>
+                    <a:pt x="3437881" y="1569899"/>
+                  </a:lnTo>
+                  <a:lnTo>
+                    <a:pt x="3509503" y="1646714"/>
+                  </a:lnTo>
+                  <a:lnTo>
+                    <a:pt x="3581126" y="1720446"/>
+                  </a:lnTo>
+                  <a:lnTo>
+                    <a:pt x="3652748" y="1791219"/>
+                  </a:lnTo>
+                  <a:lnTo>
+                    <a:pt x="3724371" y="1859151"/>
+                  </a:lnTo>
+                  <a:lnTo>
+                    <a:pt x="3795993" y="1924357"/>
+                  </a:lnTo>
+                  <a:lnTo>
+                    <a:pt x="3867616" y="1986946"/>
+                  </a:lnTo>
+                  <a:lnTo>
+                    <a:pt x="3939238" y="2047022"/>
+                  </a:lnTo>
+                  <a:lnTo>
+                    <a:pt x="4010861" y="2104687"/>
+                  </a:lnTo>
+                  <a:lnTo>
+                    <a:pt x="4082483" y="2160038"/>
+                  </a:lnTo>
+                  <a:lnTo>
+                    <a:pt x="4154106" y="2213167"/>
+                  </a:lnTo>
+                  <a:lnTo>
+                    <a:pt x="4225729" y="2264164"/>
+                  </a:lnTo>
+                  <a:lnTo>
+                    <a:pt x="4297351" y="2313114"/>
+                  </a:lnTo>
+                  <a:lnTo>
+                    <a:pt x="4368974" y="2360099"/>
+                  </a:lnTo>
+                  <a:lnTo>
+                    <a:pt x="4440596" y="2405198"/>
+                  </a:lnTo>
+                  <a:lnTo>
+                    <a:pt x="4512219" y="2448487"/>
+                  </a:lnTo>
+                  <a:lnTo>
+                    <a:pt x="4583841" y="2490039"/>
+                  </a:lnTo>
+                  <a:lnTo>
+                    <a:pt x="4655464" y="2529923"/>
+                  </a:lnTo>
+                  <a:lnTo>
+                    <a:pt x="4727086" y="2568206"/>
+                  </a:lnTo>
+                  <a:lnTo>
+                    <a:pt x="4798709" y="2604953"/>
+                  </a:lnTo>
+                  <a:lnTo>
+                    <a:pt x="4870331" y="2640225"/>
+                  </a:lnTo>
+                  <a:lnTo>
+                    <a:pt x="4941954" y="2647317"/>
+                  </a:lnTo>
+                  <a:lnTo>
+                    <a:pt x="5013576" y="2635371"/>
+                  </a:lnTo>
+                  <a:lnTo>
+                    <a:pt x="5085199" y="2623255"/>
+                  </a:lnTo>
+                  <a:lnTo>
+                    <a:pt x="5156821" y="2610966"/>
+                  </a:lnTo>
+                  <a:lnTo>
+                    <a:pt x="5228444" y="2598501"/>
+                  </a:lnTo>
+                  <a:lnTo>
+                    <a:pt x="5300066" y="2585858"/>
+                  </a:lnTo>
+                  <a:lnTo>
+                    <a:pt x="5371689" y="2573035"/>
+                  </a:lnTo>
+                  <a:lnTo>
+                    <a:pt x="5443311" y="2560028"/>
+                  </a:lnTo>
+                  <a:lnTo>
+                    <a:pt x="5514934" y="2546836"/>
+                  </a:lnTo>
+                  <a:lnTo>
+                    <a:pt x="5586557" y="2533455"/>
+                  </a:lnTo>
+                  <a:lnTo>
+                    <a:pt x="5658179" y="2519883"/>
+                  </a:lnTo>
+                  <a:lnTo>
+                    <a:pt x="5729802" y="2506118"/>
+                  </a:lnTo>
+                  <a:lnTo>
+                    <a:pt x="5801424" y="2492156"/>
+                  </a:lnTo>
+                  <a:lnTo>
+                    <a:pt x="5873047" y="2477994"/>
+                  </a:lnTo>
+                  <a:lnTo>
+                    <a:pt x="5944669" y="2463630"/>
+                  </a:lnTo>
+                  <a:lnTo>
+                    <a:pt x="6016292" y="2449061"/>
+                  </a:lnTo>
+                  <a:lnTo>
+                    <a:pt x="6087914" y="2434284"/>
+                  </a:lnTo>
+                  <a:lnTo>
+                    <a:pt x="6159537" y="2419296"/>
+                  </a:lnTo>
+                  <a:lnTo>
+                    <a:pt x="6231159" y="2404093"/>
+                  </a:lnTo>
+                  <a:lnTo>
+                    <a:pt x="6302782" y="2388674"/>
+                  </a:lnTo>
+                  <a:lnTo>
+                    <a:pt x="6374404" y="2373035"/>
+                  </a:lnTo>
+                  <a:lnTo>
+                    <a:pt x="6446027" y="2357172"/>
+                  </a:lnTo>
+                  <a:lnTo>
+                    <a:pt x="6517649" y="2341082"/>
+                  </a:lnTo>
+                  <a:lnTo>
+                    <a:pt x="6589272" y="2324763"/>
+                  </a:lnTo>
+                  <a:lnTo>
+                    <a:pt x="6660894" y="2308211"/>
+                  </a:lnTo>
+                  <a:lnTo>
+                    <a:pt x="6732517" y="2291422"/>
+                  </a:lnTo>
+                  <a:lnTo>
+                    <a:pt x="6804139" y="2274394"/>
+                  </a:lnTo>
+                  <a:lnTo>
+                    <a:pt x="6875762" y="2257122"/>
+                  </a:lnTo>
+                  <a:lnTo>
+                    <a:pt x="6947385" y="2239604"/>
+                  </a:lnTo>
+                  <a:lnTo>
+                    <a:pt x="7019007" y="2221835"/>
+                  </a:lnTo>
+                  <a:lnTo>
+                    <a:pt x="7090630" y="2203813"/>
+                  </a:lnTo>
+                  <a:lnTo>
+                    <a:pt x="7090630" y="3246833"/>
+                  </a:lnTo>
+                  <a:lnTo>
+                    <a:pt x="7019007" y="3236927"/>
+                  </a:lnTo>
+                  <a:lnTo>
+                    <a:pt x="6947385" y="3226606"/>
+                  </a:lnTo>
+                  <a:lnTo>
+                    <a:pt x="6875762" y="3215854"/>
+                  </a:lnTo>
+                  <a:lnTo>
+                    <a:pt x="6804139" y="3204652"/>
+                  </a:lnTo>
+                  <a:lnTo>
+                    <a:pt x="6732517" y="3192982"/>
+                  </a:lnTo>
+                  <a:lnTo>
+                    <a:pt x="6660894" y="3180823"/>
+                  </a:lnTo>
+                  <a:lnTo>
+                    <a:pt x="6589272" y="3168157"/>
+                  </a:lnTo>
+                  <a:lnTo>
+                    <a:pt x="6517649" y="3154960"/>
+                  </a:lnTo>
+                  <a:lnTo>
+                    <a:pt x="6446027" y="3141212"/>
+                  </a:lnTo>
+                  <a:lnTo>
+                    <a:pt x="6374404" y="3126889"/>
+                  </a:lnTo>
+                  <a:lnTo>
+                    <a:pt x="6302782" y="3111967"/>
+                  </a:lnTo>
+                  <a:lnTo>
+                    <a:pt x="6231159" y="3096421"/>
+                  </a:lnTo>
+                  <a:lnTo>
+                    <a:pt x="6159537" y="3080225"/>
+                  </a:lnTo>
+                  <a:lnTo>
+                    <a:pt x="6087914" y="3063352"/>
+                  </a:lnTo>
+                  <a:lnTo>
+                    <a:pt x="6016292" y="3045774"/>
+                  </a:lnTo>
+                  <a:lnTo>
+                    <a:pt x="5944669" y="3027460"/>
+                  </a:lnTo>
+                  <a:lnTo>
+                    <a:pt x="5873047" y="3008380"/>
+                  </a:lnTo>
+                  <a:lnTo>
+                    <a:pt x="5801424" y="2988503"/>
+                  </a:lnTo>
+                  <a:lnTo>
+                    <a:pt x="5729802" y="2967794"/>
+                  </a:lnTo>
+                  <a:lnTo>
+                    <a:pt x="5658179" y="2946220"/>
+                  </a:lnTo>
+                  <a:lnTo>
+                    <a:pt x="5586557" y="2923743"/>
+                  </a:lnTo>
+                  <a:lnTo>
+                    <a:pt x="5514934" y="2900327"/>
+                  </a:lnTo>
+                  <a:lnTo>
+                    <a:pt x="5443311" y="2875931"/>
+                  </a:lnTo>
+                  <a:lnTo>
+                    <a:pt x="5371689" y="2850515"/>
+                  </a:lnTo>
+                  <a:lnTo>
+                    <a:pt x="5300066" y="2824037"/>
+                  </a:lnTo>
+                  <a:lnTo>
+                    <a:pt x="5228444" y="2796451"/>
+                  </a:lnTo>
+                  <a:lnTo>
+                    <a:pt x="5156821" y="2767712"/>
+                  </a:lnTo>
+                  <a:lnTo>
+                    <a:pt x="5085199" y="2737771"/>
+                  </a:lnTo>
+                  <a:lnTo>
+                    <a:pt x="5013576" y="2706578"/>
+                  </a:lnTo>
+                  <a:lnTo>
+                    <a:pt x="4941954" y="2674081"/>
+                  </a:lnTo>
+                  <a:lnTo>
+                    <a:pt x="4870331" y="2659095"/>
+                  </a:lnTo>
+                  <a:lnTo>
+                    <a:pt x="4798709" y="2670706"/>
+                  </a:lnTo>
+                  <a:lnTo>
+                    <a:pt x="4727086" y="2682154"/>
+                  </a:lnTo>
+                  <a:lnTo>
+                    <a:pt x="4655464" y="2693441"/>
+                  </a:lnTo>
+                  <a:lnTo>
+                    <a:pt x="4583841" y="2704569"/>
+                  </a:lnTo>
+                  <a:lnTo>
+                    <a:pt x="4512219" y="2715541"/>
+                  </a:lnTo>
+                  <a:lnTo>
+                    <a:pt x="4440596" y="2726357"/>
+                  </a:lnTo>
+                  <a:lnTo>
+                    <a:pt x="4368974" y="2737022"/>
+                  </a:lnTo>
+                  <a:lnTo>
+                    <a:pt x="4297351" y="2747536"/>
+                  </a:lnTo>
+                  <a:lnTo>
+                    <a:pt x="4225729" y="2757903"/>
+                  </a:lnTo>
+                  <a:lnTo>
+                    <a:pt x="4154106" y="2768123"/>
+                  </a:lnTo>
+                  <a:lnTo>
+                    <a:pt x="4082483" y="2778199"/>
+                  </a:lnTo>
+                  <a:lnTo>
+                    <a:pt x="4010861" y="2788134"/>
+                  </a:lnTo>
+                  <a:lnTo>
+                    <a:pt x="3939238" y="2797929"/>
+                  </a:lnTo>
+                  <a:lnTo>
+                    <a:pt x="3867616" y="2807585"/>
+                  </a:lnTo>
+                  <a:lnTo>
+                    <a:pt x="3795993" y="2817106"/>
+                  </a:lnTo>
+                  <a:lnTo>
+                    <a:pt x="3724371" y="2826493"/>
+                  </a:lnTo>
+                  <a:lnTo>
+                    <a:pt x="3652748" y="2835747"/>
+                  </a:lnTo>
+                  <a:lnTo>
+                    <a:pt x="3581126" y="2844872"/>
+                  </a:lnTo>
+                  <a:lnTo>
+                    <a:pt x="3509503" y="2853867"/>
+                  </a:lnTo>
+                  <a:lnTo>
+                    <a:pt x="3437881" y="2862737"/>
+                  </a:lnTo>
+                  <a:lnTo>
+                    <a:pt x="3366258" y="2871481"/>
+                  </a:lnTo>
+                  <a:lnTo>
+                    <a:pt x="3294636" y="2880102"/>
+                  </a:lnTo>
+                  <a:lnTo>
+                    <a:pt x="3223013" y="2888602"/>
+                  </a:lnTo>
+                  <a:lnTo>
+                    <a:pt x="3151391" y="2896982"/>
+                  </a:lnTo>
+                  <a:lnTo>
+                    <a:pt x="3079768" y="2905244"/>
+                  </a:lnTo>
+                  <a:lnTo>
+                    <a:pt x="3008146" y="2913389"/>
+                  </a:lnTo>
+                  <a:lnTo>
+                    <a:pt x="2936523" y="2921420"/>
+                  </a:lnTo>
+                  <a:lnTo>
+                    <a:pt x="2864901" y="2929338"/>
+                  </a:lnTo>
+                  <a:lnTo>
+                    <a:pt x="2793278" y="2937145"/>
+                  </a:lnTo>
+                  <a:lnTo>
+                    <a:pt x="2721655" y="2944841"/>
+                  </a:lnTo>
+                  <a:lnTo>
+                    <a:pt x="2650033" y="2952429"/>
+                  </a:lnTo>
+                  <a:lnTo>
+                    <a:pt x="2578410" y="2959911"/>
+                  </a:lnTo>
+                  <a:lnTo>
+                    <a:pt x="2506788" y="2967287"/>
+                  </a:lnTo>
+                  <a:lnTo>
+                    <a:pt x="2435165" y="2974559"/>
+                  </a:lnTo>
+                  <a:lnTo>
+                    <a:pt x="2363543" y="2981728"/>
+                  </a:lnTo>
+                  <a:lnTo>
+                    <a:pt x="2291920" y="2988797"/>
+                  </a:lnTo>
+                  <a:lnTo>
+                    <a:pt x="2220298" y="2995766"/>
+                  </a:lnTo>
+                  <a:lnTo>
+                    <a:pt x="2148675" y="3002637"/>
+                  </a:lnTo>
+                  <a:lnTo>
+                    <a:pt x="2077053" y="3009412"/>
+                  </a:lnTo>
+                  <a:lnTo>
+                    <a:pt x="2005430" y="3016091"/>
+                  </a:lnTo>
+                  <a:lnTo>
+                    <a:pt x="1933808" y="3022675"/>
+                  </a:lnTo>
+                  <a:lnTo>
+                    <a:pt x="1862185" y="3029168"/>
+                  </a:lnTo>
+                  <a:lnTo>
+                    <a:pt x="1790563" y="3035568"/>
+                  </a:lnTo>
+                  <a:lnTo>
+                    <a:pt x="1718940" y="3041879"/>
+                  </a:lnTo>
+                  <a:lnTo>
+                    <a:pt x="1647318" y="3048101"/>
+                  </a:lnTo>
+                  <a:lnTo>
+                    <a:pt x="1575695" y="3054235"/>
+                  </a:lnTo>
+                  <a:lnTo>
+                    <a:pt x="1504073" y="3060283"/>
+                  </a:lnTo>
+                  <a:lnTo>
+                    <a:pt x="1432450" y="3066245"/>
+                  </a:lnTo>
+                  <a:lnTo>
+                    <a:pt x="1360827" y="3072124"/>
+                  </a:lnTo>
+                  <a:lnTo>
+                    <a:pt x="1289205" y="3077920"/>
+                  </a:lnTo>
+                  <a:lnTo>
+                    <a:pt x="1217582" y="3083634"/>
+                  </a:lnTo>
+                  <a:lnTo>
+                    <a:pt x="1145960" y="3089268"/>
+                  </a:lnTo>
+                  <a:lnTo>
+                    <a:pt x="1074337" y="3094823"/>
+                  </a:lnTo>
+                  <a:lnTo>
+                    <a:pt x="1002715" y="3100299"/>
+                  </a:lnTo>
+                  <a:lnTo>
+                    <a:pt x="931092" y="3105698"/>
+                  </a:lnTo>
+                  <a:lnTo>
+                    <a:pt x="859470" y="3111021"/>
+                  </a:lnTo>
+                  <a:lnTo>
+                    <a:pt x="787847" y="3116270"/>
+                  </a:lnTo>
+                  <a:lnTo>
+                    <a:pt x="716225" y="3121444"/>
+                  </a:lnTo>
+                  <a:lnTo>
+                    <a:pt x="644602" y="3126545"/>
+                  </a:lnTo>
+                  <a:lnTo>
+                    <a:pt x="572980" y="3131575"/>
+                  </a:lnTo>
+                  <a:lnTo>
+                    <a:pt x="501357" y="3136534"/>
+                  </a:lnTo>
+                  <a:lnTo>
+                    <a:pt x="429735" y="3141423"/>
+                  </a:lnTo>
+                  <a:lnTo>
+                    <a:pt x="358112" y="3146243"/>
+                  </a:lnTo>
+                  <a:lnTo>
+                    <a:pt x="286490" y="3150995"/>
+                  </a:lnTo>
+                  <a:lnTo>
+                    <a:pt x="214867" y="3155680"/>
+                  </a:lnTo>
+                  <a:lnTo>
+                    <a:pt x="143245" y="3160300"/>
+                  </a:lnTo>
+                  <a:lnTo>
+                    <a:pt x="71622" y="3164854"/>
+                  </a:lnTo>
+                  <a:lnTo>
+                    <a:pt x="0" y="3169344"/>
                   </a:lnTo>
                   <a:close/>
                 </a:path>
@@ -3516,195 +3534,213 @@
           </p:nvSpPr>
           <p:spPr>
             <a:xfrm>
-              <a:off x="3984459" y="2073503"/>
-              <a:ext cx="4278219" cy="2689061"/>
+              <a:off x="3562988" y="2073503"/>
+              <a:ext cx="4699690" cy="2647317"/>
             </a:xfrm>
             <a:custGeom>
               <a:avLst/>
               <a:pathLst>
-                <a:path w="4278219" h="2689061">
+                <a:path w="4699690" h="2647317">
                   <a:moveTo>
                     <a:pt x="0" y="0"/>
                   </a:moveTo>
                   <a:lnTo>
-                    <a:pt x="52490" y="124254"/>
-                  </a:lnTo>
-                  <a:lnTo>
-                    <a:pt x="124113" y="285651"/>
-                  </a:lnTo>
-                  <a:lnTo>
-                    <a:pt x="195735" y="439295"/>
-                  </a:lnTo>
-                  <a:lnTo>
-                    <a:pt x="267358" y="585557"/>
-                  </a:lnTo>
-                  <a:lnTo>
-                    <a:pt x="338980" y="724792"/>
-                  </a:lnTo>
-                  <a:lnTo>
-                    <a:pt x="410603" y="857338"/>
-                  </a:lnTo>
-                  <a:lnTo>
-                    <a:pt x="482225" y="983516"/>
-                  </a:lnTo>
-                  <a:lnTo>
-                    <a:pt x="553848" y="1103633"/>
-                  </a:lnTo>
-                  <a:lnTo>
-                    <a:pt x="625471" y="1217979"/>
-                  </a:lnTo>
-                  <a:lnTo>
-                    <a:pt x="697093" y="1326831"/>
-                  </a:lnTo>
-                  <a:lnTo>
-                    <a:pt x="768716" y="1430454"/>
-                  </a:lnTo>
-                  <a:lnTo>
-                    <a:pt x="840338" y="1529098"/>
-                  </a:lnTo>
-                  <a:lnTo>
-                    <a:pt x="911961" y="1623004"/>
-                  </a:lnTo>
-                  <a:lnTo>
-                    <a:pt x="983583" y="1712398"/>
-                  </a:lnTo>
-                  <a:lnTo>
-                    <a:pt x="1055206" y="1797497"/>
-                  </a:lnTo>
-                  <a:lnTo>
-                    <a:pt x="1126828" y="1878508"/>
-                  </a:lnTo>
-                  <a:lnTo>
-                    <a:pt x="1198451" y="1955628"/>
-                  </a:lnTo>
-                  <a:lnTo>
-                    <a:pt x="1270073" y="2029042"/>
-                  </a:lnTo>
-                  <a:lnTo>
-                    <a:pt x="1341696" y="2098929"/>
-                  </a:lnTo>
-                  <a:lnTo>
-                    <a:pt x="1413318" y="2165458"/>
-                  </a:lnTo>
-                  <a:lnTo>
-                    <a:pt x="1484941" y="2228792"/>
-                  </a:lnTo>
-                  <a:lnTo>
-                    <a:pt x="1556563" y="2289083"/>
-                  </a:lnTo>
-                  <a:lnTo>
-                    <a:pt x="1628186" y="2346477"/>
-                  </a:lnTo>
-                  <a:lnTo>
-                    <a:pt x="1699808" y="2401114"/>
-                  </a:lnTo>
-                  <a:lnTo>
-                    <a:pt x="1771431" y="2453126"/>
-                  </a:lnTo>
-                  <a:lnTo>
-                    <a:pt x="1843053" y="2502639"/>
-                  </a:lnTo>
-                  <a:lnTo>
-                    <a:pt x="1914676" y="2549773"/>
-                  </a:lnTo>
-                  <a:lnTo>
-                    <a:pt x="1986299" y="2594644"/>
-                  </a:lnTo>
-                  <a:lnTo>
-                    <a:pt x="2057921" y="2637358"/>
-                  </a:lnTo>
-                  <a:lnTo>
-                    <a:pt x="2129544" y="2654968"/>
-                  </a:lnTo>
-                  <a:lnTo>
-                    <a:pt x="2201166" y="2656127"/>
-                  </a:lnTo>
-                  <a:lnTo>
-                    <a:pt x="2272789" y="2657285"/>
-                  </a:lnTo>
-                  <a:lnTo>
-                    <a:pt x="2344411" y="2658442"/>
-                  </a:lnTo>
-                  <a:lnTo>
-                    <a:pt x="2416034" y="2659596"/>
-                  </a:lnTo>
-                  <a:lnTo>
-                    <a:pt x="2487656" y="2660750"/>
-                  </a:lnTo>
-                  <a:lnTo>
-                    <a:pt x="2559279" y="2661901"/>
-                  </a:lnTo>
-                  <a:lnTo>
-                    <a:pt x="2630901" y="2663051"/>
-                  </a:lnTo>
-                  <a:lnTo>
-                    <a:pt x="2702524" y="2664200"/>
-                  </a:lnTo>
-                  <a:lnTo>
-                    <a:pt x="2774146" y="2665346"/>
-                  </a:lnTo>
-                  <a:lnTo>
-                    <a:pt x="2845769" y="2666491"/>
-                  </a:lnTo>
-                  <a:lnTo>
-                    <a:pt x="2917391" y="2667635"/>
-                  </a:lnTo>
-                  <a:lnTo>
-                    <a:pt x="2989014" y="2668777"/>
-                  </a:lnTo>
-                  <a:lnTo>
-                    <a:pt x="3060636" y="2669917"/>
-                  </a:lnTo>
-                  <a:lnTo>
-                    <a:pt x="3132259" y="2671056"/>
-                  </a:lnTo>
-                  <a:lnTo>
-                    <a:pt x="3203881" y="2672193"/>
-                  </a:lnTo>
-                  <a:lnTo>
-                    <a:pt x="3275504" y="2673329"/>
-                  </a:lnTo>
-                  <a:lnTo>
-                    <a:pt x="3347126" y="2674463"/>
-                  </a:lnTo>
-                  <a:lnTo>
-                    <a:pt x="3418749" y="2675595"/>
-                  </a:lnTo>
-                  <a:lnTo>
-                    <a:pt x="3490372" y="2676726"/>
-                  </a:lnTo>
-                  <a:lnTo>
-                    <a:pt x="3561994" y="2677855"/>
-                  </a:lnTo>
-                  <a:lnTo>
-                    <a:pt x="3633617" y="2678983"/>
-                  </a:lnTo>
-                  <a:lnTo>
-                    <a:pt x="3705239" y="2680109"/>
-                  </a:lnTo>
-                  <a:lnTo>
-                    <a:pt x="3776862" y="2681233"/>
-                  </a:lnTo>
-                  <a:lnTo>
-                    <a:pt x="3848484" y="2682356"/>
-                  </a:lnTo>
-                  <a:lnTo>
-                    <a:pt x="3920107" y="2683478"/>
-                  </a:lnTo>
-                  <a:lnTo>
-                    <a:pt x="3991729" y="2684597"/>
-                  </a:lnTo>
-                  <a:lnTo>
-                    <a:pt x="4063352" y="2685716"/>
-                  </a:lnTo>
-                  <a:lnTo>
-                    <a:pt x="4134974" y="2686832"/>
-                  </a:lnTo>
-                  <a:lnTo>
-                    <a:pt x="4206597" y="2687947"/>
-                  </a:lnTo>
-                  <a:lnTo>
-                    <a:pt x="4278219" y="2689061"/>
+                    <a:pt x="44226" y="87687"/>
+                  </a:lnTo>
+                  <a:lnTo>
+                    <a:pt x="115848" y="223993"/>
+                  </a:lnTo>
+                  <a:lnTo>
+                    <a:pt x="187471" y="354829"/>
+                  </a:lnTo>
+                  <a:lnTo>
+                    <a:pt x="259094" y="480413"/>
+                  </a:lnTo>
+                  <a:lnTo>
+                    <a:pt x="330716" y="600956"/>
+                  </a:lnTo>
+                  <a:lnTo>
+                    <a:pt x="402339" y="716662"/>
+                  </a:lnTo>
+                  <a:lnTo>
+                    <a:pt x="473961" y="827723"/>
+                  </a:lnTo>
+                  <a:lnTo>
+                    <a:pt x="545584" y="934327"/>
+                  </a:lnTo>
+                  <a:lnTo>
+                    <a:pt x="617206" y="1036652"/>
+                  </a:lnTo>
+                  <a:lnTo>
+                    <a:pt x="688829" y="1134870"/>
+                  </a:lnTo>
+                  <a:lnTo>
+                    <a:pt x="760451" y="1229146"/>
+                  </a:lnTo>
+                  <a:lnTo>
+                    <a:pt x="832074" y="1319638"/>
+                  </a:lnTo>
+                  <a:lnTo>
+                    <a:pt x="903696" y="1406498"/>
+                  </a:lnTo>
+                  <a:lnTo>
+                    <a:pt x="975319" y="1489871"/>
+                  </a:lnTo>
+                  <a:lnTo>
+                    <a:pt x="1046941" y="1569899"/>
+                  </a:lnTo>
+                  <a:lnTo>
+                    <a:pt x="1118564" y="1646714"/>
+                  </a:lnTo>
+                  <a:lnTo>
+                    <a:pt x="1190186" y="1720446"/>
+                  </a:lnTo>
+                  <a:lnTo>
+                    <a:pt x="1261809" y="1791219"/>
+                  </a:lnTo>
+                  <a:lnTo>
+                    <a:pt x="1333431" y="1859151"/>
+                  </a:lnTo>
+                  <a:lnTo>
+                    <a:pt x="1405054" y="1924357"/>
+                  </a:lnTo>
+                  <a:lnTo>
+                    <a:pt x="1476676" y="1986946"/>
+                  </a:lnTo>
+                  <a:lnTo>
+                    <a:pt x="1548299" y="2047022"/>
+                  </a:lnTo>
+                  <a:lnTo>
+                    <a:pt x="1619922" y="2104687"/>
+                  </a:lnTo>
+                  <a:lnTo>
+                    <a:pt x="1691544" y="2160038"/>
+                  </a:lnTo>
+                  <a:lnTo>
+                    <a:pt x="1763167" y="2213167"/>
+                  </a:lnTo>
+                  <a:lnTo>
+                    <a:pt x="1834789" y="2264164"/>
+                  </a:lnTo>
+                  <a:lnTo>
+                    <a:pt x="1906412" y="2313114"/>
+                  </a:lnTo>
+                  <a:lnTo>
+                    <a:pt x="1978034" y="2360099"/>
+                  </a:lnTo>
+                  <a:lnTo>
+                    <a:pt x="2049657" y="2405198"/>
+                  </a:lnTo>
+                  <a:lnTo>
+                    <a:pt x="2121279" y="2448487"/>
+                  </a:lnTo>
+                  <a:lnTo>
+                    <a:pt x="2192902" y="2490039"/>
+                  </a:lnTo>
+                  <a:lnTo>
+                    <a:pt x="2264524" y="2529923"/>
+                  </a:lnTo>
+                  <a:lnTo>
+                    <a:pt x="2336147" y="2568206"/>
+                  </a:lnTo>
+                  <a:lnTo>
+                    <a:pt x="2407769" y="2604953"/>
+                  </a:lnTo>
+                  <a:lnTo>
+                    <a:pt x="2479392" y="2640225"/>
+                  </a:lnTo>
+                  <a:lnTo>
+                    <a:pt x="2551014" y="2647317"/>
+                  </a:lnTo>
+                  <a:lnTo>
+                    <a:pt x="2622637" y="2635371"/>
+                  </a:lnTo>
+                  <a:lnTo>
+                    <a:pt x="2694259" y="2623255"/>
+                  </a:lnTo>
+                  <a:lnTo>
+                    <a:pt x="2765882" y="2610966"/>
+                  </a:lnTo>
+                  <a:lnTo>
+                    <a:pt x="2837504" y="2598501"/>
+                  </a:lnTo>
+                  <a:lnTo>
+                    <a:pt x="2909127" y="2585858"/>
+                  </a:lnTo>
+                  <a:lnTo>
+                    <a:pt x="2980750" y="2573035"/>
+                  </a:lnTo>
+                  <a:lnTo>
+                    <a:pt x="3052372" y="2560028"/>
+                  </a:lnTo>
+                  <a:lnTo>
+                    <a:pt x="3123995" y="2546836"/>
+                  </a:lnTo>
+                  <a:lnTo>
+                    <a:pt x="3195617" y="2533455"/>
+                  </a:lnTo>
+                  <a:lnTo>
+                    <a:pt x="3267240" y="2519883"/>
+                  </a:lnTo>
+                  <a:lnTo>
+                    <a:pt x="3338862" y="2506118"/>
+                  </a:lnTo>
+                  <a:lnTo>
+                    <a:pt x="3410485" y="2492156"/>
+                  </a:lnTo>
+                  <a:lnTo>
+                    <a:pt x="3482107" y="2477994"/>
+                  </a:lnTo>
+                  <a:lnTo>
+                    <a:pt x="3553730" y="2463630"/>
+                  </a:lnTo>
+                  <a:lnTo>
+                    <a:pt x="3625352" y="2449061"/>
+                  </a:lnTo>
+                  <a:lnTo>
+                    <a:pt x="3696975" y="2434284"/>
+                  </a:lnTo>
+                  <a:lnTo>
+                    <a:pt x="3768597" y="2419296"/>
+                  </a:lnTo>
+                  <a:lnTo>
+                    <a:pt x="3840220" y="2404093"/>
+                  </a:lnTo>
+                  <a:lnTo>
+                    <a:pt x="3911842" y="2388674"/>
+                  </a:lnTo>
+                  <a:lnTo>
+                    <a:pt x="3983465" y="2373035"/>
+                  </a:lnTo>
+                  <a:lnTo>
+                    <a:pt x="4055087" y="2357172"/>
+                  </a:lnTo>
+                  <a:lnTo>
+                    <a:pt x="4126710" y="2341082"/>
+                  </a:lnTo>
+                  <a:lnTo>
+                    <a:pt x="4198332" y="2324763"/>
+                  </a:lnTo>
+                  <a:lnTo>
+                    <a:pt x="4269955" y="2308211"/>
+                  </a:lnTo>
+                  <a:lnTo>
+                    <a:pt x="4341578" y="2291422"/>
+                  </a:lnTo>
+                  <a:lnTo>
+                    <a:pt x="4413200" y="2274394"/>
+                  </a:lnTo>
+                  <a:lnTo>
+                    <a:pt x="4484823" y="2257122"/>
+                  </a:lnTo>
+                  <a:lnTo>
+                    <a:pt x="4556445" y="2239604"/>
+                  </a:lnTo>
+                  <a:lnTo>
+                    <a:pt x="4628068" y="2221835"/>
+                  </a:lnTo>
+                  <a:lnTo>
+                    <a:pt x="4699690" y="2203813"/>
                   </a:lnTo>
                 </a:path>
               </a:pathLst>
@@ -3724,312 +3760,312 @@
           </p:nvSpPr>
           <p:spPr>
             <a:xfrm>
-              <a:off x="1172049" y="4644401"/>
-              <a:ext cx="7090630" cy="728889"/>
+              <a:off x="1172049" y="4732598"/>
+              <a:ext cx="7090630" cy="587738"/>
             </a:xfrm>
             <a:custGeom>
               <a:avLst/>
               <a:pathLst>
-                <a:path w="7090630" h="728889">
+                <a:path w="7090630" h="587738">
                   <a:moveTo>
-                    <a:pt x="7090630" y="728889"/>
+                    <a:pt x="7090630" y="587738"/>
                   </a:moveTo>
                   <a:lnTo>
-                    <a:pt x="7019007" y="719606"/>
-                  </a:lnTo>
-                  <a:lnTo>
-                    <a:pt x="6947385" y="709853"/>
-                  </a:lnTo>
-                  <a:lnTo>
-                    <a:pt x="6875762" y="699609"/>
-                  </a:lnTo>
-                  <a:lnTo>
-                    <a:pt x="6804139" y="688847"/>
-                  </a:lnTo>
-                  <a:lnTo>
-                    <a:pt x="6732517" y="677543"/>
-                  </a:lnTo>
-                  <a:lnTo>
-                    <a:pt x="6660894" y="665668"/>
-                  </a:lnTo>
-                  <a:lnTo>
-                    <a:pt x="6589272" y="653194"/>
-                  </a:lnTo>
-                  <a:lnTo>
-                    <a:pt x="6517649" y="640090"/>
-                  </a:lnTo>
-                  <a:lnTo>
-                    <a:pt x="6446027" y="626324"/>
-                  </a:lnTo>
-                  <a:lnTo>
-                    <a:pt x="6374404" y="611865"/>
-                  </a:lnTo>
-                  <a:lnTo>
-                    <a:pt x="6302782" y="596675"/>
-                  </a:lnTo>
-                  <a:lnTo>
-                    <a:pt x="6231159" y="580719"/>
-                  </a:lnTo>
-                  <a:lnTo>
-                    <a:pt x="6159537" y="563957"/>
-                  </a:lnTo>
-                  <a:lnTo>
-                    <a:pt x="6087914" y="546350"/>
-                  </a:lnTo>
-                  <a:lnTo>
-                    <a:pt x="6016292" y="527854"/>
-                  </a:lnTo>
-                  <a:lnTo>
-                    <a:pt x="5944669" y="508425"/>
-                  </a:lnTo>
-                  <a:lnTo>
-                    <a:pt x="5873047" y="488015"/>
-                  </a:lnTo>
-                  <a:lnTo>
-                    <a:pt x="5801424" y="466575"/>
-                  </a:lnTo>
-                  <a:lnTo>
-                    <a:pt x="5729802" y="444053"/>
-                  </a:lnTo>
-                  <a:lnTo>
-                    <a:pt x="5658179" y="420395"/>
-                  </a:lnTo>
-                  <a:lnTo>
-                    <a:pt x="5586557" y="395542"/>
-                  </a:lnTo>
-                  <a:lnTo>
-                    <a:pt x="5514934" y="369436"/>
-                  </a:lnTo>
-                  <a:lnTo>
-                    <a:pt x="5443311" y="342011"/>
-                  </a:lnTo>
-                  <a:lnTo>
-                    <a:pt x="5371689" y="313203"/>
-                  </a:lnTo>
-                  <a:lnTo>
-                    <a:pt x="5300066" y="282941"/>
-                  </a:lnTo>
-                  <a:lnTo>
-                    <a:pt x="5228444" y="251152"/>
-                  </a:lnTo>
-                  <a:lnTo>
-                    <a:pt x="5156821" y="217758"/>
-                  </a:lnTo>
-                  <a:lnTo>
-                    <a:pt x="5085199" y="182679"/>
-                  </a:lnTo>
-                  <a:lnTo>
-                    <a:pt x="5013576" y="145830"/>
-                  </a:lnTo>
-                  <a:lnTo>
-                    <a:pt x="4941954" y="107121"/>
-                  </a:lnTo>
-                  <a:lnTo>
-                    <a:pt x="4870331" y="82907"/>
-                  </a:lnTo>
-                  <a:lnTo>
-                    <a:pt x="4798709" y="81744"/>
-                  </a:lnTo>
-                  <a:lnTo>
-                    <a:pt x="4727086" y="80580"/>
-                  </a:lnTo>
-                  <a:lnTo>
-                    <a:pt x="4655464" y="79414"/>
-                  </a:lnTo>
-                  <a:lnTo>
-                    <a:pt x="4583841" y="78246"/>
-                  </a:lnTo>
-                  <a:lnTo>
-                    <a:pt x="4512219" y="77076"/>
-                  </a:lnTo>
-                  <a:lnTo>
-                    <a:pt x="4440596" y="75905"/>
-                  </a:lnTo>
-                  <a:lnTo>
-                    <a:pt x="4368974" y="74733"/>
-                  </a:lnTo>
-                  <a:lnTo>
-                    <a:pt x="4297351" y="73558"/>
-                  </a:lnTo>
-                  <a:lnTo>
-                    <a:pt x="4225729" y="72382"/>
-                  </a:lnTo>
-                  <a:lnTo>
-                    <a:pt x="4154106" y="71204"/>
-                  </a:lnTo>
-                  <a:lnTo>
-                    <a:pt x="4082483" y="70025"/>
-                  </a:lnTo>
-                  <a:lnTo>
-                    <a:pt x="4010861" y="68844"/>
-                  </a:lnTo>
-                  <a:lnTo>
-                    <a:pt x="3939238" y="67662"/>
-                  </a:lnTo>
-                  <a:lnTo>
-                    <a:pt x="3867616" y="66477"/>
-                  </a:lnTo>
-                  <a:lnTo>
-                    <a:pt x="3795993" y="65291"/>
-                  </a:lnTo>
-                  <a:lnTo>
-                    <a:pt x="3724371" y="64104"/>
-                  </a:lnTo>
-                  <a:lnTo>
-                    <a:pt x="3652748" y="62914"/>
-                  </a:lnTo>
-                  <a:lnTo>
-                    <a:pt x="3581126" y="61724"/>
-                  </a:lnTo>
-                  <a:lnTo>
-                    <a:pt x="3509503" y="60531"/>
-                  </a:lnTo>
-                  <a:lnTo>
-                    <a:pt x="3437881" y="59337"/>
-                  </a:lnTo>
-                  <a:lnTo>
-                    <a:pt x="3366258" y="58141"/>
-                  </a:lnTo>
-                  <a:lnTo>
-                    <a:pt x="3294636" y="56943"/>
-                  </a:lnTo>
-                  <a:lnTo>
-                    <a:pt x="3223013" y="55744"/>
-                  </a:lnTo>
-                  <a:lnTo>
-                    <a:pt x="3151391" y="54543"/>
-                  </a:lnTo>
-                  <a:lnTo>
-                    <a:pt x="3079768" y="53340"/>
-                  </a:lnTo>
-                  <a:lnTo>
-                    <a:pt x="3008146" y="52136"/>
-                  </a:lnTo>
-                  <a:lnTo>
-                    <a:pt x="2936523" y="50930"/>
-                  </a:lnTo>
-                  <a:lnTo>
-                    <a:pt x="2864901" y="49722"/>
-                  </a:lnTo>
-                  <a:lnTo>
-                    <a:pt x="2793278" y="48513"/>
-                  </a:lnTo>
-                  <a:lnTo>
-                    <a:pt x="2721655" y="47301"/>
-                  </a:lnTo>
-                  <a:lnTo>
-                    <a:pt x="2650033" y="46089"/>
-                  </a:lnTo>
-                  <a:lnTo>
-                    <a:pt x="2578410" y="44874"/>
-                  </a:lnTo>
-                  <a:lnTo>
-                    <a:pt x="2506788" y="43658"/>
-                  </a:lnTo>
-                  <a:lnTo>
-                    <a:pt x="2435165" y="42440"/>
-                  </a:lnTo>
-                  <a:lnTo>
-                    <a:pt x="2363543" y="41220"/>
-                  </a:lnTo>
-                  <a:lnTo>
-                    <a:pt x="2291920" y="39999"/>
-                  </a:lnTo>
-                  <a:lnTo>
-                    <a:pt x="2220298" y="38776"/>
-                  </a:lnTo>
-                  <a:lnTo>
-                    <a:pt x="2148675" y="37551"/>
-                  </a:lnTo>
-                  <a:lnTo>
-                    <a:pt x="2077053" y="36325"/>
-                  </a:lnTo>
-                  <a:lnTo>
-                    <a:pt x="2005430" y="35097"/>
-                  </a:lnTo>
-                  <a:lnTo>
-                    <a:pt x="1933808" y="33867"/>
-                  </a:lnTo>
-                  <a:lnTo>
-                    <a:pt x="1862185" y="32635"/>
-                  </a:lnTo>
-                  <a:lnTo>
-                    <a:pt x="1790563" y="31402"/>
-                  </a:lnTo>
-                  <a:lnTo>
-                    <a:pt x="1718940" y="30167"/>
-                  </a:lnTo>
-                  <a:lnTo>
-                    <a:pt x="1647318" y="28930"/>
-                  </a:lnTo>
-                  <a:lnTo>
-                    <a:pt x="1575695" y="27691"/>
-                  </a:lnTo>
-                  <a:lnTo>
-                    <a:pt x="1504073" y="26451"/>
-                  </a:lnTo>
-                  <a:lnTo>
-                    <a:pt x="1432450" y="25209"/>
-                  </a:lnTo>
-                  <a:lnTo>
-                    <a:pt x="1360827" y="23965"/>
-                  </a:lnTo>
-                  <a:lnTo>
-                    <a:pt x="1289205" y="22720"/>
-                  </a:lnTo>
-                  <a:lnTo>
-                    <a:pt x="1217582" y="21472"/>
-                  </a:lnTo>
-                  <a:lnTo>
-                    <a:pt x="1145960" y="20223"/>
-                  </a:lnTo>
-                  <a:lnTo>
-                    <a:pt x="1074337" y="18973"/>
-                  </a:lnTo>
-                  <a:lnTo>
-                    <a:pt x="1002715" y="17720"/>
-                  </a:lnTo>
-                  <a:lnTo>
-                    <a:pt x="931092" y="16466"/>
-                  </a:lnTo>
-                  <a:lnTo>
-                    <a:pt x="859470" y="15210"/>
-                  </a:lnTo>
-                  <a:lnTo>
-                    <a:pt x="787847" y="13952"/>
-                  </a:lnTo>
-                  <a:lnTo>
-                    <a:pt x="716225" y="12692"/>
-                  </a:lnTo>
-                  <a:lnTo>
-                    <a:pt x="644602" y="11431"/>
-                  </a:lnTo>
-                  <a:lnTo>
-                    <a:pt x="572980" y="10168"/>
-                  </a:lnTo>
-                  <a:lnTo>
-                    <a:pt x="501357" y="8903"/>
-                  </a:lnTo>
-                  <a:lnTo>
-                    <a:pt x="429735" y="7637"/>
-                  </a:lnTo>
-                  <a:lnTo>
-                    <a:pt x="358112" y="6368"/>
-                  </a:lnTo>
-                  <a:lnTo>
-                    <a:pt x="286490" y="5098"/>
-                  </a:lnTo>
-                  <a:lnTo>
-                    <a:pt x="214867" y="3826"/>
-                  </a:lnTo>
-                  <a:lnTo>
-                    <a:pt x="143245" y="2552"/>
-                  </a:lnTo>
-                  <a:lnTo>
-                    <a:pt x="71622" y="1277"/>
-                  </a:lnTo>
-                  <a:lnTo>
-                    <a:pt x="0" y="0"/>
+                    <a:pt x="7019007" y="577832"/>
+                  </a:lnTo>
+                  <a:lnTo>
+                    <a:pt x="6947385" y="567511"/>
+                  </a:lnTo>
+                  <a:lnTo>
+                    <a:pt x="6875762" y="556759"/>
+                  </a:lnTo>
+                  <a:lnTo>
+                    <a:pt x="6804139" y="545557"/>
+                  </a:lnTo>
+                  <a:lnTo>
+                    <a:pt x="6732517" y="533887"/>
+                  </a:lnTo>
+                  <a:lnTo>
+                    <a:pt x="6660894" y="521728"/>
+                  </a:lnTo>
+                  <a:lnTo>
+                    <a:pt x="6589272" y="509062"/>
+                  </a:lnTo>
+                  <a:lnTo>
+                    <a:pt x="6517649" y="495865"/>
+                  </a:lnTo>
+                  <a:lnTo>
+                    <a:pt x="6446027" y="482117"/>
+                  </a:lnTo>
+                  <a:lnTo>
+                    <a:pt x="6374404" y="467794"/>
+                  </a:lnTo>
+                  <a:lnTo>
+                    <a:pt x="6302782" y="452872"/>
+                  </a:lnTo>
+                  <a:lnTo>
+                    <a:pt x="6231159" y="437326"/>
+                  </a:lnTo>
+                  <a:lnTo>
+                    <a:pt x="6159537" y="421130"/>
+                  </a:lnTo>
+                  <a:lnTo>
+                    <a:pt x="6087914" y="404257"/>
+                  </a:lnTo>
+                  <a:lnTo>
+                    <a:pt x="6016292" y="386678"/>
+                  </a:lnTo>
+                  <a:lnTo>
+                    <a:pt x="5944669" y="368365"/>
+                  </a:lnTo>
+                  <a:lnTo>
+                    <a:pt x="5873047" y="349285"/>
+                  </a:lnTo>
+                  <a:lnTo>
+                    <a:pt x="5801424" y="329408"/>
+                  </a:lnTo>
+                  <a:lnTo>
+                    <a:pt x="5729802" y="308699"/>
+                  </a:lnTo>
+                  <a:lnTo>
+                    <a:pt x="5658179" y="287125"/>
+                  </a:lnTo>
+                  <a:lnTo>
+                    <a:pt x="5586557" y="264648"/>
+                  </a:lnTo>
+                  <a:lnTo>
+                    <a:pt x="5514934" y="241232"/>
+                  </a:lnTo>
+                  <a:lnTo>
+                    <a:pt x="5443311" y="216836"/>
+                  </a:lnTo>
+                  <a:lnTo>
+                    <a:pt x="5371689" y="191420"/>
+                  </a:lnTo>
+                  <a:lnTo>
+                    <a:pt x="5300066" y="164942"/>
+                  </a:lnTo>
+                  <a:lnTo>
+                    <a:pt x="5228444" y="137356"/>
+                  </a:lnTo>
+                  <a:lnTo>
+                    <a:pt x="5156821" y="108617"/>
+                  </a:lnTo>
+                  <a:lnTo>
+                    <a:pt x="5085199" y="78676"/>
+                  </a:lnTo>
+                  <a:lnTo>
+                    <a:pt x="5013576" y="47483"/>
+                  </a:lnTo>
+                  <a:lnTo>
+                    <a:pt x="4941954" y="14986"/>
+                  </a:lnTo>
+                  <a:lnTo>
+                    <a:pt x="4870331" y="0"/>
+                  </a:lnTo>
+                  <a:lnTo>
+                    <a:pt x="4798709" y="11611"/>
+                  </a:lnTo>
+                  <a:lnTo>
+                    <a:pt x="4727086" y="23059"/>
+                  </a:lnTo>
+                  <a:lnTo>
+                    <a:pt x="4655464" y="34346"/>
+                  </a:lnTo>
+                  <a:lnTo>
+                    <a:pt x="4583841" y="45474"/>
+                  </a:lnTo>
+                  <a:lnTo>
+                    <a:pt x="4512219" y="56446"/>
+                  </a:lnTo>
+                  <a:lnTo>
+                    <a:pt x="4440596" y="67262"/>
+                  </a:lnTo>
+                  <a:lnTo>
+                    <a:pt x="4368974" y="77927"/>
+                  </a:lnTo>
+                  <a:lnTo>
+                    <a:pt x="4297351" y="88441"/>
+                  </a:lnTo>
+                  <a:lnTo>
+                    <a:pt x="4225729" y="98808"/>
+                  </a:lnTo>
+                  <a:lnTo>
+                    <a:pt x="4154106" y="109028"/>
+                  </a:lnTo>
+                  <a:lnTo>
+                    <a:pt x="4082483" y="119104"/>
+                  </a:lnTo>
+                  <a:lnTo>
+                    <a:pt x="4010861" y="129039"/>
+                  </a:lnTo>
+                  <a:lnTo>
+                    <a:pt x="3939238" y="138834"/>
+                  </a:lnTo>
+                  <a:lnTo>
+                    <a:pt x="3867616" y="148490"/>
+                  </a:lnTo>
+                  <a:lnTo>
+                    <a:pt x="3795993" y="158011"/>
+                  </a:lnTo>
+                  <a:lnTo>
+                    <a:pt x="3724371" y="167398"/>
+                  </a:lnTo>
+                  <a:lnTo>
+                    <a:pt x="3652748" y="176652"/>
+                  </a:lnTo>
+                  <a:lnTo>
+                    <a:pt x="3581126" y="185777"/>
+                  </a:lnTo>
+                  <a:lnTo>
+                    <a:pt x="3509503" y="194772"/>
+                  </a:lnTo>
+                  <a:lnTo>
+                    <a:pt x="3437881" y="203641"/>
+                  </a:lnTo>
+                  <a:lnTo>
+                    <a:pt x="3366258" y="212386"/>
+                  </a:lnTo>
+                  <a:lnTo>
+                    <a:pt x="3294636" y="221007"/>
+                  </a:lnTo>
+                  <a:lnTo>
+                    <a:pt x="3223013" y="229507"/>
+                  </a:lnTo>
+                  <a:lnTo>
+                    <a:pt x="3151391" y="237887"/>
+                  </a:lnTo>
+                  <a:lnTo>
+                    <a:pt x="3079768" y="246149"/>
+                  </a:lnTo>
+                  <a:lnTo>
+                    <a:pt x="3008146" y="254294"/>
+                  </a:lnTo>
+                  <a:lnTo>
+                    <a:pt x="2936523" y="262325"/>
+                  </a:lnTo>
+                  <a:lnTo>
+                    <a:pt x="2864901" y="270243"/>
+                  </a:lnTo>
+                  <a:lnTo>
+                    <a:pt x="2793278" y="278050"/>
+                  </a:lnTo>
+                  <a:lnTo>
+                    <a:pt x="2721655" y="285746"/>
+                  </a:lnTo>
+                  <a:lnTo>
+                    <a:pt x="2650033" y="293334"/>
+                  </a:lnTo>
+                  <a:lnTo>
+                    <a:pt x="2578410" y="300816"/>
+                  </a:lnTo>
+                  <a:lnTo>
+                    <a:pt x="2506788" y="308191"/>
+                  </a:lnTo>
+                  <a:lnTo>
+                    <a:pt x="2435165" y="315464"/>
+                  </a:lnTo>
+                  <a:lnTo>
+                    <a:pt x="2363543" y="322633"/>
+                  </a:lnTo>
+                  <a:lnTo>
+                    <a:pt x="2291920" y="329702"/>
+                  </a:lnTo>
+                  <a:lnTo>
+                    <a:pt x="2220298" y="336671"/>
+                  </a:lnTo>
+                  <a:lnTo>
+                    <a:pt x="2148675" y="343542"/>
+                  </a:lnTo>
+                  <a:lnTo>
+                    <a:pt x="2077053" y="350317"/>
+                  </a:lnTo>
+                  <a:lnTo>
+                    <a:pt x="2005430" y="356996"/>
+                  </a:lnTo>
+                  <a:lnTo>
+                    <a:pt x="1933808" y="363580"/>
+                  </a:lnTo>
+                  <a:lnTo>
+                    <a:pt x="1862185" y="370073"/>
+                  </a:lnTo>
+                  <a:lnTo>
+                    <a:pt x="1790563" y="376473"/>
+                  </a:lnTo>
+                  <a:lnTo>
+                    <a:pt x="1718940" y="382784"/>
+                  </a:lnTo>
+                  <a:lnTo>
+                    <a:pt x="1647318" y="389006"/>
+                  </a:lnTo>
+                  <a:lnTo>
+                    <a:pt x="1575695" y="395140"/>
+                  </a:lnTo>
+                  <a:lnTo>
+                    <a:pt x="1504073" y="401188"/>
+                  </a:lnTo>
+                  <a:lnTo>
+                    <a:pt x="1432450" y="407150"/>
+                  </a:lnTo>
+                  <a:lnTo>
+                    <a:pt x="1360827" y="413029"/>
+                  </a:lnTo>
+                  <a:lnTo>
+                    <a:pt x="1289205" y="418825"/>
+                  </a:lnTo>
+                  <a:lnTo>
+                    <a:pt x="1217582" y="424539"/>
+                  </a:lnTo>
+                  <a:lnTo>
+                    <a:pt x="1145960" y="430173"/>
+                  </a:lnTo>
+                  <a:lnTo>
+                    <a:pt x="1074337" y="435728"/>
+                  </a:lnTo>
+                  <a:lnTo>
+                    <a:pt x="1002715" y="441204"/>
+                  </a:lnTo>
+                  <a:lnTo>
+                    <a:pt x="931092" y="446603"/>
+                  </a:lnTo>
+                  <a:lnTo>
+                    <a:pt x="859470" y="451926"/>
+                  </a:lnTo>
+                  <a:lnTo>
+                    <a:pt x="787847" y="457174"/>
+                  </a:lnTo>
+                  <a:lnTo>
+                    <a:pt x="716225" y="462349"/>
+                  </a:lnTo>
+                  <a:lnTo>
+                    <a:pt x="644602" y="467450"/>
+                  </a:lnTo>
+                  <a:lnTo>
+                    <a:pt x="572980" y="472480"/>
+                  </a:lnTo>
+                  <a:lnTo>
+                    <a:pt x="501357" y="477439"/>
+                  </a:lnTo>
+                  <a:lnTo>
+                    <a:pt x="429735" y="482328"/>
+                  </a:lnTo>
+                  <a:lnTo>
+                    <a:pt x="358112" y="487148"/>
+                  </a:lnTo>
+                  <a:lnTo>
+                    <a:pt x="286490" y="491900"/>
+                  </a:lnTo>
+                  <a:lnTo>
+                    <a:pt x="214867" y="496585"/>
+                  </a:lnTo>
+                  <a:lnTo>
+                    <a:pt x="143245" y="501205"/>
+                  </a:lnTo>
+                  <a:lnTo>
+                    <a:pt x="71622" y="505759"/>
+                  </a:lnTo>
+                  <a:lnTo>
+                    <a:pt x="0" y="510249"/>
                   </a:lnTo>
                 </a:path>
               </a:pathLst>
@@ -4049,279 +4085,312 @@
           </p:nvSpPr>
           <p:spPr>
             <a:xfrm>
-              <a:off x="2012110" y="2073503"/>
-              <a:ext cx="6250569" cy="3101400"/>
+              <a:off x="1172049" y="3483913"/>
+              <a:ext cx="7090630" cy="1522670"/>
             </a:xfrm>
             <a:custGeom>
               <a:avLst/>
               <a:pathLst>
-                <a:path w="6250569" h="3101400">
+                <a:path w="7090630" h="1522670">
                   <a:moveTo>
                     <a:pt x="0" y="0"/>
                   </a:moveTo>
                   <a:lnTo>
-                    <a:pt x="19409" y="24039"/>
-                  </a:lnTo>
-                  <a:lnTo>
-                    <a:pt x="91031" y="110530"/>
-                  </a:lnTo>
-                  <a:lnTo>
-                    <a:pt x="162654" y="194859"/>
-                  </a:lnTo>
-                  <a:lnTo>
-                    <a:pt x="234276" y="277080"/>
-                  </a:lnTo>
-                  <a:lnTo>
-                    <a:pt x="305899" y="357245"/>
-                  </a:lnTo>
-                  <a:lnTo>
-                    <a:pt x="377521" y="435407"/>
-                  </a:lnTo>
-                  <a:lnTo>
-                    <a:pt x="449144" y="511614"/>
-                  </a:lnTo>
-                  <a:lnTo>
-                    <a:pt x="520766" y="585916"/>
-                  </a:lnTo>
-                  <a:lnTo>
-                    <a:pt x="592389" y="658361"/>
-                  </a:lnTo>
-                  <a:lnTo>
-                    <a:pt x="664012" y="728994"/>
-                  </a:lnTo>
-                  <a:lnTo>
-                    <a:pt x="735634" y="797862"/>
-                  </a:lnTo>
-                  <a:lnTo>
-                    <a:pt x="807257" y="865008"/>
-                  </a:lnTo>
-                  <a:lnTo>
-                    <a:pt x="878879" y="930475"/>
-                  </a:lnTo>
-                  <a:lnTo>
-                    <a:pt x="950502" y="994306"/>
-                  </a:lnTo>
-                  <a:lnTo>
-                    <a:pt x="1022124" y="1056541"/>
-                  </a:lnTo>
-                  <a:lnTo>
-                    <a:pt x="1093747" y="1117220"/>
-                  </a:lnTo>
-                  <a:lnTo>
-                    <a:pt x="1165369" y="1176382"/>
-                  </a:lnTo>
-                  <a:lnTo>
-                    <a:pt x="1236992" y="1234065"/>
-                  </a:lnTo>
-                  <a:lnTo>
-                    <a:pt x="1308614" y="1290306"/>
-                  </a:lnTo>
-                  <a:lnTo>
-                    <a:pt x="1380237" y="1345141"/>
-                  </a:lnTo>
-                  <a:lnTo>
-                    <a:pt x="1451859" y="1398606"/>
-                  </a:lnTo>
-                  <a:lnTo>
-                    <a:pt x="1523482" y="1450733"/>
-                  </a:lnTo>
-                  <a:lnTo>
-                    <a:pt x="1595104" y="1501558"/>
-                  </a:lnTo>
-                  <a:lnTo>
-                    <a:pt x="1666727" y="1551112"/>
-                  </a:lnTo>
-                  <a:lnTo>
-                    <a:pt x="1738349" y="1599427"/>
-                  </a:lnTo>
-                  <a:lnTo>
-                    <a:pt x="1809972" y="1646534"/>
-                  </a:lnTo>
-                  <a:lnTo>
-                    <a:pt x="1881594" y="1692463"/>
-                  </a:lnTo>
-                  <a:lnTo>
-                    <a:pt x="1953217" y="1737245"/>
-                  </a:lnTo>
-                  <a:lnTo>
-                    <a:pt x="2024840" y="1780907"/>
-                  </a:lnTo>
-                  <a:lnTo>
-                    <a:pt x="2096462" y="1823477"/>
-                  </a:lnTo>
-                  <a:lnTo>
-                    <a:pt x="2168085" y="1864983"/>
-                  </a:lnTo>
-                  <a:lnTo>
-                    <a:pt x="2239707" y="1905451"/>
-                  </a:lnTo>
-                  <a:lnTo>
-                    <a:pt x="2311330" y="1944908"/>
-                  </a:lnTo>
-                  <a:lnTo>
-                    <a:pt x="2382952" y="1983378"/>
-                  </a:lnTo>
-                  <a:lnTo>
-                    <a:pt x="2454575" y="2020887"/>
-                  </a:lnTo>
-                  <a:lnTo>
-                    <a:pt x="2526197" y="2057458"/>
-                  </a:lnTo>
-                  <a:lnTo>
-                    <a:pt x="2597820" y="2093114"/>
-                  </a:lnTo>
-                  <a:lnTo>
-                    <a:pt x="2669442" y="2127880"/>
-                  </a:lnTo>
-                  <a:lnTo>
-                    <a:pt x="2741065" y="2161776"/>
-                  </a:lnTo>
-                  <a:lnTo>
-                    <a:pt x="2812687" y="2194824"/>
-                  </a:lnTo>
-                  <a:lnTo>
-                    <a:pt x="2884310" y="2227047"/>
-                  </a:lnTo>
-                  <a:lnTo>
-                    <a:pt x="2955932" y="2258464"/>
-                  </a:lnTo>
-                  <a:lnTo>
-                    <a:pt x="3027555" y="2289095"/>
-                  </a:lnTo>
-                  <a:lnTo>
-                    <a:pt x="3099177" y="2318961"/>
-                  </a:lnTo>
-                  <a:lnTo>
-                    <a:pt x="3170800" y="2348080"/>
-                  </a:lnTo>
-                  <a:lnTo>
-                    <a:pt x="3242422" y="2376472"/>
-                  </a:lnTo>
-                  <a:lnTo>
-                    <a:pt x="3314045" y="2404153"/>
-                  </a:lnTo>
-                  <a:lnTo>
-                    <a:pt x="3385668" y="2431142"/>
-                  </a:lnTo>
-                  <a:lnTo>
-                    <a:pt x="3457290" y="2457457"/>
-                  </a:lnTo>
-                  <a:lnTo>
-                    <a:pt x="3528913" y="2483114"/>
-                  </a:lnTo>
-                  <a:lnTo>
-                    <a:pt x="3600535" y="2508129"/>
-                  </a:lnTo>
-                  <a:lnTo>
-                    <a:pt x="3672158" y="2532519"/>
-                  </a:lnTo>
-                  <a:lnTo>
-                    <a:pt x="3743780" y="2556299"/>
-                  </a:lnTo>
-                  <a:lnTo>
-                    <a:pt x="3815403" y="2579485"/>
-                  </a:lnTo>
-                  <a:lnTo>
-                    <a:pt x="3887025" y="2602091"/>
-                  </a:lnTo>
-                  <a:lnTo>
-                    <a:pt x="3958648" y="2624132"/>
-                  </a:lnTo>
-                  <a:lnTo>
-                    <a:pt x="4030270" y="2645622"/>
-                  </a:lnTo>
-                  <a:lnTo>
-                    <a:pt x="4101893" y="2666575"/>
-                  </a:lnTo>
-                  <a:lnTo>
-                    <a:pt x="4173515" y="2687004"/>
-                  </a:lnTo>
-                  <a:lnTo>
-                    <a:pt x="4245138" y="2706922"/>
-                  </a:lnTo>
-                  <a:lnTo>
-                    <a:pt x="4316760" y="2726343"/>
-                  </a:lnTo>
-                  <a:lnTo>
-                    <a:pt x="4388383" y="2745277"/>
-                  </a:lnTo>
-                  <a:lnTo>
-                    <a:pt x="4460005" y="2763739"/>
-                  </a:lnTo>
-                  <a:lnTo>
-                    <a:pt x="4531628" y="2781739"/>
-                  </a:lnTo>
-                  <a:lnTo>
-                    <a:pt x="4603250" y="2799289"/>
-                  </a:lnTo>
-                  <a:lnTo>
-                    <a:pt x="4674873" y="2816400"/>
-                  </a:lnTo>
-                  <a:lnTo>
-                    <a:pt x="4746496" y="2833083"/>
-                  </a:lnTo>
-                  <a:lnTo>
-                    <a:pt x="4818118" y="2849349"/>
-                  </a:lnTo>
-                  <a:lnTo>
-                    <a:pt x="4889741" y="2865209"/>
-                  </a:lnTo>
-                  <a:lnTo>
-                    <a:pt x="4961363" y="2880672"/>
-                  </a:lnTo>
-                  <a:lnTo>
-                    <a:pt x="5032986" y="2895749"/>
-                  </a:lnTo>
-                  <a:lnTo>
-                    <a:pt x="5104608" y="2910449"/>
-                  </a:lnTo>
-                  <a:lnTo>
-                    <a:pt x="5176231" y="2924781"/>
-                  </a:lnTo>
-                  <a:lnTo>
-                    <a:pt x="5247853" y="2938755"/>
-                  </a:lnTo>
-                  <a:lnTo>
-                    <a:pt x="5319476" y="2952379"/>
-                  </a:lnTo>
-                  <a:lnTo>
-                    <a:pt x="5391098" y="2965663"/>
-                  </a:lnTo>
-                  <a:lnTo>
-                    <a:pt x="5462721" y="2978615"/>
-                  </a:lnTo>
-                  <a:lnTo>
-                    <a:pt x="5534343" y="2991243"/>
-                  </a:lnTo>
-                  <a:lnTo>
-                    <a:pt x="5605966" y="3003556"/>
-                  </a:lnTo>
-                  <a:lnTo>
-                    <a:pt x="5677588" y="3015560"/>
-                  </a:lnTo>
-                  <a:lnTo>
-                    <a:pt x="5749211" y="3027265"/>
-                  </a:lnTo>
-                  <a:lnTo>
-                    <a:pt x="5820833" y="3038676"/>
-                  </a:lnTo>
-                  <a:lnTo>
-                    <a:pt x="5892456" y="3049803"/>
-                  </a:lnTo>
-                  <a:lnTo>
-                    <a:pt x="5964078" y="3060651"/>
-                  </a:lnTo>
-                  <a:lnTo>
-                    <a:pt x="6035701" y="3071229"/>
-                  </a:lnTo>
-                  <a:lnTo>
-                    <a:pt x="6107324" y="3081541"/>
-                  </a:lnTo>
-                  <a:lnTo>
-                    <a:pt x="6178946" y="3091596"/>
-                  </a:lnTo>
-                  <a:lnTo>
-                    <a:pt x="6250569" y="3101400"/>
+                    <a:pt x="71622" y="27580"/>
+                  </a:lnTo>
+                  <a:lnTo>
+                    <a:pt x="143245" y="54794"/>
+                  </a:lnTo>
+                  <a:lnTo>
+                    <a:pt x="214867" y="81645"/>
+                  </a:lnTo>
+                  <a:lnTo>
+                    <a:pt x="286490" y="108140"/>
+                  </a:lnTo>
+                  <a:lnTo>
+                    <a:pt x="358112" y="134282"/>
+                  </a:lnTo>
+                  <a:lnTo>
+                    <a:pt x="429735" y="160076"/>
+                  </a:lnTo>
+                  <a:lnTo>
+                    <a:pt x="501357" y="185527"/>
+                  </a:lnTo>
+                  <a:lnTo>
+                    <a:pt x="572980" y="210640"/>
+                  </a:lnTo>
+                  <a:lnTo>
+                    <a:pt x="644602" y="235419"/>
+                  </a:lnTo>
+                  <a:lnTo>
+                    <a:pt x="716225" y="259868"/>
+                  </a:lnTo>
+                  <a:lnTo>
+                    <a:pt x="787847" y="283991"/>
+                  </a:lnTo>
+                  <a:lnTo>
+                    <a:pt x="859470" y="307794"/>
+                  </a:lnTo>
+                  <a:lnTo>
+                    <a:pt x="931092" y="331280"/>
+                  </a:lnTo>
+                  <a:lnTo>
+                    <a:pt x="1002715" y="354454"/>
+                  </a:lnTo>
+                  <a:lnTo>
+                    <a:pt x="1074337" y="377319"/>
+                  </a:lnTo>
+                  <a:lnTo>
+                    <a:pt x="1145960" y="399881"/>
+                  </a:lnTo>
+                  <a:lnTo>
+                    <a:pt x="1217582" y="422142"/>
+                  </a:lnTo>
+                  <a:lnTo>
+                    <a:pt x="1289205" y="444107"/>
+                  </a:lnTo>
+                  <a:lnTo>
+                    <a:pt x="1360827" y="465780"/>
+                  </a:lnTo>
+                  <a:lnTo>
+                    <a:pt x="1432450" y="487164"/>
+                  </a:lnTo>
+                  <a:lnTo>
+                    <a:pt x="1504073" y="508264"/>
+                  </a:lnTo>
+                  <a:lnTo>
+                    <a:pt x="1575695" y="529084"/>
+                  </a:lnTo>
+                  <a:lnTo>
+                    <a:pt x="1647318" y="549626"/>
+                  </a:lnTo>
+                  <a:lnTo>
+                    <a:pt x="1718940" y="569895"/>
+                  </a:lnTo>
+                  <a:lnTo>
+                    <a:pt x="1790563" y="589895"/>
+                  </a:lnTo>
+                  <a:lnTo>
+                    <a:pt x="1862185" y="609628"/>
+                  </a:lnTo>
+                  <a:lnTo>
+                    <a:pt x="1933808" y="629099"/>
+                  </a:lnTo>
+                  <a:lnTo>
+                    <a:pt x="2005430" y="648311"/>
+                  </a:lnTo>
+                  <a:lnTo>
+                    <a:pt x="2077053" y="667268"/>
+                  </a:lnTo>
+                  <a:lnTo>
+                    <a:pt x="2148675" y="685972"/>
+                  </a:lnTo>
+                  <a:lnTo>
+                    <a:pt x="2220298" y="704427"/>
+                  </a:lnTo>
+                  <a:lnTo>
+                    <a:pt x="2291920" y="722637"/>
+                  </a:lnTo>
+                  <a:lnTo>
+                    <a:pt x="2363543" y="740605"/>
+                  </a:lnTo>
+                  <a:lnTo>
+                    <a:pt x="2435165" y="758334"/>
+                  </a:lnTo>
+                  <a:lnTo>
+                    <a:pt x="2506788" y="775826"/>
+                  </a:lnTo>
+                  <a:lnTo>
+                    <a:pt x="2578410" y="793087"/>
+                  </a:lnTo>
+                  <a:lnTo>
+                    <a:pt x="2650033" y="810117"/>
+                  </a:lnTo>
+                  <a:lnTo>
+                    <a:pt x="2721655" y="826921"/>
+                  </a:lnTo>
+                  <a:lnTo>
+                    <a:pt x="2793278" y="843502"/>
+                  </a:lnTo>
+                  <a:lnTo>
+                    <a:pt x="2864901" y="859861"/>
+                  </a:lnTo>
+                  <a:lnTo>
+                    <a:pt x="2936523" y="876004"/>
+                  </a:lnTo>
+                  <a:lnTo>
+                    <a:pt x="3008146" y="891931"/>
+                  </a:lnTo>
+                  <a:lnTo>
+                    <a:pt x="3079768" y="907647"/>
+                  </a:lnTo>
+                  <a:lnTo>
+                    <a:pt x="3151391" y="923153"/>
+                  </a:lnTo>
+                  <a:lnTo>
+                    <a:pt x="3223013" y="938454"/>
+                  </a:lnTo>
+                  <a:lnTo>
+                    <a:pt x="3294636" y="953551"/>
+                  </a:lnTo>
+                  <a:lnTo>
+                    <a:pt x="3366258" y="968447"/>
+                  </a:lnTo>
+                  <a:lnTo>
+                    <a:pt x="3437881" y="983144"/>
+                  </a:lnTo>
+                  <a:lnTo>
+                    <a:pt x="3509503" y="997647"/>
+                  </a:lnTo>
+                  <a:lnTo>
+                    <a:pt x="3581126" y="1011956"/>
+                  </a:lnTo>
+                  <a:lnTo>
+                    <a:pt x="3652748" y="1026075"/>
+                  </a:lnTo>
+                  <a:lnTo>
+                    <a:pt x="3724371" y="1040006"/>
+                  </a:lnTo>
+                  <a:lnTo>
+                    <a:pt x="3795993" y="1053752"/>
+                  </a:lnTo>
+                  <a:lnTo>
+                    <a:pt x="3867616" y="1067315"/>
+                  </a:lnTo>
+                  <a:lnTo>
+                    <a:pt x="3939238" y="1080698"/>
+                  </a:lnTo>
+                  <a:lnTo>
+                    <a:pt x="4010861" y="1093902"/>
+                  </a:lnTo>
+                  <a:lnTo>
+                    <a:pt x="4082483" y="1106931"/>
+                  </a:lnTo>
+                  <a:lnTo>
+                    <a:pt x="4154106" y="1119787"/>
+                  </a:lnTo>
+                  <a:lnTo>
+                    <a:pt x="4225729" y="1132471"/>
+                  </a:lnTo>
+                  <a:lnTo>
+                    <a:pt x="4297351" y="1144987"/>
+                  </a:lnTo>
+                  <a:lnTo>
+                    <a:pt x="4368974" y="1157337"/>
+                  </a:lnTo>
+                  <a:lnTo>
+                    <a:pt x="4440596" y="1169522"/>
+                  </a:lnTo>
+                  <a:lnTo>
+                    <a:pt x="4512219" y="1181545"/>
+                  </a:lnTo>
+                  <a:lnTo>
+                    <a:pt x="4583841" y="1193408"/>
+                  </a:lnTo>
+                  <a:lnTo>
+                    <a:pt x="4655464" y="1205113"/>
+                  </a:lnTo>
+                  <a:lnTo>
+                    <a:pt x="4727086" y="1216663"/>
+                  </a:lnTo>
+                  <a:lnTo>
+                    <a:pt x="4798709" y="1228059"/>
+                  </a:lnTo>
+                  <a:lnTo>
+                    <a:pt x="4870331" y="1239303"/>
+                  </a:lnTo>
+                  <a:lnTo>
+                    <a:pt x="4941954" y="1250398"/>
+                  </a:lnTo>
+                  <a:lnTo>
+                    <a:pt x="5013576" y="1261345"/>
+                  </a:lnTo>
+                  <a:lnTo>
+                    <a:pt x="5085199" y="1272146"/>
+                  </a:lnTo>
+                  <a:lnTo>
+                    <a:pt x="5156821" y="1282804"/>
+                  </a:lnTo>
+                  <a:lnTo>
+                    <a:pt x="5228444" y="1293320"/>
+                  </a:lnTo>
+                  <a:lnTo>
+                    <a:pt x="5300066" y="1303696"/>
+                  </a:lnTo>
+                  <a:lnTo>
+                    <a:pt x="5371689" y="1313935"/>
+                  </a:lnTo>
+                  <a:lnTo>
+                    <a:pt x="5443311" y="1324036"/>
+                  </a:lnTo>
+                  <a:lnTo>
+                    <a:pt x="5514934" y="1334004"/>
+                  </a:lnTo>
+                  <a:lnTo>
+                    <a:pt x="5586557" y="1343839"/>
+                  </a:lnTo>
+                  <a:lnTo>
+                    <a:pt x="5658179" y="1353543"/>
+                  </a:lnTo>
+                  <a:lnTo>
+                    <a:pt x="5729802" y="1363118"/>
+                  </a:lnTo>
+                  <a:lnTo>
+                    <a:pt x="5801424" y="1372566"/>
+                  </a:lnTo>
+                  <a:lnTo>
+                    <a:pt x="5873047" y="1381888"/>
+                  </a:lnTo>
+                  <a:lnTo>
+                    <a:pt x="5944669" y="1391086"/>
+                  </a:lnTo>
+                  <a:lnTo>
+                    <a:pt x="6016292" y="1400162"/>
+                  </a:lnTo>
+                  <a:lnTo>
+                    <a:pt x="6087914" y="1409116"/>
+                  </a:lnTo>
+                  <a:lnTo>
+                    <a:pt x="6159537" y="1417952"/>
+                  </a:lnTo>
+                  <a:lnTo>
+                    <a:pt x="6231159" y="1426671"/>
+                  </a:lnTo>
+                  <a:lnTo>
+                    <a:pt x="6302782" y="1435273"/>
+                  </a:lnTo>
+                  <a:lnTo>
+                    <a:pt x="6374404" y="1443761"/>
+                  </a:lnTo>
+                  <a:lnTo>
+                    <a:pt x="6446027" y="1452136"/>
+                  </a:lnTo>
+                  <a:lnTo>
+                    <a:pt x="6517649" y="1460399"/>
+                  </a:lnTo>
+                  <a:lnTo>
+                    <a:pt x="6589272" y="1468553"/>
+                  </a:lnTo>
+                  <a:lnTo>
+                    <a:pt x="6660894" y="1476598"/>
+                  </a:lnTo>
+                  <a:lnTo>
+                    <a:pt x="6732517" y="1484536"/>
+                  </a:lnTo>
+                  <a:lnTo>
+                    <a:pt x="6804139" y="1492368"/>
+                  </a:lnTo>
+                  <a:lnTo>
+                    <a:pt x="6875762" y="1500097"/>
+                  </a:lnTo>
+                  <a:lnTo>
+                    <a:pt x="6947385" y="1507722"/>
+                  </a:lnTo>
+                  <a:lnTo>
+                    <a:pt x="7019007" y="1515246"/>
+                  </a:lnTo>
+                  <a:lnTo>
+                    <a:pt x="7090630" y="1522670"/>
                   </a:lnTo>
                 </a:path>
               </a:pathLst>
@@ -5061,7 +5130,7 @@
                   <a:latin typeface="Helvetica"/>
                   <a:cs typeface="Helvetica"/>
                 </a:rPr>
-                <a:t>subHR per 1 mL/min: 0.97 (0.94-1.00)  |  per IQR (Δ = 18.2): 0.55 (0.31-0.97)  |  IQR: [-11.5, 6.7]</a:t>
+                <a:t>subHR per 1 mL/min: 0.98 (0.95-1.02)  |  per IQR (Δ = 18.2): 0.73 (0.38-1.40)  |  IQR: [-11.5, 6.7]</a:t>
               </a:r>
             </a:p>
           </p:txBody>

--- a/docs/plots/carbo/jx_carbo_linsubhr_egfrdisc_aki2.pptx
+++ b/docs/plots/carbo/jx_carbo_linsubhr_egfrdisc_aki2.pptx
@@ -3003,512 +3003,500 @@
           <p:spPr>
             <a:xfrm>
               <a:off x="1172049" y="2073503"/>
-              <a:ext cx="7090630" cy="3246833"/>
+              <a:ext cx="7090630" cy="3286078"/>
             </a:xfrm>
             <a:custGeom>
               <a:avLst/>
               <a:pathLst>
-                <a:path w="7090630" h="3246833">
+                <a:path w="7090630" h="3286078">
                   <a:moveTo>
-                    <a:pt x="2390939" y="0"/>
+                    <a:pt x="2707695" y="0"/>
                   </a:moveTo>
                   <a:lnTo>
-                    <a:pt x="2435165" y="87687"/>
-                  </a:lnTo>
-                  <a:lnTo>
-                    <a:pt x="2506788" y="223993"/>
-                  </a:lnTo>
-                  <a:lnTo>
-                    <a:pt x="2578410" y="354829"/>
-                  </a:lnTo>
-                  <a:lnTo>
-                    <a:pt x="2650033" y="480413"/>
-                  </a:lnTo>
-                  <a:lnTo>
-                    <a:pt x="2721655" y="600956"/>
-                  </a:lnTo>
-                  <a:lnTo>
-                    <a:pt x="2793278" y="716662"/>
-                  </a:lnTo>
-                  <a:lnTo>
-                    <a:pt x="2864901" y="827723"/>
-                  </a:lnTo>
-                  <a:lnTo>
-                    <a:pt x="2936523" y="934327"/>
-                  </a:lnTo>
-                  <a:lnTo>
-                    <a:pt x="3008146" y="1036652"/>
-                  </a:lnTo>
-                  <a:lnTo>
-                    <a:pt x="3079768" y="1134870"/>
-                  </a:lnTo>
-                  <a:lnTo>
-                    <a:pt x="3151391" y="1229146"/>
-                  </a:lnTo>
-                  <a:lnTo>
-                    <a:pt x="3223013" y="1319638"/>
-                  </a:lnTo>
-                  <a:lnTo>
-                    <a:pt x="3294636" y="1406498"/>
-                  </a:lnTo>
-                  <a:lnTo>
-                    <a:pt x="3366258" y="1489871"/>
-                  </a:lnTo>
-                  <a:lnTo>
-                    <a:pt x="3437881" y="1569899"/>
-                  </a:lnTo>
-                  <a:lnTo>
-                    <a:pt x="3509503" y="1646714"/>
-                  </a:lnTo>
-                  <a:lnTo>
-                    <a:pt x="3581126" y="1720446"/>
-                  </a:lnTo>
-                  <a:lnTo>
-                    <a:pt x="3652748" y="1791219"/>
-                  </a:lnTo>
-                  <a:lnTo>
-                    <a:pt x="3724371" y="1859151"/>
-                  </a:lnTo>
-                  <a:lnTo>
-                    <a:pt x="3795993" y="1924357"/>
-                  </a:lnTo>
-                  <a:lnTo>
-                    <a:pt x="3867616" y="1986946"/>
-                  </a:lnTo>
-                  <a:lnTo>
-                    <a:pt x="3939238" y="2047022"/>
-                  </a:lnTo>
-                  <a:lnTo>
-                    <a:pt x="4010861" y="2104687"/>
-                  </a:lnTo>
-                  <a:lnTo>
-                    <a:pt x="4082483" y="2160038"/>
-                  </a:lnTo>
-                  <a:lnTo>
-                    <a:pt x="4154106" y="2213167"/>
-                  </a:lnTo>
-                  <a:lnTo>
-                    <a:pt x="4225729" y="2264164"/>
-                  </a:lnTo>
-                  <a:lnTo>
-                    <a:pt x="4297351" y="2313114"/>
-                  </a:lnTo>
-                  <a:lnTo>
-                    <a:pt x="4368974" y="2360099"/>
-                  </a:lnTo>
-                  <a:lnTo>
-                    <a:pt x="4440596" y="2405198"/>
-                  </a:lnTo>
-                  <a:lnTo>
-                    <a:pt x="4512219" y="2448487"/>
-                  </a:lnTo>
-                  <a:lnTo>
-                    <a:pt x="4583841" y="2490039"/>
-                  </a:lnTo>
-                  <a:lnTo>
-                    <a:pt x="4655464" y="2529923"/>
-                  </a:lnTo>
-                  <a:lnTo>
-                    <a:pt x="4727086" y="2568206"/>
-                  </a:lnTo>
-                  <a:lnTo>
-                    <a:pt x="4798709" y="2604953"/>
-                  </a:lnTo>
-                  <a:lnTo>
-                    <a:pt x="4870331" y="2640225"/>
-                  </a:lnTo>
-                  <a:lnTo>
-                    <a:pt x="4941954" y="2647317"/>
-                  </a:lnTo>
-                  <a:lnTo>
-                    <a:pt x="5013576" y="2635371"/>
-                  </a:lnTo>
-                  <a:lnTo>
-                    <a:pt x="5085199" y="2623255"/>
-                  </a:lnTo>
-                  <a:lnTo>
-                    <a:pt x="5156821" y="2610966"/>
-                  </a:lnTo>
-                  <a:lnTo>
-                    <a:pt x="5228444" y="2598501"/>
-                  </a:lnTo>
-                  <a:lnTo>
-                    <a:pt x="5300066" y="2585858"/>
-                  </a:lnTo>
-                  <a:lnTo>
-                    <a:pt x="5371689" y="2573035"/>
-                  </a:lnTo>
-                  <a:lnTo>
-                    <a:pt x="5443311" y="2560028"/>
-                  </a:lnTo>
-                  <a:lnTo>
-                    <a:pt x="5514934" y="2546836"/>
-                  </a:lnTo>
-                  <a:lnTo>
-                    <a:pt x="5586557" y="2533455"/>
-                  </a:lnTo>
-                  <a:lnTo>
-                    <a:pt x="5658179" y="2519883"/>
-                  </a:lnTo>
-                  <a:lnTo>
-                    <a:pt x="5729802" y="2506118"/>
-                  </a:lnTo>
-                  <a:lnTo>
-                    <a:pt x="5801424" y="2492156"/>
-                  </a:lnTo>
-                  <a:lnTo>
-                    <a:pt x="5873047" y="2477994"/>
-                  </a:lnTo>
-                  <a:lnTo>
-                    <a:pt x="5944669" y="2463630"/>
-                  </a:lnTo>
-                  <a:lnTo>
-                    <a:pt x="6016292" y="2449061"/>
-                  </a:lnTo>
-                  <a:lnTo>
-                    <a:pt x="6087914" y="2434284"/>
-                  </a:lnTo>
-                  <a:lnTo>
-                    <a:pt x="6159537" y="2419296"/>
-                  </a:lnTo>
-                  <a:lnTo>
-                    <a:pt x="6231159" y="2404093"/>
-                  </a:lnTo>
-                  <a:lnTo>
-                    <a:pt x="6302782" y="2388674"/>
-                  </a:lnTo>
-                  <a:lnTo>
-                    <a:pt x="6374404" y="2373035"/>
-                  </a:lnTo>
-                  <a:lnTo>
-                    <a:pt x="6446027" y="2357172"/>
-                  </a:lnTo>
-                  <a:lnTo>
-                    <a:pt x="6517649" y="2341082"/>
-                  </a:lnTo>
-                  <a:lnTo>
-                    <a:pt x="6589272" y="2324763"/>
-                  </a:lnTo>
-                  <a:lnTo>
-                    <a:pt x="6660894" y="2308211"/>
-                  </a:lnTo>
-                  <a:lnTo>
-                    <a:pt x="6732517" y="2291422"/>
-                  </a:lnTo>
-                  <a:lnTo>
-                    <a:pt x="6804139" y="2274394"/>
-                  </a:lnTo>
-                  <a:lnTo>
-                    <a:pt x="6875762" y="2257122"/>
-                  </a:lnTo>
-                  <a:lnTo>
-                    <a:pt x="6947385" y="2239604"/>
-                  </a:lnTo>
-                  <a:lnTo>
-                    <a:pt x="7019007" y="2221835"/>
-                  </a:lnTo>
-                  <a:lnTo>
-                    <a:pt x="7090630" y="2203813"/>
-                  </a:lnTo>
-                  <a:lnTo>
-                    <a:pt x="7090630" y="3246833"/>
-                  </a:lnTo>
-                  <a:lnTo>
-                    <a:pt x="7019007" y="3236927"/>
-                  </a:lnTo>
-                  <a:lnTo>
-                    <a:pt x="6947385" y="3226606"/>
-                  </a:lnTo>
-                  <a:lnTo>
-                    <a:pt x="6875762" y="3215854"/>
-                  </a:lnTo>
-                  <a:lnTo>
-                    <a:pt x="6804139" y="3204652"/>
-                  </a:lnTo>
-                  <a:lnTo>
-                    <a:pt x="6732517" y="3192982"/>
-                  </a:lnTo>
-                  <a:lnTo>
-                    <a:pt x="6660894" y="3180823"/>
-                  </a:lnTo>
-                  <a:lnTo>
-                    <a:pt x="6589272" y="3168157"/>
-                  </a:lnTo>
-                  <a:lnTo>
-                    <a:pt x="6517649" y="3154960"/>
-                  </a:lnTo>
-                  <a:lnTo>
-                    <a:pt x="6446027" y="3141212"/>
-                  </a:lnTo>
-                  <a:lnTo>
-                    <a:pt x="6374404" y="3126889"/>
-                  </a:lnTo>
-                  <a:lnTo>
-                    <a:pt x="6302782" y="3111967"/>
-                  </a:lnTo>
-                  <a:lnTo>
-                    <a:pt x="6231159" y="3096421"/>
-                  </a:lnTo>
-                  <a:lnTo>
-                    <a:pt x="6159537" y="3080225"/>
-                  </a:lnTo>
-                  <a:lnTo>
-                    <a:pt x="6087914" y="3063352"/>
-                  </a:lnTo>
-                  <a:lnTo>
-                    <a:pt x="6016292" y="3045774"/>
-                  </a:lnTo>
-                  <a:lnTo>
-                    <a:pt x="5944669" y="3027460"/>
-                  </a:lnTo>
-                  <a:lnTo>
-                    <a:pt x="5873047" y="3008380"/>
-                  </a:lnTo>
-                  <a:lnTo>
-                    <a:pt x="5801424" y="2988503"/>
-                  </a:lnTo>
-                  <a:lnTo>
-                    <a:pt x="5729802" y="2967794"/>
-                  </a:lnTo>
-                  <a:lnTo>
-                    <a:pt x="5658179" y="2946220"/>
-                  </a:lnTo>
-                  <a:lnTo>
-                    <a:pt x="5586557" y="2923743"/>
-                  </a:lnTo>
-                  <a:lnTo>
-                    <a:pt x="5514934" y="2900327"/>
-                  </a:lnTo>
-                  <a:lnTo>
-                    <a:pt x="5443311" y="2875931"/>
-                  </a:lnTo>
-                  <a:lnTo>
-                    <a:pt x="5371689" y="2850515"/>
-                  </a:lnTo>
-                  <a:lnTo>
-                    <a:pt x="5300066" y="2824037"/>
-                  </a:lnTo>
-                  <a:lnTo>
-                    <a:pt x="5228444" y="2796451"/>
-                  </a:lnTo>
-                  <a:lnTo>
-                    <a:pt x="5156821" y="2767712"/>
-                  </a:lnTo>
-                  <a:lnTo>
-                    <a:pt x="5085199" y="2737771"/>
-                  </a:lnTo>
-                  <a:lnTo>
-                    <a:pt x="5013576" y="2706578"/>
-                  </a:lnTo>
-                  <a:lnTo>
-                    <a:pt x="4941954" y="2674081"/>
-                  </a:lnTo>
-                  <a:lnTo>
-                    <a:pt x="4870331" y="2659095"/>
-                  </a:lnTo>
-                  <a:lnTo>
-                    <a:pt x="4798709" y="2670706"/>
-                  </a:lnTo>
-                  <a:lnTo>
-                    <a:pt x="4727086" y="2682154"/>
-                  </a:lnTo>
-                  <a:lnTo>
-                    <a:pt x="4655464" y="2693441"/>
-                  </a:lnTo>
-                  <a:lnTo>
-                    <a:pt x="4583841" y="2704569"/>
-                  </a:lnTo>
-                  <a:lnTo>
-                    <a:pt x="4512219" y="2715541"/>
-                  </a:lnTo>
-                  <a:lnTo>
-                    <a:pt x="4440596" y="2726357"/>
-                  </a:lnTo>
-                  <a:lnTo>
-                    <a:pt x="4368974" y="2737022"/>
-                  </a:lnTo>
-                  <a:lnTo>
-                    <a:pt x="4297351" y="2747536"/>
-                  </a:lnTo>
-                  <a:lnTo>
-                    <a:pt x="4225729" y="2757903"/>
-                  </a:lnTo>
-                  <a:lnTo>
-                    <a:pt x="4154106" y="2768123"/>
-                  </a:lnTo>
-                  <a:lnTo>
-                    <a:pt x="4082483" y="2778199"/>
-                  </a:lnTo>
-                  <a:lnTo>
-                    <a:pt x="4010861" y="2788134"/>
-                  </a:lnTo>
-                  <a:lnTo>
-                    <a:pt x="3939238" y="2797929"/>
-                  </a:lnTo>
-                  <a:lnTo>
-                    <a:pt x="3867616" y="2807585"/>
-                  </a:lnTo>
-                  <a:lnTo>
-                    <a:pt x="3795993" y="2817106"/>
-                  </a:lnTo>
-                  <a:lnTo>
-                    <a:pt x="3724371" y="2826493"/>
-                  </a:lnTo>
-                  <a:lnTo>
-                    <a:pt x="3652748" y="2835747"/>
-                  </a:lnTo>
-                  <a:lnTo>
-                    <a:pt x="3581126" y="2844872"/>
-                  </a:lnTo>
-                  <a:lnTo>
-                    <a:pt x="3509503" y="2853867"/>
-                  </a:lnTo>
-                  <a:lnTo>
-                    <a:pt x="3437881" y="2862737"/>
-                  </a:lnTo>
-                  <a:lnTo>
-                    <a:pt x="3366258" y="2871481"/>
-                  </a:lnTo>
-                  <a:lnTo>
-                    <a:pt x="3294636" y="2880102"/>
-                  </a:lnTo>
-                  <a:lnTo>
-                    <a:pt x="3223013" y="2888602"/>
-                  </a:lnTo>
-                  <a:lnTo>
-                    <a:pt x="3151391" y="2896982"/>
-                  </a:lnTo>
-                  <a:lnTo>
-                    <a:pt x="3079768" y="2905244"/>
-                  </a:lnTo>
-                  <a:lnTo>
-                    <a:pt x="3008146" y="2913389"/>
-                  </a:lnTo>
-                  <a:lnTo>
-                    <a:pt x="2936523" y="2921420"/>
-                  </a:lnTo>
-                  <a:lnTo>
-                    <a:pt x="2864901" y="2929338"/>
-                  </a:lnTo>
-                  <a:lnTo>
-                    <a:pt x="2793278" y="2937145"/>
-                  </a:lnTo>
-                  <a:lnTo>
-                    <a:pt x="2721655" y="2944841"/>
-                  </a:lnTo>
-                  <a:lnTo>
-                    <a:pt x="2650033" y="2952429"/>
-                  </a:lnTo>
-                  <a:lnTo>
-                    <a:pt x="2578410" y="2959911"/>
-                  </a:lnTo>
-                  <a:lnTo>
-                    <a:pt x="2506788" y="2967287"/>
-                  </a:lnTo>
-                  <a:lnTo>
-                    <a:pt x="2435165" y="2974559"/>
-                  </a:lnTo>
-                  <a:lnTo>
-                    <a:pt x="2363543" y="2981728"/>
-                  </a:lnTo>
-                  <a:lnTo>
-                    <a:pt x="2291920" y="2988797"/>
-                  </a:lnTo>
-                  <a:lnTo>
-                    <a:pt x="2220298" y="2995766"/>
-                  </a:lnTo>
-                  <a:lnTo>
-                    <a:pt x="2148675" y="3002637"/>
-                  </a:lnTo>
-                  <a:lnTo>
-                    <a:pt x="2077053" y="3009412"/>
-                  </a:lnTo>
-                  <a:lnTo>
-                    <a:pt x="2005430" y="3016091"/>
-                  </a:lnTo>
-                  <a:lnTo>
-                    <a:pt x="1933808" y="3022675"/>
-                  </a:lnTo>
-                  <a:lnTo>
-                    <a:pt x="1862185" y="3029168"/>
-                  </a:lnTo>
-                  <a:lnTo>
-                    <a:pt x="1790563" y="3035568"/>
-                  </a:lnTo>
-                  <a:lnTo>
-                    <a:pt x="1718940" y="3041879"/>
-                  </a:lnTo>
-                  <a:lnTo>
-                    <a:pt x="1647318" y="3048101"/>
-                  </a:lnTo>
-                  <a:lnTo>
-                    <a:pt x="1575695" y="3054235"/>
-                  </a:lnTo>
-                  <a:lnTo>
-                    <a:pt x="1504073" y="3060283"/>
-                  </a:lnTo>
-                  <a:lnTo>
-                    <a:pt x="1432450" y="3066245"/>
-                  </a:lnTo>
-                  <a:lnTo>
-                    <a:pt x="1360827" y="3072124"/>
-                  </a:lnTo>
-                  <a:lnTo>
-                    <a:pt x="1289205" y="3077920"/>
-                  </a:lnTo>
-                  <a:lnTo>
-                    <a:pt x="1217582" y="3083634"/>
-                  </a:lnTo>
-                  <a:lnTo>
-                    <a:pt x="1145960" y="3089268"/>
-                  </a:lnTo>
-                  <a:lnTo>
-                    <a:pt x="1074337" y="3094823"/>
-                  </a:lnTo>
-                  <a:lnTo>
-                    <a:pt x="1002715" y="3100299"/>
-                  </a:lnTo>
-                  <a:lnTo>
-                    <a:pt x="931092" y="3105698"/>
-                  </a:lnTo>
-                  <a:lnTo>
-                    <a:pt x="859470" y="3111021"/>
-                  </a:lnTo>
-                  <a:lnTo>
-                    <a:pt x="787847" y="3116270"/>
-                  </a:lnTo>
-                  <a:lnTo>
-                    <a:pt x="716225" y="3121444"/>
-                  </a:lnTo>
-                  <a:lnTo>
-                    <a:pt x="644602" y="3126545"/>
-                  </a:lnTo>
-                  <a:lnTo>
-                    <a:pt x="572980" y="3131575"/>
-                  </a:lnTo>
-                  <a:lnTo>
-                    <a:pt x="501357" y="3136534"/>
-                  </a:lnTo>
-                  <a:lnTo>
-                    <a:pt x="429735" y="3141423"/>
-                  </a:lnTo>
-                  <a:lnTo>
-                    <a:pt x="358112" y="3146243"/>
-                  </a:lnTo>
-                  <a:lnTo>
-                    <a:pt x="286490" y="3150995"/>
-                  </a:lnTo>
-                  <a:lnTo>
-                    <a:pt x="214867" y="3155680"/>
-                  </a:lnTo>
-                  <a:lnTo>
-                    <a:pt x="143245" y="3160300"/>
-                  </a:lnTo>
-                  <a:lnTo>
-                    <a:pt x="71622" y="3164854"/>
-                  </a:lnTo>
-                  <a:lnTo>
-                    <a:pt x="0" y="3169344"/>
+                    <a:pt x="2721655" y="32291"/>
+                  </a:lnTo>
+                  <a:lnTo>
+                    <a:pt x="2793278" y="190376"/>
+                  </a:lnTo>
+                  <a:lnTo>
+                    <a:pt x="2864901" y="341221"/>
+                  </a:lnTo>
+                  <a:lnTo>
+                    <a:pt x="2936523" y="485156"/>
+                  </a:lnTo>
+                  <a:lnTo>
+                    <a:pt x="3008146" y="622499"/>
+                  </a:lnTo>
+                  <a:lnTo>
+                    <a:pt x="3079768" y="753551"/>
+                  </a:lnTo>
+                  <a:lnTo>
+                    <a:pt x="3151391" y="878601"/>
+                  </a:lnTo>
+                  <a:lnTo>
+                    <a:pt x="3223013" y="997923"/>
+                  </a:lnTo>
+                  <a:lnTo>
+                    <a:pt x="3294636" y="1111780"/>
+                  </a:lnTo>
+                  <a:lnTo>
+                    <a:pt x="3366258" y="1220422"/>
+                  </a:lnTo>
+                  <a:lnTo>
+                    <a:pt x="3437881" y="1324088"/>
+                  </a:lnTo>
+                  <a:lnTo>
+                    <a:pt x="3509503" y="1423005"/>
+                  </a:lnTo>
+                  <a:lnTo>
+                    <a:pt x="3581126" y="1517392"/>
+                  </a:lnTo>
+                  <a:lnTo>
+                    <a:pt x="3652748" y="1607456"/>
+                  </a:lnTo>
+                  <a:lnTo>
+                    <a:pt x="3724371" y="1693395"/>
+                  </a:lnTo>
+                  <a:lnTo>
+                    <a:pt x="3795993" y="1775397"/>
+                  </a:lnTo>
+                  <a:lnTo>
+                    <a:pt x="3867616" y="1853644"/>
+                  </a:lnTo>
+                  <a:lnTo>
+                    <a:pt x="3939238" y="1928307"/>
+                  </a:lnTo>
+                  <a:lnTo>
+                    <a:pt x="4010861" y="1999550"/>
+                  </a:lnTo>
+                  <a:lnTo>
+                    <a:pt x="4082483" y="2067529"/>
+                  </a:lnTo>
+                  <a:lnTo>
+                    <a:pt x="4154106" y="2132396"/>
+                  </a:lnTo>
+                  <a:lnTo>
+                    <a:pt x="4225729" y="2194291"/>
+                  </a:lnTo>
+                  <a:lnTo>
+                    <a:pt x="4297351" y="2253351"/>
+                  </a:lnTo>
+                  <a:lnTo>
+                    <a:pt x="4368974" y="2309706"/>
+                  </a:lnTo>
+                  <a:lnTo>
+                    <a:pt x="4440596" y="2363480"/>
+                  </a:lnTo>
+                  <a:lnTo>
+                    <a:pt x="4512219" y="2414791"/>
+                  </a:lnTo>
+                  <a:lnTo>
+                    <a:pt x="4583841" y="2463752"/>
+                  </a:lnTo>
+                  <a:lnTo>
+                    <a:pt x="4655464" y="2510470"/>
+                  </a:lnTo>
+                  <a:lnTo>
+                    <a:pt x="4727086" y="2555049"/>
+                  </a:lnTo>
+                  <a:lnTo>
+                    <a:pt x="4798709" y="2597585"/>
+                  </a:lnTo>
+                  <a:lnTo>
+                    <a:pt x="4870331" y="2638174"/>
+                  </a:lnTo>
+                  <a:lnTo>
+                    <a:pt x="4941954" y="2652663"/>
+                  </a:lnTo>
+                  <a:lnTo>
+                    <a:pt x="5013576" y="2649909"/>
+                  </a:lnTo>
+                  <a:lnTo>
+                    <a:pt x="5085199" y="2647146"/>
+                  </a:lnTo>
+                  <a:lnTo>
+                    <a:pt x="5156821" y="2644374"/>
+                  </a:lnTo>
+                  <a:lnTo>
+                    <a:pt x="5228444" y="2641593"/>
+                  </a:lnTo>
+                  <a:lnTo>
+                    <a:pt x="5300066" y="2638802"/>
+                  </a:lnTo>
+                  <a:lnTo>
+                    <a:pt x="5371689" y="2636002"/>
+                  </a:lnTo>
+                  <a:lnTo>
+                    <a:pt x="5443311" y="2633193"/>
+                  </a:lnTo>
+                  <a:lnTo>
+                    <a:pt x="5514934" y="2630375"/>
+                  </a:lnTo>
+                  <a:lnTo>
+                    <a:pt x="5586557" y="2627547"/>
+                  </a:lnTo>
+                  <a:lnTo>
+                    <a:pt x="5658179" y="2624710"/>
+                  </a:lnTo>
+                  <a:lnTo>
+                    <a:pt x="5729802" y="2621864"/>
+                  </a:lnTo>
+                  <a:lnTo>
+                    <a:pt x="5801424" y="2619008"/>
+                  </a:lnTo>
+                  <a:lnTo>
+                    <a:pt x="5873047" y="2616143"/>
+                  </a:lnTo>
+                  <a:lnTo>
+                    <a:pt x="5944669" y="2613268"/>
+                  </a:lnTo>
+                  <a:lnTo>
+                    <a:pt x="6016292" y="2610383"/>
+                  </a:lnTo>
+                  <a:lnTo>
+                    <a:pt x="6087914" y="2607489"/>
+                  </a:lnTo>
+                  <a:lnTo>
+                    <a:pt x="6159537" y="2604586"/>
+                  </a:lnTo>
+                  <a:lnTo>
+                    <a:pt x="6231159" y="2601673"/>
+                  </a:lnTo>
+                  <a:lnTo>
+                    <a:pt x="6302782" y="2598750"/>
+                  </a:lnTo>
+                  <a:lnTo>
+                    <a:pt x="6374404" y="2595817"/>
+                  </a:lnTo>
+                  <a:lnTo>
+                    <a:pt x="6446027" y="2592875"/>
+                  </a:lnTo>
+                  <a:lnTo>
+                    <a:pt x="6517649" y="2589923"/>
+                  </a:lnTo>
+                  <a:lnTo>
+                    <a:pt x="6589272" y="2586961"/>
+                  </a:lnTo>
+                  <a:lnTo>
+                    <a:pt x="6660894" y="2583990"/>
+                  </a:lnTo>
+                  <a:lnTo>
+                    <a:pt x="6732517" y="2581008"/>
+                  </a:lnTo>
+                  <a:lnTo>
+                    <a:pt x="6804139" y="2578017"/>
+                  </a:lnTo>
+                  <a:lnTo>
+                    <a:pt x="6875762" y="2575016"/>
+                  </a:lnTo>
+                  <a:lnTo>
+                    <a:pt x="6947385" y="2572005"/>
+                  </a:lnTo>
+                  <a:lnTo>
+                    <a:pt x="7019007" y="2568984"/>
+                  </a:lnTo>
+                  <a:lnTo>
+                    <a:pt x="7090630" y="2565953"/>
+                  </a:lnTo>
+                  <a:lnTo>
+                    <a:pt x="7090630" y="3286078"/>
+                  </a:lnTo>
+                  <a:lnTo>
+                    <a:pt x="7019007" y="3276589"/>
+                  </a:lnTo>
+                  <a:lnTo>
+                    <a:pt x="6947385" y="3266646"/>
+                  </a:lnTo>
+                  <a:lnTo>
+                    <a:pt x="6875762" y="3256224"/>
+                  </a:lnTo>
+                  <a:lnTo>
+                    <a:pt x="6804139" y="3245303"/>
+                  </a:lnTo>
+                  <a:lnTo>
+                    <a:pt x="6732517" y="3233858"/>
+                  </a:lnTo>
+                  <a:lnTo>
+                    <a:pt x="6660894" y="3221863"/>
+                  </a:lnTo>
+                  <a:lnTo>
+                    <a:pt x="6589272" y="3209292"/>
+                  </a:lnTo>
+                  <a:lnTo>
+                    <a:pt x="6517649" y="3196118"/>
+                  </a:lnTo>
+                  <a:lnTo>
+                    <a:pt x="6446027" y="3182312"/>
+                  </a:lnTo>
+                  <a:lnTo>
+                    <a:pt x="6374404" y="3167842"/>
+                  </a:lnTo>
+                  <a:lnTo>
+                    <a:pt x="6302782" y="3152679"/>
+                  </a:lnTo>
+                  <a:lnTo>
+                    <a:pt x="6231159" y="3136787"/>
+                  </a:lnTo>
+                  <a:lnTo>
+                    <a:pt x="6159537" y="3120133"/>
+                  </a:lnTo>
+                  <a:lnTo>
+                    <a:pt x="6087914" y="3102679"/>
+                  </a:lnTo>
+                  <a:lnTo>
+                    <a:pt x="6016292" y="3084387"/>
+                  </a:lnTo>
+                  <a:lnTo>
+                    <a:pt x="5944669" y="3065218"/>
+                  </a:lnTo>
+                  <a:lnTo>
+                    <a:pt x="5873047" y="3045128"/>
+                  </a:lnTo>
+                  <a:lnTo>
+                    <a:pt x="5801424" y="3024074"/>
+                  </a:lnTo>
+                  <a:lnTo>
+                    <a:pt x="5729802" y="3002009"/>
+                  </a:lnTo>
+                  <a:lnTo>
+                    <a:pt x="5658179" y="2978885"/>
+                  </a:lnTo>
+                  <a:lnTo>
+                    <a:pt x="5586557" y="2954651"/>
+                  </a:lnTo>
+                  <a:lnTo>
+                    <a:pt x="5514934" y="2929254"/>
+                  </a:lnTo>
+                  <a:lnTo>
+                    <a:pt x="5443311" y="2902638"/>
+                  </a:lnTo>
+                  <a:lnTo>
+                    <a:pt x="5371689" y="2874744"/>
+                  </a:lnTo>
+                  <a:lnTo>
+                    <a:pt x="5300066" y="2845511"/>
+                  </a:lnTo>
+                  <a:lnTo>
+                    <a:pt x="5228444" y="2814875"/>
+                  </a:lnTo>
+                  <a:lnTo>
+                    <a:pt x="5156821" y="2782769"/>
+                  </a:lnTo>
+                  <a:lnTo>
+                    <a:pt x="5085199" y="2749121"/>
+                  </a:lnTo>
+                  <a:lnTo>
+                    <a:pt x="5013576" y="2713858"/>
+                  </a:lnTo>
+                  <a:lnTo>
+                    <a:pt x="4941954" y="2676903"/>
+                  </a:lnTo>
+                  <a:lnTo>
+                    <a:pt x="4870331" y="2655408"/>
+                  </a:lnTo>
+                  <a:lnTo>
+                    <a:pt x="4798709" y="2658144"/>
+                  </a:lnTo>
+                  <a:lnTo>
+                    <a:pt x="4727086" y="2660870"/>
+                  </a:lnTo>
+                  <a:lnTo>
+                    <a:pt x="4655464" y="2663588"/>
+                  </a:lnTo>
+                  <a:lnTo>
+                    <a:pt x="4583841" y="2666297"/>
+                  </a:lnTo>
+                  <a:lnTo>
+                    <a:pt x="4512219" y="2668996"/>
+                  </a:lnTo>
+                  <a:lnTo>
+                    <a:pt x="4440596" y="2671687"/>
+                  </a:lnTo>
+                  <a:lnTo>
+                    <a:pt x="4368974" y="2674369"/>
+                  </a:lnTo>
+                  <a:lnTo>
+                    <a:pt x="4297351" y="2677042"/>
+                  </a:lnTo>
+                  <a:lnTo>
+                    <a:pt x="4225729" y="2679706"/>
+                  </a:lnTo>
+                  <a:lnTo>
+                    <a:pt x="4154106" y="2682362"/>
+                  </a:lnTo>
+                  <a:lnTo>
+                    <a:pt x="4082483" y="2685008"/>
+                  </a:lnTo>
+                  <a:lnTo>
+                    <a:pt x="4010861" y="2687646"/>
+                  </a:lnTo>
+                  <a:lnTo>
+                    <a:pt x="3939238" y="2690276"/>
+                  </a:lnTo>
+                  <a:lnTo>
+                    <a:pt x="3867616" y="2692896"/>
+                  </a:lnTo>
+                  <a:lnTo>
+                    <a:pt x="3795993" y="2695508"/>
+                  </a:lnTo>
+                  <a:lnTo>
+                    <a:pt x="3724371" y="2698111"/>
+                  </a:lnTo>
+                  <a:lnTo>
+                    <a:pt x="3652748" y="2700706"/>
+                  </a:lnTo>
+                  <a:lnTo>
+                    <a:pt x="3581126" y="2703292"/>
+                  </a:lnTo>
+                  <a:lnTo>
+                    <a:pt x="3509503" y="2705870"/>
+                  </a:lnTo>
+                  <a:lnTo>
+                    <a:pt x="3437881" y="2708439"/>
+                  </a:lnTo>
+                  <a:lnTo>
+                    <a:pt x="3366258" y="2710999"/>
+                  </a:lnTo>
+                  <a:lnTo>
+                    <a:pt x="3294636" y="2713551"/>
+                  </a:lnTo>
+                  <a:lnTo>
+                    <a:pt x="3223013" y="2716095"/>
+                  </a:lnTo>
+                  <a:lnTo>
+                    <a:pt x="3151391" y="2718630"/>
+                  </a:lnTo>
+                  <a:lnTo>
+                    <a:pt x="3079768" y="2721157"/>
+                  </a:lnTo>
+                  <a:lnTo>
+                    <a:pt x="3008146" y="2723676"/>
+                  </a:lnTo>
+                  <a:lnTo>
+                    <a:pt x="2936523" y="2726186"/>
+                  </a:lnTo>
+                  <a:lnTo>
+                    <a:pt x="2864901" y="2728688"/>
+                  </a:lnTo>
+                  <a:lnTo>
+                    <a:pt x="2793278" y="2731181"/>
+                  </a:lnTo>
+                  <a:lnTo>
+                    <a:pt x="2721655" y="2733667"/>
+                  </a:lnTo>
+                  <a:lnTo>
+                    <a:pt x="2650033" y="2736144"/>
+                  </a:lnTo>
+                  <a:lnTo>
+                    <a:pt x="2578410" y="2738613"/>
+                  </a:lnTo>
+                  <a:lnTo>
+                    <a:pt x="2506788" y="2741074"/>
+                  </a:lnTo>
+                  <a:lnTo>
+                    <a:pt x="2435165" y="2743527"/>
+                  </a:lnTo>
+                  <a:lnTo>
+                    <a:pt x="2363543" y="2745972"/>
+                  </a:lnTo>
+                  <a:lnTo>
+                    <a:pt x="2291920" y="2748408"/>
+                  </a:lnTo>
+                  <a:lnTo>
+                    <a:pt x="2220298" y="2750837"/>
+                  </a:lnTo>
+                  <a:lnTo>
+                    <a:pt x="2148675" y="2753257"/>
+                  </a:lnTo>
+                  <a:lnTo>
+                    <a:pt x="2077053" y="2755670"/>
+                  </a:lnTo>
+                  <a:lnTo>
+                    <a:pt x="2005430" y="2758074"/>
+                  </a:lnTo>
+                  <a:lnTo>
+                    <a:pt x="1933808" y="2760471"/>
+                  </a:lnTo>
+                  <a:lnTo>
+                    <a:pt x="1862185" y="2762860"/>
+                  </a:lnTo>
+                  <a:lnTo>
+                    <a:pt x="1790563" y="2765240"/>
+                  </a:lnTo>
+                  <a:lnTo>
+                    <a:pt x="1718940" y="2767613"/>
+                  </a:lnTo>
+                  <a:lnTo>
+                    <a:pt x="1647318" y="2769978"/>
+                  </a:lnTo>
+                  <a:lnTo>
+                    <a:pt x="1575695" y="2772336"/>
+                  </a:lnTo>
+                  <a:lnTo>
+                    <a:pt x="1504073" y="2774685"/>
+                  </a:lnTo>
+                  <a:lnTo>
+                    <a:pt x="1432450" y="2777027"/>
+                  </a:lnTo>
+                  <a:lnTo>
+                    <a:pt x="1360827" y="2779361"/>
+                  </a:lnTo>
+                  <a:lnTo>
+                    <a:pt x="1289205" y="2781687"/>
+                  </a:lnTo>
+                  <a:lnTo>
+                    <a:pt x="1217582" y="2784006"/>
+                  </a:lnTo>
+                  <a:lnTo>
+                    <a:pt x="1145960" y="2786317"/>
+                  </a:lnTo>
+                  <a:lnTo>
+                    <a:pt x="1074337" y="2788620"/>
+                  </a:lnTo>
+                  <a:lnTo>
+                    <a:pt x="1002715" y="2790916"/>
+                  </a:lnTo>
+                  <a:lnTo>
+                    <a:pt x="931092" y="2793204"/>
+                  </a:lnTo>
+                  <a:lnTo>
+                    <a:pt x="859470" y="2795485"/>
+                  </a:lnTo>
+                  <a:lnTo>
+                    <a:pt x="787847" y="2797758"/>
+                  </a:lnTo>
+                  <a:lnTo>
+                    <a:pt x="716225" y="2800024"/>
+                  </a:lnTo>
+                  <a:lnTo>
+                    <a:pt x="644602" y="2802282"/>
+                  </a:lnTo>
+                  <a:lnTo>
+                    <a:pt x="572980" y="2804532"/>
+                  </a:lnTo>
+                  <a:lnTo>
+                    <a:pt x="501357" y="2806775"/>
+                  </a:lnTo>
+                  <a:lnTo>
+                    <a:pt x="429735" y="2809011"/>
+                  </a:lnTo>
+                  <a:lnTo>
+                    <a:pt x="358112" y="2811240"/>
+                  </a:lnTo>
+                  <a:lnTo>
+                    <a:pt x="286490" y="2813461"/>
+                  </a:lnTo>
+                  <a:lnTo>
+                    <a:pt x="214867" y="2815674"/>
+                  </a:lnTo>
+                  <a:lnTo>
+                    <a:pt x="143245" y="2817881"/>
+                  </a:lnTo>
+                  <a:lnTo>
+                    <a:pt x="71622" y="2820080"/>
+                  </a:lnTo>
+                  <a:lnTo>
+                    <a:pt x="0" y="2822272"/>
                   </a:lnTo>
                   <a:close/>
                 </a:path>
@@ -3534,213 +3522,201 @@
           </p:nvSpPr>
           <p:spPr>
             <a:xfrm>
-              <a:off x="3562988" y="2073503"/>
-              <a:ext cx="4699690" cy="2647317"/>
+              <a:off x="3879745" y="2073503"/>
+              <a:ext cx="4382934" cy="2652663"/>
             </a:xfrm>
             <a:custGeom>
               <a:avLst/>
               <a:pathLst>
-                <a:path w="4699690" h="2647317">
+                <a:path w="4382934" h="2652663">
                   <a:moveTo>
                     <a:pt x="0" y="0"/>
                   </a:moveTo>
                   <a:lnTo>
-                    <a:pt x="44226" y="87687"/>
-                  </a:lnTo>
-                  <a:lnTo>
-                    <a:pt x="115848" y="223993"/>
-                  </a:lnTo>
-                  <a:lnTo>
-                    <a:pt x="187471" y="354829"/>
-                  </a:lnTo>
-                  <a:lnTo>
-                    <a:pt x="259094" y="480413"/>
-                  </a:lnTo>
-                  <a:lnTo>
-                    <a:pt x="330716" y="600956"/>
-                  </a:lnTo>
-                  <a:lnTo>
-                    <a:pt x="402339" y="716662"/>
-                  </a:lnTo>
-                  <a:lnTo>
-                    <a:pt x="473961" y="827723"/>
-                  </a:lnTo>
-                  <a:lnTo>
-                    <a:pt x="545584" y="934327"/>
-                  </a:lnTo>
-                  <a:lnTo>
-                    <a:pt x="617206" y="1036652"/>
-                  </a:lnTo>
-                  <a:lnTo>
-                    <a:pt x="688829" y="1134870"/>
-                  </a:lnTo>
-                  <a:lnTo>
-                    <a:pt x="760451" y="1229146"/>
-                  </a:lnTo>
-                  <a:lnTo>
-                    <a:pt x="832074" y="1319638"/>
-                  </a:lnTo>
-                  <a:lnTo>
-                    <a:pt x="903696" y="1406498"/>
-                  </a:lnTo>
-                  <a:lnTo>
-                    <a:pt x="975319" y="1489871"/>
-                  </a:lnTo>
-                  <a:lnTo>
-                    <a:pt x="1046941" y="1569899"/>
-                  </a:lnTo>
-                  <a:lnTo>
-                    <a:pt x="1118564" y="1646714"/>
-                  </a:lnTo>
-                  <a:lnTo>
-                    <a:pt x="1190186" y="1720446"/>
-                  </a:lnTo>
-                  <a:lnTo>
-                    <a:pt x="1261809" y="1791219"/>
-                  </a:lnTo>
-                  <a:lnTo>
-                    <a:pt x="1333431" y="1859151"/>
-                  </a:lnTo>
-                  <a:lnTo>
-                    <a:pt x="1405054" y="1924357"/>
-                  </a:lnTo>
-                  <a:lnTo>
-                    <a:pt x="1476676" y="1986946"/>
-                  </a:lnTo>
-                  <a:lnTo>
-                    <a:pt x="1548299" y="2047022"/>
-                  </a:lnTo>
-                  <a:lnTo>
-                    <a:pt x="1619922" y="2104687"/>
-                  </a:lnTo>
-                  <a:lnTo>
-                    <a:pt x="1691544" y="2160038"/>
-                  </a:lnTo>
-                  <a:lnTo>
-                    <a:pt x="1763167" y="2213167"/>
-                  </a:lnTo>
-                  <a:lnTo>
-                    <a:pt x="1834789" y="2264164"/>
-                  </a:lnTo>
-                  <a:lnTo>
-                    <a:pt x="1906412" y="2313114"/>
-                  </a:lnTo>
-                  <a:lnTo>
-                    <a:pt x="1978034" y="2360099"/>
-                  </a:lnTo>
-                  <a:lnTo>
-                    <a:pt x="2049657" y="2405198"/>
-                  </a:lnTo>
-                  <a:lnTo>
-                    <a:pt x="2121279" y="2448487"/>
-                  </a:lnTo>
-                  <a:lnTo>
-                    <a:pt x="2192902" y="2490039"/>
-                  </a:lnTo>
-                  <a:lnTo>
-                    <a:pt x="2264524" y="2529923"/>
-                  </a:lnTo>
-                  <a:lnTo>
-                    <a:pt x="2336147" y="2568206"/>
-                  </a:lnTo>
-                  <a:lnTo>
-                    <a:pt x="2407769" y="2604953"/>
-                  </a:lnTo>
-                  <a:lnTo>
-                    <a:pt x="2479392" y="2640225"/>
-                  </a:lnTo>
-                  <a:lnTo>
-                    <a:pt x="2551014" y="2647317"/>
-                  </a:lnTo>
-                  <a:lnTo>
-                    <a:pt x="2622637" y="2635371"/>
-                  </a:lnTo>
-                  <a:lnTo>
-                    <a:pt x="2694259" y="2623255"/>
-                  </a:lnTo>
-                  <a:lnTo>
-                    <a:pt x="2765882" y="2610966"/>
-                  </a:lnTo>
-                  <a:lnTo>
-                    <a:pt x="2837504" y="2598501"/>
-                  </a:lnTo>
-                  <a:lnTo>
-                    <a:pt x="2909127" y="2585858"/>
-                  </a:lnTo>
-                  <a:lnTo>
-                    <a:pt x="2980750" y="2573035"/>
-                  </a:lnTo>
-                  <a:lnTo>
-                    <a:pt x="3052372" y="2560028"/>
-                  </a:lnTo>
-                  <a:lnTo>
-                    <a:pt x="3123995" y="2546836"/>
-                  </a:lnTo>
-                  <a:lnTo>
-                    <a:pt x="3195617" y="2533455"/>
-                  </a:lnTo>
-                  <a:lnTo>
-                    <a:pt x="3267240" y="2519883"/>
-                  </a:lnTo>
-                  <a:lnTo>
-                    <a:pt x="3338862" y="2506118"/>
-                  </a:lnTo>
-                  <a:lnTo>
-                    <a:pt x="3410485" y="2492156"/>
-                  </a:lnTo>
-                  <a:lnTo>
-                    <a:pt x="3482107" y="2477994"/>
-                  </a:lnTo>
-                  <a:lnTo>
-                    <a:pt x="3553730" y="2463630"/>
-                  </a:lnTo>
-                  <a:lnTo>
-                    <a:pt x="3625352" y="2449061"/>
-                  </a:lnTo>
-                  <a:lnTo>
-                    <a:pt x="3696975" y="2434284"/>
-                  </a:lnTo>
-                  <a:lnTo>
-                    <a:pt x="3768597" y="2419296"/>
-                  </a:lnTo>
-                  <a:lnTo>
-                    <a:pt x="3840220" y="2404093"/>
-                  </a:lnTo>
-                  <a:lnTo>
-                    <a:pt x="3911842" y="2388674"/>
-                  </a:lnTo>
-                  <a:lnTo>
-                    <a:pt x="3983465" y="2373035"/>
-                  </a:lnTo>
-                  <a:lnTo>
-                    <a:pt x="4055087" y="2357172"/>
-                  </a:lnTo>
-                  <a:lnTo>
-                    <a:pt x="4126710" y="2341082"/>
-                  </a:lnTo>
-                  <a:lnTo>
-                    <a:pt x="4198332" y="2324763"/>
-                  </a:lnTo>
-                  <a:lnTo>
-                    <a:pt x="4269955" y="2308211"/>
-                  </a:lnTo>
-                  <a:lnTo>
-                    <a:pt x="4341578" y="2291422"/>
-                  </a:lnTo>
-                  <a:lnTo>
-                    <a:pt x="4413200" y="2274394"/>
-                  </a:lnTo>
-                  <a:lnTo>
-                    <a:pt x="4484823" y="2257122"/>
-                  </a:lnTo>
-                  <a:lnTo>
-                    <a:pt x="4556445" y="2239604"/>
-                  </a:lnTo>
-                  <a:lnTo>
-                    <a:pt x="4628068" y="2221835"/>
-                  </a:lnTo>
-                  <a:lnTo>
-                    <a:pt x="4699690" y="2203813"/>
+                    <a:pt x="13960" y="32291"/>
+                  </a:lnTo>
+                  <a:lnTo>
+                    <a:pt x="85582" y="190376"/>
+                  </a:lnTo>
+                  <a:lnTo>
+                    <a:pt x="157205" y="341221"/>
+                  </a:lnTo>
+                  <a:lnTo>
+                    <a:pt x="228827" y="485156"/>
+                  </a:lnTo>
+                  <a:lnTo>
+                    <a:pt x="300450" y="622499"/>
+                  </a:lnTo>
+                  <a:lnTo>
+                    <a:pt x="372072" y="753551"/>
+                  </a:lnTo>
+                  <a:lnTo>
+                    <a:pt x="443695" y="878601"/>
+                  </a:lnTo>
+                  <a:lnTo>
+                    <a:pt x="515317" y="997923"/>
+                  </a:lnTo>
+                  <a:lnTo>
+                    <a:pt x="586940" y="1111780"/>
+                  </a:lnTo>
+                  <a:lnTo>
+                    <a:pt x="658562" y="1220422"/>
+                  </a:lnTo>
+                  <a:lnTo>
+                    <a:pt x="730185" y="1324088"/>
+                  </a:lnTo>
+                  <a:lnTo>
+                    <a:pt x="801807" y="1423005"/>
+                  </a:lnTo>
+                  <a:lnTo>
+                    <a:pt x="873430" y="1517392"/>
+                  </a:lnTo>
+                  <a:lnTo>
+                    <a:pt x="945052" y="1607456"/>
+                  </a:lnTo>
+                  <a:lnTo>
+                    <a:pt x="1016675" y="1693395"/>
+                  </a:lnTo>
+                  <a:lnTo>
+                    <a:pt x="1088298" y="1775397"/>
+                  </a:lnTo>
+                  <a:lnTo>
+                    <a:pt x="1159920" y="1853644"/>
+                  </a:lnTo>
+                  <a:lnTo>
+                    <a:pt x="1231543" y="1928307"/>
+                  </a:lnTo>
+                  <a:lnTo>
+                    <a:pt x="1303165" y="1999550"/>
+                  </a:lnTo>
+                  <a:lnTo>
+                    <a:pt x="1374788" y="2067529"/>
+                  </a:lnTo>
+                  <a:lnTo>
+                    <a:pt x="1446410" y="2132396"/>
+                  </a:lnTo>
+                  <a:lnTo>
+                    <a:pt x="1518033" y="2194291"/>
+                  </a:lnTo>
+                  <a:lnTo>
+                    <a:pt x="1589655" y="2253351"/>
+                  </a:lnTo>
+                  <a:lnTo>
+                    <a:pt x="1661278" y="2309706"/>
+                  </a:lnTo>
+                  <a:lnTo>
+                    <a:pt x="1732900" y="2363480"/>
+                  </a:lnTo>
+                  <a:lnTo>
+                    <a:pt x="1804523" y="2414791"/>
+                  </a:lnTo>
+                  <a:lnTo>
+                    <a:pt x="1876145" y="2463752"/>
+                  </a:lnTo>
+                  <a:lnTo>
+                    <a:pt x="1947768" y="2510470"/>
+                  </a:lnTo>
+                  <a:lnTo>
+                    <a:pt x="2019390" y="2555049"/>
+                  </a:lnTo>
+                  <a:lnTo>
+                    <a:pt x="2091013" y="2597585"/>
+                  </a:lnTo>
+                  <a:lnTo>
+                    <a:pt x="2162635" y="2638174"/>
+                  </a:lnTo>
+                  <a:lnTo>
+                    <a:pt x="2234258" y="2652663"/>
+                  </a:lnTo>
+                  <a:lnTo>
+                    <a:pt x="2305880" y="2649909"/>
+                  </a:lnTo>
+                  <a:lnTo>
+                    <a:pt x="2377503" y="2647146"/>
+                  </a:lnTo>
+                  <a:lnTo>
+                    <a:pt x="2449125" y="2644374"/>
+                  </a:lnTo>
+                  <a:lnTo>
+                    <a:pt x="2520748" y="2641593"/>
+                  </a:lnTo>
+                  <a:lnTo>
+                    <a:pt x="2592371" y="2638802"/>
+                  </a:lnTo>
+                  <a:lnTo>
+                    <a:pt x="2663993" y="2636002"/>
+                  </a:lnTo>
+                  <a:lnTo>
+                    <a:pt x="2735616" y="2633193"/>
+                  </a:lnTo>
+                  <a:lnTo>
+                    <a:pt x="2807238" y="2630375"/>
+                  </a:lnTo>
+                  <a:lnTo>
+                    <a:pt x="2878861" y="2627547"/>
+                  </a:lnTo>
+                  <a:lnTo>
+                    <a:pt x="2950483" y="2624710"/>
+                  </a:lnTo>
+                  <a:lnTo>
+                    <a:pt x="3022106" y="2621864"/>
+                  </a:lnTo>
+                  <a:lnTo>
+                    <a:pt x="3093728" y="2619008"/>
+                  </a:lnTo>
+                  <a:lnTo>
+                    <a:pt x="3165351" y="2616143"/>
+                  </a:lnTo>
+                  <a:lnTo>
+                    <a:pt x="3236973" y="2613268"/>
+                  </a:lnTo>
+                  <a:lnTo>
+                    <a:pt x="3308596" y="2610383"/>
+                  </a:lnTo>
+                  <a:lnTo>
+                    <a:pt x="3380218" y="2607489"/>
+                  </a:lnTo>
+                  <a:lnTo>
+                    <a:pt x="3451841" y="2604586"/>
+                  </a:lnTo>
+                  <a:lnTo>
+                    <a:pt x="3523463" y="2601673"/>
+                  </a:lnTo>
+                  <a:lnTo>
+                    <a:pt x="3595086" y="2598750"/>
+                  </a:lnTo>
+                  <a:lnTo>
+                    <a:pt x="3666708" y="2595817"/>
+                  </a:lnTo>
+                  <a:lnTo>
+                    <a:pt x="3738331" y="2592875"/>
+                  </a:lnTo>
+                  <a:lnTo>
+                    <a:pt x="3809953" y="2589923"/>
+                  </a:lnTo>
+                  <a:lnTo>
+                    <a:pt x="3881576" y="2586961"/>
+                  </a:lnTo>
+                  <a:lnTo>
+                    <a:pt x="3953199" y="2583990"/>
+                  </a:lnTo>
+                  <a:lnTo>
+                    <a:pt x="4024821" y="2581008"/>
+                  </a:lnTo>
+                  <a:lnTo>
+                    <a:pt x="4096444" y="2578017"/>
+                  </a:lnTo>
+                  <a:lnTo>
+                    <a:pt x="4168066" y="2575016"/>
+                  </a:lnTo>
+                  <a:lnTo>
+                    <a:pt x="4239689" y="2572005"/>
+                  </a:lnTo>
+                  <a:lnTo>
+                    <a:pt x="4311311" y="2568984"/>
+                  </a:lnTo>
+                  <a:lnTo>
+                    <a:pt x="4382934" y="2565953"/>
                   </a:lnTo>
                 </a:path>
               </a:pathLst>
@@ -3760,312 +3736,312 @@
           </p:nvSpPr>
           <p:spPr>
             <a:xfrm>
-              <a:off x="1172049" y="4732598"/>
-              <a:ext cx="7090630" cy="587738"/>
+              <a:off x="1172049" y="4728911"/>
+              <a:ext cx="7090630" cy="630669"/>
             </a:xfrm>
             <a:custGeom>
               <a:avLst/>
               <a:pathLst>
-                <a:path w="7090630" h="587738">
+                <a:path w="7090630" h="630669">
                   <a:moveTo>
-                    <a:pt x="7090630" y="587738"/>
+                    <a:pt x="7090630" y="630669"/>
                   </a:moveTo>
                   <a:lnTo>
-                    <a:pt x="7019007" y="577832"/>
-                  </a:lnTo>
-                  <a:lnTo>
-                    <a:pt x="6947385" y="567511"/>
-                  </a:lnTo>
-                  <a:lnTo>
-                    <a:pt x="6875762" y="556759"/>
-                  </a:lnTo>
-                  <a:lnTo>
-                    <a:pt x="6804139" y="545557"/>
-                  </a:lnTo>
-                  <a:lnTo>
-                    <a:pt x="6732517" y="533887"/>
-                  </a:lnTo>
-                  <a:lnTo>
-                    <a:pt x="6660894" y="521728"/>
-                  </a:lnTo>
-                  <a:lnTo>
-                    <a:pt x="6589272" y="509062"/>
-                  </a:lnTo>
-                  <a:lnTo>
-                    <a:pt x="6517649" y="495865"/>
-                  </a:lnTo>
-                  <a:lnTo>
-                    <a:pt x="6446027" y="482117"/>
-                  </a:lnTo>
-                  <a:lnTo>
-                    <a:pt x="6374404" y="467794"/>
-                  </a:lnTo>
-                  <a:lnTo>
-                    <a:pt x="6302782" y="452872"/>
-                  </a:lnTo>
-                  <a:lnTo>
-                    <a:pt x="6231159" y="437326"/>
-                  </a:lnTo>
-                  <a:lnTo>
-                    <a:pt x="6159537" y="421130"/>
-                  </a:lnTo>
-                  <a:lnTo>
-                    <a:pt x="6087914" y="404257"/>
-                  </a:lnTo>
-                  <a:lnTo>
-                    <a:pt x="6016292" y="386678"/>
-                  </a:lnTo>
-                  <a:lnTo>
-                    <a:pt x="5944669" y="368365"/>
-                  </a:lnTo>
-                  <a:lnTo>
-                    <a:pt x="5873047" y="349285"/>
-                  </a:lnTo>
-                  <a:lnTo>
-                    <a:pt x="5801424" y="329408"/>
-                  </a:lnTo>
-                  <a:lnTo>
-                    <a:pt x="5729802" y="308699"/>
-                  </a:lnTo>
-                  <a:lnTo>
-                    <a:pt x="5658179" y="287125"/>
-                  </a:lnTo>
-                  <a:lnTo>
-                    <a:pt x="5586557" y="264648"/>
-                  </a:lnTo>
-                  <a:lnTo>
-                    <a:pt x="5514934" y="241232"/>
-                  </a:lnTo>
-                  <a:lnTo>
-                    <a:pt x="5443311" y="216836"/>
-                  </a:lnTo>
-                  <a:lnTo>
-                    <a:pt x="5371689" y="191420"/>
-                  </a:lnTo>
-                  <a:lnTo>
-                    <a:pt x="5300066" y="164942"/>
-                  </a:lnTo>
-                  <a:lnTo>
-                    <a:pt x="5228444" y="137356"/>
-                  </a:lnTo>
-                  <a:lnTo>
-                    <a:pt x="5156821" y="108617"/>
-                  </a:lnTo>
-                  <a:lnTo>
-                    <a:pt x="5085199" y="78676"/>
-                  </a:lnTo>
-                  <a:lnTo>
-                    <a:pt x="5013576" y="47483"/>
-                  </a:lnTo>
-                  <a:lnTo>
-                    <a:pt x="4941954" y="14986"/>
+                    <a:pt x="7019007" y="621181"/>
+                  </a:lnTo>
+                  <a:lnTo>
+                    <a:pt x="6947385" y="611237"/>
+                  </a:lnTo>
+                  <a:lnTo>
+                    <a:pt x="6875762" y="600816"/>
+                  </a:lnTo>
+                  <a:lnTo>
+                    <a:pt x="6804139" y="589895"/>
+                  </a:lnTo>
+                  <a:lnTo>
+                    <a:pt x="6732517" y="578449"/>
+                  </a:lnTo>
+                  <a:lnTo>
+                    <a:pt x="6660894" y="566454"/>
+                  </a:lnTo>
+                  <a:lnTo>
+                    <a:pt x="6589272" y="553884"/>
+                  </a:lnTo>
+                  <a:lnTo>
+                    <a:pt x="6517649" y="540710"/>
+                  </a:lnTo>
+                  <a:lnTo>
+                    <a:pt x="6446027" y="526903"/>
+                  </a:lnTo>
+                  <a:lnTo>
+                    <a:pt x="6374404" y="512434"/>
+                  </a:lnTo>
+                  <a:lnTo>
+                    <a:pt x="6302782" y="497270"/>
+                  </a:lnTo>
+                  <a:lnTo>
+                    <a:pt x="6231159" y="481379"/>
+                  </a:lnTo>
+                  <a:lnTo>
+                    <a:pt x="6159537" y="464724"/>
+                  </a:lnTo>
+                  <a:lnTo>
+                    <a:pt x="6087914" y="447270"/>
+                  </a:lnTo>
+                  <a:lnTo>
+                    <a:pt x="6016292" y="428979"/>
+                  </a:lnTo>
+                  <a:lnTo>
+                    <a:pt x="5944669" y="409809"/>
+                  </a:lnTo>
+                  <a:lnTo>
+                    <a:pt x="5873047" y="389719"/>
+                  </a:lnTo>
+                  <a:lnTo>
+                    <a:pt x="5801424" y="368665"/>
+                  </a:lnTo>
+                  <a:lnTo>
+                    <a:pt x="5729802" y="346600"/>
+                  </a:lnTo>
+                  <a:lnTo>
+                    <a:pt x="5658179" y="323477"/>
+                  </a:lnTo>
+                  <a:lnTo>
+                    <a:pt x="5586557" y="299243"/>
+                  </a:lnTo>
+                  <a:lnTo>
+                    <a:pt x="5514934" y="273846"/>
+                  </a:lnTo>
+                  <a:lnTo>
+                    <a:pt x="5443311" y="247229"/>
+                  </a:lnTo>
+                  <a:lnTo>
+                    <a:pt x="5371689" y="219336"/>
+                  </a:lnTo>
+                  <a:lnTo>
+                    <a:pt x="5300066" y="190103"/>
+                  </a:lnTo>
+                  <a:lnTo>
+                    <a:pt x="5228444" y="159467"/>
+                  </a:lnTo>
+                  <a:lnTo>
+                    <a:pt x="5156821" y="127360"/>
+                  </a:lnTo>
+                  <a:lnTo>
+                    <a:pt x="5085199" y="93713"/>
+                  </a:lnTo>
+                  <a:lnTo>
+                    <a:pt x="5013576" y="58450"/>
+                  </a:lnTo>
+                  <a:lnTo>
+                    <a:pt x="4941954" y="21495"/>
                   </a:lnTo>
                   <a:lnTo>
                     <a:pt x="4870331" y="0"/>
                   </a:lnTo>
                   <a:lnTo>
-                    <a:pt x="4798709" y="11611"/>
-                  </a:lnTo>
-                  <a:lnTo>
-                    <a:pt x="4727086" y="23059"/>
-                  </a:lnTo>
-                  <a:lnTo>
-                    <a:pt x="4655464" y="34346"/>
-                  </a:lnTo>
-                  <a:lnTo>
-                    <a:pt x="4583841" y="45474"/>
-                  </a:lnTo>
-                  <a:lnTo>
-                    <a:pt x="4512219" y="56446"/>
-                  </a:lnTo>
-                  <a:lnTo>
-                    <a:pt x="4440596" y="67262"/>
-                  </a:lnTo>
-                  <a:lnTo>
-                    <a:pt x="4368974" y="77927"/>
-                  </a:lnTo>
-                  <a:lnTo>
-                    <a:pt x="4297351" y="88441"/>
-                  </a:lnTo>
-                  <a:lnTo>
-                    <a:pt x="4225729" y="98808"/>
-                  </a:lnTo>
-                  <a:lnTo>
-                    <a:pt x="4154106" y="109028"/>
-                  </a:lnTo>
-                  <a:lnTo>
-                    <a:pt x="4082483" y="119104"/>
-                  </a:lnTo>
-                  <a:lnTo>
-                    <a:pt x="4010861" y="129039"/>
-                  </a:lnTo>
-                  <a:lnTo>
-                    <a:pt x="3939238" y="138834"/>
-                  </a:lnTo>
-                  <a:lnTo>
-                    <a:pt x="3867616" y="148490"/>
-                  </a:lnTo>
-                  <a:lnTo>
-                    <a:pt x="3795993" y="158011"/>
-                  </a:lnTo>
-                  <a:lnTo>
-                    <a:pt x="3724371" y="167398"/>
-                  </a:lnTo>
-                  <a:lnTo>
-                    <a:pt x="3652748" y="176652"/>
-                  </a:lnTo>
-                  <a:lnTo>
-                    <a:pt x="3581126" y="185777"/>
-                  </a:lnTo>
-                  <a:lnTo>
-                    <a:pt x="3509503" y="194772"/>
-                  </a:lnTo>
-                  <a:lnTo>
-                    <a:pt x="3437881" y="203641"/>
-                  </a:lnTo>
-                  <a:lnTo>
-                    <a:pt x="3366258" y="212386"/>
-                  </a:lnTo>
-                  <a:lnTo>
-                    <a:pt x="3294636" y="221007"/>
-                  </a:lnTo>
-                  <a:lnTo>
-                    <a:pt x="3223013" y="229507"/>
-                  </a:lnTo>
-                  <a:lnTo>
-                    <a:pt x="3151391" y="237887"/>
-                  </a:lnTo>
-                  <a:lnTo>
-                    <a:pt x="3079768" y="246149"/>
-                  </a:lnTo>
-                  <a:lnTo>
-                    <a:pt x="3008146" y="254294"/>
-                  </a:lnTo>
-                  <a:lnTo>
-                    <a:pt x="2936523" y="262325"/>
-                  </a:lnTo>
-                  <a:lnTo>
-                    <a:pt x="2864901" y="270243"/>
-                  </a:lnTo>
-                  <a:lnTo>
-                    <a:pt x="2793278" y="278050"/>
-                  </a:lnTo>
-                  <a:lnTo>
-                    <a:pt x="2721655" y="285746"/>
-                  </a:lnTo>
-                  <a:lnTo>
-                    <a:pt x="2650033" y="293334"/>
-                  </a:lnTo>
-                  <a:lnTo>
-                    <a:pt x="2578410" y="300816"/>
-                  </a:lnTo>
-                  <a:lnTo>
-                    <a:pt x="2506788" y="308191"/>
-                  </a:lnTo>
-                  <a:lnTo>
-                    <a:pt x="2435165" y="315464"/>
-                  </a:lnTo>
-                  <a:lnTo>
-                    <a:pt x="2363543" y="322633"/>
-                  </a:lnTo>
-                  <a:lnTo>
-                    <a:pt x="2291920" y="329702"/>
-                  </a:lnTo>
-                  <a:lnTo>
-                    <a:pt x="2220298" y="336671"/>
-                  </a:lnTo>
-                  <a:lnTo>
-                    <a:pt x="2148675" y="343542"/>
-                  </a:lnTo>
-                  <a:lnTo>
-                    <a:pt x="2077053" y="350317"/>
-                  </a:lnTo>
-                  <a:lnTo>
-                    <a:pt x="2005430" y="356996"/>
-                  </a:lnTo>
-                  <a:lnTo>
-                    <a:pt x="1933808" y="363580"/>
-                  </a:lnTo>
-                  <a:lnTo>
-                    <a:pt x="1862185" y="370073"/>
-                  </a:lnTo>
-                  <a:lnTo>
-                    <a:pt x="1790563" y="376473"/>
-                  </a:lnTo>
-                  <a:lnTo>
-                    <a:pt x="1718940" y="382784"/>
-                  </a:lnTo>
-                  <a:lnTo>
-                    <a:pt x="1647318" y="389006"/>
-                  </a:lnTo>
-                  <a:lnTo>
-                    <a:pt x="1575695" y="395140"/>
-                  </a:lnTo>
-                  <a:lnTo>
-                    <a:pt x="1504073" y="401188"/>
-                  </a:lnTo>
-                  <a:lnTo>
-                    <a:pt x="1432450" y="407150"/>
-                  </a:lnTo>
-                  <a:lnTo>
-                    <a:pt x="1360827" y="413029"/>
-                  </a:lnTo>
-                  <a:lnTo>
-                    <a:pt x="1289205" y="418825"/>
-                  </a:lnTo>
-                  <a:lnTo>
-                    <a:pt x="1217582" y="424539"/>
-                  </a:lnTo>
-                  <a:lnTo>
-                    <a:pt x="1145960" y="430173"/>
-                  </a:lnTo>
-                  <a:lnTo>
-                    <a:pt x="1074337" y="435728"/>
-                  </a:lnTo>
-                  <a:lnTo>
-                    <a:pt x="1002715" y="441204"/>
-                  </a:lnTo>
-                  <a:lnTo>
-                    <a:pt x="931092" y="446603"/>
-                  </a:lnTo>
-                  <a:lnTo>
-                    <a:pt x="859470" y="451926"/>
-                  </a:lnTo>
-                  <a:lnTo>
-                    <a:pt x="787847" y="457174"/>
-                  </a:lnTo>
-                  <a:lnTo>
-                    <a:pt x="716225" y="462349"/>
-                  </a:lnTo>
-                  <a:lnTo>
-                    <a:pt x="644602" y="467450"/>
-                  </a:lnTo>
-                  <a:lnTo>
-                    <a:pt x="572980" y="472480"/>
-                  </a:lnTo>
-                  <a:lnTo>
-                    <a:pt x="501357" y="477439"/>
-                  </a:lnTo>
-                  <a:lnTo>
-                    <a:pt x="429735" y="482328"/>
-                  </a:lnTo>
-                  <a:lnTo>
-                    <a:pt x="358112" y="487148"/>
-                  </a:lnTo>
-                  <a:lnTo>
-                    <a:pt x="286490" y="491900"/>
-                  </a:lnTo>
-                  <a:lnTo>
-                    <a:pt x="214867" y="496585"/>
-                  </a:lnTo>
-                  <a:lnTo>
-                    <a:pt x="143245" y="501205"/>
-                  </a:lnTo>
-                  <a:lnTo>
-                    <a:pt x="71622" y="505759"/>
-                  </a:lnTo>
-                  <a:lnTo>
-                    <a:pt x="0" y="510249"/>
+                    <a:pt x="4798709" y="2735"/>
+                  </a:lnTo>
+                  <a:lnTo>
+                    <a:pt x="4727086" y="5462"/>
+                  </a:lnTo>
+                  <a:lnTo>
+                    <a:pt x="4655464" y="8180"/>
+                  </a:lnTo>
+                  <a:lnTo>
+                    <a:pt x="4583841" y="10888"/>
+                  </a:lnTo>
+                  <a:lnTo>
+                    <a:pt x="4512219" y="13588"/>
+                  </a:lnTo>
+                  <a:lnTo>
+                    <a:pt x="4440596" y="16279"/>
+                  </a:lnTo>
+                  <a:lnTo>
+                    <a:pt x="4368974" y="18961"/>
+                  </a:lnTo>
+                  <a:lnTo>
+                    <a:pt x="4297351" y="21634"/>
+                  </a:lnTo>
+                  <a:lnTo>
+                    <a:pt x="4225729" y="24298"/>
+                  </a:lnTo>
+                  <a:lnTo>
+                    <a:pt x="4154106" y="26953"/>
+                  </a:lnTo>
+                  <a:lnTo>
+                    <a:pt x="4082483" y="29600"/>
+                  </a:lnTo>
+                  <a:lnTo>
+                    <a:pt x="4010861" y="32238"/>
+                  </a:lnTo>
+                  <a:lnTo>
+                    <a:pt x="3939238" y="34867"/>
+                  </a:lnTo>
+                  <a:lnTo>
+                    <a:pt x="3867616" y="37488"/>
+                  </a:lnTo>
+                  <a:lnTo>
+                    <a:pt x="3795993" y="40100"/>
+                  </a:lnTo>
+                  <a:lnTo>
+                    <a:pt x="3724371" y="42703"/>
+                  </a:lnTo>
+                  <a:lnTo>
+                    <a:pt x="3652748" y="45298"/>
+                  </a:lnTo>
+                  <a:lnTo>
+                    <a:pt x="3581126" y="47884"/>
+                  </a:lnTo>
+                  <a:lnTo>
+                    <a:pt x="3509503" y="50461"/>
+                  </a:lnTo>
+                  <a:lnTo>
+                    <a:pt x="3437881" y="53030"/>
+                  </a:lnTo>
+                  <a:lnTo>
+                    <a:pt x="3366258" y="55591"/>
+                  </a:lnTo>
+                  <a:lnTo>
+                    <a:pt x="3294636" y="58143"/>
+                  </a:lnTo>
+                  <a:lnTo>
+                    <a:pt x="3223013" y="60687"/>
+                  </a:lnTo>
+                  <a:lnTo>
+                    <a:pt x="3151391" y="63222"/>
+                  </a:lnTo>
+                  <a:lnTo>
+                    <a:pt x="3079768" y="65749"/>
+                  </a:lnTo>
+                  <a:lnTo>
+                    <a:pt x="3008146" y="68267"/>
+                  </a:lnTo>
+                  <a:lnTo>
+                    <a:pt x="2936523" y="70777"/>
+                  </a:lnTo>
+                  <a:lnTo>
+                    <a:pt x="2864901" y="73279"/>
+                  </a:lnTo>
+                  <a:lnTo>
+                    <a:pt x="2793278" y="75773"/>
+                  </a:lnTo>
+                  <a:lnTo>
+                    <a:pt x="2721655" y="78259"/>
+                  </a:lnTo>
+                  <a:lnTo>
+                    <a:pt x="2650033" y="80736"/>
+                  </a:lnTo>
+                  <a:lnTo>
+                    <a:pt x="2578410" y="83205"/>
+                  </a:lnTo>
+                  <a:lnTo>
+                    <a:pt x="2506788" y="85666"/>
+                  </a:lnTo>
+                  <a:lnTo>
+                    <a:pt x="2435165" y="88118"/>
+                  </a:lnTo>
+                  <a:lnTo>
+                    <a:pt x="2363543" y="90563"/>
+                  </a:lnTo>
+                  <a:lnTo>
+                    <a:pt x="2291920" y="93000"/>
+                  </a:lnTo>
+                  <a:lnTo>
+                    <a:pt x="2220298" y="95428"/>
+                  </a:lnTo>
+                  <a:lnTo>
+                    <a:pt x="2148675" y="97849"/>
+                  </a:lnTo>
+                  <a:lnTo>
+                    <a:pt x="2077053" y="100261"/>
+                  </a:lnTo>
+                  <a:lnTo>
+                    <a:pt x="2005430" y="102666"/>
+                  </a:lnTo>
+                  <a:lnTo>
+                    <a:pt x="1933808" y="105063"/>
+                  </a:lnTo>
+                  <a:lnTo>
+                    <a:pt x="1862185" y="107451"/>
+                  </a:lnTo>
+                  <a:lnTo>
+                    <a:pt x="1790563" y="109832"/>
+                  </a:lnTo>
+                  <a:lnTo>
+                    <a:pt x="1718940" y="112205"/>
+                  </a:lnTo>
+                  <a:lnTo>
+                    <a:pt x="1647318" y="114570"/>
+                  </a:lnTo>
+                  <a:lnTo>
+                    <a:pt x="1575695" y="116927"/>
+                  </a:lnTo>
+                  <a:lnTo>
+                    <a:pt x="1504073" y="119277"/>
+                  </a:lnTo>
+                  <a:lnTo>
+                    <a:pt x="1432450" y="121619"/>
+                  </a:lnTo>
+                  <a:lnTo>
+                    <a:pt x="1360827" y="123953"/>
+                  </a:lnTo>
+                  <a:lnTo>
+                    <a:pt x="1289205" y="126279"/>
+                  </a:lnTo>
+                  <a:lnTo>
+                    <a:pt x="1217582" y="128598"/>
+                  </a:lnTo>
+                  <a:lnTo>
+                    <a:pt x="1145960" y="130909"/>
+                  </a:lnTo>
+                  <a:lnTo>
+                    <a:pt x="1074337" y="133212"/>
+                  </a:lnTo>
+                  <a:lnTo>
+                    <a:pt x="1002715" y="135508"/>
+                  </a:lnTo>
+                  <a:lnTo>
+                    <a:pt x="931092" y="137796"/>
+                  </a:lnTo>
+                  <a:lnTo>
+                    <a:pt x="859470" y="140077"/>
+                  </a:lnTo>
+                  <a:lnTo>
+                    <a:pt x="787847" y="142350"/>
+                  </a:lnTo>
+                  <a:lnTo>
+                    <a:pt x="716225" y="144615"/>
+                  </a:lnTo>
+                  <a:lnTo>
+                    <a:pt x="644602" y="146873"/>
+                  </a:lnTo>
+                  <a:lnTo>
+                    <a:pt x="572980" y="149124"/>
+                  </a:lnTo>
+                  <a:lnTo>
+                    <a:pt x="501357" y="151367"/>
+                  </a:lnTo>
+                  <a:lnTo>
+                    <a:pt x="429735" y="153603"/>
+                  </a:lnTo>
+                  <a:lnTo>
+                    <a:pt x="358112" y="155831"/>
+                  </a:lnTo>
+                  <a:lnTo>
+                    <a:pt x="286490" y="158052"/>
+                  </a:lnTo>
+                  <a:lnTo>
+                    <a:pt x="214867" y="160266"/>
+                  </a:lnTo>
+                  <a:lnTo>
+                    <a:pt x="143245" y="162472"/>
+                  </a:lnTo>
+                  <a:lnTo>
+                    <a:pt x="71622" y="164672"/>
+                  </a:lnTo>
+                  <a:lnTo>
+                    <a:pt x="0" y="166863"/>
                   </a:lnTo>
                 </a:path>
               </a:pathLst>
@@ -4085,312 +4061,306 @@
           </p:nvSpPr>
           <p:spPr>
             <a:xfrm>
-              <a:off x="1172049" y="3483913"/>
-              <a:ext cx="7090630" cy="1522670"/>
+              <a:off x="1354533" y="2073503"/>
+              <a:ext cx="6908146" cy="3057813"/>
             </a:xfrm>
             <a:custGeom>
               <a:avLst/>
               <a:pathLst>
-                <a:path w="7090630" h="1522670">
+                <a:path w="6908146" h="3057813">
                   <a:moveTo>
                     <a:pt x="0" y="0"/>
                   </a:moveTo>
                   <a:lnTo>
-                    <a:pt x="71622" y="27580"/>
-                  </a:lnTo>
-                  <a:lnTo>
-                    <a:pt x="143245" y="54794"/>
-                  </a:lnTo>
-                  <a:lnTo>
-                    <a:pt x="214867" y="81645"/>
-                  </a:lnTo>
-                  <a:lnTo>
-                    <a:pt x="286490" y="108140"/>
-                  </a:lnTo>
-                  <a:lnTo>
-                    <a:pt x="358112" y="134282"/>
-                  </a:lnTo>
-                  <a:lnTo>
-                    <a:pt x="429735" y="160076"/>
-                  </a:lnTo>
-                  <a:lnTo>
-                    <a:pt x="501357" y="185527"/>
-                  </a:lnTo>
-                  <a:lnTo>
-                    <a:pt x="572980" y="210640"/>
-                  </a:lnTo>
-                  <a:lnTo>
-                    <a:pt x="644602" y="235419"/>
-                  </a:lnTo>
-                  <a:lnTo>
-                    <a:pt x="716225" y="259868"/>
-                  </a:lnTo>
-                  <a:lnTo>
-                    <a:pt x="787847" y="283991"/>
-                  </a:lnTo>
-                  <a:lnTo>
-                    <a:pt x="859470" y="307794"/>
-                  </a:lnTo>
-                  <a:lnTo>
-                    <a:pt x="931092" y="331280"/>
-                  </a:lnTo>
-                  <a:lnTo>
-                    <a:pt x="1002715" y="354454"/>
-                  </a:lnTo>
-                  <a:lnTo>
-                    <a:pt x="1074337" y="377319"/>
-                  </a:lnTo>
-                  <a:lnTo>
-                    <a:pt x="1145960" y="399881"/>
-                  </a:lnTo>
-                  <a:lnTo>
-                    <a:pt x="1217582" y="422142"/>
-                  </a:lnTo>
-                  <a:lnTo>
-                    <a:pt x="1289205" y="444107"/>
-                  </a:lnTo>
-                  <a:lnTo>
-                    <a:pt x="1360827" y="465780"/>
-                  </a:lnTo>
-                  <a:lnTo>
-                    <a:pt x="1432450" y="487164"/>
-                  </a:lnTo>
-                  <a:lnTo>
-                    <a:pt x="1504073" y="508264"/>
-                  </a:lnTo>
-                  <a:lnTo>
-                    <a:pt x="1575695" y="529084"/>
-                  </a:lnTo>
-                  <a:lnTo>
-                    <a:pt x="1647318" y="549626"/>
-                  </a:lnTo>
-                  <a:lnTo>
-                    <a:pt x="1718940" y="569895"/>
-                  </a:lnTo>
-                  <a:lnTo>
-                    <a:pt x="1790563" y="589895"/>
-                  </a:lnTo>
-                  <a:lnTo>
-                    <a:pt x="1862185" y="609628"/>
-                  </a:lnTo>
-                  <a:lnTo>
-                    <a:pt x="1933808" y="629099"/>
-                  </a:lnTo>
-                  <a:lnTo>
-                    <a:pt x="2005430" y="648311"/>
-                  </a:lnTo>
-                  <a:lnTo>
-                    <a:pt x="2077053" y="667268"/>
-                  </a:lnTo>
-                  <a:lnTo>
-                    <a:pt x="2148675" y="685972"/>
-                  </a:lnTo>
-                  <a:lnTo>
-                    <a:pt x="2220298" y="704427"/>
-                  </a:lnTo>
-                  <a:lnTo>
-                    <a:pt x="2291920" y="722637"/>
-                  </a:lnTo>
-                  <a:lnTo>
-                    <a:pt x="2363543" y="740605"/>
-                  </a:lnTo>
-                  <a:lnTo>
-                    <a:pt x="2435165" y="758334"/>
-                  </a:lnTo>
-                  <a:lnTo>
-                    <a:pt x="2506788" y="775826"/>
-                  </a:lnTo>
-                  <a:lnTo>
-                    <a:pt x="2578410" y="793087"/>
-                  </a:lnTo>
-                  <a:lnTo>
-                    <a:pt x="2650033" y="810117"/>
-                  </a:lnTo>
-                  <a:lnTo>
-                    <a:pt x="2721655" y="826921"/>
-                  </a:lnTo>
-                  <a:lnTo>
-                    <a:pt x="2793278" y="843502"/>
-                  </a:lnTo>
-                  <a:lnTo>
-                    <a:pt x="2864901" y="859861"/>
-                  </a:lnTo>
-                  <a:lnTo>
-                    <a:pt x="2936523" y="876004"/>
-                  </a:lnTo>
-                  <a:lnTo>
-                    <a:pt x="3008146" y="891931"/>
-                  </a:lnTo>
-                  <a:lnTo>
-                    <a:pt x="3079768" y="907647"/>
-                  </a:lnTo>
-                  <a:lnTo>
-                    <a:pt x="3151391" y="923153"/>
-                  </a:lnTo>
-                  <a:lnTo>
-                    <a:pt x="3223013" y="938454"/>
-                  </a:lnTo>
-                  <a:lnTo>
-                    <a:pt x="3294636" y="953551"/>
-                  </a:lnTo>
-                  <a:lnTo>
-                    <a:pt x="3366258" y="968447"/>
-                  </a:lnTo>
-                  <a:lnTo>
-                    <a:pt x="3437881" y="983144"/>
-                  </a:lnTo>
-                  <a:lnTo>
-                    <a:pt x="3509503" y="997647"/>
-                  </a:lnTo>
-                  <a:lnTo>
-                    <a:pt x="3581126" y="1011956"/>
-                  </a:lnTo>
-                  <a:lnTo>
-                    <a:pt x="3652748" y="1026075"/>
-                  </a:lnTo>
-                  <a:lnTo>
-                    <a:pt x="3724371" y="1040006"/>
-                  </a:lnTo>
-                  <a:lnTo>
-                    <a:pt x="3795993" y="1053752"/>
-                  </a:lnTo>
-                  <a:lnTo>
-                    <a:pt x="3867616" y="1067315"/>
-                  </a:lnTo>
-                  <a:lnTo>
-                    <a:pt x="3939238" y="1080698"/>
-                  </a:lnTo>
-                  <a:lnTo>
-                    <a:pt x="4010861" y="1093902"/>
-                  </a:lnTo>
-                  <a:lnTo>
-                    <a:pt x="4082483" y="1106931"/>
-                  </a:lnTo>
-                  <a:lnTo>
-                    <a:pt x="4154106" y="1119787"/>
-                  </a:lnTo>
-                  <a:lnTo>
-                    <a:pt x="4225729" y="1132471"/>
-                  </a:lnTo>
-                  <a:lnTo>
-                    <a:pt x="4297351" y="1144987"/>
-                  </a:lnTo>
-                  <a:lnTo>
-                    <a:pt x="4368974" y="1157337"/>
-                  </a:lnTo>
-                  <a:lnTo>
-                    <a:pt x="4440596" y="1169522"/>
-                  </a:lnTo>
-                  <a:lnTo>
-                    <a:pt x="4512219" y="1181545"/>
-                  </a:lnTo>
-                  <a:lnTo>
-                    <a:pt x="4583841" y="1193408"/>
-                  </a:lnTo>
-                  <a:lnTo>
-                    <a:pt x="4655464" y="1205113"/>
-                  </a:lnTo>
-                  <a:lnTo>
-                    <a:pt x="4727086" y="1216663"/>
-                  </a:lnTo>
-                  <a:lnTo>
-                    <a:pt x="4798709" y="1228059"/>
-                  </a:lnTo>
-                  <a:lnTo>
-                    <a:pt x="4870331" y="1239303"/>
-                  </a:lnTo>
-                  <a:lnTo>
-                    <a:pt x="4941954" y="1250398"/>
-                  </a:lnTo>
-                  <a:lnTo>
-                    <a:pt x="5013576" y="1261345"/>
-                  </a:lnTo>
-                  <a:lnTo>
-                    <a:pt x="5085199" y="1272146"/>
-                  </a:lnTo>
-                  <a:lnTo>
-                    <a:pt x="5156821" y="1282804"/>
-                  </a:lnTo>
-                  <a:lnTo>
-                    <a:pt x="5228444" y="1293320"/>
-                  </a:lnTo>
-                  <a:lnTo>
-                    <a:pt x="5300066" y="1303696"/>
-                  </a:lnTo>
-                  <a:lnTo>
-                    <a:pt x="5371689" y="1313935"/>
-                  </a:lnTo>
-                  <a:lnTo>
-                    <a:pt x="5443311" y="1324036"/>
-                  </a:lnTo>
-                  <a:lnTo>
-                    <a:pt x="5514934" y="1334004"/>
-                  </a:lnTo>
-                  <a:lnTo>
-                    <a:pt x="5586557" y="1343839"/>
-                  </a:lnTo>
-                  <a:lnTo>
-                    <a:pt x="5658179" y="1353543"/>
-                  </a:lnTo>
-                  <a:lnTo>
-                    <a:pt x="5729802" y="1363118"/>
-                  </a:lnTo>
-                  <a:lnTo>
-                    <a:pt x="5801424" y="1372566"/>
-                  </a:lnTo>
-                  <a:lnTo>
-                    <a:pt x="5873047" y="1381888"/>
-                  </a:lnTo>
-                  <a:lnTo>
-                    <a:pt x="5944669" y="1391086"/>
-                  </a:lnTo>
-                  <a:lnTo>
-                    <a:pt x="6016292" y="1400162"/>
-                  </a:lnTo>
-                  <a:lnTo>
-                    <a:pt x="6087914" y="1409116"/>
-                  </a:lnTo>
-                  <a:lnTo>
-                    <a:pt x="6159537" y="1417952"/>
-                  </a:lnTo>
-                  <a:lnTo>
-                    <a:pt x="6231159" y="1426671"/>
-                  </a:lnTo>
-                  <a:lnTo>
-                    <a:pt x="6302782" y="1435273"/>
-                  </a:lnTo>
-                  <a:lnTo>
-                    <a:pt x="6374404" y="1443761"/>
-                  </a:lnTo>
-                  <a:lnTo>
-                    <a:pt x="6446027" y="1452136"/>
-                  </a:lnTo>
-                  <a:lnTo>
-                    <a:pt x="6517649" y="1460399"/>
-                  </a:lnTo>
-                  <a:lnTo>
-                    <a:pt x="6589272" y="1468553"/>
-                  </a:lnTo>
-                  <a:lnTo>
-                    <a:pt x="6660894" y="1476598"/>
-                  </a:lnTo>
-                  <a:lnTo>
-                    <a:pt x="6732517" y="1484536"/>
-                  </a:lnTo>
-                  <a:lnTo>
-                    <a:pt x="6804139" y="1492368"/>
-                  </a:lnTo>
-                  <a:lnTo>
-                    <a:pt x="6875762" y="1500097"/>
-                  </a:lnTo>
-                  <a:lnTo>
-                    <a:pt x="6947385" y="1507722"/>
-                  </a:lnTo>
-                  <a:lnTo>
-                    <a:pt x="7019007" y="1515246"/>
-                  </a:lnTo>
-                  <a:lnTo>
-                    <a:pt x="7090630" y="1522670"/>
+                    <a:pt x="32383" y="34354"/>
+                  </a:lnTo>
+                  <a:lnTo>
+                    <a:pt x="104006" y="108697"/>
+                  </a:lnTo>
+                  <a:lnTo>
+                    <a:pt x="175628" y="181438"/>
+                  </a:lnTo>
+                  <a:lnTo>
+                    <a:pt x="247251" y="252611"/>
+                  </a:lnTo>
+                  <a:lnTo>
+                    <a:pt x="318873" y="322251"/>
+                  </a:lnTo>
+                  <a:lnTo>
+                    <a:pt x="390496" y="390389"/>
+                  </a:lnTo>
+                  <a:lnTo>
+                    <a:pt x="462118" y="457059"/>
+                  </a:lnTo>
+                  <a:lnTo>
+                    <a:pt x="533741" y="522292"/>
+                  </a:lnTo>
+                  <a:lnTo>
+                    <a:pt x="605363" y="586119"/>
+                  </a:lnTo>
+                  <a:lnTo>
+                    <a:pt x="676986" y="648570"/>
+                  </a:lnTo>
+                  <a:lnTo>
+                    <a:pt x="748608" y="709676"/>
+                  </a:lnTo>
+                  <a:lnTo>
+                    <a:pt x="820231" y="769464"/>
+                  </a:lnTo>
+                  <a:lnTo>
+                    <a:pt x="891853" y="827964"/>
+                  </a:lnTo>
+                  <a:lnTo>
+                    <a:pt x="963476" y="885203"/>
+                  </a:lnTo>
+                  <a:lnTo>
+                    <a:pt x="1035098" y="941208"/>
+                  </a:lnTo>
+                  <a:lnTo>
+                    <a:pt x="1106721" y="996006"/>
+                  </a:lnTo>
+                  <a:lnTo>
+                    <a:pt x="1178344" y="1049624"/>
+                  </a:lnTo>
+                  <a:lnTo>
+                    <a:pt x="1249966" y="1102085"/>
+                  </a:lnTo>
+                  <a:lnTo>
+                    <a:pt x="1321589" y="1153416"/>
+                  </a:lnTo>
+                  <a:lnTo>
+                    <a:pt x="1393211" y="1203641"/>
+                  </a:lnTo>
+                  <a:lnTo>
+                    <a:pt x="1464834" y="1252783"/>
+                  </a:lnTo>
+                  <a:lnTo>
+                    <a:pt x="1536456" y="1300866"/>
+                  </a:lnTo>
+                  <a:lnTo>
+                    <a:pt x="1608079" y="1347913"/>
+                  </a:lnTo>
+                  <a:lnTo>
+                    <a:pt x="1679701" y="1393946"/>
+                  </a:lnTo>
+                  <a:lnTo>
+                    <a:pt x="1751324" y="1438986"/>
+                  </a:lnTo>
+                  <a:lnTo>
+                    <a:pt x="1822946" y="1483056"/>
+                  </a:lnTo>
+                  <a:lnTo>
+                    <a:pt x="1894569" y="1526176"/>
+                  </a:lnTo>
+                  <a:lnTo>
+                    <a:pt x="1966191" y="1568367"/>
+                  </a:lnTo>
+                  <a:lnTo>
+                    <a:pt x="2037814" y="1609648"/>
+                  </a:lnTo>
+                  <a:lnTo>
+                    <a:pt x="2109436" y="1650040"/>
+                  </a:lnTo>
+                  <a:lnTo>
+                    <a:pt x="2181059" y="1689561"/>
+                  </a:lnTo>
+                  <a:lnTo>
+                    <a:pt x="2252681" y="1728230"/>
+                  </a:lnTo>
+                  <a:lnTo>
+                    <a:pt x="2324304" y="1766066"/>
+                  </a:lnTo>
+                  <a:lnTo>
+                    <a:pt x="2395926" y="1803087"/>
+                  </a:lnTo>
+                  <a:lnTo>
+                    <a:pt x="2467549" y="1839309"/>
+                  </a:lnTo>
+                  <a:lnTo>
+                    <a:pt x="2539172" y="1874751"/>
+                  </a:lnTo>
+                  <a:lnTo>
+                    <a:pt x="2610794" y="1909429"/>
+                  </a:lnTo>
+                  <a:lnTo>
+                    <a:pt x="2682417" y="1943360"/>
+                  </a:lnTo>
+                  <a:lnTo>
+                    <a:pt x="2754039" y="1976559"/>
+                  </a:lnTo>
+                  <a:lnTo>
+                    <a:pt x="2825662" y="2009043"/>
+                  </a:lnTo>
+                  <a:lnTo>
+                    <a:pt x="2897284" y="2040827"/>
+                  </a:lnTo>
+                  <a:lnTo>
+                    <a:pt x="2968907" y="2071925"/>
+                  </a:lnTo>
+                  <a:lnTo>
+                    <a:pt x="3040529" y="2102354"/>
+                  </a:lnTo>
+                  <a:lnTo>
+                    <a:pt x="3112152" y="2132126"/>
+                  </a:lnTo>
+                  <a:lnTo>
+                    <a:pt x="3183774" y="2161257"/>
+                  </a:lnTo>
+                  <a:lnTo>
+                    <a:pt x="3255397" y="2189760"/>
+                  </a:lnTo>
+                  <a:lnTo>
+                    <a:pt x="3327019" y="2217649"/>
+                  </a:lnTo>
+                  <a:lnTo>
+                    <a:pt x="3398642" y="2244937"/>
+                  </a:lnTo>
+                  <a:lnTo>
+                    <a:pt x="3470264" y="2271636"/>
+                  </a:lnTo>
+                  <a:lnTo>
+                    <a:pt x="3541887" y="2297760"/>
+                  </a:lnTo>
+                  <a:lnTo>
+                    <a:pt x="3613509" y="2323321"/>
+                  </a:lnTo>
+                  <a:lnTo>
+                    <a:pt x="3685132" y="2348331"/>
+                  </a:lnTo>
+                  <a:lnTo>
+                    <a:pt x="3756754" y="2372803"/>
+                  </a:lnTo>
+                  <a:lnTo>
+                    <a:pt x="3828377" y="2396746"/>
+                  </a:lnTo>
+                  <a:lnTo>
+                    <a:pt x="3900000" y="2420174"/>
+                  </a:lnTo>
+                  <a:lnTo>
+                    <a:pt x="3971622" y="2443097"/>
+                  </a:lnTo>
+                  <a:lnTo>
+                    <a:pt x="4043245" y="2465525"/>
+                  </a:lnTo>
+                  <a:lnTo>
+                    <a:pt x="4114867" y="2487471"/>
+                  </a:lnTo>
+                  <a:lnTo>
+                    <a:pt x="4186490" y="2508943"/>
+                  </a:lnTo>
+                  <a:lnTo>
+                    <a:pt x="4258112" y="2529953"/>
+                  </a:lnTo>
+                  <a:lnTo>
+                    <a:pt x="4329735" y="2550509"/>
+                  </a:lnTo>
+                  <a:lnTo>
+                    <a:pt x="4401357" y="2570623"/>
+                  </a:lnTo>
+                  <a:lnTo>
+                    <a:pt x="4472980" y="2590303"/>
+                  </a:lnTo>
+                  <a:lnTo>
+                    <a:pt x="4544602" y="2609559"/>
+                  </a:lnTo>
+                  <a:lnTo>
+                    <a:pt x="4616225" y="2628400"/>
+                  </a:lnTo>
+                  <a:lnTo>
+                    <a:pt x="4687847" y="2646835"/>
+                  </a:lnTo>
+                  <a:lnTo>
+                    <a:pt x="4759470" y="2664873"/>
+                  </a:lnTo>
+                  <a:lnTo>
+                    <a:pt x="4831092" y="2682522"/>
+                  </a:lnTo>
+                  <a:lnTo>
+                    <a:pt x="4902715" y="2699790"/>
+                  </a:lnTo>
+                  <a:lnTo>
+                    <a:pt x="4974337" y="2716686"/>
+                  </a:lnTo>
+                  <a:lnTo>
+                    <a:pt x="5045960" y="2733218"/>
+                  </a:lnTo>
+                  <a:lnTo>
+                    <a:pt x="5117582" y="2749394"/>
+                  </a:lnTo>
+                  <a:lnTo>
+                    <a:pt x="5189205" y="2765221"/>
+                  </a:lnTo>
+                  <a:lnTo>
+                    <a:pt x="5260828" y="2780707"/>
+                  </a:lnTo>
+                  <a:lnTo>
+                    <a:pt x="5332450" y="2795860"/>
+                  </a:lnTo>
+                  <a:lnTo>
+                    <a:pt x="5404073" y="2810686"/>
+                  </a:lnTo>
+                  <a:lnTo>
+                    <a:pt x="5475695" y="2825192"/>
+                  </a:lnTo>
+                  <a:lnTo>
+                    <a:pt x="5547318" y="2839385"/>
+                  </a:lnTo>
+                  <a:lnTo>
+                    <a:pt x="5618940" y="2853273"/>
+                  </a:lnTo>
+                  <a:lnTo>
+                    <a:pt x="5690563" y="2866861"/>
+                  </a:lnTo>
+                  <a:lnTo>
+                    <a:pt x="5762185" y="2880157"/>
+                  </a:lnTo>
+                  <a:lnTo>
+                    <a:pt x="5833808" y="2893166"/>
+                  </a:lnTo>
+                  <a:lnTo>
+                    <a:pt x="5905430" y="2905894"/>
+                  </a:lnTo>
+                  <a:lnTo>
+                    <a:pt x="5977053" y="2918348"/>
+                  </a:lnTo>
+                  <a:lnTo>
+                    <a:pt x="6048675" y="2930534"/>
+                  </a:lnTo>
+                  <a:lnTo>
+                    <a:pt x="6120298" y="2942457"/>
+                  </a:lnTo>
+                  <a:lnTo>
+                    <a:pt x="6191920" y="2954124"/>
+                  </a:lnTo>
+                  <a:lnTo>
+                    <a:pt x="6263543" y="2965538"/>
+                  </a:lnTo>
+                  <a:lnTo>
+                    <a:pt x="6335165" y="2976707"/>
+                  </a:lnTo>
+                  <a:lnTo>
+                    <a:pt x="6406788" y="2987635"/>
+                  </a:lnTo>
+                  <a:lnTo>
+                    <a:pt x="6478410" y="2998327"/>
+                  </a:lnTo>
+                  <a:lnTo>
+                    <a:pt x="6550033" y="3008790"/>
+                  </a:lnTo>
+                  <a:lnTo>
+                    <a:pt x="6621656" y="3019026"/>
+                  </a:lnTo>
+                  <a:lnTo>
+                    <a:pt x="6693278" y="3029042"/>
+                  </a:lnTo>
+                  <a:lnTo>
+                    <a:pt x="6764901" y="3038842"/>
+                  </a:lnTo>
+                  <a:lnTo>
+                    <a:pt x="6836523" y="3048431"/>
+                  </a:lnTo>
+                  <a:lnTo>
+                    <a:pt x="6908146" y="3057813"/>
                   </a:lnTo>
                 </a:path>
               </a:pathLst>
@@ -5130,7 +5100,7 @@
                   <a:latin typeface="Helvetica"/>
                   <a:cs typeface="Helvetica"/>
                 </a:rPr>
-                <a:t>subHR per 1 mL/min: 0.98 (0.95-1.02)  |  per IQR (Δ = 18.2): 0.73 (0.38-1.40)  |  IQR: [-11.5, 6.7]</a:t>
+                <a:t>subHR per 1 mL/min: 0.97 (0.94-1.00)  |  per IQR (Δ = 18.2): 0.60 (0.33-1.08)  |  IQR: [-11.5, 6.7]</a:t>
               </a:r>
             </a:p>
           </p:txBody>

--- a/docs/plots/carbo/jx_carbo_linsubhr_egfrdisc_aki2.pptx
+++ b/docs/plots/carbo/jx_carbo_linsubhr_egfrdisc_aki2.pptx
@@ -3003,500 +3003,512 @@
           <p:spPr>
             <a:xfrm>
               <a:off x="1172049" y="2073503"/>
-              <a:ext cx="7090630" cy="3286078"/>
+              <a:ext cx="7090630" cy="3246833"/>
             </a:xfrm>
             <a:custGeom>
               <a:avLst/>
               <a:pathLst>
-                <a:path w="7090630" h="3286078">
+                <a:path w="7090630" h="3246833">
                   <a:moveTo>
-                    <a:pt x="2707695" y="0"/>
+                    <a:pt x="2390939" y="0"/>
                   </a:moveTo>
                   <a:lnTo>
-                    <a:pt x="2721655" y="32291"/>
-                  </a:lnTo>
-                  <a:lnTo>
-                    <a:pt x="2793278" y="190376"/>
-                  </a:lnTo>
-                  <a:lnTo>
-                    <a:pt x="2864901" y="341221"/>
-                  </a:lnTo>
-                  <a:lnTo>
-                    <a:pt x="2936523" y="485156"/>
-                  </a:lnTo>
-                  <a:lnTo>
-                    <a:pt x="3008146" y="622499"/>
-                  </a:lnTo>
-                  <a:lnTo>
-                    <a:pt x="3079768" y="753551"/>
-                  </a:lnTo>
-                  <a:lnTo>
-                    <a:pt x="3151391" y="878601"/>
-                  </a:lnTo>
-                  <a:lnTo>
-                    <a:pt x="3223013" y="997923"/>
-                  </a:lnTo>
-                  <a:lnTo>
-                    <a:pt x="3294636" y="1111780"/>
-                  </a:lnTo>
-                  <a:lnTo>
-                    <a:pt x="3366258" y="1220422"/>
-                  </a:lnTo>
-                  <a:lnTo>
-                    <a:pt x="3437881" y="1324088"/>
-                  </a:lnTo>
-                  <a:lnTo>
-                    <a:pt x="3509503" y="1423005"/>
-                  </a:lnTo>
-                  <a:lnTo>
-                    <a:pt x="3581126" y="1517392"/>
-                  </a:lnTo>
-                  <a:lnTo>
-                    <a:pt x="3652748" y="1607456"/>
-                  </a:lnTo>
-                  <a:lnTo>
-                    <a:pt x="3724371" y="1693395"/>
-                  </a:lnTo>
-                  <a:lnTo>
-                    <a:pt x="3795993" y="1775397"/>
-                  </a:lnTo>
-                  <a:lnTo>
-                    <a:pt x="3867616" y="1853644"/>
-                  </a:lnTo>
-                  <a:lnTo>
-                    <a:pt x="3939238" y="1928307"/>
-                  </a:lnTo>
-                  <a:lnTo>
-                    <a:pt x="4010861" y="1999550"/>
-                  </a:lnTo>
-                  <a:lnTo>
-                    <a:pt x="4082483" y="2067529"/>
-                  </a:lnTo>
-                  <a:lnTo>
-                    <a:pt x="4154106" y="2132396"/>
-                  </a:lnTo>
-                  <a:lnTo>
-                    <a:pt x="4225729" y="2194291"/>
-                  </a:lnTo>
-                  <a:lnTo>
-                    <a:pt x="4297351" y="2253351"/>
-                  </a:lnTo>
-                  <a:lnTo>
-                    <a:pt x="4368974" y="2309706"/>
-                  </a:lnTo>
-                  <a:lnTo>
-                    <a:pt x="4440596" y="2363480"/>
-                  </a:lnTo>
-                  <a:lnTo>
-                    <a:pt x="4512219" y="2414791"/>
-                  </a:lnTo>
-                  <a:lnTo>
-                    <a:pt x="4583841" y="2463752"/>
-                  </a:lnTo>
-                  <a:lnTo>
-                    <a:pt x="4655464" y="2510470"/>
-                  </a:lnTo>
-                  <a:lnTo>
-                    <a:pt x="4727086" y="2555049"/>
-                  </a:lnTo>
-                  <a:lnTo>
-                    <a:pt x="4798709" y="2597585"/>
-                  </a:lnTo>
-                  <a:lnTo>
-                    <a:pt x="4870331" y="2638174"/>
-                  </a:lnTo>
-                  <a:lnTo>
-                    <a:pt x="4941954" y="2652663"/>
-                  </a:lnTo>
-                  <a:lnTo>
-                    <a:pt x="5013576" y="2649909"/>
-                  </a:lnTo>
-                  <a:lnTo>
-                    <a:pt x="5085199" y="2647146"/>
-                  </a:lnTo>
-                  <a:lnTo>
-                    <a:pt x="5156821" y="2644374"/>
-                  </a:lnTo>
-                  <a:lnTo>
-                    <a:pt x="5228444" y="2641593"/>
-                  </a:lnTo>
-                  <a:lnTo>
-                    <a:pt x="5300066" y="2638802"/>
-                  </a:lnTo>
-                  <a:lnTo>
-                    <a:pt x="5371689" y="2636002"/>
-                  </a:lnTo>
-                  <a:lnTo>
-                    <a:pt x="5443311" y="2633193"/>
-                  </a:lnTo>
-                  <a:lnTo>
-                    <a:pt x="5514934" y="2630375"/>
-                  </a:lnTo>
-                  <a:lnTo>
-                    <a:pt x="5586557" y="2627547"/>
-                  </a:lnTo>
-                  <a:lnTo>
-                    <a:pt x="5658179" y="2624710"/>
-                  </a:lnTo>
-                  <a:lnTo>
-                    <a:pt x="5729802" y="2621864"/>
-                  </a:lnTo>
-                  <a:lnTo>
-                    <a:pt x="5801424" y="2619008"/>
-                  </a:lnTo>
-                  <a:lnTo>
-                    <a:pt x="5873047" y="2616143"/>
-                  </a:lnTo>
-                  <a:lnTo>
-                    <a:pt x="5944669" y="2613268"/>
-                  </a:lnTo>
-                  <a:lnTo>
-                    <a:pt x="6016292" y="2610383"/>
-                  </a:lnTo>
-                  <a:lnTo>
-                    <a:pt x="6087914" y="2607489"/>
-                  </a:lnTo>
-                  <a:lnTo>
-                    <a:pt x="6159537" y="2604586"/>
-                  </a:lnTo>
-                  <a:lnTo>
-                    <a:pt x="6231159" y="2601673"/>
-                  </a:lnTo>
-                  <a:lnTo>
-                    <a:pt x="6302782" y="2598750"/>
-                  </a:lnTo>
-                  <a:lnTo>
-                    <a:pt x="6374404" y="2595817"/>
-                  </a:lnTo>
-                  <a:lnTo>
-                    <a:pt x="6446027" y="2592875"/>
-                  </a:lnTo>
-                  <a:lnTo>
-                    <a:pt x="6517649" y="2589923"/>
-                  </a:lnTo>
-                  <a:lnTo>
-                    <a:pt x="6589272" y="2586961"/>
-                  </a:lnTo>
-                  <a:lnTo>
-                    <a:pt x="6660894" y="2583990"/>
-                  </a:lnTo>
-                  <a:lnTo>
-                    <a:pt x="6732517" y="2581008"/>
-                  </a:lnTo>
-                  <a:lnTo>
-                    <a:pt x="6804139" y="2578017"/>
-                  </a:lnTo>
-                  <a:lnTo>
-                    <a:pt x="6875762" y="2575016"/>
-                  </a:lnTo>
-                  <a:lnTo>
-                    <a:pt x="6947385" y="2572005"/>
-                  </a:lnTo>
-                  <a:lnTo>
-                    <a:pt x="7019007" y="2568984"/>
-                  </a:lnTo>
-                  <a:lnTo>
-                    <a:pt x="7090630" y="2565953"/>
-                  </a:lnTo>
-                  <a:lnTo>
-                    <a:pt x="7090630" y="3286078"/>
-                  </a:lnTo>
-                  <a:lnTo>
-                    <a:pt x="7019007" y="3276589"/>
-                  </a:lnTo>
-                  <a:lnTo>
-                    <a:pt x="6947385" y="3266646"/>
-                  </a:lnTo>
-                  <a:lnTo>
-                    <a:pt x="6875762" y="3256224"/>
-                  </a:lnTo>
-                  <a:lnTo>
-                    <a:pt x="6804139" y="3245303"/>
-                  </a:lnTo>
-                  <a:lnTo>
-                    <a:pt x="6732517" y="3233858"/>
-                  </a:lnTo>
-                  <a:lnTo>
-                    <a:pt x="6660894" y="3221863"/>
-                  </a:lnTo>
-                  <a:lnTo>
-                    <a:pt x="6589272" y="3209292"/>
-                  </a:lnTo>
-                  <a:lnTo>
-                    <a:pt x="6517649" y="3196118"/>
-                  </a:lnTo>
-                  <a:lnTo>
-                    <a:pt x="6446027" y="3182312"/>
-                  </a:lnTo>
-                  <a:lnTo>
-                    <a:pt x="6374404" y="3167842"/>
-                  </a:lnTo>
-                  <a:lnTo>
-                    <a:pt x="6302782" y="3152679"/>
-                  </a:lnTo>
-                  <a:lnTo>
-                    <a:pt x="6231159" y="3136787"/>
-                  </a:lnTo>
-                  <a:lnTo>
-                    <a:pt x="6159537" y="3120133"/>
-                  </a:lnTo>
-                  <a:lnTo>
-                    <a:pt x="6087914" y="3102679"/>
-                  </a:lnTo>
-                  <a:lnTo>
-                    <a:pt x="6016292" y="3084387"/>
-                  </a:lnTo>
-                  <a:lnTo>
-                    <a:pt x="5944669" y="3065218"/>
-                  </a:lnTo>
-                  <a:lnTo>
-                    <a:pt x="5873047" y="3045128"/>
-                  </a:lnTo>
-                  <a:lnTo>
-                    <a:pt x="5801424" y="3024074"/>
-                  </a:lnTo>
-                  <a:lnTo>
-                    <a:pt x="5729802" y="3002009"/>
-                  </a:lnTo>
-                  <a:lnTo>
-                    <a:pt x="5658179" y="2978885"/>
-                  </a:lnTo>
-                  <a:lnTo>
-                    <a:pt x="5586557" y="2954651"/>
-                  </a:lnTo>
-                  <a:lnTo>
-                    <a:pt x="5514934" y="2929254"/>
-                  </a:lnTo>
-                  <a:lnTo>
-                    <a:pt x="5443311" y="2902638"/>
-                  </a:lnTo>
-                  <a:lnTo>
-                    <a:pt x="5371689" y="2874744"/>
-                  </a:lnTo>
-                  <a:lnTo>
-                    <a:pt x="5300066" y="2845511"/>
-                  </a:lnTo>
-                  <a:lnTo>
-                    <a:pt x="5228444" y="2814875"/>
-                  </a:lnTo>
-                  <a:lnTo>
-                    <a:pt x="5156821" y="2782769"/>
-                  </a:lnTo>
-                  <a:lnTo>
-                    <a:pt x="5085199" y="2749121"/>
-                  </a:lnTo>
-                  <a:lnTo>
-                    <a:pt x="5013576" y="2713858"/>
-                  </a:lnTo>
-                  <a:lnTo>
-                    <a:pt x="4941954" y="2676903"/>
-                  </a:lnTo>
-                  <a:lnTo>
-                    <a:pt x="4870331" y="2655408"/>
-                  </a:lnTo>
-                  <a:lnTo>
-                    <a:pt x="4798709" y="2658144"/>
-                  </a:lnTo>
-                  <a:lnTo>
-                    <a:pt x="4727086" y="2660870"/>
-                  </a:lnTo>
-                  <a:lnTo>
-                    <a:pt x="4655464" y="2663588"/>
-                  </a:lnTo>
-                  <a:lnTo>
-                    <a:pt x="4583841" y="2666297"/>
-                  </a:lnTo>
-                  <a:lnTo>
-                    <a:pt x="4512219" y="2668996"/>
-                  </a:lnTo>
-                  <a:lnTo>
-                    <a:pt x="4440596" y="2671687"/>
-                  </a:lnTo>
-                  <a:lnTo>
-                    <a:pt x="4368974" y="2674369"/>
-                  </a:lnTo>
-                  <a:lnTo>
-                    <a:pt x="4297351" y="2677042"/>
-                  </a:lnTo>
-                  <a:lnTo>
-                    <a:pt x="4225729" y="2679706"/>
-                  </a:lnTo>
-                  <a:lnTo>
-                    <a:pt x="4154106" y="2682362"/>
-                  </a:lnTo>
-                  <a:lnTo>
-                    <a:pt x="4082483" y="2685008"/>
-                  </a:lnTo>
-                  <a:lnTo>
-                    <a:pt x="4010861" y="2687646"/>
-                  </a:lnTo>
-                  <a:lnTo>
-                    <a:pt x="3939238" y="2690276"/>
-                  </a:lnTo>
-                  <a:lnTo>
-                    <a:pt x="3867616" y="2692896"/>
-                  </a:lnTo>
-                  <a:lnTo>
-                    <a:pt x="3795993" y="2695508"/>
-                  </a:lnTo>
-                  <a:lnTo>
-                    <a:pt x="3724371" y="2698111"/>
-                  </a:lnTo>
-                  <a:lnTo>
-                    <a:pt x="3652748" y="2700706"/>
-                  </a:lnTo>
-                  <a:lnTo>
-                    <a:pt x="3581126" y="2703292"/>
-                  </a:lnTo>
-                  <a:lnTo>
-                    <a:pt x="3509503" y="2705870"/>
-                  </a:lnTo>
-                  <a:lnTo>
-                    <a:pt x="3437881" y="2708439"/>
-                  </a:lnTo>
-                  <a:lnTo>
-                    <a:pt x="3366258" y="2710999"/>
-                  </a:lnTo>
-                  <a:lnTo>
-                    <a:pt x="3294636" y="2713551"/>
-                  </a:lnTo>
-                  <a:lnTo>
-                    <a:pt x="3223013" y="2716095"/>
-                  </a:lnTo>
-                  <a:lnTo>
-                    <a:pt x="3151391" y="2718630"/>
-                  </a:lnTo>
-                  <a:lnTo>
-                    <a:pt x="3079768" y="2721157"/>
-                  </a:lnTo>
-                  <a:lnTo>
-                    <a:pt x="3008146" y="2723676"/>
-                  </a:lnTo>
-                  <a:lnTo>
-                    <a:pt x="2936523" y="2726186"/>
-                  </a:lnTo>
-                  <a:lnTo>
-                    <a:pt x="2864901" y="2728688"/>
-                  </a:lnTo>
-                  <a:lnTo>
-                    <a:pt x="2793278" y="2731181"/>
-                  </a:lnTo>
-                  <a:lnTo>
-                    <a:pt x="2721655" y="2733667"/>
-                  </a:lnTo>
-                  <a:lnTo>
-                    <a:pt x="2650033" y="2736144"/>
-                  </a:lnTo>
-                  <a:lnTo>
-                    <a:pt x="2578410" y="2738613"/>
-                  </a:lnTo>
-                  <a:lnTo>
-                    <a:pt x="2506788" y="2741074"/>
-                  </a:lnTo>
-                  <a:lnTo>
-                    <a:pt x="2435165" y="2743527"/>
-                  </a:lnTo>
-                  <a:lnTo>
-                    <a:pt x="2363543" y="2745972"/>
-                  </a:lnTo>
-                  <a:lnTo>
-                    <a:pt x="2291920" y="2748408"/>
-                  </a:lnTo>
-                  <a:lnTo>
-                    <a:pt x="2220298" y="2750837"/>
-                  </a:lnTo>
-                  <a:lnTo>
-                    <a:pt x="2148675" y="2753257"/>
-                  </a:lnTo>
-                  <a:lnTo>
-                    <a:pt x="2077053" y="2755670"/>
-                  </a:lnTo>
-                  <a:lnTo>
-                    <a:pt x="2005430" y="2758074"/>
-                  </a:lnTo>
-                  <a:lnTo>
-                    <a:pt x="1933808" y="2760471"/>
-                  </a:lnTo>
-                  <a:lnTo>
-                    <a:pt x="1862185" y="2762860"/>
-                  </a:lnTo>
-                  <a:lnTo>
-                    <a:pt x="1790563" y="2765240"/>
-                  </a:lnTo>
-                  <a:lnTo>
-                    <a:pt x="1718940" y="2767613"/>
-                  </a:lnTo>
-                  <a:lnTo>
-                    <a:pt x="1647318" y="2769978"/>
-                  </a:lnTo>
-                  <a:lnTo>
-                    <a:pt x="1575695" y="2772336"/>
-                  </a:lnTo>
-                  <a:lnTo>
-                    <a:pt x="1504073" y="2774685"/>
-                  </a:lnTo>
-                  <a:lnTo>
-                    <a:pt x="1432450" y="2777027"/>
-                  </a:lnTo>
-                  <a:lnTo>
-                    <a:pt x="1360827" y="2779361"/>
-                  </a:lnTo>
-                  <a:lnTo>
-                    <a:pt x="1289205" y="2781687"/>
-                  </a:lnTo>
-                  <a:lnTo>
-                    <a:pt x="1217582" y="2784006"/>
-                  </a:lnTo>
-                  <a:lnTo>
-                    <a:pt x="1145960" y="2786317"/>
-                  </a:lnTo>
-                  <a:lnTo>
-                    <a:pt x="1074337" y="2788620"/>
-                  </a:lnTo>
-                  <a:lnTo>
-                    <a:pt x="1002715" y="2790916"/>
-                  </a:lnTo>
-                  <a:lnTo>
-                    <a:pt x="931092" y="2793204"/>
-                  </a:lnTo>
-                  <a:lnTo>
-                    <a:pt x="859470" y="2795485"/>
-                  </a:lnTo>
-                  <a:lnTo>
-                    <a:pt x="787847" y="2797758"/>
-                  </a:lnTo>
-                  <a:lnTo>
-                    <a:pt x="716225" y="2800024"/>
-                  </a:lnTo>
-                  <a:lnTo>
-                    <a:pt x="644602" y="2802282"/>
-                  </a:lnTo>
-                  <a:lnTo>
-                    <a:pt x="572980" y="2804532"/>
-                  </a:lnTo>
-                  <a:lnTo>
-                    <a:pt x="501357" y="2806775"/>
-                  </a:lnTo>
-                  <a:lnTo>
-                    <a:pt x="429735" y="2809011"/>
-                  </a:lnTo>
-                  <a:lnTo>
-                    <a:pt x="358112" y="2811240"/>
-                  </a:lnTo>
-                  <a:lnTo>
-                    <a:pt x="286490" y="2813461"/>
-                  </a:lnTo>
-                  <a:lnTo>
-                    <a:pt x="214867" y="2815674"/>
-                  </a:lnTo>
-                  <a:lnTo>
-                    <a:pt x="143245" y="2817881"/>
-                  </a:lnTo>
-                  <a:lnTo>
-                    <a:pt x="71622" y="2820080"/>
-                  </a:lnTo>
-                  <a:lnTo>
-                    <a:pt x="0" y="2822272"/>
+                    <a:pt x="2435165" y="87687"/>
+                  </a:lnTo>
+                  <a:lnTo>
+                    <a:pt x="2506788" y="223993"/>
+                  </a:lnTo>
+                  <a:lnTo>
+                    <a:pt x="2578410" y="354829"/>
+                  </a:lnTo>
+                  <a:lnTo>
+                    <a:pt x="2650033" y="480413"/>
+                  </a:lnTo>
+                  <a:lnTo>
+                    <a:pt x="2721655" y="600956"/>
+                  </a:lnTo>
+                  <a:lnTo>
+                    <a:pt x="2793278" y="716662"/>
+                  </a:lnTo>
+                  <a:lnTo>
+                    <a:pt x="2864901" y="827723"/>
+                  </a:lnTo>
+                  <a:lnTo>
+                    <a:pt x="2936523" y="934327"/>
+                  </a:lnTo>
+                  <a:lnTo>
+                    <a:pt x="3008146" y="1036652"/>
+                  </a:lnTo>
+                  <a:lnTo>
+                    <a:pt x="3079768" y="1134870"/>
+                  </a:lnTo>
+                  <a:lnTo>
+                    <a:pt x="3151391" y="1229146"/>
+                  </a:lnTo>
+                  <a:lnTo>
+                    <a:pt x="3223013" y="1319638"/>
+                  </a:lnTo>
+                  <a:lnTo>
+                    <a:pt x="3294636" y="1406498"/>
+                  </a:lnTo>
+                  <a:lnTo>
+                    <a:pt x="3366258" y="1489871"/>
+                  </a:lnTo>
+                  <a:lnTo>
+                    <a:pt x="3437881" y="1569899"/>
+                  </a:lnTo>
+                  <a:lnTo>
+                    <a:pt x="3509503" y="1646714"/>
+                  </a:lnTo>
+                  <a:lnTo>
+                    <a:pt x="3581126" y="1720446"/>
+                  </a:lnTo>
+                  <a:lnTo>
+                    <a:pt x="3652748" y="1791219"/>
+                  </a:lnTo>
+                  <a:lnTo>
+                    <a:pt x="3724371" y="1859151"/>
+                  </a:lnTo>
+                  <a:lnTo>
+                    <a:pt x="3795993" y="1924357"/>
+                  </a:lnTo>
+                  <a:lnTo>
+                    <a:pt x="3867616" y="1986946"/>
+                  </a:lnTo>
+                  <a:lnTo>
+                    <a:pt x="3939238" y="2047022"/>
+                  </a:lnTo>
+                  <a:lnTo>
+                    <a:pt x="4010861" y="2104687"/>
+                  </a:lnTo>
+                  <a:lnTo>
+                    <a:pt x="4082483" y="2160038"/>
+                  </a:lnTo>
+                  <a:lnTo>
+                    <a:pt x="4154106" y="2213167"/>
+                  </a:lnTo>
+                  <a:lnTo>
+                    <a:pt x="4225729" y="2264164"/>
+                  </a:lnTo>
+                  <a:lnTo>
+                    <a:pt x="4297351" y="2313114"/>
+                  </a:lnTo>
+                  <a:lnTo>
+                    <a:pt x="4368974" y="2360099"/>
+                  </a:lnTo>
+                  <a:lnTo>
+                    <a:pt x="4440596" y="2405198"/>
+                  </a:lnTo>
+                  <a:lnTo>
+                    <a:pt x="4512219" y="2448487"/>
+                  </a:lnTo>
+                  <a:lnTo>
+                    <a:pt x="4583841" y="2490039"/>
+                  </a:lnTo>
+                  <a:lnTo>
+                    <a:pt x="4655464" y="2529923"/>
+                  </a:lnTo>
+                  <a:lnTo>
+                    <a:pt x="4727086" y="2568206"/>
+                  </a:lnTo>
+                  <a:lnTo>
+                    <a:pt x="4798709" y="2604953"/>
+                  </a:lnTo>
+                  <a:lnTo>
+                    <a:pt x="4870331" y="2640225"/>
+                  </a:lnTo>
+                  <a:lnTo>
+                    <a:pt x="4941954" y="2647317"/>
+                  </a:lnTo>
+                  <a:lnTo>
+                    <a:pt x="5013576" y="2635371"/>
+                  </a:lnTo>
+                  <a:lnTo>
+                    <a:pt x="5085199" y="2623255"/>
+                  </a:lnTo>
+                  <a:lnTo>
+                    <a:pt x="5156821" y="2610966"/>
+                  </a:lnTo>
+                  <a:lnTo>
+                    <a:pt x="5228444" y="2598501"/>
+                  </a:lnTo>
+                  <a:lnTo>
+                    <a:pt x="5300066" y="2585858"/>
+                  </a:lnTo>
+                  <a:lnTo>
+                    <a:pt x="5371689" y="2573035"/>
+                  </a:lnTo>
+                  <a:lnTo>
+                    <a:pt x="5443311" y="2560028"/>
+                  </a:lnTo>
+                  <a:lnTo>
+                    <a:pt x="5514934" y="2546836"/>
+                  </a:lnTo>
+                  <a:lnTo>
+                    <a:pt x="5586557" y="2533455"/>
+                  </a:lnTo>
+                  <a:lnTo>
+                    <a:pt x="5658179" y="2519883"/>
+                  </a:lnTo>
+                  <a:lnTo>
+                    <a:pt x="5729802" y="2506118"/>
+                  </a:lnTo>
+                  <a:lnTo>
+                    <a:pt x="5801424" y="2492156"/>
+                  </a:lnTo>
+                  <a:lnTo>
+                    <a:pt x="5873047" y="2477994"/>
+                  </a:lnTo>
+                  <a:lnTo>
+                    <a:pt x="5944669" y="2463630"/>
+                  </a:lnTo>
+                  <a:lnTo>
+                    <a:pt x="6016292" y="2449061"/>
+                  </a:lnTo>
+                  <a:lnTo>
+                    <a:pt x="6087914" y="2434284"/>
+                  </a:lnTo>
+                  <a:lnTo>
+                    <a:pt x="6159537" y="2419296"/>
+                  </a:lnTo>
+                  <a:lnTo>
+                    <a:pt x="6231159" y="2404093"/>
+                  </a:lnTo>
+                  <a:lnTo>
+                    <a:pt x="6302782" y="2388674"/>
+                  </a:lnTo>
+                  <a:lnTo>
+                    <a:pt x="6374404" y="2373035"/>
+                  </a:lnTo>
+                  <a:lnTo>
+                    <a:pt x="6446027" y="2357172"/>
+                  </a:lnTo>
+                  <a:lnTo>
+                    <a:pt x="6517649" y="2341082"/>
+                  </a:lnTo>
+                  <a:lnTo>
+                    <a:pt x="6589272" y="2324763"/>
+                  </a:lnTo>
+                  <a:lnTo>
+                    <a:pt x="6660894" y="2308211"/>
+                  </a:lnTo>
+                  <a:lnTo>
+                    <a:pt x="6732517" y="2291422"/>
+                  </a:lnTo>
+                  <a:lnTo>
+                    <a:pt x="6804139" y="2274394"/>
+                  </a:lnTo>
+                  <a:lnTo>
+                    <a:pt x="6875762" y="2257122"/>
+                  </a:lnTo>
+                  <a:lnTo>
+                    <a:pt x="6947385" y="2239604"/>
+                  </a:lnTo>
+                  <a:lnTo>
+                    <a:pt x="7019007" y="2221835"/>
+                  </a:lnTo>
+                  <a:lnTo>
+                    <a:pt x="7090630" y="2203813"/>
+                  </a:lnTo>
+                  <a:lnTo>
+                    <a:pt x="7090630" y="3246833"/>
+                  </a:lnTo>
+                  <a:lnTo>
+                    <a:pt x="7019007" y="3236927"/>
+                  </a:lnTo>
+                  <a:lnTo>
+                    <a:pt x="6947385" y="3226606"/>
+                  </a:lnTo>
+                  <a:lnTo>
+                    <a:pt x="6875762" y="3215854"/>
+                  </a:lnTo>
+                  <a:lnTo>
+                    <a:pt x="6804139" y="3204652"/>
+                  </a:lnTo>
+                  <a:lnTo>
+                    <a:pt x="6732517" y="3192982"/>
+                  </a:lnTo>
+                  <a:lnTo>
+                    <a:pt x="6660894" y="3180823"/>
+                  </a:lnTo>
+                  <a:lnTo>
+                    <a:pt x="6589272" y="3168157"/>
+                  </a:lnTo>
+                  <a:lnTo>
+                    <a:pt x="6517649" y="3154960"/>
+                  </a:lnTo>
+                  <a:lnTo>
+                    <a:pt x="6446027" y="3141212"/>
+                  </a:lnTo>
+                  <a:lnTo>
+                    <a:pt x="6374404" y="3126889"/>
+                  </a:lnTo>
+                  <a:lnTo>
+                    <a:pt x="6302782" y="3111967"/>
+                  </a:lnTo>
+                  <a:lnTo>
+                    <a:pt x="6231159" y="3096421"/>
+                  </a:lnTo>
+                  <a:lnTo>
+                    <a:pt x="6159537" y="3080225"/>
+                  </a:lnTo>
+                  <a:lnTo>
+                    <a:pt x="6087914" y="3063352"/>
+                  </a:lnTo>
+                  <a:lnTo>
+                    <a:pt x="6016292" y="3045774"/>
+                  </a:lnTo>
+                  <a:lnTo>
+                    <a:pt x="5944669" y="3027460"/>
+                  </a:lnTo>
+                  <a:lnTo>
+                    <a:pt x="5873047" y="3008380"/>
+                  </a:lnTo>
+                  <a:lnTo>
+                    <a:pt x="5801424" y="2988503"/>
+                  </a:lnTo>
+                  <a:lnTo>
+                    <a:pt x="5729802" y="2967794"/>
+                  </a:lnTo>
+                  <a:lnTo>
+                    <a:pt x="5658179" y="2946220"/>
+                  </a:lnTo>
+                  <a:lnTo>
+                    <a:pt x="5586557" y="2923743"/>
+                  </a:lnTo>
+                  <a:lnTo>
+                    <a:pt x="5514934" y="2900327"/>
+                  </a:lnTo>
+                  <a:lnTo>
+                    <a:pt x="5443311" y="2875931"/>
+                  </a:lnTo>
+                  <a:lnTo>
+                    <a:pt x="5371689" y="2850515"/>
+                  </a:lnTo>
+                  <a:lnTo>
+                    <a:pt x="5300066" y="2824037"/>
+                  </a:lnTo>
+                  <a:lnTo>
+                    <a:pt x="5228444" y="2796451"/>
+                  </a:lnTo>
+                  <a:lnTo>
+                    <a:pt x="5156821" y="2767712"/>
+                  </a:lnTo>
+                  <a:lnTo>
+                    <a:pt x="5085199" y="2737771"/>
+                  </a:lnTo>
+                  <a:lnTo>
+                    <a:pt x="5013576" y="2706578"/>
+                  </a:lnTo>
+                  <a:lnTo>
+                    <a:pt x="4941954" y="2674081"/>
+                  </a:lnTo>
+                  <a:lnTo>
+                    <a:pt x="4870331" y="2659095"/>
+                  </a:lnTo>
+                  <a:lnTo>
+                    <a:pt x="4798709" y="2670706"/>
+                  </a:lnTo>
+                  <a:lnTo>
+                    <a:pt x="4727086" y="2682154"/>
+                  </a:lnTo>
+                  <a:lnTo>
+                    <a:pt x="4655464" y="2693441"/>
+                  </a:lnTo>
+                  <a:lnTo>
+                    <a:pt x="4583841" y="2704569"/>
+                  </a:lnTo>
+                  <a:lnTo>
+                    <a:pt x="4512219" y="2715541"/>
+                  </a:lnTo>
+                  <a:lnTo>
+                    <a:pt x="4440596" y="2726357"/>
+                  </a:lnTo>
+                  <a:lnTo>
+                    <a:pt x="4368974" y="2737022"/>
+                  </a:lnTo>
+                  <a:lnTo>
+                    <a:pt x="4297351" y="2747536"/>
+                  </a:lnTo>
+                  <a:lnTo>
+                    <a:pt x="4225729" y="2757903"/>
+                  </a:lnTo>
+                  <a:lnTo>
+                    <a:pt x="4154106" y="2768123"/>
+                  </a:lnTo>
+                  <a:lnTo>
+                    <a:pt x="4082483" y="2778199"/>
+                  </a:lnTo>
+                  <a:lnTo>
+                    <a:pt x="4010861" y="2788134"/>
+                  </a:lnTo>
+                  <a:lnTo>
+                    <a:pt x="3939238" y="2797929"/>
+                  </a:lnTo>
+                  <a:lnTo>
+                    <a:pt x="3867616" y="2807585"/>
+                  </a:lnTo>
+                  <a:lnTo>
+                    <a:pt x="3795993" y="2817106"/>
+                  </a:lnTo>
+                  <a:lnTo>
+                    <a:pt x="3724371" y="2826493"/>
+                  </a:lnTo>
+                  <a:lnTo>
+                    <a:pt x="3652748" y="2835747"/>
+                  </a:lnTo>
+                  <a:lnTo>
+                    <a:pt x="3581126" y="2844872"/>
+                  </a:lnTo>
+                  <a:lnTo>
+                    <a:pt x="3509503" y="2853867"/>
+                  </a:lnTo>
+                  <a:lnTo>
+                    <a:pt x="3437881" y="2862737"/>
+                  </a:lnTo>
+                  <a:lnTo>
+                    <a:pt x="3366258" y="2871481"/>
+                  </a:lnTo>
+                  <a:lnTo>
+                    <a:pt x="3294636" y="2880102"/>
+                  </a:lnTo>
+                  <a:lnTo>
+                    <a:pt x="3223013" y="2888602"/>
+                  </a:lnTo>
+                  <a:lnTo>
+                    <a:pt x="3151391" y="2896982"/>
+                  </a:lnTo>
+                  <a:lnTo>
+                    <a:pt x="3079768" y="2905244"/>
+                  </a:lnTo>
+                  <a:lnTo>
+                    <a:pt x="3008146" y="2913389"/>
+                  </a:lnTo>
+                  <a:lnTo>
+                    <a:pt x="2936523" y="2921420"/>
+                  </a:lnTo>
+                  <a:lnTo>
+                    <a:pt x="2864901" y="2929338"/>
+                  </a:lnTo>
+                  <a:lnTo>
+                    <a:pt x="2793278" y="2937145"/>
+                  </a:lnTo>
+                  <a:lnTo>
+                    <a:pt x="2721655" y="2944841"/>
+                  </a:lnTo>
+                  <a:lnTo>
+                    <a:pt x="2650033" y="2952429"/>
+                  </a:lnTo>
+                  <a:lnTo>
+                    <a:pt x="2578410" y="2959911"/>
+                  </a:lnTo>
+                  <a:lnTo>
+                    <a:pt x="2506788" y="2967287"/>
+                  </a:lnTo>
+                  <a:lnTo>
+                    <a:pt x="2435165" y="2974559"/>
+                  </a:lnTo>
+                  <a:lnTo>
+                    <a:pt x="2363543" y="2981728"/>
+                  </a:lnTo>
+                  <a:lnTo>
+                    <a:pt x="2291920" y="2988797"/>
+                  </a:lnTo>
+                  <a:lnTo>
+                    <a:pt x="2220298" y="2995766"/>
+                  </a:lnTo>
+                  <a:lnTo>
+                    <a:pt x="2148675" y="3002637"/>
+                  </a:lnTo>
+                  <a:lnTo>
+                    <a:pt x="2077053" y="3009412"/>
+                  </a:lnTo>
+                  <a:lnTo>
+                    <a:pt x="2005430" y="3016091"/>
+                  </a:lnTo>
+                  <a:lnTo>
+                    <a:pt x="1933808" y="3022675"/>
+                  </a:lnTo>
+                  <a:lnTo>
+                    <a:pt x="1862185" y="3029168"/>
+                  </a:lnTo>
+                  <a:lnTo>
+                    <a:pt x="1790563" y="3035568"/>
+                  </a:lnTo>
+                  <a:lnTo>
+                    <a:pt x="1718940" y="3041879"/>
+                  </a:lnTo>
+                  <a:lnTo>
+                    <a:pt x="1647318" y="3048101"/>
+                  </a:lnTo>
+                  <a:lnTo>
+                    <a:pt x="1575695" y="3054235"/>
+                  </a:lnTo>
+                  <a:lnTo>
+                    <a:pt x="1504073" y="3060283"/>
+                  </a:lnTo>
+                  <a:lnTo>
+                    <a:pt x="1432450" y="3066245"/>
+                  </a:lnTo>
+                  <a:lnTo>
+                    <a:pt x="1360827" y="3072124"/>
+                  </a:lnTo>
+                  <a:lnTo>
+                    <a:pt x="1289205" y="3077920"/>
+                  </a:lnTo>
+                  <a:lnTo>
+                    <a:pt x="1217582" y="3083634"/>
+                  </a:lnTo>
+                  <a:lnTo>
+                    <a:pt x="1145960" y="3089268"/>
+                  </a:lnTo>
+                  <a:lnTo>
+                    <a:pt x="1074337" y="3094823"/>
+                  </a:lnTo>
+                  <a:lnTo>
+                    <a:pt x="1002715" y="3100299"/>
+                  </a:lnTo>
+                  <a:lnTo>
+                    <a:pt x="931092" y="3105698"/>
+                  </a:lnTo>
+                  <a:lnTo>
+                    <a:pt x="859470" y="3111021"/>
+                  </a:lnTo>
+                  <a:lnTo>
+                    <a:pt x="787847" y="3116270"/>
+                  </a:lnTo>
+                  <a:lnTo>
+                    <a:pt x="716225" y="3121444"/>
+                  </a:lnTo>
+                  <a:lnTo>
+                    <a:pt x="644602" y="3126545"/>
+                  </a:lnTo>
+                  <a:lnTo>
+                    <a:pt x="572980" y="3131575"/>
+                  </a:lnTo>
+                  <a:lnTo>
+                    <a:pt x="501357" y="3136534"/>
+                  </a:lnTo>
+                  <a:lnTo>
+                    <a:pt x="429735" y="3141423"/>
+                  </a:lnTo>
+                  <a:lnTo>
+                    <a:pt x="358112" y="3146243"/>
+                  </a:lnTo>
+                  <a:lnTo>
+                    <a:pt x="286490" y="3150995"/>
+                  </a:lnTo>
+                  <a:lnTo>
+                    <a:pt x="214867" y="3155680"/>
+                  </a:lnTo>
+                  <a:lnTo>
+                    <a:pt x="143245" y="3160300"/>
+                  </a:lnTo>
+                  <a:lnTo>
+                    <a:pt x="71622" y="3164854"/>
+                  </a:lnTo>
+                  <a:lnTo>
+                    <a:pt x="0" y="3169344"/>
                   </a:lnTo>
                   <a:close/>
                 </a:path>
@@ -3522,201 +3534,213 @@
           </p:nvSpPr>
           <p:spPr>
             <a:xfrm>
-              <a:off x="3879745" y="2073503"/>
-              <a:ext cx="4382934" cy="2652663"/>
+              <a:off x="3562988" y="2073503"/>
+              <a:ext cx="4699690" cy="2647317"/>
             </a:xfrm>
             <a:custGeom>
               <a:avLst/>
               <a:pathLst>
-                <a:path w="4382934" h="2652663">
+                <a:path w="4699690" h="2647317">
                   <a:moveTo>
                     <a:pt x="0" y="0"/>
                   </a:moveTo>
                   <a:lnTo>
-                    <a:pt x="13960" y="32291"/>
-                  </a:lnTo>
-                  <a:lnTo>
-                    <a:pt x="85582" y="190376"/>
-                  </a:lnTo>
-                  <a:lnTo>
-                    <a:pt x="157205" y="341221"/>
-                  </a:lnTo>
-                  <a:lnTo>
-                    <a:pt x="228827" y="485156"/>
-                  </a:lnTo>
-                  <a:lnTo>
-                    <a:pt x="300450" y="622499"/>
-                  </a:lnTo>
-                  <a:lnTo>
-                    <a:pt x="372072" y="753551"/>
-                  </a:lnTo>
-                  <a:lnTo>
-                    <a:pt x="443695" y="878601"/>
-                  </a:lnTo>
-                  <a:lnTo>
-                    <a:pt x="515317" y="997923"/>
-                  </a:lnTo>
-                  <a:lnTo>
-                    <a:pt x="586940" y="1111780"/>
-                  </a:lnTo>
-                  <a:lnTo>
-                    <a:pt x="658562" y="1220422"/>
-                  </a:lnTo>
-                  <a:lnTo>
-                    <a:pt x="730185" y="1324088"/>
-                  </a:lnTo>
-                  <a:lnTo>
-                    <a:pt x="801807" y="1423005"/>
-                  </a:lnTo>
-                  <a:lnTo>
-                    <a:pt x="873430" y="1517392"/>
-                  </a:lnTo>
-                  <a:lnTo>
-                    <a:pt x="945052" y="1607456"/>
-                  </a:lnTo>
-                  <a:lnTo>
-                    <a:pt x="1016675" y="1693395"/>
-                  </a:lnTo>
-                  <a:lnTo>
-                    <a:pt x="1088298" y="1775397"/>
-                  </a:lnTo>
-                  <a:lnTo>
-                    <a:pt x="1159920" y="1853644"/>
-                  </a:lnTo>
-                  <a:lnTo>
-                    <a:pt x="1231543" y="1928307"/>
-                  </a:lnTo>
-                  <a:lnTo>
-                    <a:pt x="1303165" y="1999550"/>
-                  </a:lnTo>
-                  <a:lnTo>
-                    <a:pt x="1374788" y="2067529"/>
-                  </a:lnTo>
-                  <a:lnTo>
-                    <a:pt x="1446410" y="2132396"/>
-                  </a:lnTo>
-                  <a:lnTo>
-                    <a:pt x="1518033" y="2194291"/>
-                  </a:lnTo>
-                  <a:lnTo>
-                    <a:pt x="1589655" y="2253351"/>
-                  </a:lnTo>
-                  <a:lnTo>
-                    <a:pt x="1661278" y="2309706"/>
-                  </a:lnTo>
-                  <a:lnTo>
-                    <a:pt x="1732900" y="2363480"/>
-                  </a:lnTo>
-                  <a:lnTo>
-                    <a:pt x="1804523" y="2414791"/>
-                  </a:lnTo>
-                  <a:lnTo>
-                    <a:pt x="1876145" y="2463752"/>
-                  </a:lnTo>
-                  <a:lnTo>
-                    <a:pt x="1947768" y="2510470"/>
-                  </a:lnTo>
-                  <a:lnTo>
-                    <a:pt x="2019390" y="2555049"/>
-                  </a:lnTo>
-                  <a:lnTo>
-                    <a:pt x="2091013" y="2597585"/>
-                  </a:lnTo>
-                  <a:lnTo>
-                    <a:pt x="2162635" y="2638174"/>
-                  </a:lnTo>
-                  <a:lnTo>
-                    <a:pt x="2234258" y="2652663"/>
-                  </a:lnTo>
-                  <a:lnTo>
-                    <a:pt x="2305880" y="2649909"/>
-                  </a:lnTo>
-                  <a:lnTo>
-                    <a:pt x="2377503" y="2647146"/>
-                  </a:lnTo>
-                  <a:lnTo>
-                    <a:pt x="2449125" y="2644374"/>
-                  </a:lnTo>
-                  <a:lnTo>
-                    <a:pt x="2520748" y="2641593"/>
-                  </a:lnTo>
-                  <a:lnTo>
-                    <a:pt x="2592371" y="2638802"/>
-                  </a:lnTo>
-                  <a:lnTo>
-                    <a:pt x="2663993" y="2636002"/>
-                  </a:lnTo>
-                  <a:lnTo>
-                    <a:pt x="2735616" y="2633193"/>
-                  </a:lnTo>
-                  <a:lnTo>
-                    <a:pt x="2807238" y="2630375"/>
-                  </a:lnTo>
-                  <a:lnTo>
-                    <a:pt x="2878861" y="2627547"/>
-                  </a:lnTo>
-                  <a:lnTo>
-                    <a:pt x="2950483" y="2624710"/>
-                  </a:lnTo>
-                  <a:lnTo>
-                    <a:pt x="3022106" y="2621864"/>
-                  </a:lnTo>
-                  <a:lnTo>
-                    <a:pt x="3093728" y="2619008"/>
-                  </a:lnTo>
-                  <a:lnTo>
-                    <a:pt x="3165351" y="2616143"/>
-                  </a:lnTo>
-                  <a:lnTo>
-                    <a:pt x="3236973" y="2613268"/>
-                  </a:lnTo>
-                  <a:lnTo>
-                    <a:pt x="3308596" y="2610383"/>
-                  </a:lnTo>
-                  <a:lnTo>
-                    <a:pt x="3380218" y="2607489"/>
-                  </a:lnTo>
-                  <a:lnTo>
-                    <a:pt x="3451841" y="2604586"/>
-                  </a:lnTo>
-                  <a:lnTo>
-                    <a:pt x="3523463" y="2601673"/>
-                  </a:lnTo>
-                  <a:lnTo>
-                    <a:pt x="3595086" y="2598750"/>
-                  </a:lnTo>
-                  <a:lnTo>
-                    <a:pt x="3666708" y="2595817"/>
-                  </a:lnTo>
-                  <a:lnTo>
-                    <a:pt x="3738331" y="2592875"/>
-                  </a:lnTo>
-                  <a:lnTo>
-                    <a:pt x="3809953" y="2589923"/>
-                  </a:lnTo>
-                  <a:lnTo>
-                    <a:pt x="3881576" y="2586961"/>
-                  </a:lnTo>
-                  <a:lnTo>
-                    <a:pt x="3953199" y="2583990"/>
-                  </a:lnTo>
-                  <a:lnTo>
-                    <a:pt x="4024821" y="2581008"/>
-                  </a:lnTo>
-                  <a:lnTo>
-                    <a:pt x="4096444" y="2578017"/>
-                  </a:lnTo>
-                  <a:lnTo>
-                    <a:pt x="4168066" y="2575016"/>
-                  </a:lnTo>
-                  <a:lnTo>
-                    <a:pt x="4239689" y="2572005"/>
-                  </a:lnTo>
-                  <a:lnTo>
-                    <a:pt x="4311311" y="2568984"/>
-                  </a:lnTo>
-                  <a:lnTo>
-                    <a:pt x="4382934" y="2565953"/>
+                    <a:pt x="44226" y="87687"/>
+                  </a:lnTo>
+                  <a:lnTo>
+                    <a:pt x="115848" y="223993"/>
+                  </a:lnTo>
+                  <a:lnTo>
+                    <a:pt x="187471" y="354829"/>
+                  </a:lnTo>
+                  <a:lnTo>
+                    <a:pt x="259094" y="480413"/>
+                  </a:lnTo>
+                  <a:lnTo>
+                    <a:pt x="330716" y="600956"/>
+                  </a:lnTo>
+                  <a:lnTo>
+                    <a:pt x="402339" y="716662"/>
+                  </a:lnTo>
+                  <a:lnTo>
+                    <a:pt x="473961" y="827723"/>
+                  </a:lnTo>
+                  <a:lnTo>
+                    <a:pt x="545584" y="934327"/>
+                  </a:lnTo>
+                  <a:lnTo>
+                    <a:pt x="617206" y="1036652"/>
+                  </a:lnTo>
+                  <a:lnTo>
+                    <a:pt x="688829" y="1134870"/>
+                  </a:lnTo>
+                  <a:lnTo>
+                    <a:pt x="760451" y="1229146"/>
+                  </a:lnTo>
+                  <a:lnTo>
+                    <a:pt x="832074" y="1319638"/>
+                  </a:lnTo>
+                  <a:lnTo>
+                    <a:pt x="903696" y="1406498"/>
+                  </a:lnTo>
+                  <a:lnTo>
+                    <a:pt x="975319" y="1489871"/>
+                  </a:lnTo>
+                  <a:lnTo>
+                    <a:pt x="1046941" y="1569899"/>
+                  </a:lnTo>
+                  <a:lnTo>
+                    <a:pt x="1118564" y="1646714"/>
+                  </a:lnTo>
+                  <a:lnTo>
+                    <a:pt x="1190186" y="1720446"/>
+                  </a:lnTo>
+                  <a:lnTo>
+                    <a:pt x="1261809" y="1791219"/>
+                  </a:lnTo>
+                  <a:lnTo>
+                    <a:pt x="1333431" y="1859151"/>
+                  </a:lnTo>
+                  <a:lnTo>
+                    <a:pt x="1405054" y="1924357"/>
+                  </a:lnTo>
+                  <a:lnTo>
+                    <a:pt x="1476676" y="1986946"/>
+                  </a:lnTo>
+                  <a:lnTo>
+                    <a:pt x="1548299" y="2047022"/>
+                  </a:lnTo>
+                  <a:lnTo>
+                    <a:pt x="1619922" y="2104687"/>
+                  </a:lnTo>
+                  <a:lnTo>
+                    <a:pt x="1691544" y="2160038"/>
+                  </a:lnTo>
+                  <a:lnTo>
+                    <a:pt x="1763167" y="2213167"/>
+                  </a:lnTo>
+                  <a:lnTo>
+                    <a:pt x="1834789" y="2264164"/>
+                  </a:lnTo>
+                  <a:lnTo>
+                    <a:pt x="1906412" y="2313114"/>
+                  </a:lnTo>
+                  <a:lnTo>
+                    <a:pt x="1978034" y="2360099"/>
+                  </a:lnTo>
+                  <a:lnTo>
+                    <a:pt x="2049657" y="2405198"/>
+                  </a:lnTo>
+                  <a:lnTo>
+                    <a:pt x="2121279" y="2448487"/>
+                  </a:lnTo>
+                  <a:lnTo>
+                    <a:pt x="2192902" y="2490039"/>
+                  </a:lnTo>
+                  <a:lnTo>
+                    <a:pt x="2264524" y="2529923"/>
+                  </a:lnTo>
+                  <a:lnTo>
+                    <a:pt x="2336147" y="2568206"/>
+                  </a:lnTo>
+                  <a:lnTo>
+                    <a:pt x="2407769" y="2604953"/>
+                  </a:lnTo>
+                  <a:lnTo>
+                    <a:pt x="2479392" y="2640225"/>
+                  </a:lnTo>
+                  <a:lnTo>
+                    <a:pt x="2551014" y="2647317"/>
+                  </a:lnTo>
+                  <a:lnTo>
+                    <a:pt x="2622637" y="2635371"/>
+                  </a:lnTo>
+                  <a:lnTo>
+                    <a:pt x="2694259" y="2623255"/>
+                  </a:lnTo>
+                  <a:lnTo>
+                    <a:pt x="2765882" y="2610966"/>
+                  </a:lnTo>
+                  <a:lnTo>
+                    <a:pt x="2837504" y="2598501"/>
+                  </a:lnTo>
+                  <a:lnTo>
+                    <a:pt x="2909127" y="2585858"/>
+                  </a:lnTo>
+                  <a:lnTo>
+                    <a:pt x="2980750" y="2573035"/>
+                  </a:lnTo>
+                  <a:lnTo>
+                    <a:pt x="3052372" y="2560028"/>
+                  </a:lnTo>
+                  <a:lnTo>
+                    <a:pt x="3123995" y="2546836"/>
+                  </a:lnTo>
+                  <a:lnTo>
+                    <a:pt x="3195617" y="2533455"/>
+                  </a:lnTo>
+                  <a:lnTo>
+                    <a:pt x="3267240" y="2519883"/>
+                  </a:lnTo>
+                  <a:lnTo>
+                    <a:pt x="3338862" y="2506118"/>
+                  </a:lnTo>
+                  <a:lnTo>
+                    <a:pt x="3410485" y="2492156"/>
+                  </a:lnTo>
+                  <a:lnTo>
+                    <a:pt x="3482107" y="2477994"/>
+                  </a:lnTo>
+                  <a:lnTo>
+                    <a:pt x="3553730" y="2463630"/>
+                  </a:lnTo>
+                  <a:lnTo>
+                    <a:pt x="3625352" y="2449061"/>
+                  </a:lnTo>
+                  <a:lnTo>
+                    <a:pt x="3696975" y="2434284"/>
+                  </a:lnTo>
+                  <a:lnTo>
+                    <a:pt x="3768597" y="2419296"/>
+                  </a:lnTo>
+                  <a:lnTo>
+                    <a:pt x="3840220" y="2404093"/>
+                  </a:lnTo>
+                  <a:lnTo>
+                    <a:pt x="3911842" y="2388674"/>
+                  </a:lnTo>
+                  <a:lnTo>
+                    <a:pt x="3983465" y="2373035"/>
+                  </a:lnTo>
+                  <a:lnTo>
+                    <a:pt x="4055087" y="2357172"/>
+                  </a:lnTo>
+                  <a:lnTo>
+                    <a:pt x="4126710" y="2341082"/>
+                  </a:lnTo>
+                  <a:lnTo>
+                    <a:pt x="4198332" y="2324763"/>
+                  </a:lnTo>
+                  <a:lnTo>
+                    <a:pt x="4269955" y="2308211"/>
+                  </a:lnTo>
+                  <a:lnTo>
+                    <a:pt x="4341578" y="2291422"/>
+                  </a:lnTo>
+                  <a:lnTo>
+                    <a:pt x="4413200" y="2274394"/>
+                  </a:lnTo>
+                  <a:lnTo>
+                    <a:pt x="4484823" y="2257122"/>
+                  </a:lnTo>
+                  <a:lnTo>
+                    <a:pt x="4556445" y="2239604"/>
+                  </a:lnTo>
+                  <a:lnTo>
+                    <a:pt x="4628068" y="2221835"/>
+                  </a:lnTo>
+                  <a:lnTo>
+                    <a:pt x="4699690" y="2203813"/>
                   </a:lnTo>
                 </a:path>
               </a:pathLst>
@@ -3736,312 +3760,312 @@
           </p:nvSpPr>
           <p:spPr>
             <a:xfrm>
-              <a:off x="1172049" y="4728911"/>
-              <a:ext cx="7090630" cy="630669"/>
+              <a:off x="1172049" y="4732598"/>
+              <a:ext cx="7090630" cy="587738"/>
             </a:xfrm>
             <a:custGeom>
               <a:avLst/>
               <a:pathLst>
-                <a:path w="7090630" h="630669">
+                <a:path w="7090630" h="587738">
                   <a:moveTo>
-                    <a:pt x="7090630" y="630669"/>
+                    <a:pt x="7090630" y="587738"/>
                   </a:moveTo>
                   <a:lnTo>
-                    <a:pt x="7019007" y="621181"/>
-                  </a:lnTo>
-                  <a:lnTo>
-                    <a:pt x="6947385" y="611237"/>
-                  </a:lnTo>
-                  <a:lnTo>
-                    <a:pt x="6875762" y="600816"/>
-                  </a:lnTo>
-                  <a:lnTo>
-                    <a:pt x="6804139" y="589895"/>
-                  </a:lnTo>
-                  <a:lnTo>
-                    <a:pt x="6732517" y="578449"/>
-                  </a:lnTo>
-                  <a:lnTo>
-                    <a:pt x="6660894" y="566454"/>
-                  </a:lnTo>
-                  <a:lnTo>
-                    <a:pt x="6589272" y="553884"/>
-                  </a:lnTo>
-                  <a:lnTo>
-                    <a:pt x="6517649" y="540710"/>
-                  </a:lnTo>
-                  <a:lnTo>
-                    <a:pt x="6446027" y="526903"/>
-                  </a:lnTo>
-                  <a:lnTo>
-                    <a:pt x="6374404" y="512434"/>
-                  </a:lnTo>
-                  <a:lnTo>
-                    <a:pt x="6302782" y="497270"/>
-                  </a:lnTo>
-                  <a:lnTo>
-                    <a:pt x="6231159" y="481379"/>
-                  </a:lnTo>
-                  <a:lnTo>
-                    <a:pt x="6159537" y="464724"/>
-                  </a:lnTo>
-                  <a:lnTo>
-                    <a:pt x="6087914" y="447270"/>
-                  </a:lnTo>
-                  <a:lnTo>
-                    <a:pt x="6016292" y="428979"/>
-                  </a:lnTo>
-                  <a:lnTo>
-                    <a:pt x="5944669" y="409809"/>
-                  </a:lnTo>
-                  <a:lnTo>
-                    <a:pt x="5873047" y="389719"/>
-                  </a:lnTo>
-                  <a:lnTo>
-                    <a:pt x="5801424" y="368665"/>
-                  </a:lnTo>
-                  <a:lnTo>
-                    <a:pt x="5729802" y="346600"/>
-                  </a:lnTo>
-                  <a:lnTo>
-                    <a:pt x="5658179" y="323477"/>
-                  </a:lnTo>
-                  <a:lnTo>
-                    <a:pt x="5586557" y="299243"/>
-                  </a:lnTo>
-                  <a:lnTo>
-                    <a:pt x="5514934" y="273846"/>
-                  </a:lnTo>
-                  <a:lnTo>
-                    <a:pt x="5443311" y="247229"/>
-                  </a:lnTo>
-                  <a:lnTo>
-                    <a:pt x="5371689" y="219336"/>
-                  </a:lnTo>
-                  <a:lnTo>
-                    <a:pt x="5300066" y="190103"/>
-                  </a:lnTo>
-                  <a:lnTo>
-                    <a:pt x="5228444" y="159467"/>
-                  </a:lnTo>
-                  <a:lnTo>
-                    <a:pt x="5156821" y="127360"/>
-                  </a:lnTo>
-                  <a:lnTo>
-                    <a:pt x="5085199" y="93713"/>
-                  </a:lnTo>
-                  <a:lnTo>
-                    <a:pt x="5013576" y="58450"/>
-                  </a:lnTo>
-                  <a:lnTo>
-                    <a:pt x="4941954" y="21495"/>
+                    <a:pt x="7019007" y="577832"/>
+                  </a:lnTo>
+                  <a:lnTo>
+                    <a:pt x="6947385" y="567511"/>
+                  </a:lnTo>
+                  <a:lnTo>
+                    <a:pt x="6875762" y="556759"/>
+                  </a:lnTo>
+                  <a:lnTo>
+                    <a:pt x="6804139" y="545557"/>
+                  </a:lnTo>
+                  <a:lnTo>
+                    <a:pt x="6732517" y="533887"/>
+                  </a:lnTo>
+                  <a:lnTo>
+                    <a:pt x="6660894" y="521728"/>
+                  </a:lnTo>
+                  <a:lnTo>
+                    <a:pt x="6589272" y="509062"/>
+                  </a:lnTo>
+                  <a:lnTo>
+                    <a:pt x="6517649" y="495865"/>
+                  </a:lnTo>
+                  <a:lnTo>
+                    <a:pt x="6446027" y="482117"/>
+                  </a:lnTo>
+                  <a:lnTo>
+                    <a:pt x="6374404" y="467794"/>
+                  </a:lnTo>
+                  <a:lnTo>
+                    <a:pt x="6302782" y="452872"/>
+                  </a:lnTo>
+                  <a:lnTo>
+                    <a:pt x="6231159" y="437326"/>
+                  </a:lnTo>
+                  <a:lnTo>
+                    <a:pt x="6159537" y="421130"/>
+                  </a:lnTo>
+                  <a:lnTo>
+                    <a:pt x="6087914" y="404257"/>
+                  </a:lnTo>
+                  <a:lnTo>
+                    <a:pt x="6016292" y="386678"/>
+                  </a:lnTo>
+                  <a:lnTo>
+                    <a:pt x="5944669" y="368365"/>
+                  </a:lnTo>
+                  <a:lnTo>
+                    <a:pt x="5873047" y="349285"/>
+                  </a:lnTo>
+                  <a:lnTo>
+                    <a:pt x="5801424" y="329408"/>
+                  </a:lnTo>
+                  <a:lnTo>
+                    <a:pt x="5729802" y="308699"/>
+                  </a:lnTo>
+                  <a:lnTo>
+                    <a:pt x="5658179" y="287125"/>
+                  </a:lnTo>
+                  <a:lnTo>
+                    <a:pt x="5586557" y="264648"/>
+                  </a:lnTo>
+                  <a:lnTo>
+                    <a:pt x="5514934" y="241232"/>
+                  </a:lnTo>
+                  <a:lnTo>
+                    <a:pt x="5443311" y="216836"/>
+                  </a:lnTo>
+                  <a:lnTo>
+                    <a:pt x="5371689" y="191420"/>
+                  </a:lnTo>
+                  <a:lnTo>
+                    <a:pt x="5300066" y="164942"/>
+                  </a:lnTo>
+                  <a:lnTo>
+                    <a:pt x="5228444" y="137356"/>
+                  </a:lnTo>
+                  <a:lnTo>
+                    <a:pt x="5156821" y="108617"/>
+                  </a:lnTo>
+                  <a:lnTo>
+                    <a:pt x="5085199" y="78676"/>
+                  </a:lnTo>
+                  <a:lnTo>
+                    <a:pt x="5013576" y="47483"/>
+                  </a:lnTo>
+                  <a:lnTo>
+                    <a:pt x="4941954" y="14986"/>
                   </a:lnTo>
                   <a:lnTo>
                     <a:pt x="4870331" y="0"/>
                   </a:lnTo>
                   <a:lnTo>
-                    <a:pt x="4798709" y="2735"/>
-                  </a:lnTo>
-                  <a:lnTo>
-                    <a:pt x="4727086" y="5462"/>
-                  </a:lnTo>
-                  <a:lnTo>
-                    <a:pt x="4655464" y="8180"/>
-                  </a:lnTo>
-                  <a:lnTo>
-                    <a:pt x="4583841" y="10888"/>
-                  </a:lnTo>
-                  <a:lnTo>
-                    <a:pt x="4512219" y="13588"/>
-                  </a:lnTo>
-                  <a:lnTo>
-                    <a:pt x="4440596" y="16279"/>
-                  </a:lnTo>
-                  <a:lnTo>
-                    <a:pt x="4368974" y="18961"/>
-                  </a:lnTo>
-                  <a:lnTo>
-                    <a:pt x="4297351" y="21634"/>
-                  </a:lnTo>
-                  <a:lnTo>
-                    <a:pt x="4225729" y="24298"/>
-                  </a:lnTo>
-                  <a:lnTo>
-                    <a:pt x="4154106" y="26953"/>
-                  </a:lnTo>
-                  <a:lnTo>
-                    <a:pt x="4082483" y="29600"/>
-                  </a:lnTo>
-                  <a:lnTo>
-                    <a:pt x="4010861" y="32238"/>
-                  </a:lnTo>
-                  <a:lnTo>
-                    <a:pt x="3939238" y="34867"/>
-                  </a:lnTo>
-                  <a:lnTo>
-                    <a:pt x="3867616" y="37488"/>
-                  </a:lnTo>
-                  <a:lnTo>
-                    <a:pt x="3795993" y="40100"/>
-                  </a:lnTo>
-                  <a:lnTo>
-                    <a:pt x="3724371" y="42703"/>
-                  </a:lnTo>
-                  <a:lnTo>
-                    <a:pt x="3652748" y="45298"/>
-                  </a:lnTo>
-                  <a:lnTo>
-                    <a:pt x="3581126" y="47884"/>
-                  </a:lnTo>
-                  <a:lnTo>
-                    <a:pt x="3509503" y="50461"/>
-                  </a:lnTo>
-                  <a:lnTo>
-                    <a:pt x="3437881" y="53030"/>
-                  </a:lnTo>
-                  <a:lnTo>
-                    <a:pt x="3366258" y="55591"/>
-                  </a:lnTo>
-                  <a:lnTo>
-                    <a:pt x="3294636" y="58143"/>
-                  </a:lnTo>
-                  <a:lnTo>
-                    <a:pt x="3223013" y="60687"/>
-                  </a:lnTo>
-                  <a:lnTo>
-                    <a:pt x="3151391" y="63222"/>
-                  </a:lnTo>
-                  <a:lnTo>
-                    <a:pt x="3079768" y="65749"/>
-                  </a:lnTo>
-                  <a:lnTo>
-                    <a:pt x="3008146" y="68267"/>
-                  </a:lnTo>
-                  <a:lnTo>
-                    <a:pt x="2936523" y="70777"/>
-                  </a:lnTo>
-                  <a:lnTo>
-                    <a:pt x="2864901" y="73279"/>
-                  </a:lnTo>
-                  <a:lnTo>
-                    <a:pt x="2793278" y="75773"/>
-                  </a:lnTo>
-                  <a:lnTo>
-                    <a:pt x="2721655" y="78259"/>
-                  </a:lnTo>
-                  <a:lnTo>
-                    <a:pt x="2650033" y="80736"/>
-                  </a:lnTo>
-                  <a:lnTo>
-                    <a:pt x="2578410" y="83205"/>
-                  </a:lnTo>
-                  <a:lnTo>
-                    <a:pt x="2506788" y="85666"/>
-                  </a:lnTo>
-                  <a:lnTo>
-                    <a:pt x="2435165" y="88118"/>
-                  </a:lnTo>
-                  <a:lnTo>
-                    <a:pt x="2363543" y="90563"/>
-                  </a:lnTo>
-                  <a:lnTo>
-                    <a:pt x="2291920" y="93000"/>
-                  </a:lnTo>
-                  <a:lnTo>
-                    <a:pt x="2220298" y="95428"/>
-                  </a:lnTo>
-                  <a:lnTo>
-                    <a:pt x="2148675" y="97849"/>
-                  </a:lnTo>
-                  <a:lnTo>
-                    <a:pt x="2077053" y="100261"/>
-                  </a:lnTo>
-                  <a:lnTo>
-                    <a:pt x="2005430" y="102666"/>
-                  </a:lnTo>
-                  <a:lnTo>
-                    <a:pt x="1933808" y="105063"/>
-                  </a:lnTo>
-                  <a:lnTo>
-                    <a:pt x="1862185" y="107451"/>
-                  </a:lnTo>
-                  <a:lnTo>
-                    <a:pt x="1790563" y="109832"/>
-                  </a:lnTo>
-                  <a:lnTo>
-                    <a:pt x="1718940" y="112205"/>
-                  </a:lnTo>
-                  <a:lnTo>
-                    <a:pt x="1647318" y="114570"/>
-                  </a:lnTo>
-                  <a:lnTo>
-                    <a:pt x="1575695" y="116927"/>
-                  </a:lnTo>
-                  <a:lnTo>
-                    <a:pt x="1504073" y="119277"/>
-                  </a:lnTo>
-                  <a:lnTo>
-                    <a:pt x="1432450" y="121619"/>
-                  </a:lnTo>
-                  <a:lnTo>
-                    <a:pt x="1360827" y="123953"/>
-                  </a:lnTo>
-                  <a:lnTo>
-                    <a:pt x="1289205" y="126279"/>
-                  </a:lnTo>
-                  <a:lnTo>
-                    <a:pt x="1217582" y="128598"/>
-                  </a:lnTo>
-                  <a:lnTo>
-                    <a:pt x="1145960" y="130909"/>
-                  </a:lnTo>
-                  <a:lnTo>
-                    <a:pt x="1074337" y="133212"/>
-                  </a:lnTo>
-                  <a:lnTo>
-                    <a:pt x="1002715" y="135508"/>
-                  </a:lnTo>
-                  <a:lnTo>
-                    <a:pt x="931092" y="137796"/>
-                  </a:lnTo>
-                  <a:lnTo>
-                    <a:pt x="859470" y="140077"/>
-                  </a:lnTo>
-                  <a:lnTo>
-                    <a:pt x="787847" y="142350"/>
-                  </a:lnTo>
-                  <a:lnTo>
-                    <a:pt x="716225" y="144615"/>
-                  </a:lnTo>
-                  <a:lnTo>
-                    <a:pt x="644602" y="146873"/>
-                  </a:lnTo>
-                  <a:lnTo>
-                    <a:pt x="572980" y="149124"/>
-                  </a:lnTo>
-                  <a:lnTo>
-                    <a:pt x="501357" y="151367"/>
-                  </a:lnTo>
-                  <a:lnTo>
-                    <a:pt x="429735" y="153603"/>
-                  </a:lnTo>
-                  <a:lnTo>
-                    <a:pt x="358112" y="155831"/>
-                  </a:lnTo>
-                  <a:lnTo>
-                    <a:pt x="286490" y="158052"/>
-                  </a:lnTo>
-                  <a:lnTo>
-                    <a:pt x="214867" y="160266"/>
-                  </a:lnTo>
-                  <a:lnTo>
-                    <a:pt x="143245" y="162472"/>
-                  </a:lnTo>
-                  <a:lnTo>
-                    <a:pt x="71622" y="164672"/>
-                  </a:lnTo>
-                  <a:lnTo>
-                    <a:pt x="0" y="166863"/>
+                    <a:pt x="4798709" y="11611"/>
+                  </a:lnTo>
+                  <a:lnTo>
+                    <a:pt x="4727086" y="23059"/>
+                  </a:lnTo>
+                  <a:lnTo>
+                    <a:pt x="4655464" y="34346"/>
+                  </a:lnTo>
+                  <a:lnTo>
+                    <a:pt x="4583841" y="45474"/>
+                  </a:lnTo>
+                  <a:lnTo>
+                    <a:pt x="4512219" y="56446"/>
+                  </a:lnTo>
+                  <a:lnTo>
+                    <a:pt x="4440596" y="67262"/>
+                  </a:lnTo>
+                  <a:lnTo>
+                    <a:pt x="4368974" y="77927"/>
+                  </a:lnTo>
+                  <a:lnTo>
+                    <a:pt x="4297351" y="88441"/>
+                  </a:lnTo>
+                  <a:lnTo>
+                    <a:pt x="4225729" y="98808"/>
+                  </a:lnTo>
+                  <a:lnTo>
+                    <a:pt x="4154106" y="109028"/>
+                  </a:lnTo>
+                  <a:lnTo>
+                    <a:pt x="4082483" y="119104"/>
+                  </a:lnTo>
+                  <a:lnTo>
+                    <a:pt x="4010861" y="129039"/>
+                  </a:lnTo>
+                  <a:lnTo>
+                    <a:pt x="3939238" y="138834"/>
+                  </a:lnTo>
+                  <a:lnTo>
+                    <a:pt x="3867616" y="148490"/>
+                  </a:lnTo>
+                  <a:lnTo>
+                    <a:pt x="3795993" y="158011"/>
+                  </a:lnTo>
+                  <a:lnTo>
+                    <a:pt x="3724371" y="167398"/>
+                  </a:lnTo>
+                  <a:lnTo>
+                    <a:pt x="3652748" y="176652"/>
+                  </a:lnTo>
+                  <a:lnTo>
+                    <a:pt x="3581126" y="185777"/>
+                  </a:lnTo>
+                  <a:lnTo>
+                    <a:pt x="3509503" y="194772"/>
+                  </a:lnTo>
+                  <a:lnTo>
+                    <a:pt x="3437881" y="203641"/>
+                  </a:lnTo>
+                  <a:lnTo>
+                    <a:pt x="3366258" y="212386"/>
+                  </a:lnTo>
+                  <a:lnTo>
+                    <a:pt x="3294636" y="221007"/>
+                  </a:lnTo>
+                  <a:lnTo>
+                    <a:pt x="3223013" y="229507"/>
+                  </a:lnTo>
+                  <a:lnTo>
+                    <a:pt x="3151391" y="237887"/>
+                  </a:lnTo>
+                  <a:lnTo>
+                    <a:pt x="3079768" y="246149"/>
+                  </a:lnTo>
+                  <a:lnTo>
+                    <a:pt x="3008146" y="254294"/>
+                  </a:lnTo>
+                  <a:lnTo>
+                    <a:pt x="2936523" y="262325"/>
+                  </a:lnTo>
+                  <a:lnTo>
+                    <a:pt x="2864901" y="270243"/>
+                  </a:lnTo>
+                  <a:lnTo>
+                    <a:pt x="2793278" y="278050"/>
+                  </a:lnTo>
+                  <a:lnTo>
+                    <a:pt x="2721655" y="285746"/>
+                  </a:lnTo>
+                  <a:lnTo>
+                    <a:pt x="2650033" y="293334"/>
+                  </a:lnTo>
+                  <a:lnTo>
+                    <a:pt x="2578410" y="300816"/>
+                  </a:lnTo>
+                  <a:lnTo>
+                    <a:pt x="2506788" y="308191"/>
+                  </a:lnTo>
+                  <a:lnTo>
+                    <a:pt x="2435165" y="315464"/>
+                  </a:lnTo>
+                  <a:lnTo>
+                    <a:pt x="2363543" y="322633"/>
+                  </a:lnTo>
+                  <a:lnTo>
+                    <a:pt x="2291920" y="329702"/>
+                  </a:lnTo>
+                  <a:lnTo>
+                    <a:pt x="2220298" y="336671"/>
+                  </a:lnTo>
+                  <a:lnTo>
+                    <a:pt x="2148675" y="343542"/>
+                  </a:lnTo>
+                  <a:lnTo>
+                    <a:pt x="2077053" y="350317"/>
+                  </a:lnTo>
+                  <a:lnTo>
+                    <a:pt x="2005430" y="356996"/>
+                  </a:lnTo>
+                  <a:lnTo>
+                    <a:pt x="1933808" y="363580"/>
+                  </a:lnTo>
+                  <a:lnTo>
+                    <a:pt x="1862185" y="370073"/>
+                  </a:lnTo>
+                  <a:lnTo>
+                    <a:pt x="1790563" y="376473"/>
+                  </a:lnTo>
+                  <a:lnTo>
+                    <a:pt x="1718940" y="382784"/>
+                  </a:lnTo>
+                  <a:lnTo>
+                    <a:pt x="1647318" y="389006"/>
+                  </a:lnTo>
+                  <a:lnTo>
+                    <a:pt x="1575695" y="395140"/>
+                  </a:lnTo>
+                  <a:lnTo>
+                    <a:pt x="1504073" y="401188"/>
+                  </a:lnTo>
+                  <a:lnTo>
+                    <a:pt x="1432450" y="407150"/>
+                  </a:lnTo>
+                  <a:lnTo>
+                    <a:pt x="1360827" y="413029"/>
+                  </a:lnTo>
+                  <a:lnTo>
+                    <a:pt x="1289205" y="418825"/>
+                  </a:lnTo>
+                  <a:lnTo>
+                    <a:pt x="1217582" y="424539"/>
+                  </a:lnTo>
+                  <a:lnTo>
+                    <a:pt x="1145960" y="430173"/>
+                  </a:lnTo>
+                  <a:lnTo>
+                    <a:pt x="1074337" y="435728"/>
+                  </a:lnTo>
+                  <a:lnTo>
+                    <a:pt x="1002715" y="441204"/>
+                  </a:lnTo>
+                  <a:lnTo>
+                    <a:pt x="931092" y="446603"/>
+                  </a:lnTo>
+                  <a:lnTo>
+                    <a:pt x="859470" y="451926"/>
+                  </a:lnTo>
+                  <a:lnTo>
+                    <a:pt x="787847" y="457174"/>
+                  </a:lnTo>
+                  <a:lnTo>
+                    <a:pt x="716225" y="462349"/>
+                  </a:lnTo>
+                  <a:lnTo>
+                    <a:pt x="644602" y="467450"/>
+                  </a:lnTo>
+                  <a:lnTo>
+                    <a:pt x="572980" y="472480"/>
+                  </a:lnTo>
+                  <a:lnTo>
+                    <a:pt x="501357" y="477439"/>
+                  </a:lnTo>
+                  <a:lnTo>
+                    <a:pt x="429735" y="482328"/>
+                  </a:lnTo>
+                  <a:lnTo>
+                    <a:pt x="358112" y="487148"/>
+                  </a:lnTo>
+                  <a:lnTo>
+                    <a:pt x="286490" y="491900"/>
+                  </a:lnTo>
+                  <a:lnTo>
+                    <a:pt x="214867" y="496585"/>
+                  </a:lnTo>
+                  <a:lnTo>
+                    <a:pt x="143245" y="501205"/>
+                  </a:lnTo>
+                  <a:lnTo>
+                    <a:pt x="71622" y="505759"/>
+                  </a:lnTo>
+                  <a:lnTo>
+                    <a:pt x="0" y="510249"/>
                   </a:lnTo>
                 </a:path>
               </a:pathLst>
@@ -4061,306 +4085,312 @@
           </p:nvSpPr>
           <p:spPr>
             <a:xfrm>
-              <a:off x="1354533" y="2073503"/>
-              <a:ext cx="6908146" cy="3057813"/>
+              <a:off x="1172049" y="3483913"/>
+              <a:ext cx="7090630" cy="1522670"/>
             </a:xfrm>
             <a:custGeom>
               <a:avLst/>
               <a:pathLst>
-                <a:path w="6908146" h="3057813">
+                <a:path w="7090630" h="1522670">
                   <a:moveTo>
                     <a:pt x="0" y="0"/>
                   </a:moveTo>
                   <a:lnTo>
-                    <a:pt x="32383" y="34354"/>
-                  </a:lnTo>
-                  <a:lnTo>
-                    <a:pt x="104006" y="108697"/>
-                  </a:lnTo>
-                  <a:lnTo>
-                    <a:pt x="175628" y="181438"/>
-                  </a:lnTo>
-                  <a:lnTo>
-                    <a:pt x="247251" y="252611"/>
-                  </a:lnTo>
-                  <a:lnTo>
-                    <a:pt x="318873" y="322251"/>
-                  </a:lnTo>
-                  <a:lnTo>
-                    <a:pt x="390496" y="390389"/>
-                  </a:lnTo>
-                  <a:lnTo>
-                    <a:pt x="462118" y="457059"/>
-                  </a:lnTo>
-                  <a:lnTo>
-                    <a:pt x="533741" y="522292"/>
-                  </a:lnTo>
-                  <a:lnTo>
-                    <a:pt x="605363" y="586119"/>
-                  </a:lnTo>
-                  <a:lnTo>
-                    <a:pt x="676986" y="648570"/>
-                  </a:lnTo>
-                  <a:lnTo>
-                    <a:pt x="748608" y="709676"/>
-                  </a:lnTo>
-                  <a:lnTo>
-                    <a:pt x="820231" y="769464"/>
-                  </a:lnTo>
-                  <a:lnTo>
-                    <a:pt x="891853" y="827964"/>
-                  </a:lnTo>
-                  <a:lnTo>
-                    <a:pt x="963476" y="885203"/>
-                  </a:lnTo>
-                  <a:lnTo>
-                    <a:pt x="1035098" y="941208"/>
-                  </a:lnTo>
-                  <a:lnTo>
-                    <a:pt x="1106721" y="996006"/>
-                  </a:lnTo>
-                  <a:lnTo>
-                    <a:pt x="1178344" y="1049624"/>
-                  </a:lnTo>
-                  <a:lnTo>
-                    <a:pt x="1249966" y="1102085"/>
-                  </a:lnTo>
-                  <a:lnTo>
-                    <a:pt x="1321589" y="1153416"/>
-                  </a:lnTo>
-                  <a:lnTo>
-                    <a:pt x="1393211" y="1203641"/>
-                  </a:lnTo>
-                  <a:lnTo>
-                    <a:pt x="1464834" y="1252783"/>
-                  </a:lnTo>
-                  <a:lnTo>
-                    <a:pt x="1536456" y="1300866"/>
-                  </a:lnTo>
-                  <a:lnTo>
-                    <a:pt x="1608079" y="1347913"/>
-                  </a:lnTo>
-                  <a:lnTo>
-                    <a:pt x="1679701" y="1393946"/>
-                  </a:lnTo>
-                  <a:lnTo>
-                    <a:pt x="1751324" y="1438986"/>
-                  </a:lnTo>
-                  <a:lnTo>
-                    <a:pt x="1822946" y="1483056"/>
-                  </a:lnTo>
-                  <a:lnTo>
-                    <a:pt x="1894569" y="1526176"/>
-                  </a:lnTo>
-                  <a:lnTo>
-                    <a:pt x="1966191" y="1568367"/>
-                  </a:lnTo>
-                  <a:lnTo>
-                    <a:pt x="2037814" y="1609648"/>
-                  </a:lnTo>
-                  <a:lnTo>
-                    <a:pt x="2109436" y="1650040"/>
-                  </a:lnTo>
-                  <a:lnTo>
-                    <a:pt x="2181059" y="1689561"/>
-                  </a:lnTo>
-                  <a:lnTo>
-                    <a:pt x="2252681" y="1728230"/>
-                  </a:lnTo>
-                  <a:lnTo>
-                    <a:pt x="2324304" y="1766066"/>
-                  </a:lnTo>
-                  <a:lnTo>
-                    <a:pt x="2395926" y="1803087"/>
-                  </a:lnTo>
-                  <a:lnTo>
-                    <a:pt x="2467549" y="1839309"/>
-                  </a:lnTo>
-                  <a:lnTo>
-                    <a:pt x="2539172" y="1874751"/>
-                  </a:lnTo>
-                  <a:lnTo>
-                    <a:pt x="2610794" y="1909429"/>
-                  </a:lnTo>
-                  <a:lnTo>
-                    <a:pt x="2682417" y="1943360"/>
-                  </a:lnTo>
-                  <a:lnTo>
-                    <a:pt x="2754039" y="1976559"/>
-                  </a:lnTo>
-                  <a:lnTo>
-                    <a:pt x="2825662" y="2009043"/>
-                  </a:lnTo>
-                  <a:lnTo>
-                    <a:pt x="2897284" y="2040827"/>
-                  </a:lnTo>
-                  <a:lnTo>
-                    <a:pt x="2968907" y="2071925"/>
-                  </a:lnTo>
-                  <a:lnTo>
-                    <a:pt x="3040529" y="2102354"/>
-                  </a:lnTo>
-                  <a:lnTo>
-                    <a:pt x="3112152" y="2132126"/>
-                  </a:lnTo>
-                  <a:lnTo>
-                    <a:pt x="3183774" y="2161257"/>
-                  </a:lnTo>
-                  <a:lnTo>
-                    <a:pt x="3255397" y="2189760"/>
-                  </a:lnTo>
-                  <a:lnTo>
-                    <a:pt x="3327019" y="2217649"/>
-                  </a:lnTo>
-                  <a:lnTo>
-                    <a:pt x="3398642" y="2244937"/>
-                  </a:lnTo>
-                  <a:lnTo>
-                    <a:pt x="3470264" y="2271636"/>
-                  </a:lnTo>
-                  <a:lnTo>
-                    <a:pt x="3541887" y="2297760"/>
-                  </a:lnTo>
-                  <a:lnTo>
-                    <a:pt x="3613509" y="2323321"/>
-                  </a:lnTo>
-                  <a:lnTo>
-                    <a:pt x="3685132" y="2348331"/>
-                  </a:lnTo>
-                  <a:lnTo>
-                    <a:pt x="3756754" y="2372803"/>
-                  </a:lnTo>
-                  <a:lnTo>
-                    <a:pt x="3828377" y="2396746"/>
-                  </a:lnTo>
-                  <a:lnTo>
-                    <a:pt x="3900000" y="2420174"/>
-                  </a:lnTo>
-                  <a:lnTo>
-                    <a:pt x="3971622" y="2443097"/>
-                  </a:lnTo>
-                  <a:lnTo>
-                    <a:pt x="4043245" y="2465525"/>
-                  </a:lnTo>
-                  <a:lnTo>
-                    <a:pt x="4114867" y="2487471"/>
-                  </a:lnTo>
-                  <a:lnTo>
-                    <a:pt x="4186490" y="2508943"/>
-                  </a:lnTo>
-                  <a:lnTo>
-                    <a:pt x="4258112" y="2529953"/>
-                  </a:lnTo>
-                  <a:lnTo>
-                    <a:pt x="4329735" y="2550509"/>
-                  </a:lnTo>
-                  <a:lnTo>
-                    <a:pt x="4401357" y="2570623"/>
-                  </a:lnTo>
-                  <a:lnTo>
-                    <a:pt x="4472980" y="2590303"/>
-                  </a:lnTo>
-                  <a:lnTo>
-                    <a:pt x="4544602" y="2609559"/>
-                  </a:lnTo>
-                  <a:lnTo>
-                    <a:pt x="4616225" y="2628400"/>
-                  </a:lnTo>
-                  <a:lnTo>
-                    <a:pt x="4687847" y="2646835"/>
-                  </a:lnTo>
-                  <a:lnTo>
-                    <a:pt x="4759470" y="2664873"/>
-                  </a:lnTo>
-                  <a:lnTo>
-                    <a:pt x="4831092" y="2682522"/>
-                  </a:lnTo>
-                  <a:lnTo>
-                    <a:pt x="4902715" y="2699790"/>
-                  </a:lnTo>
-                  <a:lnTo>
-                    <a:pt x="4974337" y="2716686"/>
-                  </a:lnTo>
-                  <a:lnTo>
-                    <a:pt x="5045960" y="2733218"/>
-                  </a:lnTo>
-                  <a:lnTo>
-                    <a:pt x="5117582" y="2749394"/>
-                  </a:lnTo>
-                  <a:lnTo>
-                    <a:pt x="5189205" y="2765221"/>
-                  </a:lnTo>
-                  <a:lnTo>
-                    <a:pt x="5260828" y="2780707"/>
-                  </a:lnTo>
-                  <a:lnTo>
-                    <a:pt x="5332450" y="2795860"/>
-                  </a:lnTo>
-                  <a:lnTo>
-                    <a:pt x="5404073" y="2810686"/>
-                  </a:lnTo>
-                  <a:lnTo>
-                    <a:pt x="5475695" y="2825192"/>
-                  </a:lnTo>
-                  <a:lnTo>
-                    <a:pt x="5547318" y="2839385"/>
-                  </a:lnTo>
-                  <a:lnTo>
-                    <a:pt x="5618940" y="2853273"/>
-                  </a:lnTo>
-                  <a:lnTo>
-                    <a:pt x="5690563" y="2866861"/>
-                  </a:lnTo>
-                  <a:lnTo>
-                    <a:pt x="5762185" y="2880157"/>
-                  </a:lnTo>
-                  <a:lnTo>
-                    <a:pt x="5833808" y="2893166"/>
-                  </a:lnTo>
-                  <a:lnTo>
-                    <a:pt x="5905430" y="2905894"/>
-                  </a:lnTo>
-                  <a:lnTo>
-                    <a:pt x="5977053" y="2918348"/>
-                  </a:lnTo>
-                  <a:lnTo>
-                    <a:pt x="6048675" y="2930534"/>
-                  </a:lnTo>
-                  <a:lnTo>
-                    <a:pt x="6120298" y="2942457"/>
-                  </a:lnTo>
-                  <a:lnTo>
-                    <a:pt x="6191920" y="2954124"/>
-                  </a:lnTo>
-                  <a:lnTo>
-                    <a:pt x="6263543" y="2965538"/>
-                  </a:lnTo>
-                  <a:lnTo>
-                    <a:pt x="6335165" y="2976707"/>
-                  </a:lnTo>
-                  <a:lnTo>
-                    <a:pt x="6406788" y="2987635"/>
-                  </a:lnTo>
-                  <a:lnTo>
-                    <a:pt x="6478410" y="2998327"/>
-                  </a:lnTo>
-                  <a:lnTo>
-                    <a:pt x="6550033" y="3008790"/>
-                  </a:lnTo>
-                  <a:lnTo>
-                    <a:pt x="6621656" y="3019026"/>
-                  </a:lnTo>
-                  <a:lnTo>
-                    <a:pt x="6693278" y="3029042"/>
-                  </a:lnTo>
-                  <a:lnTo>
-                    <a:pt x="6764901" y="3038842"/>
-                  </a:lnTo>
-                  <a:lnTo>
-                    <a:pt x="6836523" y="3048431"/>
-                  </a:lnTo>
-                  <a:lnTo>
-                    <a:pt x="6908146" y="3057813"/>
+                    <a:pt x="71622" y="27580"/>
+                  </a:lnTo>
+                  <a:lnTo>
+                    <a:pt x="143245" y="54794"/>
+                  </a:lnTo>
+                  <a:lnTo>
+                    <a:pt x="214867" y="81645"/>
+                  </a:lnTo>
+                  <a:lnTo>
+                    <a:pt x="286490" y="108140"/>
+                  </a:lnTo>
+                  <a:lnTo>
+                    <a:pt x="358112" y="134282"/>
+                  </a:lnTo>
+                  <a:lnTo>
+                    <a:pt x="429735" y="160076"/>
+                  </a:lnTo>
+                  <a:lnTo>
+                    <a:pt x="501357" y="185527"/>
+                  </a:lnTo>
+                  <a:lnTo>
+                    <a:pt x="572980" y="210640"/>
+                  </a:lnTo>
+                  <a:lnTo>
+                    <a:pt x="644602" y="235419"/>
+                  </a:lnTo>
+                  <a:lnTo>
+                    <a:pt x="716225" y="259868"/>
+                  </a:lnTo>
+                  <a:lnTo>
+                    <a:pt x="787847" y="283991"/>
+                  </a:lnTo>
+                  <a:lnTo>
+                    <a:pt x="859470" y="307794"/>
+                  </a:lnTo>
+                  <a:lnTo>
+                    <a:pt x="931092" y="331280"/>
+                  </a:lnTo>
+                  <a:lnTo>
+                    <a:pt x="1002715" y="354454"/>
+                  </a:lnTo>
+                  <a:lnTo>
+                    <a:pt x="1074337" y="377319"/>
+                  </a:lnTo>
+                  <a:lnTo>
+                    <a:pt x="1145960" y="399881"/>
+                  </a:lnTo>
+                  <a:lnTo>
+                    <a:pt x="1217582" y="422142"/>
+                  </a:lnTo>
+                  <a:lnTo>
+                    <a:pt x="1289205" y="444107"/>
+                  </a:lnTo>
+                  <a:lnTo>
+                    <a:pt x="1360827" y="465780"/>
+                  </a:lnTo>
+                  <a:lnTo>
+                    <a:pt x="1432450" y="487164"/>
+                  </a:lnTo>
+                  <a:lnTo>
+                    <a:pt x="1504073" y="508264"/>
+                  </a:lnTo>
+                  <a:lnTo>
+                    <a:pt x="1575695" y="529084"/>
+                  </a:lnTo>
+                  <a:lnTo>
+                    <a:pt x="1647318" y="549626"/>
+                  </a:lnTo>
+                  <a:lnTo>
+                    <a:pt x="1718940" y="569895"/>
+                  </a:lnTo>
+                  <a:lnTo>
+                    <a:pt x="1790563" y="589895"/>
+                  </a:lnTo>
+                  <a:lnTo>
+                    <a:pt x="1862185" y="609628"/>
+                  </a:lnTo>
+                  <a:lnTo>
+                    <a:pt x="1933808" y="629099"/>
+                  </a:lnTo>
+                  <a:lnTo>
+                    <a:pt x="2005430" y="648311"/>
+                  </a:lnTo>
+                  <a:lnTo>
+                    <a:pt x="2077053" y="667268"/>
+                  </a:lnTo>
+                  <a:lnTo>
+                    <a:pt x="2148675" y="685972"/>
+                  </a:lnTo>
+                  <a:lnTo>
+                    <a:pt x="2220298" y="704427"/>
+                  </a:lnTo>
+                  <a:lnTo>
+                    <a:pt x="2291920" y="722637"/>
+                  </a:lnTo>
+                  <a:lnTo>
+                    <a:pt x="2363543" y="740605"/>
+                  </a:lnTo>
+                  <a:lnTo>
+                    <a:pt x="2435165" y="758334"/>
+                  </a:lnTo>
+                  <a:lnTo>
+                    <a:pt x="2506788" y="775826"/>
+                  </a:lnTo>
+                  <a:lnTo>
+                    <a:pt x="2578410" y="793087"/>
+                  </a:lnTo>
+                  <a:lnTo>
+                    <a:pt x="2650033" y="810117"/>
+                  </a:lnTo>
+                  <a:lnTo>
+                    <a:pt x="2721655" y="826921"/>
+                  </a:lnTo>
+                  <a:lnTo>
+                    <a:pt x="2793278" y="843502"/>
+                  </a:lnTo>
+                  <a:lnTo>
+                    <a:pt x="2864901" y="859861"/>
+                  </a:lnTo>
+                  <a:lnTo>
+                    <a:pt x="2936523" y="876004"/>
+                  </a:lnTo>
+                  <a:lnTo>
+                    <a:pt x="3008146" y="891931"/>
+                  </a:lnTo>
+                  <a:lnTo>
+                    <a:pt x="3079768" y="907647"/>
+                  </a:lnTo>
+                  <a:lnTo>
+                    <a:pt x="3151391" y="923153"/>
+                  </a:lnTo>
+                  <a:lnTo>
+                    <a:pt x="3223013" y="938454"/>
+                  </a:lnTo>
+                  <a:lnTo>
+                    <a:pt x="3294636" y="953551"/>
+                  </a:lnTo>
+                  <a:lnTo>
+                    <a:pt x="3366258" y="968447"/>
+                  </a:lnTo>
+                  <a:lnTo>
+                    <a:pt x="3437881" y="983144"/>
+                  </a:lnTo>
+                  <a:lnTo>
+                    <a:pt x="3509503" y="997647"/>
+                  </a:lnTo>
+                  <a:lnTo>
+                    <a:pt x="3581126" y="1011956"/>
+                  </a:lnTo>
+                  <a:lnTo>
+                    <a:pt x="3652748" y="1026075"/>
+                  </a:lnTo>
+                  <a:lnTo>
+                    <a:pt x="3724371" y="1040006"/>
+                  </a:lnTo>
+                  <a:lnTo>
+                    <a:pt x="3795993" y="1053752"/>
+                  </a:lnTo>
+                  <a:lnTo>
+                    <a:pt x="3867616" y="1067315"/>
+                  </a:lnTo>
+                  <a:lnTo>
+                    <a:pt x="3939238" y="1080698"/>
+                  </a:lnTo>
+                  <a:lnTo>
+                    <a:pt x="4010861" y="1093902"/>
+                  </a:lnTo>
+                  <a:lnTo>
+                    <a:pt x="4082483" y="1106931"/>
+                  </a:lnTo>
+                  <a:lnTo>
+                    <a:pt x="4154106" y="1119787"/>
+                  </a:lnTo>
+                  <a:lnTo>
+                    <a:pt x="4225729" y="1132471"/>
+                  </a:lnTo>
+                  <a:lnTo>
+                    <a:pt x="4297351" y="1144987"/>
+                  </a:lnTo>
+                  <a:lnTo>
+                    <a:pt x="4368974" y="1157337"/>
+                  </a:lnTo>
+                  <a:lnTo>
+                    <a:pt x="4440596" y="1169522"/>
+                  </a:lnTo>
+                  <a:lnTo>
+                    <a:pt x="4512219" y="1181545"/>
+                  </a:lnTo>
+                  <a:lnTo>
+                    <a:pt x="4583841" y="1193408"/>
+                  </a:lnTo>
+                  <a:lnTo>
+                    <a:pt x="4655464" y="1205113"/>
+                  </a:lnTo>
+                  <a:lnTo>
+                    <a:pt x="4727086" y="1216663"/>
+                  </a:lnTo>
+                  <a:lnTo>
+                    <a:pt x="4798709" y="1228059"/>
+                  </a:lnTo>
+                  <a:lnTo>
+                    <a:pt x="4870331" y="1239303"/>
+                  </a:lnTo>
+                  <a:lnTo>
+                    <a:pt x="4941954" y="1250398"/>
+                  </a:lnTo>
+                  <a:lnTo>
+                    <a:pt x="5013576" y="1261345"/>
+                  </a:lnTo>
+                  <a:lnTo>
+                    <a:pt x="5085199" y="1272146"/>
+                  </a:lnTo>
+                  <a:lnTo>
+                    <a:pt x="5156821" y="1282804"/>
+                  </a:lnTo>
+                  <a:lnTo>
+                    <a:pt x="5228444" y="1293320"/>
+                  </a:lnTo>
+                  <a:lnTo>
+                    <a:pt x="5300066" y="1303696"/>
+                  </a:lnTo>
+                  <a:lnTo>
+                    <a:pt x="5371689" y="1313935"/>
+                  </a:lnTo>
+                  <a:lnTo>
+                    <a:pt x="5443311" y="1324036"/>
+                  </a:lnTo>
+                  <a:lnTo>
+                    <a:pt x="5514934" y="1334004"/>
+                  </a:lnTo>
+                  <a:lnTo>
+                    <a:pt x="5586557" y="1343839"/>
+                  </a:lnTo>
+                  <a:lnTo>
+                    <a:pt x="5658179" y="1353543"/>
+                  </a:lnTo>
+                  <a:lnTo>
+                    <a:pt x="5729802" y="1363118"/>
+                  </a:lnTo>
+                  <a:lnTo>
+                    <a:pt x="5801424" y="1372566"/>
+                  </a:lnTo>
+                  <a:lnTo>
+                    <a:pt x="5873047" y="1381888"/>
+                  </a:lnTo>
+                  <a:lnTo>
+                    <a:pt x="5944669" y="1391086"/>
+                  </a:lnTo>
+                  <a:lnTo>
+                    <a:pt x="6016292" y="1400162"/>
+                  </a:lnTo>
+                  <a:lnTo>
+                    <a:pt x="6087914" y="1409116"/>
+                  </a:lnTo>
+                  <a:lnTo>
+                    <a:pt x="6159537" y="1417952"/>
+                  </a:lnTo>
+                  <a:lnTo>
+                    <a:pt x="6231159" y="1426671"/>
+                  </a:lnTo>
+                  <a:lnTo>
+                    <a:pt x="6302782" y="1435273"/>
+                  </a:lnTo>
+                  <a:lnTo>
+                    <a:pt x="6374404" y="1443761"/>
+                  </a:lnTo>
+                  <a:lnTo>
+                    <a:pt x="6446027" y="1452136"/>
+                  </a:lnTo>
+                  <a:lnTo>
+                    <a:pt x="6517649" y="1460399"/>
+                  </a:lnTo>
+                  <a:lnTo>
+                    <a:pt x="6589272" y="1468553"/>
+                  </a:lnTo>
+                  <a:lnTo>
+                    <a:pt x="6660894" y="1476598"/>
+                  </a:lnTo>
+                  <a:lnTo>
+                    <a:pt x="6732517" y="1484536"/>
+                  </a:lnTo>
+                  <a:lnTo>
+                    <a:pt x="6804139" y="1492368"/>
+                  </a:lnTo>
+                  <a:lnTo>
+                    <a:pt x="6875762" y="1500097"/>
+                  </a:lnTo>
+                  <a:lnTo>
+                    <a:pt x="6947385" y="1507722"/>
+                  </a:lnTo>
+                  <a:lnTo>
+                    <a:pt x="7019007" y="1515246"/>
+                  </a:lnTo>
+                  <a:lnTo>
+                    <a:pt x="7090630" y="1522670"/>
                   </a:lnTo>
                 </a:path>
               </a:pathLst>
@@ -5100,7 +5130,7 @@
                   <a:latin typeface="Helvetica"/>
                   <a:cs typeface="Helvetica"/>
                 </a:rPr>
-                <a:t>subHR per 1 mL/min: 0.97 (0.94-1.00)  |  per IQR (Δ = 18.2): 0.60 (0.33-1.08)  |  IQR: [-11.5, 6.7]</a:t>
+                <a:t>subHR per 1 mL/min: 0.98 (0.95-1.02)  |  per IQR (Δ = 18.2): 0.73 (0.38-1.40)  |  IQR: [-11.5, 6.7]</a:t>
               </a:r>
             </a:p>
           </p:txBody>

--- a/docs/plots/carbo/jx_carbo_linsubhr_egfrdisc_aki2.pptx
+++ b/docs/plots/carbo/jx_carbo_linsubhr_egfrdisc_aki2.pptx
@@ -3403,7 +3403,7 @@
                     <a:pt x="2578410" y="2959911"/>
                   </a:lnTo>
                   <a:lnTo>
-                    <a:pt x="2506788" y="2967287"/>
+                    <a:pt x="2506788" y="2967286"/>
                   </a:lnTo>
                   <a:lnTo>
                     <a:pt x="2435165" y="2974559"/>
@@ -3475,7 +3475,7 @@
                     <a:pt x="859470" y="3111021"/>
                   </a:lnTo>
                   <a:lnTo>
-                    <a:pt x="787847" y="3116270"/>
+                    <a:pt x="787847" y="3116269"/>
                   </a:lnTo>
                   <a:lnTo>
                     <a:pt x="716225" y="3121444"/>
@@ -3548,7 +3548,7 @@
                     <a:pt x="44226" y="87687"/>
                   </a:lnTo>
                   <a:lnTo>
-                    <a:pt x="115848" y="223993"/>
+                    <a:pt x="115849" y="223993"/>
                   </a:lnTo>
                   <a:lnTo>
                     <a:pt x="187471" y="354829"/>
@@ -3605,7 +3605,7 @@
                     <a:pt x="1405054" y="1924357"/>
                   </a:lnTo>
                   <a:lnTo>
-                    <a:pt x="1476676" y="1986946"/>
+                    <a:pt x="1476677" y="1986946"/>
                   </a:lnTo>
                   <a:lnTo>
                     <a:pt x="1548299" y="2047022"/>
@@ -3930,7 +3930,7 @@
                     <a:pt x="3294636" y="221007"/>
                   </a:lnTo>
                   <a:lnTo>
-                    <a:pt x="3223013" y="229507"/>
+                    <a:pt x="3223013" y="229506"/>
                   </a:lnTo>
                   <a:lnTo>
                     <a:pt x="3151391" y="237887"/>
@@ -3957,7 +3957,7 @@
                     <a:pt x="2650033" y="293334"/>
                   </a:lnTo>
                   <a:lnTo>
-                    <a:pt x="2578410" y="300816"/>
+                    <a:pt x="2578410" y="300815"/>
                   </a:lnTo>
                   <a:lnTo>
                     <a:pt x="2506788" y="308191"/>
@@ -3981,7 +3981,7 @@
                     <a:pt x="2077053" y="350317"/>
                   </a:lnTo>
                   <a:lnTo>
-                    <a:pt x="2005430" y="356996"/>
+                    <a:pt x="2005430" y="356995"/>
                   </a:lnTo>
                   <a:lnTo>
                     <a:pt x="1933808" y="363580"/>
@@ -4225,7 +4225,7 @@
                     <a:pt x="3079768" y="907647"/>
                   </a:lnTo>
                   <a:lnTo>
-                    <a:pt x="3151391" y="923153"/>
+                    <a:pt x="3151391" y="923154"/>
                   </a:lnTo>
                   <a:lnTo>
                     <a:pt x="3223013" y="938454"/>
@@ -4270,7 +4270,7 @@
                     <a:pt x="4154106" y="1119787"/>
                   </a:lnTo>
                   <a:lnTo>
-                    <a:pt x="4225729" y="1132471"/>
+                    <a:pt x="4225729" y="1132472"/>
                   </a:lnTo>
                   <a:lnTo>
                     <a:pt x="4297351" y="1144987"/>
@@ -4321,7 +4321,7 @@
                     <a:pt x="5371689" y="1313935"/>
                   </a:lnTo>
                   <a:lnTo>
-                    <a:pt x="5443311" y="1324036"/>
+                    <a:pt x="5443311" y="1324037"/>
                   </a:lnTo>
                   <a:lnTo>
                     <a:pt x="5514934" y="1334004"/>
@@ -4348,7 +4348,7 @@
                     <a:pt x="6016292" y="1400162"/>
                   </a:lnTo>
                   <a:lnTo>
-                    <a:pt x="6087914" y="1409116"/>
+                    <a:pt x="6087914" y="1409117"/>
                   </a:lnTo>
                   <a:lnTo>
                     <a:pt x="6159537" y="1417952"/>
@@ -4378,7 +4378,7 @@
                     <a:pt x="6732517" y="1484536"/>
                   </a:lnTo>
                   <a:lnTo>
-                    <a:pt x="6804139" y="1492368"/>
+                    <a:pt x="6804139" y="1492369"/>
                   </a:lnTo>
                   <a:lnTo>
                     <a:pt x="6875762" y="1500097"/>

--- a/docs/plots/carbo/jx_carbo_linsubhr_egfrdisc_aki2.pptx
+++ b/docs/plots/carbo/jx_carbo_linsubhr_egfrdisc_aki2.pptx
@@ -5098,7 +5098,7 @@
           <p:spPr>
             <a:xfrm>
               <a:off x="817517" y="1896563"/>
-              <a:ext cx="4869911" cy="82021"/>
+              <a:ext cx="5413065" cy="82021"/>
             </a:xfrm>
             <a:prstGeom prst="rect">
               <a:avLst/>
@@ -5130,7 +5130,7 @@
                   <a:latin typeface="Helvetica"/>
                   <a:cs typeface="Helvetica"/>
                 </a:rPr>
-                <a:t>subHR per 1 mL/min: 0.98 (0.95-1.02)  |  per IQR (Δ = 18.2): 0.73 (0.38-1.40)  |  IQR: [-11.5, 6.7]</a:t>
+                <a:t>subHR per 1 mL/min: 0.98 (0.95-1.02), p = 0.341  |  per IQR (Δ = 18.2): 0.73 (0.38-1.40)  |  IQR: [-11.5, 6.7]</a:t>
               </a:r>
             </a:p>
           </p:txBody>

--- a/docs/plots/carbo/jx_carbo_linsubhr_egfrdisc_aki2.pptx
+++ b/docs/plots/carbo/jx_carbo_linsubhr_egfrdisc_aki2.pptx
@@ -2271,26 +2271,26 @@
           </p:nvSpPr>
           <p:spPr>
             <a:xfrm>
-              <a:off x="817517" y="5142518"/>
-              <a:ext cx="7799693" cy="0"/>
+              <a:off x="915645" y="5071743"/>
+              <a:ext cx="7682587" cy="0"/>
             </a:xfrm>
             <a:custGeom>
               <a:avLst/>
               <a:pathLst>
-                <a:path w="7799693" h="0">
+                <a:path w="7682587" h="0">
                   <a:moveTo>
                     <a:pt x="0" y="0"/>
                   </a:moveTo>
                   <a:lnTo>
-                    <a:pt x="7799693" y="0"/>
-                  </a:lnTo>
-                  <a:lnTo>
-                    <a:pt x="7799693" y="0"/>
+                    <a:pt x="7682587" y="0"/>
+                  </a:lnTo>
+                  <a:lnTo>
+                    <a:pt x="7682587" y="0"/>
                   </a:lnTo>
                 </a:path>
               </a:pathLst>
             </a:custGeom>
-            <a:ln w="6775" cap="flat">
+            <a:ln w="8623" cap="flat">
               <a:solidFill>
                 <a:srgbClr val="EBEBEB">
                   <a:alpha val="100000"/>
@@ -2314,26 +2314,26 @@
           </p:nvSpPr>
           <p:spPr>
             <a:xfrm>
-              <a:off x="817517" y="4313054"/>
-              <a:ext cx="7799693" cy="0"/>
+              <a:off x="915645" y="4298074"/>
+              <a:ext cx="7682587" cy="0"/>
             </a:xfrm>
             <a:custGeom>
               <a:avLst/>
               <a:pathLst>
-                <a:path w="7799693" h="0">
+                <a:path w="7682587" h="0">
                   <a:moveTo>
                     <a:pt x="0" y="0"/>
                   </a:moveTo>
                   <a:lnTo>
-                    <a:pt x="7799693" y="0"/>
-                  </a:lnTo>
-                  <a:lnTo>
-                    <a:pt x="7799693" y="0"/>
+                    <a:pt x="7682587" y="0"/>
+                  </a:lnTo>
+                  <a:lnTo>
+                    <a:pt x="7682587" y="0"/>
                   </a:lnTo>
                 </a:path>
               </a:pathLst>
             </a:custGeom>
-            <a:ln w="6775" cap="flat">
+            <a:ln w="8623" cap="flat">
               <a:solidFill>
                 <a:srgbClr val="EBEBEB">
                   <a:alpha val="100000"/>
@@ -2357,26 +2357,26 @@
           </p:nvSpPr>
           <p:spPr>
             <a:xfrm>
-              <a:off x="817517" y="3483591"/>
-              <a:ext cx="7799693" cy="0"/>
+              <a:off x="915645" y="3524405"/>
+              <a:ext cx="7682587" cy="0"/>
             </a:xfrm>
             <a:custGeom>
               <a:avLst/>
               <a:pathLst>
-                <a:path w="7799693" h="0">
+                <a:path w="7682587" h="0">
                   <a:moveTo>
                     <a:pt x="0" y="0"/>
                   </a:moveTo>
                   <a:lnTo>
-                    <a:pt x="7799693" y="0"/>
-                  </a:lnTo>
-                  <a:lnTo>
-                    <a:pt x="7799693" y="0"/>
+                    <a:pt x="7682587" y="0"/>
+                  </a:lnTo>
+                  <a:lnTo>
+                    <a:pt x="7682587" y="0"/>
                   </a:lnTo>
                 </a:path>
               </a:pathLst>
             </a:custGeom>
-            <a:ln w="6775" cap="flat">
+            <a:ln w="8623" cap="flat">
               <a:solidFill>
                 <a:srgbClr val="EBEBEB">
                   <a:alpha val="100000"/>
@@ -2400,26 +2400,26 @@
           </p:nvSpPr>
           <p:spPr>
             <a:xfrm>
-              <a:off x="817517" y="2654127"/>
-              <a:ext cx="7799693" cy="0"/>
+              <a:off x="915645" y="2750737"/>
+              <a:ext cx="7682587" cy="0"/>
             </a:xfrm>
             <a:custGeom>
               <a:avLst/>
               <a:pathLst>
-                <a:path w="7799693" h="0">
+                <a:path w="7682587" h="0">
                   <a:moveTo>
                     <a:pt x="0" y="0"/>
                   </a:moveTo>
                   <a:lnTo>
-                    <a:pt x="7799693" y="0"/>
-                  </a:lnTo>
-                  <a:lnTo>
-                    <a:pt x="7799693" y="0"/>
+                    <a:pt x="7682587" y="0"/>
+                  </a:lnTo>
+                  <a:lnTo>
+                    <a:pt x="7682587" y="0"/>
                   </a:lnTo>
                 </a:path>
               </a:pathLst>
             </a:custGeom>
-            <a:ln w="6775" cap="flat">
+            <a:ln w="8623" cap="flat">
               <a:solidFill>
                 <a:srgbClr val="EBEBEB">
                   <a:alpha val="100000"/>
@@ -2443,15 +2443,15 @@
           </p:nvSpPr>
           <p:spPr>
             <a:xfrm>
-              <a:off x="1487487" y="2073503"/>
-              <a:ext cx="0" cy="3649639"/>
+              <a:off x="1575555" y="2209169"/>
+              <a:ext cx="0" cy="3404141"/>
             </a:xfrm>
             <a:custGeom>
               <a:avLst/>
               <a:pathLst>
-                <a:path w="0" h="3649639">
+                <a:path w="0" h="3404141">
                   <a:moveTo>
-                    <a:pt x="0" y="3649639"/>
+                    <a:pt x="0" y="3404141"/>
                   </a:moveTo>
                   <a:lnTo>
                     <a:pt x="0" y="0"/>
@@ -2462,7 +2462,7 @@
                 </a:path>
               </a:pathLst>
             </a:custGeom>
-            <a:ln w="6775" cap="flat">
+            <a:ln w="8623" cap="flat">
               <a:solidFill>
                 <a:srgbClr val="EBEBEB">
                   <a:alpha val="100000"/>
@@ -2486,15 +2486,15 @@
           </p:nvSpPr>
           <p:spPr>
             <a:xfrm>
-              <a:off x="3337360" y="2073503"/>
-              <a:ext cx="0" cy="3649639"/>
+              <a:off x="3397654" y="2209169"/>
+              <a:ext cx="0" cy="3404141"/>
             </a:xfrm>
             <a:custGeom>
               <a:avLst/>
               <a:pathLst>
-                <a:path w="0" h="3649639">
+                <a:path w="0" h="3404141">
                   <a:moveTo>
-                    <a:pt x="0" y="3649639"/>
+                    <a:pt x="0" y="3404141"/>
                   </a:moveTo>
                   <a:lnTo>
                     <a:pt x="0" y="0"/>
@@ -2505,7 +2505,7 @@
                 </a:path>
               </a:pathLst>
             </a:custGeom>
-            <a:ln w="6775" cap="flat">
+            <a:ln w="8623" cap="flat">
               <a:solidFill>
                 <a:srgbClr val="EBEBEB">
                   <a:alpha val="100000"/>
@@ -2529,15 +2529,15 @@
           </p:nvSpPr>
           <p:spPr>
             <a:xfrm>
-              <a:off x="5187233" y="2073503"/>
-              <a:ext cx="0" cy="3649639"/>
+              <a:off x="5219752" y="2209169"/>
+              <a:ext cx="0" cy="3404141"/>
             </a:xfrm>
             <a:custGeom>
               <a:avLst/>
               <a:pathLst>
-                <a:path w="0" h="3649639">
+                <a:path w="0" h="3404141">
                   <a:moveTo>
-                    <a:pt x="0" y="3649639"/>
+                    <a:pt x="0" y="3404141"/>
                   </a:moveTo>
                   <a:lnTo>
                     <a:pt x="0" y="0"/>
@@ -2548,7 +2548,7 @@
                 </a:path>
               </a:pathLst>
             </a:custGeom>
-            <a:ln w="6775" cap="flat">
+            <a:ln w="8623" cap="flat">
               <a:solidFill>
                 <a:srgbClr val="EBEBEB">
                   <a:alpha val="100000"/>
@@ -2572,15 +2572,15 @@
           </p:nvSpPr>
           <p:spPr>
             <a:xfrm>
-              <a:off x="7037106" y="2073503"/>
-              <a:ext cx="0" cy="3649639"/>
+              <a:off x="7041851" y="2209169"/>
+              <a:ext cx="0" cy="3404141"/>
             </a:xfrm>
             <a:custGeom>
               <a:avLst/>
               <a:pathLst>
-                <a:path w="0" h="3649639">
+                <a:path w="0" h="3404141">
                   <a:moveTo>
-                    <a:pt x="0" y="3649639"/>
+                    <a:pt x="0" y="3404141"/>
                   </a:moveTo>
                   <a:lnTo>
                     <a:pt x="0" y="0"/>
@@ -2591,7 +2591,7 @@
                 </a:path>
               </a:pathLst>
             </a:custGeom>
-            <a:ln w="6775" cap="flat">
+            <a:ln w="8623" cap="flat">
               <a:solidFill>
                 <a:srgbClr val="EBEBEB">
                   <a:alpha val="100000"/>
@@ -2615,26 +2615,26 @@
           </p:nvSpPr>
           <p:spPr>
             <a:xfrm>
-              <a:off x="817517" y="5557249"/>
-              <a:ext cx="7799693" cy="0"/>
+              <a:off x="915645" y="5458577"/>
+              <a:ext cx="7682587" cy="0"/>
             </a:xfrm>
             <a:custGeom>
               <a:avLst/>
               <a:pathLst>
-                <a:path w="7799693" h="0">
+                <a:path w="7682587" h="0">
                   <a:moveTo>
                     <a:pt x="0" y="0"/>
                   </a:moveTo>
                   <a:lnTo>
-                    <a:pt x="7799693" y="0"/>
-                  </a:lnTo>
-                  <a:lnTo>
-                    <a:pt x="7799693" y="0"/>
+                    <a:pt x="7682587" y="0"/>
+                  </a:lnTo>
+                  <a:lnTo>
+                    <a:pt x="7682587" y="0"/>
                   </a:lnTo>
                 </a:path>
               </a:pathLst>
             </a:custGeom>
-            <a:ln w="13550" cap="flat">
+            <a:ln w="17246" cap="flat">
               <a:solidFill>
                 <a:srgbClr val="EBEBEB">
                   <a:alpha val="100000"/>
@@ -2658,26 +2658,26 @@
           </p:nvSpPr>
           <p:spPr>
             <a:xfrm>
-              <a:off x="817517" y="4727786"/>
-              <a:ext cx="7799693" cy="0"/>
+              <a:off x="915645" y="4684908"/>
+              <a:ext cx="7682587" cy="0"/>
             </a:xfrm>
             <a:custGeom>
               <a:avLst/>
               <a:pathLst>
-                <a:path w="7799693" h="0">
+                <a:path w="7682587" h="0">
                   <a:moveTo>
                     <a:pt x="0" y="0"/>
                   </a:moveTo>
                   <a:lnTo>
-                    <a:pt x="7799693" y="0"/>
-                  </a:lnTo>
-                  <a:lnTo>
-                    <a:pt x="7799693" y="0"/>
+                    <a:pt x="7682587" y="0"/>
+                  </a:lnTo>
+                  <a:lnTo>
+                    <a:pt x="7682587" y="0"/>
                   </a:lnTo>
                 </a:path>
               </a:pathLst>
             </a:custGeom>
-            <a:ln w="13550" cap="flat">
+            <a:ln w="17246" cap="flat">
               <a:solidFill>
                 <a:srgbClr val="EBEBEB">
                   <a:alpha val="100000"/>
@@ -2701,26 +2701,26 @@
           </p:nvSpPr>
           <p:spPr>
             <a:xfrm>
-              <a:off x="817517" y="3898322"/>
-              <a:ext cx="7799693" cy="0"/>
+              <a:off x="915645" y="3911240"/>
+              <a:ext cx="7682587" cy="0"/>
             </a:xfrm>
             <a:custGeom>
               <a:avLst/>
               <a:pathLst>
-                <a:path w="7799693" h="0">
+                <a:path w="7682587" h="0">
                   <a:moveTo>
                     <a:pt x="0" y="0"/>
                   </a:moveTo>
                   <a:lnTo>
-                    <a:pt x="7799693" y="0"/>
-                  </a:lnTo>
-                  <a:lnTo>
-                    <a:pt x="7799693" y="0"/>
+                    <a:pt x="7682587" y="0"/>
+                  </a:lnTo>
+                  <a:lnTo>
+                    <a:pt x="7682587" y="0"/>
                   </a:lnTo>
                 </a:path>
               </a:pathLst>
             </a:custGeom>
-            <a:ln w="13550" cap="flat">
+            <a:ln w="17246" cap="flat">
               <a:solidFill>
                 <a:srgbClr val="EBEBEB">
                   <a:alpha val="100000"/>
@@ -2744,26 +2744,26 @@
           </p:nvSpPr>
           <p:spPr>
             <a:xfrm>
-              <a:off x="817517" y="3068859"/>
-              <a:ext cx="7799693" cy="0"/>
+              <a:off x="915645" y="3137571"/>
+              <a:ext cx="7682587" cy="0"/>
             </a:xfrm>
             <a:custGeom>
               <a:avLst/>
               <a:pathLst>
-                <a:path w="7799693" h="0">
+                <a:path w="7682587" h="0">
                   <a:moveTo>
                     <a:pt x="0" y="0"/>
                   </a:moveTo>
                   <a:lnTo>
-                    <a:pt x="7799693" y="0"/>
-                  </a:lnTo>
-                  <a:lnTo>
-                    <a:pt x="7799693" y="0"/>
+                    <a:pt x="7682587" y="0"/>
+                  </a:lnTo>
+                  <a:lnTo>
+                    <a:pt x="7682587" y="0"/>
                   </a:lnTo>
                 </a:path>
               </a:pathLst>
             </a:custGeom>
-            <a:ln w="13550" cap="flat">
+            <a:ln w="17246" cap="flat">
               <a:solidFill>
                 <a:srgbClr val="EBEBEB">
                   <a:alpha val="100000"/>
@@ -2787,26 +2787,26 @@
           </p:nvSpPr>
           <p:spPr>
             <a:xfrm>
-              <a:off x="817517" y="2239395"/>
-              <a:ext cx="7799693" cy="0"/>
+              <a:off x="915645" y="2363903"/>
+              <a:ext cx="7682587" cy="0"/>
             </a:xfrm>
             <a:custGeom>
               <a:avLst/>
               <a:pathLst>
-                <a:path w="7799693" h="0">
+                <a:path w="7682587" h="0">
                   <a:moveTo>
                     <a:pt x="0" y="0"/>
                   </a:moveTo>
                   <a:lnTo>
-                    <a:pt x="7799693" y="0"/>
-                  </a:lnTo>
-                  <a:lnTo>
-                    <a:pt x="7799693" y="0"/>
+                    <a:pt x="7682587" y="0"/>
+                  </a:lnTo>
+                  <a:lnTo>
+                    <a:pt x="7682587" y="0"/>
                   </a:lnTo>
                 </a:path>
               </a:pathLst>
             </a:custGeom>
-            <a:ln w="13550" cap="flat">
+            <a:ln w="17246" cap="flat">
               <a:solidFill>
                 <a:srgbClr val="EBEBEB">
                   <a:alpha val="100000"/>
@@ -2830,15 +2830,15 @@
           </p:nvSpPr>
           <p:spPr>
             <a:xfrm>
-              <a:off x="2412424" y="2073503"/>
-              <a:ext cx="0" cy="3649639"/>
+              <a:off x="2486605" y="2209169"/>
+              <a:ext cx="0" cy="3404141"/>
             </a:xfrm>
             <a:custGeom>
               <a:avLst/>
               <a:pathLst>
-                <a:path w="0" h="3649639">
+                <a:path w="0" h="3404141">
                   <a:moveTo>
-                    <a:pt x="0" y="3649639"/>
+                    <a:pt x="0" y="3404141"/>
                   </a:moveTo>
                   <a:lnTo>
                     <a:pt x="0" y="0"/>
@@ -2849,7 +2849,7 @@
                 </a:path>
               </a:pathLst>
             </a:custGeom>
-            <a:ln w="13550" cap="flat">
+            <a:ln w="17246" cap="flat">
               <a:solidFill>
                 <a:srgbClr val="EBEBEB">
                   <a:alpha val="100000"/>
@@ -2873,15 +2873,15 @@
           </p:nvSpPr>
           <p:spPr>
             <a:xfrm>
-              <a:off x="4262297" y="2073503"/>
-              <a:ext cx="0" cy="3649639"/>
+              <a:off x="4308703" y="2209169"/>
+              <a:ext cx="0" cy="3404141"/>
             </a:xfrm>
             <a:custGeom>
               <a:avLst/>
               <a:pathLst>
-                <a:path w="0" h="3649639">
+                <a:path w="0" h="3404141">
                   <a:moveTo>
-                    <a:pt x="0" y="3649639"/>
+                    <a:pt x="0" y="3404141"/>
                   </a:moveTo>
                   <a:lnTo>
                     <a:pt x="0" y="0"/>
@@ -2892,7 +2892,7 @@
                 </a:path>
               </a:pathLst>
             </a:custGeom>
-            <a:ln w="13550" cap="flat">
+            <a:ln w="17246" cap="flat">
               <a:solidFill>
                 <a:srgbClr val="EBEBEB">
                   <a:alpha val="100000"/>
@@ -2916,15 +2916,15 @@
           </p:nvSpPr>
           <p:spPr>
             <a:xfrm>
-              <a:off x="6112169" y="2073503"/>
-              <a:ext cx="0" cy="3649639"/>
+              <a:off x="6130802" y="2209169"/>
+              <a:ext cx="0" cy="3404141"/>
             </a:xfrm>
             <a:custGeom>
               <a:avLst/>
               <a:pathLst>
-                <a:path w="0" h="3649639">
+                <a:path w="0" h="3404141">
                   <a:moveTo>
-                    <a:pt x="0" y="3649639"/>
+                    <a:pt x="0" y="3404141"/>
                   </a:moveTo>
                   <a:lnTo>
                     <a:pt x="0" y="0"/>
@@ -2935,7 +2935,7 @@
                 </a:path>
               </a:pathLst>
             </a:custGeom>
-            <a:ln w="13550" cap="flat">
+            <a:ln w="17246" cap="flat">
               <a:solidFill>
                 <a:srgbClr val="EBEBEB">
                   <a:alpha val="100000"/>
@@ -2959,15 +2959,15 @@
           </p:nvSpPr>
           <p:spPr>
             <a:xfrm>
-              <a:off x="7962042" y="2073503"/>
-              <a:ext cx="0" cy="3649639"/>
+              <a:off x="7952900" y="2209169"/>
+              <a:ext cx="0" cy="3404141"/>
             </a:xfrm>
             <a:custGeom>
               <a:avLst/>
               <a:pathLst>
-                <a:path w="0" h="3649639">
+                <a:path w="0" h="3404141">
                   <a:moveTo>
-                    <a:pt x="0" y="3649639"/>
+                    <a:pt x="0" y="3404141"/>
                   </a:moveTo>
                   <a:lnTo>
                     <a:pt x="0" y="0"/>
@@ -2978,7 +2978,7 @@
                 </a:path>
               </a:pathLst>
             </a:custGeom>
-            <a:ln w="13550" cap="flat">
+            <a:ln w="17246" cap="flat">
               <a:solidFill>
                 <a:srgbClr val="EBEBEB">
                   <a:alpha val="100000"/>
@@ -3002,513 +3002,513 @@
           </p:nvSpPr>
           <p:spPr>
             <a:xfrm>
-              <a:off x="1172049" y="2073503"/>
-              <a:ext cx="7090630" cy="3246833"/>
+              <a:off x="1264853" y="2209169"/>
+              <a:ext cx="6984170" cy="3028431"/>
             </a:xfrm>
             <a:custGeom>
               <a:avLst/>
               <a:pathLst>
-                <a:path w="7090630" h="3246833">
+                <a:path w="6984170" h="3028431">
                   <a:moveTo>
-                    <a:pt x="2390939" y="0"/>
+                    <a:pt x="2355041" y="0"/>
                   </a:moveTo>
                   <a:lnTo>
-                    <a:pt x="2435165" y="87687"/>
-                  </a:lnTo>
-                  <a:lnTo>
-                    <a:pt x="2506788" y="223993"/>
-                  </a:lnTo>
-                  <a:lnTo>
-                    <a:pt x="2578410" y="354829"/>
-                  </a:lnTo>
-                  <a:lnTo>
-                    <a:pt x="2650033" y="480413"/>
-                  </a:lnTo>
-                  <a:lnTo>
-                    <a:pt x="2721655" y="600956"/>
-                  </a:lnTo>
-                  <a:lnTo>
-                    <a:pt x="2793278" y="716662"/>
-                  </a:lnTo>
-                  <a:lnTo>
-                    <a:pt x="2864901" y="827723"/>
-                  </a:lnTo>
-                  <a:lnTo>
-                    <a:pt x="2936523" y="934327"/>
-                  </a:lnTo>
-                  <a:lnTo>
-                    <a:pt x="3008146" y="1036652"/>
-                  </a:lnTo>
-                  <a:lnTo>
-                    <a:pt x="3079768" y="1134870"/>
-                  </a:lnTo>
-                  <a:lnTo>
-                    <a:pt x="3151391" y="1229146"/>
-                  </a:lnTo>
-                  <a:lnTo>
-                    <a:pt x="3223013" y="1319638"/>
-                  </a:lnTo>
-                  <a:lnTo>
-                    <a:pt x="3294636" y="1406498"/>
-                  </a:lnTo>
-                  <a:lnTo>
-                    <a:pt x="3366258" y="1489871"/>
-                  </a:lnTo>
-                  <a:lnTo>
-                    <a:pt x="3437881" y="1569899"/>
-                  </a:lnTo>
-                  <a:lnTo>
-                    <a:pt x="3509503" y="1646714"/>
-                  </a:lnTo>
-                  <a:lnTo>
-                    <a:pt x="3581126" y="1720446"/>
-                  </a:lnTo>
-                  <a:lnTo>
-                    <a:pt x="3652748" y="1791219"/>
-                  </a:lnTo>
-                  <a:lnTo>
-                    <a:pt x="3724371" y="1859151"/>
-                  </a:lnTo>
-                  <a:lnTo>
-                    <a:pt x="3795993" y="1924357"/>
-                  </a:lnTo>
-                  <a:lnTo>
-                    <a:pt x="3867616" y="1986946"/>
-                  </a:lnTo>
-                  <a:lnTo>
-                    <a:pt x="3939238" y="2047022"/>
-                  </a:lnTo>
-                  <a:lnTo>
-                    <a:pt x="4010861" y="2104687"/>
-                  </a:lnTo>
-                  <a:lnTo>
-                    <a:pt x="4082483" y="2160038"/>
-                  </a:lnTo>
-                  <a:lnTo>
-                    <a:pt x="4154106" y="2213167"/>
-                  </a:lnTo>
-                  <a:lnTo>
-                    <a:pt x="4225729" y="2264164"/>
-                  </a:lnTo>
-                  <a:lnTo>
-                    <a:pt x="4297351" y="2313114"/>
-                  </a:lnTo>
-                  <a:lnTo>
-                    <a:pt x="4368974" y="2360099"/>
-                  </a:lnTo>
-                  <a:lnTo>
-                    <a:pt x="4440596" y="2405198"/>
-                  </a:lnTo>
-                  <a:lnTo>
-                    <a:pt x="4512219" y="2448487"/>
-                  </a:lnTo>
-                  <a:lnTo>
-                    <a:pt x="4583841" y="2490039"/>
-                  </a:lnTo>
-                  <a:lnTo>
-                    <a:pt x="4655464" y="2529923"/>
-                  </a:lnTo>
-                  <a:lnTo>
-                    <a:pt x="4727086" y="2568206"/>
-                  </a:lnTo>
-                  <a:lnTo>
-                    <a:pt x="4798709" y="2604953"/>
-                  </a:lnTo>
-                  <a:lnTo>
-                    <a:pt x="4870331" y="2640225"/>
-                  </a:lnTo>
-                  <a:lnTo>
-                    <a:pt x="4941954" y="2647317"/>
-                  </a:lnTo>
-                  <a:lnTo>
-                    <a:pt x="5013576" y="2635371"/>
-                  </a:lnTo>
-                  <a:lnTo>
-                    <a:pt x="5085199" y="2623255"/>
-                  </a:lnTo>
-                  <a:lnTo>
-                    <a:pt x="5156821" y="2610966"/>
-                  </a:lnTo>
-                  <a:lnTo>
-                    <a:pt x="5228444" y="2598501"/>
-                  </a:lnTo>
-                  <a:lnTo>
-                    <a:pt x="5300066" y="2585858"/>
-                  </a:lnTo>
-                  <a:lnTo>
-                    <a:pt x="5371689" y="2573035"/>
-                  </a:lnTo>
-                  <a:lnTo>
-                    <a:pt x="5443311" y="2560028"/>
-                  </a:lnTo>
-                  <a:lnTo>
-                    <a:pt x="5514934" y="2546836"/>
-                  </a:lnTo>
-                  <a:lnTo>
-                    <a:pt x="5586557" y="2533455"/>
-                  </a:lnTo>
-                  <a:lnTo>
-                    <a:pt x="5658179" y="2519883"/>
-                  </a:lnTo>
-                  <a:lnTo>
-                    <a:pt x="5729802" y="2506118"/>
-                  </a:lnTo>
-                  <a:lnTo>
-                    <a:pt x="5801424" y="2492156"/>
-                  </a:lnTo>
-                  <a:lnTo>
-                    <a:pt x="5873047" y="2477994"/>
-                  </a:lnTo>
-                  <a:lnTo>
-                    <a:pt x="5944669" y="2463630"/>
-                  </a:lnTo>
-                  <a:lnTo>
-                    <a:pt x="6016292" y="2449061"/>
-                  </a:lnTo>
-                  <a:lnTo>
-                    <a:pt x="6087914" y="2434284"/>
-                  </a:lnTo>
-                  <a:lnTo>
-                    <a:pt x="6159537" y="2419296"/>
-                  </a:lnTo>
-                  <a:lnTo>
-                    <a:pt x="6231159" y="2404093"/>
-                  </a:lnTo>
-                  <a:lnTo>
-                    <a:pt x="6302782" y="2388674"/>
-                  </a:lnTo>
-                  <a:lnTo>
-                    <a:pt x="6374404" y="2373035"/>
-                  </a:lnTo>
-                  <a:lnTo>
-                    <a:pt x="6446027" y="2357172"/>
-                  </a:lnTo>
-                  <a:lnTo>
-                    <a:pt x="6517649" y="2341082"/>
-                  </a:lnTo>
-                  <a:lnTo>
-                    <a:pt x="6589272" y="2324763"/>
-                  </a:lnTo>
-                  <a:lnTo>
-                    <a:pt x="6660894" y="2308211"/>
-                  </a:lnTo>
-                  <a:lnTo>
-                    <a:pt x="6732517" y="2291422"/>
-                  </a:lnTo>
-                  <a:lnTo>
-                    <a:pt x="6804139" y="2274394"/>
-                  </a:lnTo>
-                  <a:lnTo>
-                    <a:pt x="6875762" y="2257122"/>
-                  </a:lnTo>
-                  <a:lnTo>
-                    <a:pt x="6947385" y="2239604"/>
-                  </a:lnTo>
-                  <a:lnTo>
-                    <a:pt x="7019007" y="2221835"/>
-                  </a:lnTo>
-                  <a:lnTo>
-                    <a:pt x="7090630" y="2203813"/>
-                  </a:lnTo>
-                  <a:lnTo>
-                    <a:pt x="7090630" y="3246833"/>
-                  </a:lnTo>
-                  <a:lnTo>
-                    <a:pt x="7019007" y="3236927"/>
-                  </a:lnTo>
-                  <a:lnTo>
-                    <a:pt x="6947385" y="3226606"/>
-                  </a:lnTo>
-                  <a:lnTo>
-                    <a:pt x="6875762" y="3215854"/>
-                  </a:lnTo>
-                  <a:lnTo>
-                    <a:pt x="6804139" y="3204652"/>
-                  </a:lnTo>
-                  <a:lnTo>
-                    <a:pt x="6732517" y="3192982"/>
-                  </a:lnTo>
-                  <a:lnTo>
-                    <a:pt x="6660894" y="3180823"/>
-                  </a:lnTo>
-                  <a:lnTo>
-                    <a:pt x="6589272" y="3168157"/>
-                  </a:lnTo>
-                  <a:lnTo>
-                    <a:pt x="6517649" y="3154960"/>
-                  </a:lnTo>
-                  <a:lnTo>
-                    <a:pt x="6446027" y="3141212"/>
-                  </a:lnTo>
-                  <a:lnTo>
-                    <a:pt x="6374404" y="3126889"/>
-                  </a:lnTo>
-                  <a:lnTo>
-                    <a:pt x="6302782" y="3111967"/>
-                  </a:lnTo>
-                  <a:lnTo>
-                    <a:pt x="6231159" y="3096421"/>
-                  </a:lnTo>
-                  <a:lnTo>
-                    <a:pt x="6159537" y="3080225"/>
-                  </a:lnTo>
-                  <a:lnTo>
-                    <a:pt x="6087914" y="3063352"/>
-                  </a:lnTo>
-                  <a:lnTo>
-                    <a:pt x="6016292" y="3045774"/>
-                  </a:lnTo>
-                  <a:lnTo>
-                    <a:pt x="5944669" y="3027460"/>
-                  </a:lnTo>
-                  <a:lnTo>
-                    <a:pt x="5873047" y="3008380"/>
-                  </a:lnTo>
-                  <a:lnTo>
-                    <a:pt x="5801424" y="2988503"/>
-                  </a:lnTo>
-                  <a:lnTo>
-                    <a:pt x="5729802" y="2967794"/>
-                  </a:lnTo>
-                  <a:lnTo>
-                    <a:pt x="5658179" y="2946220"/>
-                  </a:lnTo>
-                  <a:lnTo>
-                    <a:pt x="5586557" y="2923743"/>
-                  </a:lnTo>
-                  <a:lnTo>
-                    <a:pt x="5514934" y="2900327"/>
-                  </a:lnTo>
-                  <a:lnTo>
-                    <a:pt x="5443311" y="2875931"/>
-                  </a:lnTo>
-                  <a:lnTo>
-                    <a:pt x="5371689" y="2850515"/>
-                  </a:lnTo>
-                  <a:lnTo>
-                    <a:pt x="5300066" y="2824037"/>
-                  </a:lnTo>
-                  <a:lnTo>
-                    <a:pt x="5228444" y="2796451"/>
-                  </a:lnTo>
-                  <a:lnTo>
-                    <a:pt x="5156821" y="2767712"/>
-                  </a:lnTo>
-                  <a:lnTo>
-                    <a:pt x="5085199" y="2737771"/>
-                  </a:lnTo>
-                  <a:lnTo>
-                    <a:pt x="5013576" y="2706578"/>
-                  </a:lnTo>
-                  <a:lnTo>
-                    <a:pt x="4941954" y="2674081"/>
-                  </a:lnTo>
-                  <a:lnTo>
-                    <a:pt x="4870331" y="2659095"/>
-                  </a:lnTo>
-                  <a:lnTo>
-                    <a:pt x="4798709" y="2670706"/>
-                  </a:lnTo>
-                  <a:lnTo>
-                    <a:pt x="4727086" y="2682154"/>
-                  </a:lnTo>
-                  <a:lnTo>
-                    <a:pt x="4655464" y="2693441"/>
-                  </a:lnTo>
-                  <a:lnTo>
-                    <a:pt x="4583841" y="2704569"/>
-                  </a:lnTo>
-                  <a:lnTo>
-                    <a:pt x="4512219" y="2715541"/>
-                  </a:lnTo>
-                  <a:lnTo>
-                    <a:pt x="4440596" y="2726357"/>
-                  </a:lnTo>
-                  <a:lnTo>
-                    <a:pt x="4368974" y="2737022"/>
-                  </a:lnTo>
-                  <a:lnTo>
-                    <a:pt x="4297351" y="2747536"/>
-                  </a:lnTo>
-                  <a:lnTo>
-                    <a:pt x="4225729" y="2757903"/>
-                  </a:lnTo>
-                  <a:lnTo>
-                    <a:pt x="4154106" y="2768123"/>
-                  </a:lnTo>
-                  <a:lnTo>
-                    <a:pt x="4082483" y="2778199"/>
-                  </a:lnTo>
-                  <a:lnTo>
-                    <a:pt x="4010861" y="2788134"/>
-                  </a:lnTo>
-                  <a:lnTo>
-                    <a:pt x="3939238" y="2797929"/>
-                  </a:lnTo>
-                  <a:lnTo>
-                    <a:pt x="3867616" y="2807585"/>
-                  </a:lnTo>
-                  <a:lnTo>
-                    <a:pt x="3795993" y="2817106"/>
-                  </a:lnTo>
-                  <a:lnTo>
-                    <a:pt x="3724371" y="2826493"/>
-                  </a:lnTo>
-                  <a:lnTo>
-                    <a:pt x="3652748" y="2835747"/>
-                  </a:lnTo>
-                  <a:lnTo>
-                    <a:pt x="3581126" y="2844872"/>
-                  </a:lnTo>
-                  <a:lnTo>
-                    <a:pt x="3509503" y="2853867"/>
-                  </a:lnTo>
-                  <a:lnTo>
-                    <a:pt x="3437881" y="2862737"/>
-                  </a:lnTo>
-                  <a:lnTo>
-                    <a:pt x="3366258" y="2871481"/>
-                  </a:lnTo>
-                  <a:lnTo>
-                    <a:pt x="3294636" y="2880102"/>
-                  </a:lnTo>
-                  <a:lnTo>
-                    <a:pt x="3223013" y="2888602"/>
-                  </a:lnTo>
-                  <a:lnTo>
-                    <a:pt x="3151391" y="2896982"/>
-                  </a:lnTo>
-                  <a:lnTo>
-                    <a:pt x="3079768" y="2905244"/>
-                  </a:lnTo>
-                  <a:lnTo>
-                    <a:pt x="3008146" y="2913389"/>
-                  </a:lnTo>
-                  <a:lnTo>
-                    <a:pt x="2936523" y="2921420"/>
-                  </a:lnTo>
-                  <a:lnTo>
-                    <a:pt x="2864901" y="2929338"/>
-                  </a:lnTo>
-                  <a:lnTo>
-                    <a:pt x="2793278" y="2937145"/>
-                  </a:lnTo>
-                  <a:lnTo>
-                    <a:pt x="2721655" y="2944841"/>
-                  </a:lnTo>
-                  <a:lnTo>
-                    <a:pt x="2650033" y="2952429"/>
-                  </a:lnTo>
-                  <a:lnTo>
-                    <a:pt x="2578410" y="2959911"/>
-                  </a:lnTo>
-                  <a:lnTo>
-                    <a:pt x="2506788" y="2967286"/>
-                  </a:lnTo>
-                  <a:lnTo>
-                    <a:pt x="2435165" y="2974559"/>
-                  </a:lnTo>
-                  <a:lnTo>
-                    <a:pt x="2363543" y="2981728"/>
-                  </a:lnTo>
-                  <a:lnTo>
-                    <a:pt x="2291920" y="2988797"/>
-                  </a:lnTo>
-                  <a:lnTo>
-                    <a:pt x="2220298" y="2995766"/>
-                  </a:lnTo>
-                  <a:lnTo>
-                    <a:pt x="2148675" y="3002637"/>
-                  </a:lnTo>
-                  <a:lnTo>
-                    <a:pt x="2077053" y="3009412"/>
-                  </a:lnTo>
-                  <a:lnTo>
-                    <a:pt x="2005430" y="3016091"/>
-                  </a:lnTo>
-                  <a:lnTo>
-                    <a:pt x="1933808" y="3022675"/>
-                  </a:lnTo>
-                  <a:lnTo>
-                    <a:pt x="1862185" y="3029168"/>
-                  </a:lnTo>
-                  <a:lnTo>
-                    <a:pt x="1790563" y="3035568"/>
-                  </a:lnTo>
-                  <a:lnTo>
-                    <a:pt x="1718940" y="3041879"/>
-                  </a:lnTo>
-                  <a:lnTo>
-                    <a:pt x="1647318" y="3048101"/>
-                  </a:lnTo>
-                  <a:lnTo>
-                    <a:pt x="1575695" y="3054235"/>
-                  </a:lnTo>
-                  <a:lnTo>
-                    <a:pt x="1504073" y="3060283"/>
-                  </a:lnTo>
-                  <a:lnTo>
-                    <a:pt x="1432450" y="3066245"/>
-                  </a:lnTo>
-                  <a:lnTo>
-                    <a:pt x="1360827" y="3072124"/>
-                  </a:lnTo>
-                  <a:lnTo>
-                    <a:pt x="1289205" y="3077920"/>
-                  </a:lnTo>
-                  <a:lnTo>
-                    <a:pt x="1217582" y="3083634"/>
-                  </a:lnTo>
-                  <a:lnTo>
-                    <a:pt x="1145960" y="3089268"/>
-                  </a:lnTo>
-                  <a:lnTo>
-                    <a:pt x="1074337" y="3094823"/>
-                  </a:lnTo>
-                  <a:lnTo>
-                    <a:pt x="1002715" y="3100299"/>
-                  </a:lnTo>
-                  <a:lnTo>
-                    <a:pt x="931092" y="3105698"/>
-                  </a:lnTo>
-                  <a:lnTo>
-                    <a:pt x="859470" y="3111021"/>
-                  </a:lnTo>
-                  <a:lnTo>
-                    <a:pt x="787847" y="3116269"/>
-                  </a:lnTo>
-                  <a:lnTo>
-                    <a:pt x="716225" y="3121444"/>
-                  </a:lnTo>
-                  <a:lnTo>
-                    <a:pt x="644602" y="3126545"/>
-                  </a:lnTo>
-                  <a:lnTo>
-                    <a:pt x="572980" y="3131575"/>
-                  </a:lnTo>
-                  <a:lnTo>
-                    <a:pt x="501357" y="3136534"/>
-                  </a:lnTo>
-                  <a:lnTo>
-                    <a:pt x="429735" y="3141423"/>
-                  </a:lnTo>
-                  <a:lnTo>
-                    <a:pt x="358112" y="3146243"/>
-                  </a:lnTo>
-                  <a:lnTo>
-                    <a:pt x="286490" y="3150995"/>
-                  </a:lnTo>
-                  <a:lnTo>
-                    <a:pt x="214867" y="3155680"/>
-                  </a:lnTo>
-                  <a:lnTo>
-                    <a:pt x="143245" y="3160300"/>
-                  </a:lnTo>
-                  <a:lnTo>
-                    <a:pt x="71622" y="3164854"/>
-                  </a:lnTo>
-                  <a:lnTo>
-                    <a:pt x="0" y="3169344"/>
+                    <a:pt x="2398603" y="81789"/>
+                  </a:lnTo>
+                  <a:lnTo>
+                    <a:pt x="2469151" y="208926"/>
+                  </a:lnTo>
+                  <a:lnTo>
+                    <a:pt x="2539698" y="330961"/>
+                  </a:lnTo>
+                  <a:lnTo>
+                    <a:pt x="2610245" y="448097"/>
+                  </a:lnTo>
+                  <a:lnTo>
+                    <a:pt x="2680792" y="560532"/>
+                  </a:lnTo>
+                  <a:lnTo>
+                    <a:pt x="2751339" y="668455"/>
+                  </a:lnTo>
+                  <a:lnTo>
+                    <a:pt x="2821886" y="772045"/>
+                  </a:lnTo>
+                  <a:lnTo>
+                    <a:pt x="2892434" y="871478"/>
+                  </a:lnTo>
+                  <a:lnTo>
+                    <a:pt x="2962981" y="966920"/>
+                  </a:lnTo>
+                  <a:lnTo>
+                    <a:pt x="3033528" y="1058531"/>
+                  </a:lnTo>
+                  <a:lnTo>
+                    <a:pt x="3104075" y="1146466"/>
+                  </a:lnTo>
+                  <a:lnTo>
+                    <a:pt x="3174622" y="1230870"/>
+                  </a:lnTo>
+                  <a:lnTo>
+                    <a:pt x="3245169" y="1311888"/>
+                  </a:lnTo>
+                  <a:lnTo>
+                    <a:pt x="3315717" y="1389653"/>
+                  </a:lnTo>
+                  <a:lnTo>
+                    <a:pt x="3386264" y="1464297"/>
+                  </a:lnTo>
+                  <a:lnTo>
+                    <a:pt x="3456811" y="1535946"/>
+                  </a:lnTo>
+                  <a:lnTo>
+                    <a:pt x="3527358" y="1604718"/>
+                  </a:lnTo>
+                  <a:lnTo>
+                    <a:pt x="3597905" y="1670730"/>
+                  </a:lnTo>
+                  <a:lnTo>
+                    <a:pt x="3668452" y="1734093"/>
+                  </a:lnTo>
+                  <a:lnTo>
+                    <a:pt x="3739000" y="1794913"/>
+                  </a:lnTo>
+                  <a:lnTo>
+                    <a:pt x="3809547" y="1853291"/>
+                  </a:lnTo>
+                  <a:lnTo>
+                    <a:pt x="3880094" y="1909326"/>
+                  </a:lnTo>
+                  <a:lnTo>
+                    <a:pt x="3950641" y="1963113"/>
+                  </a:lnTo>
+                  <a:lnTo>
+                    <a:pt x="4021188" y="2014740"/>
+                  </a:lnTo>
+                  <a:lnTo>
+                    <a:pt x="4091736" y="2064295"/>
+                  </a:lnTo>
+                  <a:lnTo>
+                    <a:pt x="4162283" y="2111862"/>
+                  </a:lnTo>
+                  <a:lnTo>
+                    <a:pt x="4232830" y="2157519"/>
+                  </a:lnTo>
+                  <a:lnTo>
+                    <a:pt x="4303377" y="2201344"/>
+                  </a:lnTo>
+                  <a:lnTo>
+                    <a:pt x="4373924" y="2243409"/>
+                  </a:lnTo>
+                  <a:lnTo>
+                    <a:pt x="4444471" y="2283787"/>
+                  </a:lnTo>
+                  <a:lnTo>
+                    <a:pt x="4515019" y="2322543"/>
+                  </a:lnTo>
+                  <a:lnTo>
+                    <a:pt x="4585566" y="2359745"/>
+                  </a:lnTo>
+                  <a:lnTo>
+                    <a:pt x="4656113" y="2395453"/>
+                  </a:lnTo>
+                  <a:lnTo>
+                    <a:pt x="4726660" y="2429727"/>
+                  </a:lnTo>
+                  <a:lnTo>
+                    <a:pt x="4797207" y="2462627"/>
+                  </a:lnTo>
+                  <a:lnTo>
+                    <a:pt x="4867754" y="2469242"/>
+                  </a:lnTo>
+                  <a:lnTo>
+                    <a:pt x="4938302" y="2458100"/>
+                  </a:lnTo>
+                  <a:lnTo>
+                    <a:pt x="5008849" y="2446798"/>
+                  </a:lnTo>
+                  <a:lnTo>
+                    <a:pt x="5079396" y="2435336"/>
+                  </a:lnTo>
+                  <a:lnTo>
+                    <a:pt x="5149943" y="2423709"/>
+                  </a:lnTo>
+                  <a:lnTo>
+                    <a:pt x="5220490" y="2411917"/>
+                  </a:lnTo>
+                  <a:lnTo>
+                    <a:pt x="5291037" y="2399956"/>
+                  </a:lnTo>
+                  <a:lnTo>
+                    <a:pt x="5361585" y="2387825"/>
+                  </a:lnTo>
+                  <a:lnTo>
+                    <a:pt x="5432132" y="2375520"/>
+                  </a:lnTo>
+                  <a:lnTo>
+                    <a:pt x="5502679" y="2363039"/>
+                  </a:lnTo>
+                  <a:lnTo>
+                    <a:pt x="5573226" y="2350380"/>
+                  </a:lnTo>
+                  <a:lnTo>
+                    <a:pt x="5643773" y="2337540"/>
+                  </a:lnTo>
+                  <a:lnTo>
+                    <a:pt x="5714320" y="2324517"/>
+                  </a:lnTo>
+                  <a:lnTo>
+                    <a:pt x="5784868" y="2311308"/>
+                  </a:lnTo>
+                  <a:lnTo>
+                    <a:pt x="5855415" y="2297911"/>
+                  </a:lnTo>
+                  <a:lnTo>
+                    <a:pt x="5925962" y="2284322"/>
+                  </a:lnTo>
+                  <a:lnTo>
+                    <a:pt x="5996509" y="2270538"/>
+                  </a:lnTo>
+                  <a:lnTo>
+                    <a:pt x="6067056" y="2256559"/>
+                  </a:lnTo>
+                  <a:lnTo>
+                    <a:pt x="6137604" y="2242379"/>
+                  </a:lnTo>
+                  <a:lnTo>
+                    <a:pt x="6208151" y="2227997"/>
+                  </a:lnTo>
+                  <a:lnTo>
+                    <a:pt x="6278698" y="2213409"/>
+                  </a:lnTo>
+                  <a:lnTo>
+                    <a:pt x="6349245" y="2198613"/>
+                  </a:lnTo>
+                  <a:lnTo>
+                    <a:pt x="6419792" y="2183606"/>
+                  </a:lnTo>
+                  <a:lnTo>
+                    <a:pt x="6490339" y="2168385"/>
+                  </a:lnTo>
+                  <a:lnTo>
+                    <a:pt x="6560887" y="2152946"/>
+                  </a:lnTo>
+                  <a:lnTo>
+                    <a:pt x="6631434" y="2137287"/>
+                  </a:lnTo>
+                  <a:lnTo>
+                    <a:pt x="6701981" y="2121403"/>
+                  </a:lnTo>
+                  <a:lnTo>
+                    <a:pt x="6772528" y="2105294"/>
+                  </a:lnTo>
+                  <a:lnTo>
+                    <a:pt x="6843075" y="2088954"/>
+                  </a:lnTo>
+                  <a:lnTo>
+                    <a:pt x="6913622" y="2072380"/>
+                  </a:lnTo>
+                  <a:lnTo>
+                    <a:pt x="6984170" y="2055570"/>
+                  </a:lnTo>
+                  <a:lnTo>
+                    <a:pt x="6984170" y="3028431"/>
+                  </a:lnTo>
+                  <a:lnTo>
+                    <a:pt x="6913622" y="3019191"/>
+                  </a:lnTo>
+                  <a:lnTo>
+                    <a:pt x="6843075" y="3009564"/>
+                  </a:lnTo>
+                  <a:lnTo>
+                    <a:pt x="6772528" y="2999535"/>
+                  </a:lnTo>
+                  <a:lnTo>
+                    <a:pt x="6701981" y="2989087"/>
+                  </a:lnTo>
+                  <a:lnTo>
+                    <a:pt x="6631434" y="2978202"/>
+                  </a:lnTo>
+                  <a:lnTo>
+                    <a:pt x="6560887" y="2966861"/>
+                  </a:lnTo>
+                  <a:lnTo>
+                    <a:pt x="6490339" y="2955046"/>
+                  </a:lnTo>
+                  <a:lnTo>
+                    <a:pt x="6419792" y="2942738"/>
+                  </a:lnTo>
+                  <a:lnTo>
+                    <a:pt x="6349245" y="2929914"/>
+                  </a:lnTo>
+                  <a:lnTo>
+                    <a:pt x="6278698" y="2916555"/>
+                  </a:lnTo>
+                  <a:lnTo>
+                    <a:pt x="6208151" y="2902637"/>
+                  </a:lnTo>
+                  <a:lnTo>
+                    <a:pt x="6137604" y="2888137"/>
+                  </a:lnTo>
+                  <a:lnTo>
+                    <a:pt x="6067056" y="2873030"/>
+                  </a:lnTo>
+                  <a:lnTo>
+                    <a:pt x="5996509" y="2857292"/>
+                  </a:lnTo>
+                  <a:lnTo>
+                    <a:pt x="5925962" y="2840896"/>
+                  </a:lnTo>
+                  <a:lnTo>
+                    <a:pt x="5855415" y="2823814"/>
+                  </a:lnTo>
+                  <a:lnTo>
+                    <a:pt x="5784868" y="2806017"/>
+                  </a:lnTo>
+                  <a:lnTo>
+                    <a:pt x="5714320" y="2787477"/>
+                  </a:lnTo>
+                  <a:lnTo>
+                    <a:pt x="5643773" y="2768162"/>
+                  </a:lnTo>
+                  <a:lnTo>
+                    <a:pt x="5573226" y="2748038"/>
+                  </a:lnTo>
+                  <a:lnTo>
+                    <a:pt x="5502679" y="2727074"/>
+                  </a:lnTo>
+                  <a:lnTo>
+                    <a:pt x="5432132" y="2705232"/>
+                  </a:lnTo>
+                  <a:lnTo>
+                    <a:pt x="5361585" y="2682478"/>
+                  </a:lnTo>
+                  <a:lnTo>
+                    <a:pt x="5291037" y="2658772"/>
+                  </a:lnTo>
+                  <a:lnTo>
+                    <a:pt x="5220490" y="2634074"/>
+                  </a:lnTo>
+                  <a:lnTo>
+                    <a:pt x="5149943" y="2608344"/>
+                  </a:lnTo>
+                  <a:lnTo>
+                    <a:pt x="5079396" y="2581538"/>
+                  </a:lnTo>
+                  <a:lnTo>
+                    <a:pt x="5008849" y="2553611"/>
+                  </a:lnTo>
+                  <a:lnTo>
+                    <a:pt x="4938302" y="2524517"/>
+                  </a:lnTo>
+                  <a:lnTo>
+                    <a:pt x="4867754" y="2494205"/>
+                  </a:lnTo>
+                  <a:lnTo>
+                    <a:pt x="4797207" y="2480227"/>
+                  </a:lnTo>
+                  <a:lnTo>
+                    <a:pt x="4726660" y="2491058"/>
+                  </a:lnTo>
+                  <a:lnTo>
+                    <a:pt x="4656113" y="2501736"/>
+                  </a:lnTo>
+                  <a:lnTo>
+                    <a:pt x="4585566" y="2512263"/>
+                  </a:lnTo>
+                  <a:lnTo>
+                    <a:pt x="4515019" y="2522643"/>
+                  </a:lnTo>
+                  <a:lnTo>
+                    <a:pt x="4444471" y="2532876"/>
+                  </a:lnTo>
+                  <a:lnTo>
+                    <a:pt x="4373924" y="2542965"/>
+                  </a:lnTo>
+                  <a:lnTo>
+                    <a:pt x="4303377" y="2552912"/>
+                  </a:lnTo>
+                  <a:lnTo>
+                    <a:pt x="4232830" y="2562720"/>
+                  </a:lnTo>
+                  <a:lnTo>
+                    <a:pt x="4162283" y="2572389"/>
+                  </a:lnTo>
+                  <a:lnTo>
+                    <a:pt x="4091736" y="2581921"/>
+                  </a:lnTo>
+                  <a:lnTo>
+                    <a:pt x="4021188" y="2591320"/>
+                  </a:lnTo>
+                  <a:lnTo>
+                    <a:pt x="3950641" y="2600586"/>
+                  </a:lnTo>
+                  <a:lnTo>
+                    <a:pt x="3880094" y="2609722"/>
+                  </a:lnTo>
+                  <a:lnTo>
+                    <a:pt x="3809547" y="2618729"/>
+                  </a:lnTo>
+                  <a:lnTo>
+                    <a:pt x="3739000" y="2627610"/>
+                  </a:lnTo>
+                  <a:lnTo>
+                    <a:pt x="3668452" y="2636365"/>
+                  </a:lnTo>
+                  <a:lnTo>
+                    <a:pt x="3597905" y="2644997"/>
+                  </a:lnTo>
+                  <a:lnTo>
+                    <a:pt x="3527358" y="2653508"/>
+                  </a:lnTo>
+                  <a:lnTo>
+                    <a:pt x="3456811" y="2661898"/>
+                  </a:lnTo>
+                  <a:lnTo>
+                    <a:pt x="3386264" y="2670171"/>
+                  </a:lnTo>
+                  <a:lnTo>
+                    <a:pt x="3315717" y="2678327"/>
+                  </a:lnTo>
+                  <a:lnTo>
+                    <a:pt x="3245169" y="2686368"/>
+                  </a:lnTo>
+                  <a:lnTo>
+                    <a:pt x="3174622" y="2694296"/>
+                  </a:lnTo>
+                  <a:lnTo>
+                    <a:pt x="3104075" y="2702112"/>
+                  </a:lnTo>
+                  <a:lnTo>
+                    <a:pt x="3033528" y="2709819"/>
+                  </a:lnTo>
+                  <a:lnTo>
+                    <a:pt x="2962981" y="2717416"/>
+                  </a:lnTo>
+                  <a:lnTo>
+                    <a:pt x="2892434" y="2724907"/>
+                  </a:lnTo>
+                  <a:lnTo>
+                    <a:pt x="2821886" y="2732292"/>
+                  </a:lnTo>
+                  <a:lnTo>
+                    <a:pt x="2751339" y="2739574"/>
+                  </a:lnTo>
+                  <a:lnTo>
+                    <a:pt x="2680792" y="2746752"/>
+                  </a:lnTo>
+                  <a:lnTo>
+                    <a:pt x="2610245" y="2753830"/>
+                  </a:lnTo>
+                  <a:lnTo>
+                    <a:pt x="2539698" y="2760808"/>
+                  </a:lnTo>
+                  <a:lnTo>
+                    <a:pt x="2469151" y="2767688"/>
+                  </a:lnTo>
+                  <a:lnTo>
+                    <a:pt x="2398603" y="2774471"/>
+                  </a:lnTo>
+                  <a:lnTo>
+                    <a:pt x="2328056" y="2781158"/>
+                  </a:lnTo>
+                  <a:lnTo>
+                    <a:pt x="2257509" y="2787752"/>
+                  </a:lnTo>
+                  <a:lnTo>
+                    <a:pt x="2186962" y="2794252"/>
+                  </a:lnTo>
+                  <a:lnTo>
+                    <a:pt x="2116415" y="2800661"/>
+                  </a:lnTo>
+                  <a:lnTo>
+                    <a:pt x="2045868" y="2806980"/>
+                  </a:lnTo>
+                  <a:lnTo>
+                    <a:pt x="1975320" y="2813209"/>
+                  </a:lnTo>
+                  <a:lnTo>
+                    <a:pt x="1904773" y="2819351"/>
+                  </a:lnTo>
+                  <a:lnTo>
+                    <a:pt x="1834226" y="2825407"/>
+                  </a:lnTo>
+                  <a:lnTo>
+                    <a:pt x="1763679" y="2831377"/>
+                  </a:lnTo>
+                  <a:lnTo>
+                    <a:pt x="1693132" y="2837263"/>
+                  </a:lnTo>
+                  <a:lnTo>
+                    <a:pt x="1622584" y="2843066"/>
+                  </a:lnTo>
+                  <a:lnTo>
+                    <a:pt x="1552037" y="2848788"/>
+                  </a:lnTo>
+                  <a:lnTo>
+                    <a:pt x="1481490" y="2854429"/>
+                  </a:lnTo>
+                  <a:lnTo>
+                    <a:pt x="1410943" y="2859990"/>
+                  </a:lnTo>
+                  <a:lnTo>
+                    <a:pt x="1340396" y="2865474"/>
+                  </a:lnTo>
+                  <a:lnTo>
+                    <a:pt x="1269849" y="2870880"/>
+                  </a:lnTo>
+                  <a:lnTo>
+                    <a:pt x="1199301" y="2876210"/>
+                  </a:lnTo>
+                  <a:lnTo>
+                    <a:pt x="1128754" y="2881464"/>
+                  </a:lnTo>
+                  <a:lnTo>
+                    <a:pt x="1058207" y="2886645"/>
+                  </a:lnTo>
+                  <a:lnTo>
+                    <a:pt x="987660" y="2891753"/>
+                  </a:lnTo>
+                  <a:lnTo>
+                    <a:pt x="917113" y="2896789"/>
+                  </a:lnTo>
+                  <a:lnTo>
+                    <a:pt x="846566" y="2901754"/>
+                  </a:lnTo>
+                  <a:lnTo>
+                    <a:pt x="776018" y="2906649"/>
+                  </a:lnTo>
+                  <a:lnTo>
+                    <a:pt x="705471" y="2911476"/>
+                  </a:lnTo>
+                  <a:lnTo>
+                    <a:pt x="634924" y="2916234"/>
+                  </a:lnTo>
+                  <a:lnTo>
+                    <a:pt x="564377" y="2920925"/>
+                  </a:lnTo>
+                  <a:lnTo>
+                    <a:pt x="493830" y="2925551"/>
+                  </a:lnTo>
+                  <a:lnTo>
+                    <a:pt x="423283" y="2930111"/>
+                  </a:lnTo>
+                  <a:lnTo>
+                    <a:pt x="352735" y="2934607"/>
+                  </a:lnTo>
+                  <a:lnTo>
+                    <a:pt x="282188" y="2939039"/>
+                  </a:lnTo>
+                  <a:lnTo>
+                    <a:pt x="211641" y="2943409"/>
+                  </a:lnTo>
+                  <a:lnTo>
+                    <a:pt x="141094" y="2947718"/>
+                  </a:lnTo>
+                  <a:lnTo>
+                    <a:pt x="70547" y="2951966"/>
+                  </a:lnTo>
+                  <a:lnTo>
+                    <a:pt x="0" y="2956154"/>
                   </a:lnTo>
                   <a:close/>
                 </a:path>
@@ -3534,213 +3534,213 @@
           </p:nvSpPr>
           <p:spPr>
             <a:xfrm>
-              <a:off x="3562988" y="2073503"/>
-              <a:ext cx="4699690" cy="2647317"/>
+              <a:off x="3619894" y="2209169"/>
+              <a:ext cx="4629128" cy="2469242"/>
             </a:xfrm>
             <a:custGeom>
               <a:avLst/>
               <a:pathLst>
-                <a:path w="4699690" h="2647317">
+                <a:path w="4629128" h="2469242">
                   <a:moveTo>
                     <a:pt x="0" y="0"/>
                   </a:moveTo>
                   <a:lnTo>
-                    <a:pt x="44226" y="87687"/>
-                  </a:lnTo>
-                  <a:lnTo>
-                    <a:pt x="115849" y="223993"/>
-                  </a:lnTo>
-                  <a:lnTo>
-                    <a:pt x="187471" y="354829"/>
-                  </a:lnTo>
-                  <a:lnTo>
-                    <a:pt x="259094" y="480413"/>
-                  </a:lnTo>
-                  <a:lnTo>
-                    <a:pt x="330716" y="600956"/>
-                  </a:lnTo>
-                  <a:lnTo>
-                    <a:pt x="402339" y="716662"/>
-                  </a:lnTo>
-                  <a:lnTo>
-                    <a:pt x="473961" y="827723"/>
-                  </a:lnTo>
-                  <a:lnTo>
-                    <a:pt x="545584" y="934327"/>
-                  </a:lnTo>
-                  <a:lnTo>
-                    <a:pt x="617206" y="1036652"/>
-                  </a:lnTo>
-                  <a:lnTo>
-                    <a:pt x="688829" y="1134870"/>
-                  </a:lnTo>
-                  <a:lnTo>
-                    <a:pt x="760451" y="1229146"/>
-                  </a:lnTo>
-                  <a:lnTo>
-                    <a:pt x="832074" y="1319638"/>
-                  </a:lnTo>
-                  <a:lnTo>
-                    <a:pt x="903696" y="1406498"/>
-                  </a:lnTo>
-                  <a:lnTo>
-                    <a:pt x="975319" y="1489871"/>
-                  </a:lnTo>
-                  <a:lnTo>
-                    <a:pt x="1046941" y="1569899"/>
-                  </a:lnTo>
-                  <a:lnTo>
-                    <a:pt x="1118564" y="1646714"/>
-                  </a:lnTo>
-                  <a:lnTo>
-                    <a:pt x="1190186" y="1720446"/>
-                  </a:lnTo>
-                  <a:lnTo>
-                    <a:pt x="1261809" y="1791219"/>
-                  </a:lnTo>
-                  <a:lnTo>
-                    <a:pt x="1333431" y="1859151"/>
-                  </a:lnTo>
-                  <a:lnTo>
-                    <a:pt x="1405054" y="1924357"/>
-                  </a:lnTo>
-                  <a:lnTo>
-                    <a:pt x="1476677" y="1986946"/>
-                  </a:lnTo>
-                  <a:lnTo>
-                    <a:pt x="1548299" y="2047022"/>
-                  </a:lnTo>
-                  <a:lnTo>
-                    <a:pt x="1619922" y="2104687"/>
-                  </a:lnTo>
-                  <a:lnTo>
-                    <a:pt x="1691544" y="2160038"/>
-                  </a:lnTo>
-                  <a:lnTo>
-                    <a:pt x="1763167" y="2213167"/>
-                  </a:lnTo>
-                  <a:lnTo>
-                    <a:pt x="1834789" y="2264164"/>
-                  </a:lnTo>
-                  <a:lnTo>
-                    <a:pt x="1906412" y="2313114"/>
-                  </a:lnTo>
-                  <a:lnTo>
-                    <a:pt x="1978034" y="2360099"/>
-                  </a:lnTo>
-                  <a:lnTo>
-                    <a:pt x="2049657" y="2405198"/>
-                  </a:lnTo>
-                  <a:lnTo>
-                    <a:pt x="2121279" y="2448487"/>
-                  </a:lnTo>
-                  <a:lnTo>
-                    <a:pt x="2192902" y="2490039"/>
-                  </a:lnTo>
-                  <a:lnTo>
-                    <a:pt x="2264524" y="2529923"/>
-                  </a:lnTo>
-                  <a:lnTo>
-                    <a:pt x="2336147" y="2568206"/>
-                  </a:lnTo>
-                  <a:lnTo>
-                    <a:pt x="2407769" y="2604953"/>
-                  </a:lnTo>
-                  <a:lnTo>
-                    <a:pt x="2479392" y="2640225"/>
-                  </a:lnTo>
-                  <a:lnTo>
-                    <a:pt x="2551014" y="2647317"/>
-                  </a:lnTo>
-                  <a:lnTo>
-                    <a:pt x="2622637" y="2635371"/>
-                  </a:lnTo>
-                  <a:lnTo>
-                    <a:pt x="2694259" y="2623255"/>
-                  </a:lnTo>
-                  <a:lnTo>
-                    <a:pt x="2765882" y="2610966"/>
-                  </a:lnTo>
-                  <a:lnTo>
-                    <a:pt x="2837504" y="2598501"/>
-                  </a:lnTo>
-                  <a:lnTo>
-                    <a:pt x="2909127" y="2585858"/>
-                  </a:lnTo>
-                  <a:lnTo>
-                    <a:pt x="2980750" y="2573035"/>
-                  </a:lnTo>
-                  <a:lnTo>
-                    <a:pt x="3052372" y="2560028"/>
-                  </a:lnTo>
-                  <a:lnTo>
-                    <a:pt x="3123995" y="2546836"/>
-                  </a:lnTo>
-                  <a:lnTo>
-                    <a:pt x="3195617" y="2533455"/>
-                  </a:lnTo>
-                  <a:lnTo>
-                    <a:pt x="3267240" y="2519883"/>
-                  </a:lnTo>
-                  <a:lnTo>
-                    <a:pt x="3338862" y="2506118"/>
-                  </a:lnTo>
-                  <a:lnTo>
-                    <a:pt x="3410485" y="2492156"/>
-                  </a:lnTo>
-                  <a:lnTo>
-                    <a:pt x="3482107" y="2477994"/>
-                  </a:lnTo>
-                  <a:lnTo>
-                    <a:pt x="3553730" y="2463630"/>
-                  </a:lnTo>
-                  <a:lnTo>
-                    <a:pt x="3625352" y="2449061"/>
-                  </a:lnTo>
-                  <a:lnTo>
-                    <a:pt x="3696975" y="2434284"/>
-                  </a:lnTo>
-                  <a:lnTo>
-                    <a:pt x="3768597" y="2419296"/>
-                  </a:lnTo>
-                  <a:lnTo>
-                    <a:pt x="3840220" y="2404093"/>
-                  </a:lnTo>
-                  <a:lnTo>
-                    <a:pt x="3911842" y="2388674"/>
-                  </a:lnTo>
-                  <a:lnTo>
-                    <a:pt x="3983465" y="2373035"/>
-                  </a:lnTo>
-                  <a:lnTo>
-                    <a:pt x="4055087" y="2357172"/>
-                  </a:lnTo>
-                  <a:lnTo>
-                    <a:pt x="4126710" y="2341082"/>
-                  </a:lnTo>
-                  <a:lnTo>
-                    <a:pt x="4198332" y="2324763"/>
-                  </a:lnTo>
-                  <a:lnTo>
-                    <a:pt x="4269955" y="2308211"/>
-                  </a:lnTo>
-                  <a:lnTo>
-                    <a:pt x="4341578" y="2291422"/>
-                  </a:lnTo>
-                  <a:lnTo>
-                    <a:pt x="4413200" y="2274394"/>
-                  </a:lnTo>
-                  <a:lnTo>
-                    <a:pt x="4484823" y="2257122"/>
-                  </a:lnTo>
-                  <a:lnTo>
-                    <a:pt x="4556445" y="2239604"/>
-                  </a:lnTo>
-                  <a:lnTo>
-                    <a:pt x="4628068" y="2221835"/>
-                  </a:lnTo>
-                  <a:lnTo>
-                    <a:pt x="4699690" y="2203813"/>
+                    <a:pt x="43562" y="81789"/>
+                  </a:lnTo>
+                  <a:lnTo>
+                    <a:pt x="114109" y="208926"/>
+                  </a:lnTo>
+                  <a:lnTo>
+                    <a:pt x="184656" y="330961"/>
+                  </a:lnTo>
+                  <a:lnTo>
+                    <a:pt x="255203" y="448097"/>
+                  </a:lnTo>
+                  <a:lnTo>
+                    <a:pt x="325751" y="560532"/>
+                  </a:lnTo>
+                  <a:lnTo>
+                    <a:pt x="396298" y="668455"/>
+                  </a:lnTo>
+                  <a:lnTo>
+                    <a:pt x="466845" y="772045"/>
+                  </a:lnTo>
+                  <a:lnTo>
+                    <a:pt x="537392" y="871478"/>
+                  </a:lnTo>
+                  <a:lnTo>
+                    <a:pt x="607939" y="966920"/>
+                  </a:lnTo>
+                  <a:lnTo>
+                    <a:pt x="678487" y="1058531"/>
+                  </a:lnTo>
+                  <a:lnTo>
+                    <a:pt x="749034" y="1146466"/>
+                  </a:lnTo>
+                  <a:lnTo>
+                    <a:pt x="819581" y="1230870"/>
+                  </a:lnTo>
+                  <a:lnTo>
+                    <a:pt x="890128" y="1311888"/>
+                  </a:lnTo>
+                  <a:lnTo>
+                    <a:pt x="960675" y="1389653"/>
+                  </a:lnTo>
+                  <a:lnTo>
+                    <a:pt x="1031222" y="1464297"/>
+                  </a:lnTo>
+                  <a:lnTo>
+                    <a:pt x="1101770" y="1535946"/>
+                  </a:lnTo>
+                  <a:lnTo>
+                    <a:pt x="1172317" y="1604718"/>
+                  </a:lnTo>
+                  <a:lnTo>
+                    <a:pt x="1242864" y="1670730"/>
+                  </a:lnTo>
+                  <a:lnTo>
+                    <a:pt x="1313411" y="1734093"/>
+                  </a:lnTo>
+                  <a:lnTo>
+                    <a:pt x="1383958" y="1794913"/>
+                  </a:lnTo>
+                  <a:lnTo>
+                    <a:pt x="1454505" y="1853291"/>
+                  </a:lnTo>
+                  <a:lnTo>
+                    <a:pt x="1525053" y="1909326"/>
+                  </a:lnTo>
+                  <a:lnTo>
+                    <a:pt x="1595600" y="1963113"/>
+                  </a:lnTo>
+                  <a:lnTo>
+                    <a:pt x="1666147" y="2014740"/>
+                  </a:lnTo>
+                  <a:lnTo>
+                    <a:pt x="1736694" y="2064295"/>
+                  </a:lnTo>
+                  <a:lnTo>
+                    <a:pt x="1807241" y="2111862"/>
+                  </a:lnTo>
+                  <a:lnTo>
+                    <a:pt x="1877788" y="2157519"/>
+                  </a:lnTo>
+                  <a:lnTo>
+                    <a:pt x="1948336" y="2201344"/>
+                  </a:lnTo>
+                  <a:lnTo>
+                    <a:pt x="2018883" y="2243409"/>
+                  </a:lnTo>
+                  <a:lnTo>
+                    <a:pt x="2089430" y="2283787"/>
+                  </a:lnTo>
+                  <a:lnTo>
+                    <a:pt x="2159977" y="2322543"/>
+                  </a:lnTo>
+                  <a:lnTo>
+                    <a:pt x="2230524" y="2359745"/>
+                  </a:lnTo>
+                  <a:lnTo>
+                    <a:pt x="2301071" y="2395453"/>
+                  </a:lnTo>
+                  <a:lnTo>
+                    <a:pt x="2371619" y="2429727"/>
+                  </a:lnTo>
+                  <a:lnTo>
+                    <a:pt x="2442166" y="2462627"/>
+                  </a:lnTo>
+                  <a:lnTo>
+                    <a:pt x="2512713" y="2469242"/>
+                  </a:lnTo>
+                  <a:lnTo>
+                    <a:pt x="2583260" y="2458100"/>
+                  </a:lnTo>
+                  <a:lnTo>
+                    <a:pt x="2653807" y="2446798"/>
+                  </a:lnTo>
+                  <a:lnTo>
+                    <a:pt x="2724355" y="2435336"/>
+                  </a:lnTo>
+                  <a:lnTo>
+                    <a:pt x="2794902" y="2423709"/>
+                  </a:lnTo>
+                  <a:lnTo>
+                    <a:pt x="2865449" y="2411917"/>
+                  </a:lnTo>
+                  <a:lnTo>
+                    <a:pt x="2935996" y="2399956"/>
+                  </a:lnTo>
+                  <a:lnTo>
+                    <a:pt x="3006543" y="2387825"/>
+                  </a:lnTo>
+                  <a:lnTo>
+                    <a:pt x="3077090" y="2375520"/>
+                  </a:lnTo>
+                  <a:lnTo>
+                    <a:pt x="3147638" y="2363039"/>
+                  </a:lnTo>
+                  <a:lnTo>
+                    <a:pt x="3218185" y="2350380"/>
+                  </a:lnTo>
+                  <a:lnTo>
+                    <a:pt x="3288732" y="2337540"/>
+                  </a:lnTo>
+                  <a:lnTo>
+                    <a:pt x="3359279" y="2324517"/>
+                  </a:lnTo>
+                  <a:lnTo>
+                    <a:pt x="3429826" y="2311308"/>
+                  </a:lnTo>
+                  <a:lnTo>
+                    <a:pt x="3500373" y="2297911"/>
+                  </a:lnTo>
+                  <a:lnTo>
+                    <a:pt x="3570921" y="2284322"/>
+                  </a:lnTo>
+                  <a:lnTo>
+                    <a:pt x="3641468" y="2270538"/>
+                  </a:lnTo>
+                  <a:lnTo>
+                    <a:pt x="3712015" y="2256559"/>
+                  </a:lnTo>
+                  <a:lnTo>
+                    <a:pt x="3782562" y="2242379"/>
+                  </a:lnTo>
+                  <a:lnTo>
+                    <a:pt x="3853109" y="2227997"/>
+                  </a:lnTo>
+                  <a:lnTo>
+                    <a:pt x="3923656" y="2213409"/>
+                  </a:lnTo>
+                  <a:lnTo>
+                    <a:pt x="3994204" y="2198613"/>
+                  </a:lnTo>
+                  <a:lnTo>
+                    <a:pt x="4064751" y="2183606"/>
+                  </a:lnTo>
+                  <a:lnTo>
+                    <a:pt x="4135298" y="2168385"/>
+                  </a:lnTo>
+                  <a:lnTo>
+                    <a:pt x="4205845" y="2152946"/>
+                  </a:lnTo>
+                  <a:lnTo>
+                    <a:pt x="4276392" y="2137287"/>
+                  </a:lnTo>
+                  <a:lnTo>
+                    <a:pt x="4346939" y="2121403"/>
+                  </a:lnTo>
+                  <a:lnTo>
+                    <a:pt x="4417487" y="2105294"/>
+                  </a:lnTo>
+                  <a:lnTo>
+                    <a:pt x="4488034" y="2088954"/>
+                  </a:lnTo>
+                  <a:lnTo>
+                    <a:pt x="4558581" y="2072380"/>
+                  </a:lnTo>
+                  <a:lnTo>
+                    <a:pt x="4629128" y="2055570"/>
                   </a:lnTo>
                 </a:path>
               </a:pathLst>
@@ -3760,312 +3760,312 @@
           </p:nvSpPr>
           <p:spPr>
             <a:xfrm>
-              <a:off x="1172049" y="4732598"/>
-              <a:ext cx="7090630" cy="587738"/>
+              <a:off x="1264853" y="4689396"/>
+              <a:ext cx="6984170" cy="548203"/>
             </a:xfrm>
             <a:custGeom>
               <a:avLst/>
               <a:pathLst>
-                <a:path w="7090630" h="587738">
+                <a:path w="6984170" h="548203">
                   <a:moveTo>
-                    <a:pt x="7090630" y="587738"/>
+                    <a:pt x="6984170" y="548203"/>
                   </a:moveTo>
                   <a:lnTo>
-                    <a:pt x="7019007" y="577832"/>
-                  </a:lnTo>
-                  <a:lnTo>
-                    <a:pt x="6947385" y="567511"/>
-                  </a:lnTo>
-                  <a:lnTo>
-                    <a:pt x="6875762" y="556759"/>
-                  </a:lnTo>
-                  <a:lnTo>
-                    <a:pt x="6804139" y="545557"/>
-                  </a:lnTo>
-                  <a:lnTo>
-                    <a:pt x="6732517" y="533887"/>
-                  </a:lnTo>
-                  <a:lnTo>
-                    <a:pt x="6660894" y="521728"/>
-                  </a:lnTo>
-                  <a:lnTo>
-                    <a:pt x="6589272" y="509062"/>
-                  </a:lnTo>
-                  <a:lnTo>
-                    <a:pt x="6517649" y="495865"/>
-                  </a:lnTo>
-                  <a:lnTo>
-                    <a:pt x="6446027" y="482117"/>
-                  </a:lnTo>
-                  <a:lnTo>
-                    <a:pt x="6374404" y="467794"/>
-                  </a:lnTo>
-                  <a:lnTo>
-                    <a:pt x="6302782" y="452872"/>
-                  </a:lnTo>
-                  <a:lnTo>
-                    <a:pt x="6231159" y="437326"/>
-                  </a:lnTo>
-                  <a:lnTo>
-                    <a:pt x="6159537" y="421130"/>
-                  </a:lnTo>
-                  <a:lnTo>
-                    <a:pt x="6087914" y="404257"/>
-                  </a:lnTo>
-                  <a:lnTo>
-                    <a:pt x="6016292" y="386678"/>
-                  </a:lnTo>
-                  <a:lnTo>
-                    <a:pt x="5944669" y="368365"/>
-                  </a:lnTo>
-                  <a:lnTo>
-                    <a:pt x="5873047" y="349285"/>
-                  </a:lnTo>
-                  <a:lnTo>
-                    <a:pt x="5801424" y="329408"/>
-                  </a:lnTo>
-                  <a:lnTo>
-                    <a:pt x="5729802" y="308699"/>
-                  </a:lnTo>
-                  <a:lnTo>
-                    <a:pt x="5658179" y="287125"/>
-                  </a:lnTo>
-                  <a:lnTo>
-                    <a:pt x="5586557" y="264648"/>
-                  </a:lnTo>
-                  <a:lnTo>
-                    <a:pt x="5514934" y="241232"/>
-                  </a:lnTo>
-                  <a:lnTo>
-                    <a:pt x="5443311" y="216836"/>
-                  </a:lnTo>
-                  <a:lnTo>
-                    <a:pt x="5371689" y="191420"/>
-                  </a:lnTo>
-                  <a:lnTo>
-                    <a:pt x="5300066" y="164942"/>
-                  </a:lnTo>
-                  <a:lnTo>
-                    <a:pt x="5228444" y="137356"/>
-                  </a:lnTo>
-                  <a:lnTo>
-                    <a:pt x="5156821" y="108617"/>
-                  </a:lnTo>
-                  <a:lnTo>
-                    <a:pt x="5085199" y="78676"/>
-                  </a:lnTo>
-                  <a:lnTo>
-                    <a:pt x="5013576" y="47483"/>
-                  </a:lnTo>
-                  <a:lnTo>
-                    <a:pt x="4941954" y="14986"/>
-                  </a:lnTo>
-                  <a:lnTo>
-                    <a:pt x="4870331" y="0"/>
-                  </a:lnTo>
-                  <a:lnTo>
-                    <a:pt x="4798709" y="11611"/>
-                  </a:lnTo>
-                  <a:lnTo>
-                    <a:pt x="4727086" y="23059"/>
-                  </a:lnTo>
-                  <a:lnTo>
-                    <a:pt x="4655464" y="34346"/>
-                  </a:lnTo>
-                  <a:lnTo>
-                    <a:pt x="4583841" y="45474"/>
-                  </a:lnTo>
-                  <a:lnTo>
-                    <a:pt x="4512219" y="56446"/>
-                  </a:lnTo>
-                  <a:lnTo>
-                    <a:pt x="4440596" y="67262"/>
-                  </a:lnTo>
-                  <a:lnTo>
-                    <a:pt x="4368974" y="77927"/>
-                  </a:lnTo>
-                  <a:lnTo>
-                    <a:pt x="4297351" y="88441"/>
-                  </a:lnTo>
-                  <a:lnTo>
-                    <a:pt x="4225729" y="98808"/>
-                  </a:lnTo>
-                  <a:lnTo>
-                    <a:pt x="4154106" y="109028"/>
-                  </a:lnTo>
-                  <a:lnTo>
-                    <a:pt x="4082483" y="119104"/>
-                  </a:lnTo>
-                  <a:lnTo>
-                    <a:pt x="4010861" y="129039"/>
-                  </a:lnTo>
-                  <a:lnTo>
-                    <a:pt x="3939238" y="138834"/>
-                  </a:lnTo>
-                  <a:lnTo>
-                    <a:pt x="3867616" y="148490"/>
-                  </a:lnTo>
-                  <a:lnTo>
-                    <a:pt x="3795993" y="158011"/>
-                  </a:lnTo>
-                  <a:lnTo>
-                    <a:pt x="3724371" y="167398"/>
-                  </a:lnTo>
-                  <a:lnTo>
-                    <a:pt x="3652748" y="176652"/>
-                  </a:lnTo>
-                  <a:lnTo>
-                    <a:pt x="3581126" y="185777"/>
-                  </a:lnTo>
-                  <a:lnTo>
-                    <a:pt x="3509503" y="194772"/>
-                  </a:lnTo>
-                  <a:lnTo>
-                    <a:pt x="3437881" y="203641"/>
-                  </a:lnTo>
-                  <a:lnTo>
-                    <a:pt x="3366258" y="212386"/>
-                  </a:lnTo>
-                  <a:lnTo>
-                    <a:pt x="3294636" y="221007"/>
-                  </a:lnTo>
-                  <a:lnTo>
-                    <a:pt x="3223013" y="229506"/>
-                  </a:lnTo>
-                  <a:lnTo>
-                    <a:pt x="3151391" y="237887"/>
-                  </a:lnTo>
-                  <a:lnTo>
-                    <a:pt x="3079768" y="246149"/>
-                  </a:lnTo>
-                  <a:lnTo>
-                    <a:pt x="3008146" y="254294"/>
-                  </a:lnTo>
-                  <a:lnTo>
-                    <a:pt x="2936523" y="262325"/>
-                  </a:lnTo>
-                  <a:lnTo>
-                    <a:pt x="2864901" y="270243"/>
-                  </a:lnTo>
-                  <a:lnTo>
-                    <a:pt x="2793278" y="278050"/>
-                  </a:lnTo>
-                  <a:lnTo>
-                    <a:pt x="2721655" y="285746"/>
-                  </a:lnTo>
-                  <a:lnTo>
-                    <a:pt x="2650033" y="293334"/>
-                  </a:lnTo>
-                  <a:lnTo>
-                    <a:pt x="2578410" y="300815"/>
-                  </a:lnTo>
-                  <a:lnTo>
-                    <a:pt x="2506788" y="308191"/>
-                  </a:lnTo>
-                  <a:lnTo>
-                    <a:pt x="2435165" y="315464"/>
-                  </a:lnTo>
-                  <a:lnTo>
-                    <a:pt x="2363543" y="322633"/>
-                  </a:lnTo>
-                  <a:lnTo>
-                    <a:pt x="2291920" y="329702"/>
-                  </a:lnTo>
-                  <a:lnTo>
-                    <a:pt x="2220298" y="336671"/>
-                  </a:lnTo>
-                  <a:lnTo>
-                    <a:pt x="2148675" y="343542"/>
-                  </a:lnTo>
-                  <a:lnTo>
-                    <a:pt x="2077053" y="350317"/>
-                  </a:lnTo>
-                  <a:lnTo>
-                    <a:pt x="2005430" y="356995"/>
-                  </a:lnTo>
-                  <a:lnTo>
-                    <a:pt x="1933808" y="363580"/>
-                  </a:lnTo>
-                  <a:lnTo>
-                    <a:pt x="1862185" y="370073"/>
-                  </a:lnTo>
-                  <a:lnTo>
-                    <a:pt x="1790563" y="376473"/>
-                  </a:lnTo>
-                  <a:lnTo>
-                    <a:pt x="1718940" y="382784"/>
-                  </a:lnTo>
-                  <a:lnTo>
-                    <a:pt x="1647318" y="389006"/>
-                  </a:lnTo>
-                  <a:lnTo>
-                    <a:pt x="1575695" y="395140"/>
-                  </a:lnTo>
-                  <a:lnTo>
-                    <a:pt x="1504073" y="401188"/>
-                  </a:lnTo>
-                  <a:lnTo>
-                    <a:pt x="1432450" y="407150"/>
-                  </a:lnTo>
-                  <a:lnTo>
-                    <a:pt x="1360827" y="413029"/>
-                  </a:lnTo>
-                  <a:lnTo>
-                    <a:pt x="1289205" y="418825"/>
-                  </a:lnTo>
-                  <a:lnTo>
-                    <a:pt x="1217582" y="424539"/>
-                  </a:lnTo>
-                  <a:lnTo>
-                    <a:pt x="1145960" y="430173"/>
-                  </a:lnTo>
-                  <a:lnTo>
-                    <a:pt x="1074337" y="435728"/>
-                  </a:lnTo>
-                  <a:lnTo>
-                    <a:pt x="1002715" y="441204"/>
-                  </a:lnTo>
-                  <a:lnTo>
-                    <a:pt x="931092" y="446603"/>
-                  </a:lnTo>
-                  <a:lnTo>
-                    <a:pt x="859470" y="451926"/>
-                  </a:lnTo>
-                  <a:lnTo>
-                    <a:pt x="787847" y="457174"/>
-                  </a:lnTo>
-                  <a:lnTo>
-                    <a:pt x="716225" y="462349"/>
-                  </a:lnTo>
-                  <a:lnTo>
-                    <a:pt x="644602" y="467450"/>
-                  </a:lnTo>
-                  <a:lnTo>
-                    <a:pt x="572980" y="472480"/>
-                  </a:lnTo>
-                  <a:lnTo>
-                    <a:pt x="501357" y="477439"/>
-                  </a:lnTo>
-                  <a:lnTo>
-                    <a:pt x="429735" y="482328"/>
-                  </a:lnTo>
-                  <a:lnTo>
-                    <a:pt x="358112" y="487148"/>
-                  </a:lnTo>
-                  <a:lnTo>
-                    <a:pt x="286490" y="491900"/>
-                  </a:lnTo>
-                  <a:lnTo>
-                    <a:pt x="214867" y="496585"/>
-                  </a:lnTo>
-                  <a:lnTo>
-                    <a:pt x="143245" y="501205"/>
-                  </a:lnTo>
-                  <a:lnTo>
-                    <a:pt x="71622" y="505759"/>
-                  </a:lnTo>
-                  <a:lnTo>
-                    <a:pt x="0" y="510249"/>
+                    <a:pt x="6913622" y="538963"/>
+                  </a:lnTo>
+                  <a:lnTo>
+                    <a:pt x="6843075" y="529337"/>
+                  </a:lnTo>
+                  <a:lnTo>
+                    <a:pt x="6772528" y="519308"/>
+                  </a:lnTo>
+                  <a:lnTo>
+                    <a:pt x="6701981" y="508859"/>
+                  </a:lnTo>
+                  <a:lnTo>
+                    <a:pt x="6631434" y="497974"/>
+                  </a:lnTo>
+                  <a:lnTo>
+                    <a:pt x="6560887" y="486634"/>
+                  </a:lnTo>
+                  <a:lnTo>
+                    <a:pt x="6490339" y="474819"/>
+                  </a:lnTo>
+                  <a:lnTo>
+                    <a:pt x="6419792" y="462510"/>
+                  </a:lnTo>
+                  <a:lnTo>
+                    <a:pt x="6349245" y="449687"/>
+                  </a:lnTo>
+                  <a:lnTo>
+                    <a:pt x="6278698" y="436327"/>
+                  </a:lnTo>
+                  <a:lnTo>
+                    <a:pt x="6208151" y="422409"/>
+                  </a:lnTo>
+                  <a:lnTo>
+                    <a:pt x="6137604" y="407909"/>
+                  </a:lnTo>
+                  <a:lnTo>
+                    <a:pt x="6067056" y="392802"/>
+                  </a:lnTo>
+                  <a:lnTo>
+                    <a:pt x="5996509" y="377064"/>
+                  </a:lnTo>
+                  <a:lnTo>
+                    <a:pt x="5925962" y="360668"/>
+                  </a:lnTo>
+                  <a:lnTo>
+                    <a:pt x="5855415" y="343586"/>
+                  </a:lnTo>
+                  <a:lnTo>
+                    <a:pt x="5784868" y="325790"/>
+                  </a:lnTo>
+                  <a:lnTo>
+                    <a:pt x="5714320" y="307250"/>
+                  </a:lnTo>
+                  <a:lnTo>
+                    <a:pt x="5643773" y="287934"/>
+                  </a:lnTo>
+                  <a:lnTo>
+                    <a:pt x="5573226" y="267811"/>
+                  </a:lnTo>
+                  <a:lnTo>
+                    <a:pt x="5502679" y="246846"/>
+                  </a:lnTo>
+                  <a:lnTo>
+                    <a:pt x="5432132" y="225005"/>
+                  </a:lnTo>
+                  <a:lnTo>
+                    <a:pt x="5361585" y="202250"/>
+                  </a:lnTo>
+                  <a:lnTo>
+                    <a:pt x="5291037" y="178544"/>
+                  </a:lnTo>
+                  <a:lnTo>
+                    <a:pt x="5220490" y="153847"/>
+                  </a:lnTo>
+                  <a:lnTo>
+                    <a:pt x="5149943" y="128117"/>
+                  </a:lnTo>
+                  <a:lnTo>
+                    <a:pt x="5079396" y="101311"/>
+                  </a:lnTo>
+                  <a:lnTo>
+                    <a:pt x="5008849" y="73384"/>
+                  </a:lnTo>
+                  <a:lnTo>
+                    <a:pt x="4938302" y="44289"/>
+                  </a:lnTo>
+                  <a:lnTo>
+                    <a:pt x="4867754" y="13978"/>
+                  </a:lnTo>
+                  <a:lnTo>
+                    <a:pt x="4797207" y="0"/>
+                  </a:lnTo>
+                  <a:lnTo>
+                    <a:pt x="4726660" y="10830"/>
+                  </a:lnTo>
+                  <a:lnTo>
+                    <a:pt x="4656113" y="21508"/>
+                  </a:lnTo>
+                  <a:lnTo>
+                    <a:pt x="4585566" y="32036"/>
+                  </a:lnTo>
+                  <a:lnTo>
+                    <a:pt x="4515019" y="42415"/>
+                  </a:lnTo>
+                  <a:lnTo>
+                    <a:pt x="4444471" y="52649"/>
+                  </a:lnTo>
+                  <a:lnTo>
+                    <a:pt x="4373924" y="62738"/>
+                  </a:lnTo>
+                  <a:lnTo>
+                    <a:pt x="4303377" y="72685"/>
+                  </a:lnTo>
+                  <a:lnTo>
+                    <a:pt x="4232830" y="82492"/>
+                  </a:lnTo>
+                  <a:lnTo>
+                    <a:pt x="4162283" y="92161"/>
+                  </a:lnTo>
+                  <a:lnTo>
+                    <a:pt x="4091736" y="101694"/>
+                  </a:lnTo>
+                  <a:lnTo>
+                    <a:pt x="4021188" y="111093"/>
+                  </a:lnTo>
+                  <a:lnTo>
+                    <a:pt x="3950641" y="120359"/>
+                  </a:lnTo>
+                  <a:lnTo>
+                    <a:pt x="3880094" y="129495"/>
+                  </a:lnTo>
+                  <a:lnTo>
+                    <a:pt x="3809547" y="138502"/>
+                  </a:lnTo>
+                  <a:lnTo>
+                    <a:pt x="3739000" y="147382"/>
+                  </a:lnTo>
+                  <a:lnTo>
+                    <a:pt x="3668452" y="156138"/>
+                  </a:lnTo>
+                  <a:lnTo>
+                    <a:pt x="3597905" y="164770"/>
+                  </a:lnTo>
+                  <a:lnTo>
+                    <a:pt x="3527358" y="173280"/>
+                  </a:lnTo>
+                  <a:lnTo>
+                    <a:pt x="3456811" y="181671"/>
+                  </a:lnTo>
+                  <a:lnTo>
+                    <a:pt x="3386264" y="189943"/>
+                  </a:lnTo>
+                  <a:lnTo>
+                    <a:pt x="3315717" y="198099"/>
+                  </a:lnTo>
+                  <a:lnTo>
+                    <a:pt x="3245169" y="206140"/>
+                  </a:lnTo>
+                  <a:lnTo>
+                    <a:pt x="3174622" y="214068"/>
+                  </a:lnTo>
+                  <a:lnTo>
+                    <a:pt x="3104075" y="221885"/>
+                  </a:lnTo>
+                  <a:lnTo>
+                    <a:pt x="3033528" y="229591"/>
+                  </a:lnTo>
+                  <a:lnTo>
+                    <a:pt x="2962981" y="237189"/>
+                  </a:lnTo>
+                  <a:lnTo>
+                    <a:pt x="2892434" y="244680"/>
+                  </a:lnTo>
+                  <a:lnTo>
+                    <a:pt x="2821886" y="252065"/>
+                  </a:lnTo>
+                  <a:lnTo>
+                    <a:pt x="2751339" y="259346"/>
+                  </a:lnTo>
+                  <a:lnTo>
+                    <a:pt x="2680792" y="266525"/>
+                  </a:lnTo>
+                  <a:lnTo>
+                    <a:pt x="2610245" y="273603"/>
+                  </a:lnTo>
+                  <a:lnTo>
+                    <a:pt x="2539698" y="280581"/>
+                  </a:lnTo>
+                  <a:lnTo>
+                    <a:pt x="2469151" y="287460"/>
+                  </a:lnTo>
+                  <a:lnTo>
+                    <a:pt x="2398603" y="294243"/>
+                  </a:lnTo>
+                  <a:lnTo>
+                    <a:pt x="2328056" y="300931"/>
+                  </a:lnTo>
+                  <a:lnTo>
+                    <a:pt x="2257509" y="307524"/>
+                  </a:lnTo>
+                  <a:lnTo>
+                    <a:pt x="2186962" y="314024"/>
+                  </a:lnTo>
+                  <a:lnTo>
+                    <a:pt x="2116415" y="320433"/>
+                  </a:lnTo>
+                  <a:lnTo>
+                    <a:pt x="2045868" y="326752"/>
+                  </a:lnTo>
+                  <a:lnTo>
+                    <a:pt x="1975320" y="332982"/>
+                  </a:lnTo>
+                  <a:lnTo>
+                    <a:pt x="1904773" y="339124"/>
+                  </a:lnTo>
+                  <a:lnTo>
+                    <a:pt x="1834226" y="345179"/>
+                  </a:lnTo>
+                  <a:lnTo>
+                    <a:pt x="1763679" y="351149"/>
+                  </a:lnTo>
+                  <a:lnTo>
+                    <a:pt x="1693132" y="357035"/>
+                  </a:lnTo>
+                  <a:lnTo>
+                    <a:pt x="1622584" y="362839"/>
+                  </a:lnTo>
+                  <a:lnTo>
+                    <a:pt x="1552037" y="368560"/>
+                  </a:lnTo>
+                  <a:lnTo>
+                    <a:pt x="1481490" y="374201"/>
+                  </a:lnTo>
+                  <a:lnTo>
+                    <a:pt x="1410943" y="379763"/>
+                  </a:lnTo>
+                  <a:lnTo>
+                    <a:pt x="1340396" y="385246"/>
+                  </a:lnTo>
+                  <a:lnTo>
+                    <a:pt x="1269849" y="390652"/>
+                  </a:lnTo>
+                  <a:lnTo>
+                    <a:pt x="1199301" y="395982"/>
+                  </a:lnTo>
+                  <a:lnTo>
+                    <a:pt x="1128754" y="401237"/>
+                  </a:lnTo>
+                  <a:lnTo>
+                    <a:pt x="1058207" y="406418"/>
+                  </a:lnTo>
+                  <a:lnTo>
+                    <a:pt x="987660" y="411526"/>
+                  </a:lnTo>
+                  <a:lnTo>
+                    <a:pt x="917113" y="416562"/>
+                  </a:lnTo>
+                  <a:lnTo>
+                    <a:pt x="846566" y="421527"/>
+                  </a:lnTo>
+                  <a:lnTo>
+                    <a:pt x="776018" y="426422"/>
+                  </a:lnTo>
+                  <a:lnTo>
+                    <a:pt x="705471" y="431248"/>
+                  </a:lnTo>
+                  <a:lnTo>
+                    <a:pt x="634924" y="436007"/>
+                  </a:lnTo>
+                  <a:lnTo>
+                    <a:pt x="564377" y="440698"/>
+                  </a:lnTo>
+                  <a:lnTo>
+                    <a:pt x="493830" y="445323"/>
+                  </a:lnTo>
+                  <a:lnTo>
+                    <a:pt x="423283" y="449883"/>
+                  </a:lnTo>
+                  <a:lnTo>
+                    <a:pt x="352735" y="454379"/>
+                  </a:lnTo>
+                  <a:lnTo>
+                    <a:pt x="282188" y="458812"/>
+                  </a:lnTo>
+                  <a:lnTo>
+                    <a:pt x="211641" y="463182"/>
+                  </a:lnTo>
+                  <a:lnTo>
+                    <a:pt x="141094" y="467491"/>
+                  </a:lnTo>
+                  <a:lnTo>
+                    <a:pt x="70547" y="471738"/>
+                  </a:lnTo>
+                  <a:lnTo>
+                    <a:pt x="0" y="475927"/>
                   </a:lnTo>
                 </a:path>
               </a:pathLst>
@@ -4085,312 +4085,312 @@
           </p:nvSpPr>
           <p:spPr>
             <a:xfrm>
-              <a:off x="1172049" y="3483913"/>
-              <a:ext cx="7090630" cy="1522670"/>
+              <a:off x="1264853" y="3524706"/>
+              <a:ext cx="6984170" cy="1420246"/>
             </a:xfrm>
             <a:custGeom>
               <a:avLst/>
               <a:pathLst>
-                <a:path w="7090630" h="1522670">
+                <a:path w="6984170" h="1420246">
                   <a:moveTo>
                     <a:pt x="0" y="0"/>
                   </a:moveTo>
                   <a:lnTo>
-                    <a:pt x="71622" y="27580"/>
-                  </a:lnTo>
-                  <a:lnTo>
-                    <a:pt x="143245" y="54794"/>
-                  </a:lnTo>
-                  <a:lnTo>
-                    <a:pt x="214867" y="81645"/>
-                  </a:lnTo>
-                  <a:lnTo>
-                    <a:pt x="286490" y="108140"/>
-                  </a:lnTo>
-                  <a:lnTo>
-                    <a:pt x="358112" y="134282"/>
-                  </a:lnTo>
-                  <a:lnTo>
-                    <a:pt x="429735" y="160076"/>
-                  </a:lnTo>
-                  <a:lnTo>
-                    <a:pt x="501357" y="185527"/>
-                  </a:lnTo>
-                  <a:lnTo>
-                    <a:pt x="572980" y="210640"/>
-                  </a:lnTo>
-                  <a:lnTo>
-                    <a:pt x="644602" y="235419"/>
-                  </a:lnTo>
-                  <a:lnTo>
-                    <a:pt x="716225" y="259868"/>
-                  </a:lnTo>
-                  <a:lnTo>
-                    <a:pt x="787847" y="283991"/>
-                  </a:lnTo>
-                  <a:lnTo>
-                    <a:pt x="859470" y="307794"/>
-                  </a:lnTo>
-                  <a:lnTo>
-                    <a:pt x="931092" y="331280"/>
-                  </a:lnTo>
-                  <a:lnTo>
-                    <a:pt x="1002715" y="354454"/>
-                  </a:lnTo>
-                  <a:lnTo>
-                    <a:pt x="1074337" y="377319"/>
-                  </a:lnTo>
-                  <a:lnTo>
-                    <a:pt x="1145960" y="399881"/>
-                  </a:lnTo>
-                  <a:lnTo>
-                    <a:pt x="1217582" y="422142"/>
-                  </a:lnTo>
-                  <a:lnTo>
-                    <a:pt x="1289205" y="444107"/>
-                  </a:lnTo>
-                  <a:lnTo>
-                    <a:pt x="1360827" y="465780"/>
-                  </a:lnTo>
-                  <a:lnTo>
-                    <a:pt x="1432450" y="487164"/>
-                  </a:lnTo>
-                  <a:lnTo>
-                    <a:pt x="1504073" y="508264"/>
-                  </a:lnTo>
-                  <a:lnTo>
-                    <a:pt x="1575695" y="529084"/>
-                  </a:lnTo>
-                  <a:lnTo>
-                    <a:pt x="1647318" y="549626"/>
-                  </a:lnTo>
-                  <a:lnTo>
-                    <a:pt x="1718940" y="569895"/>
-                  </a:lnTo>
-                  <a:lnTo>
-                    <a:pt x="1790563" y="589895"/>
-                  </a:lnTo>
-                  <a:lnTo>
-                    <a:pt x="1862185" y="609628"/>
-                  </a:lnTo>
-                  <a:lnTo>
-                    <a:pt x="1933808" y="629099"/>
-                  </a:lnTo>
-                  <a:lnTo>
-                    <a:pt x="2005430" y="648311"/>
-                  </a:lnTo>
-                  <a:lnTo>
-                    <a:pt x="2077053" y="667268"/>
-                  </a:lnTo>
-                  <a:lnTo>
-                    <a:pt x="2148675" y="685972"/>
-                  </a:lnTo>
-                  <a:lnTo>
-                    <a:pt x="2220298" y="704427"/>
-                  </a:lnTo>
-                  <a:lnTo>
-                    <a:pt x="2291920" y="722637"/>
-                  </a:lnTo>
-                  <a:lnTo>
-                    <a:pt x="2363543" y="740605"/>
-                  </a:lnTo>
-                  <a:lnTo>
-                    <a:pt x="2435165" y="758334"/>
-                  </a:lnTo>
-                  <a:lnTo>
-                    <a:pt x="2506788" y="775826"/>
-                  </a:lnTo>
-                  <a:lnTo>
-                    <a:pt x="2578410" y="793087"/>
-                  </a:lnTo>
-                  <a:lnTo>
-                    <a:pt x="2650033" y="810117"/>
-                  </a:lnTo>
-                  <a:lnTo>
-                    <a:pt x="2721655" y="826921"/>
-                  </a:lnTo>
-                  <a:lnTo>
-                    <a:pt x="2793278" y="843502"/>
-                  </a:lnTo>
-                  <a:lnTo>
-                    <a:pt x="2864901" y="859861"/>
-                  </a:lnTo>
-                  <a:lnTo>
-                    <a:pt x="2936523" y="876004"/>
-                  </a:lnTo>
-                  <a:lnTo>
-                    <a:pt x="3008146" y="891931"/>
-                  </a:lnTo>
-                  <a:lnTo>
-                    <a:pt x="3079768" y="907647"/>
-                  </a:lnTo>
-                  <a:lnTo>
-                    <a:pt x="3151391" y="923154"/>
-                  </a:lnTo>
-                  <a:lnTo>
-                    <a:pt x="3223013" y="938454"/>
-                  </a:lnTo>
-                  <a:lnTo>
-                    <a:pt x="3294636" y="953551"/>
-                  </a:lnTo>
-                  <a:lnTo>
-                    <a:pt x="3366258" y="968447"/>
-                  </a:lnTo>
-                  <a:lnTo>
-                    <a:pt x="3437881" y="983144"/>
-                  </a:lnTo>
-                  <a:lnTo>
-                    <a:pt x="3509503" y="997647"/>
-                  </a:lnTo>
-                  <a:lnTo>
-                    <a:pt x="3581126" y="1011956"/>
-                  </a:lnTo>
-                  <a:lnTo>
-                    <a:pt x="3652748" y="1026075"/>
-                  </a:lnTo>
-                  <a:lnTo>
-                    <a:pt x="3724371" y="1040006"/>
-                  </a:lnTo>
-                  <a:lnTo>
-                    <a:pt x="3795993" y="1053752"/>
-                  </a:lnTo>
-                  <a:lnTo>
-                    <a:pt x="3867616" y="1067315"/>
-                  </a:lnTo>
-                  <a:lnTo>
-                    <a:pt x="3939238" y="1080698"/>
-                  </a:lnTo>
-                  <a:lnTo>
-                    <a:pt x="4010861" y="1093902"/>
-                  </a:lnTo>
-                  <a:lnTo>
-                    <a:pt x="4082483" y="1106931"/>
-                  </a:lnTo>
-                  <a:lnTo>
-                    <a:pt x="4154106" y="1119787"/>
-                  </a:lnTo>
-                  <a:lnTo>
-                    <a:pt x="4225729" y="1132472"/>
-                  </a:lnTo>
-                  <a:lnTo>
-                    <a:pt x="4297351" y="1144987"/>
-                  </a:lnTo>
-                  <a:lnTo>
-                    <a:pt x="4368974" y="1157337"/>
-                  </a:lnTo>
-                  <a:lnTo>
-                    <a:pt x="4440596" y="1169522"/>
-                  </a:lnTo>
-                  <a:lnTo>
-                    <a:pt x="4512219" y="1181545"/>
-                  </a:lnTo>
-                  <a:lnTo>
-                    <a:pt x="4583841" y="1193408"/>
-                  </a:lnTo>
-                  <a:lnTo>
-                    <a:pt x="4655464" y="1205113"/>
-                  </a:lnTo>
-                  <a:lnTo>
-                    <a:pt x="4727086" y="1216663"/>
-                  </a:lnTo>
-                  <a:lnTo>
-                    <a:pt x="4798709" y="1228059"/>
-                  </a:lnTo>
-                  <a:lnTo>
-                    <a:pt x="4870331" y="1239303"/>
-                  </a:lnTo>
-                  <a:lnTo>
-                    <a:pt x="4941954" y="1250398"/>
-                  </a:lnTo>
-                  <a:lnTo>
-                    <a:pt x="5013576" y="1261345"/>
-                  </a:lnTo>
-                  <a:lnTo>
-                    <a:pt x="5085199" y="1272146"/>
-                  </a:lnTo>
-                  <a:lnTo>
-                    <a:pt x="5156821" y="1282804"/>
-                  </a:lnTo>
-                  <a:lnTo>
-                    <a:pt x="5228444" y="1293320"/>
-                  </a:lnTo>
-                  <a:lnTo>
-                    <a:pt x="5300066" y="1303696"/>
-                  </a:lnTo>
-                  <a:lnTo>
-                    <a:pt x="5371689" y="1313935"/>
-                  </a:lnTo>
-                  <a:lnTo>
-                    <a:pt x="5443311" y="1324037"/>
-                  </a:lnTo>
-                  <a:lnTo>
-                    <a:pt x="5514934" y="1334004"/>
-                  </a:lnTo>
-                  <a:lnTo>
-                    <a:pt x="5586557" y="1343839"/>
-                  </a:lnTo>
-                  <a:lnTo>
-                    <a:pt x="5658179" y="1353543"/>
-                  </a:lnTo>
-                  <a:lnTo>
-                    <a:pt x="5729802" y="1363118"/>
-                  </a:lnTo>
-                  <a:lnTo>
-                    <a:pt x="5801424" y="1372566"/>
-                  </a:lnTo>
-                  <a:lnTo>
-                    <a:pt x="5873047" y="1381888"/>
-                  </a:lnTo>
-                  <a:lnTo>
-                    <a:pt x="5944669" y="1391086"/>
-                  </a:lnTo>
-                  <a:lnTo>
-                    <a:pt x="6016292" y="1400162"/>
-                  </a:lnTo>
-                  <a:lnTo>
-                    <a:pt x="6087914" y="1409117"/>
-                  </a:lnTo>
-                  <a:lnTo>
-                    <a:pt x="6159537" y="1417952"/>
-                  </a:lnTo>
-                  <a:lnTo>
-                    <a:pt x="6231159" y="1426671"/>
-                  </a:lnTo>
-                  <a:lnTo>
-                    <a:pt x="6302782" y="1435273"/>
-                  </a:lnTo>
-                  <a:lnTo>
-                    <a:pt x="6374404" y="1443761"/>
-                  </a:lnTo>
-                  <a:lnTo>
-                    <a:pt x="6446027" y="1452136"/>
-                  </a:lnTo>
-                  <a:lnTo>
-                    <a:pt x="6517649" y="1460399"/>
-                  </a:lnTo>
-                  <a:lnTo>
-                    <a:pt x="6589272" y="1468553"/>
-                  </a:lnTo>
-                  <a:lnTo>
-                    <a:pt x="6660894" y="1476598"/>
-                  </a:lnTo>
-                  <a:lnTo>
-                    <a:pt x="6732517" y="1484536"/>
-                  </a:lnTo>
-                  <a:lnTo>
-                    <a:pt x="6804139" y="1492369"/>
-                  </a:lnTo>
-                  <a:lnTo>
-                    <a:pt x="6875762" y="1500097"/>
-                  </a:lnTo>
-                  <a:lnTo>
-                    <a:pt x="6947385" y="1507722"/>
-                  </a:lnTo>
-                  <a:lnTo>
-                    <a:pt x="7019007" y="1515246"/>
-                  </a:lnTo>
-                  <a:lnTo>
-                    <a:pt x="7090630" y="1522670"/>
+                    <a:pt x="70547" y="25725"/>
+                  </a:lnTo>
+                  <a:lnTo>
+                    <a:pt x="141094" y="51108"/>
+                  </a:lnTo>
+                  <a:lnTo>
+                    <a:pt x="211641" y="76153"/>
+                  </a:lnTo>
+                  <a:lnTo>
+                    <a:pt x="282188" y="100866"/>
+                  </a:lnTo>
+                  <a:lnTo>
+                    <a:pt x="352735" y="125249"/>
+                  </a:lnTo>
+                  <a:lnTo>
+                    <a:pt x="423283" y="149309"/>
+                  </a:lnTo>
+                  <a:lnTo>
+                    <a:pt x="493830" y="173048"/>
+                  </a:lnTo>
+                  <a:lnTo>
+                    <a:pt x="564377" y="196471"/>
+                  </a:lnTo>
+                  <a:lnTo>
+                    <a:pt x="634924" y="219583"/>
+                  </a:lnTo>
+                  <a:lnTo>
+                    <a:pt x="705471" y="242387"/>
+                  </a:lnTo>
+                  <a:lnTo>
+                    <a:pt x="776018" y="264888"/>
+                  </a:lnTo>
+                  <a:lnTo>
+                    <a:pt x="846566" y="287090"/>
+                  </a:lnTo>
+                  <a:lnTo>
+                    <a:pt x="917113" y="308996"/>
+                  </a:lnTo>
+                  <a:lnTo>
+                    <a:pt x="987660" y="330611"/>
+                  </a:lnTo>
+                  <a:lnTo>
+                    <a:pt x="1058207" y="351938"/>
+                  </a:lnTo>
+                  <a:lnTo>
+                    <a:pt x="1128754" y="372982"/>
+                  </a:lnTo>
+                  <a:lnTo>
+                    <a:pt x="1199301" y="393746"/>
+                  </a:lnTo>
+                  <a:lnTo>
+                    <a:pt x="1269849" y="414233"/>
+                  </a:lnTo>
+                  <a:lnTo>
+                    <a:pt x="1340396" y="434448"/>
+                  </a:lnTo>
+                  <a:lnTo>
+                    <a:pt x="1410943" y="454394"/>
+                  </a:lnTo>
+                  <a:lnTo>
+                    <a:pt x="1481490" y="474075"/>
+                  </a:lnTo>
+                  <a:lnTo>
+                    <a:pt x="1552037" y="493494"/>
+                  </a:lnTo>
+                  <a:lnTo>
+                    <a:pt x="1622584" y="512655"/>
+                  </a:lnTo>
+                  <a:lnTo>
+                    <a:pt x="1693132" y="531560"/>
+                  </a:lnTo>
+                  <a:lnTo>
+                    <a:pt x="1763679" y="550215"/>
+                  </a:lnTo>
+                  <a:lnTo>
+                    <a:pt x="1834226" y="568621"/>
+                  </a:lnTo>
+                  <a:lnTo>
+                    <a:pt x="1904773" y="586782"/>
+                  </a:lnTo>
+                  <a:lnTo>
+                    <a:pt x="1975320" y="604702"/>
+                  </a:lnTo>
+                  <a:lnTo>
+                    <a:pt x="2045868" y="622383"/>
+                  </a:lnTo>
+                  <a:lnTo>
+                    <a:pt x="2116415" y="639829"/>
+                  </a:lnTo>
+                  <a:lnTo>
+                    <a:pt x="2186962" y="657043"/>
+                  </a:lnTo>
+                  <a:lnTo>
+                    <a:pt x="2257509" y="674028"/>
+                  </a:lnTo>
+                  <a:lnTo>
+                    <a:pt x="2328056" y="690787"/>
+                  </a:lnTo>
+                  <a:lnTo>
+                    <a:pt x="2398603" y="707323"/>
+                  </a:lnTo>
+                  <a:lnTo>
+                    <a:pt x="2469151" y="723639"/>
+                  </a:lnTo>
+                  <a:lnTo>
+                    <a:pt x="2539698" y="739739"/>
+                  </a:lnTo>
+                  <a:lnTo>
+                    <a:pt x="2610245" y="755624"/>
+                  </a:lnTo>
+                  <a:lnTo>
+                    <a:pt x="2680792" y="771297"/>
+                  </a:lnTo>
+                  <a:lnTo>
+                    <a:pt x="2751339" y="786762"/>
+                  </a:lnTo>
+                  <a:lnTo>
+                    <a:pt x="2821886" y="802022"/>
+                  </a:lnTo>
+                  <a:lnTo>
+                    <a:pt x="2892434" y="817078"/>
+                  </a:lnTo>
+                  <a:lnTo>
+                    <a:pt x="2962981" y="831934"/>
+                  </a:lnTo>
+                  <a:lnTo>
+                    <a:pt x="3033528" y="846593"/>
+                  </a:lnTo>
+                  <a:lnTo>
+                    <a:pt x="3104075" y="861056"/>
+                  </a:lnTo>
+                  <a:lnTo>
+                    <a:pt x="3174622" y="875327"/>
+                  </a:lnTo>
+                  <a:lnTo>
+                    <a:pt x="3245169" y="889409"/>
+                  </a:lnTo>
+                  <a:lnTo>
+                    <a:pt x="3315717" y="903303"/>
+                  </a:lnTo>
+                  <a:lnTo>
+                    <a:pt x="3386264" y="917012"/>
+                  </a:lnTo>
+                  <a:lnTo>
+                    <a:pt x="3456811" y="930539"/>
+                  </a:lnTo>
+                  <a:lnTo>
+                    <a:pt x="3527358" y="943885"/>
+                  </a:lnTo>
+                  <a:lnTo>
+                    <a:pt x="3597905" y="957055"/>
+                  </a:lnTo>
+                  <a:lnTo>
+                    <a:pt x="3668452" y="970049"/>
+                  </a:lnTo>
+                  <a:lnTo>
+                    <a:pt x="3739000" y="982870"/>
+                  </a:lnTo>
+                  <a:lnTo>
+                    <a:pt x="3809547" y="995521"/>
+                  </a:lnTo>
+                  <a:lnTo>
+                    <a:pt x="3880094" y="1008003"/>
+                  </a:lnTo>
+                  <a:lnTo>
+                    <a:pt x="3950641" y="1020320"/>
+                  </a:lnTo>
+                  <a:lnTo>
+                    <a:pt x="4021188" y="1032472"/>
+                  </a:lnTo>
+                  <a:lnTo>
+                    <a:pt x="4091736" y="1044463"/>
+                  </a:lnTo>
+                  <a:lnTo>
+                    <a:pt x="4162283" y="1056294"/>
+                  </a:lnTo>
+                  <a:lnTo>
+                    <a:pt x="4232830" y="1067968"/>
+                  </a:lnTo>
+                  <a:lnTo>
+                    <a:pt x="4303377" y="1079487"/>
+                  </a:lnTo>
+                  <a:lnTo>
+                    <a:pt x="4373924" y="1090852"/>
+                  </a:lnTo>
+                  <a:lnTo>
+                    <a:pt x="4444471" y="1102067"/>
+                  </a:lnTo>
+                  <a:lnTo>
+                    <a:pt x="4515019" y="1113132"/>
+                  </a:lnTo>
+                  <a:lnTo>
+                    <a:pt x="4585566" y="1124050"/>
+                  </a:lnTo>
+                  <a:lnTo>
+                    <a:pt x="4656113" y="1134822"/>
+                  </a:lnTo>
+                  <a:lnTo>
+                    <a:pt x="4726660" y="1145452"/>
+                  </a:lnTo>
+                  <a:lnTo>
+                    <a:pt x="4797207" y="1155940"/>
+                  </a:lnTo>
+                  <a:lnTo>
+                    <a:pt x="4867754" y="1166288"/>
+                  </a:lnTo>
+                  <a:lnTo>
+                    <a:pt x="4938302" y="1176499"/>
+                  </a:lnTo>
+                  <a:lnTo>
+                    <a:pt x="5008849" y="1186574"/>
+                  </a:lnTo>
+                  <a:lnTo>
+                    <a:pt x="5079396" y="1196515"/>
+                  </a:lnTo>
+                  <a:lnTo>
+                    <a:pt x="5149943" y="1206323"/>
+                  </a:lnTo>
+                  <a:lnTo>
+                    <a:pt x="5220490" y="1216002"/>
+                  </a:lnTo>
+                  <a:lnTo>
+                    <a:pt x="5291037" y="1225551"/>
+                  </a:lnTo>
+                  <a:lnTo>
+                    <a:pt x="5361585" y="1234973"/>
+                  </a:lnTo>
+                  <a:lnTo>
+                    <a:pt x="5432132" y="1244271"/>
+                  </a:lnTo>
+                  <a:lnTo>
+                    <a:pt x="5502679" y="1253444"/>
+                  </a:lnTo>
+                  <a:lnTo>
+                    <a:pt x="5573226" y="1262495"/>
+                  </a:lnTo>
+                  <a:lnTo>
+                    <a:pt x="5643773" y="1271426"/>
+                  </a:lnTo>
+                  <a:lnTo>
+                    <a:pt x="5714320" y="1280238"/>
+                  </a:lnTo>
+                  <a:lnTo>
+                    <a:pt x="5784868" y="1288933"/>
+                  </a:lnTo>
+                  <a:lnTo>
+                    <a:pt x="5855415" y="1297513"/>
+                  </a:lnTo>
+                  <a:lnTo>
+                    <a:pt x="5925962" y="1305978"/>
+                  </a:lnTo>
+                  <a:lnTo>
+                    <a:pt x="5996509" y="1314330"/>
+                  </a:lnTo>
+                  <a:lnTo>
+                    <a:pt x="6067056" y="1322572"/>
+                  </a:lnTo>
+                  <a:lnTo>
+                    <a:pt x="6137604" y="1330704"/>
+                  </a:lnTo>
+                  <a:lnTo>
+                    <a:pt x="6208151" y="1338727"/>
+                  </a:lnTo>
+                  <a:lnTo>
+                    <a:pt x="6278698" y="1346644"/>
+                  </a:lnTo>
+                  <a:lnTo>
+                    <a:pt x="6349245" y="1354456"/>
+                  </a:lnTo>
+                  <a:lnTo>
+                    <a:pt x="6419792" y="1362163"/>
+                  </a:lnTo>
+                  <a:lnTo>
+                    <a:pt x="6490339" y="1369769"/>
+                  </a:lnTo>
+                  <a:lnTo>
+                    <a:pt x="6560887" y="1377273"/>
+                  </a:lnTo>
+                  <a:lnTo>
+                    <a:pt x="6631434" y="1384677"/>
+                  </a:lnTo>
+                  <a:lnTo>
+                    <a:pt x="6701981" y="1391982"/>
+                  </a:lnTo>
+                  <a:lnTo>
+                    <a:pt x="6772528" y="1399191"/>
+                  </a:lnTo>
+                  <a:lnTo>
+                    <a:pt x="6843075" y="1406303"/>
+                  </a:lnTo>
+                  <a:lnTo>
+                    <a:pt x="6913622" y="1413321"/>
+                  </a:lnTo>
+                  <a:lnTo>
+                    <a:pt x="6984170" y="1420246"/>
                   </a:lnTo>
                 </a:path>
               </a:pathLst>
@@ -4419,21 +4419,21 @@
           </p:nvSpPr>
           <p:spPr>
             <a:xfrm>
-              <a:off x="817517" y="4727786"/>
-              <a:ext cx="7799693" cy="0"/>
+              <a:off x="915645" y="4684908"/>
+              <a:ext cx="7682587" cy="0"/>
             </a:xfrm>
             <a:custGeom>
               <a:avLst/>
               <a:pathLst>
-                <a:path w="7799693" h="0">
+                <a:path w="7682587" h="0">
                   <a:moveTo>
                     <a:pt x="0" y="0"/>
                   </a:moveTo>
                   <a:lnTo>
-                    <a:pt x="7799693" y="0"/>
-                  </a:lnTo>
-                  <a:lnTo>
-                    <a:pt x="7799693" y="0"/>
+                    <a:pt x="7682587" y="0"/>
+                  </a:lnTo>
+                  <a:lnTo>
+                    <a:pt x="7682587" y="0"/>
                   </a:lnTo>
                 </a:path>
               </a:pathLst>
@@ -4462,15 +4462,15 @@
           </p:nvSpPr>
           <p:spPr>
             <a:xfrm>
-              <a:off x="6071765" y="2073503"/>
-              <a:ext cx="0" cy="3649639"/>
+              <a:off x="6091004" y="2209169"/>
+              <a:ext cx="0" cy="3404141"/>
             </a:xfrm>
             <a:custGeom>
               <a:avLst/>
               <a:pathLst>
-                <a:path w="0" h="3649639">
+                <a:path w="0" h="3404141">
                   <a:moveTo>
-                    <a:pt x="0" y="3649639"/>
+                    <a:pt x="0" y="3404141"/>
                   </a:moveTo>
                   <a:lnTo>
                     <a:pt x="0" y="0"/>
@@ -4505,15 +4505,15 @@
           </p:nvSpPr>
           <p:spPr>
             <a:xfrm>
-              <a:off x="5051213" y="2073503"/>
-              <a:ext cx="0" cy="3649639"/>
+              <a:off x="5085775" y="2209169"/>
+              <a:ext cx="0" cy="3404141"/>
             </a:xfrm>
             <a:custGeom>
               <a:avLst/>
               <a:pathLst>
-                <a:path w="0" h="3649639">
+                <a:path w="0" h="3404141">
                   <a:moveTo>
-                    <a:pt x="0" y="3649639"/>
+                    <a:pt x="0" y="3404141"/>
                   </a:moveTo>
                   <a:lnTo>
                     <a:pt x="0" y="0"/>
@@ -4548,15 +4548,15 @@
           </p:nvSpPr>
           <p:spPr>
             <a:xfrm>
-              <a:off x="6733531" y="2073503"/>
-              <a:ext cx="0" cy="3649639"/>
+              <a:off x="6742834" y="2209169"/>
+              <a:ext cx="0" cy="3404141"/>
             </a:xfrm>
             <a:custGeom>
               <a:avLst/>
               <a:pathLst>
-                <a:path w="0" h="3649639">
+                <a:path w="0" h="3404141">
                   <a:moveTo>
-                    <a:pt x="0" y="3649639"/>
+                    <a:pt x="0" y="3404141"/>
                   </a:moveTo>
                   <a:lnTo>
                     <a:pt x="0" y="0"/>
@@ -4591,8 +4591,8 @@
           </p:nvSpPr>
           <p:spPr>
             <a:xfrm>
-              <a:off x="692708" y="5517199"/>
-              <a:ext cx="62179" cy="80101"/>
+              <a:off x="756929" y="5407599"/>
+              <a:ext cx="79004" cy="101955"/>
             </a:xfrm>
             <a:prstGeom prst="rect">
               <a:avLst/>
@@ -4605,7 +4605,7 @@
             <a:p>
               <a:pPr algn="l" marL="0" marR="0" indent="0">
                 <a:lnSpc>
-                  <a:spcPts val="880"/>
+                  <a:spcPts val="1120"/>
                 </a:lnSpc>
                 <a:spcBef>
                   <a:spcPts val="0"/>
@@ -4615,7 +4615,7 @@
                 </a:spcAft>
               </a:pPr>
               <a:r>
-                <a:rPr sz="880">
+                <a:rPr sz="1120">
                   <a:solidFill>
                     <a:srgbClr val="4D4D4D">
                       <a:alpha val="100000"/>
@@ -4637,8 +4637,8 @@
           </p:nvSpPr>
           <p:spPr>
             <a:xfrm>
-              <a:off x="692708" y="4687735"/>
-              <a:ext cx="62179" cy="80101"/>
+              <a:off x="756929" y="4633931"/>
+              <a:ext cx="79004" cy="101955"/>
             </a:xfrm>
             <a:prstGeom prst="rect">
               <a:avLst/>
@@ -4651,7 +4651,7 @@
             <a:p>
               <a:pPr algn="l" marL="0" marR="0" indent="0">
                 <a:lnSpc>
-                  <a:spcPts val="880"/>
+                  <a:spcPts val="1120"/>
                 </a:lnSpc>
                 <a:spcBef>
                   <a:spcPts val="0"/>
@@ -4661,7 +4661,7 @@
                 </a:spcAft>
               </a:pPr>
               <a:r>
-                <a:rPr sz="880">
+                <a:rPr sz="1120">
                   <a:solidFill>
                     <a:srgbClr val="4D4D4D">
                       <a:alpha val="100000"/>
@@ -4683,8 +4683,8 @@
           </p:nvSpPr>
           <p:spPr>
             <a:xfrm>
-              <a:off x="692708" y="3858272"/>
-              <a:ext cx="62179" cy="80101"/>
+              <a:off x="756929" y="3860262"/>
+              <a:ext cx="79004" cy="101955"/>
             </a:xfrm>
             <a:prstGeom prst="rect">
               <a:avLst/>
@@ -4697,7 +4697,7 @@
             <a:p>
               <a:pPr algn="l" marL="0" marR="0" indent="0">
                 <a:lnSpc>
-                  <a:spcPts val="880"/>
+                  <a:spcPts val="1120"/>
                 </a:lnSpc>
                 <a:spcBef>
                   <a:spcPts val="0"/>
@@ -4707,7 +4707,7 @@
                 </a:spcAft>
               </a:pPr>
               <a:r>
-                <a:rPr sz="880">
+                <a:rPr sz="1120">
                   <a:solidFill>
                     <a:srgbClr val="4D4D4D">
                       <a:alpha val="100000"/>
@@ -4729,8 +4729,8 @@
           </p:nvSpPr>
           <p:spPr>
             <a:xfrm>
-              <a:off x="692708" y="3028808"/>
-              <a:ext cx="62179" cy="80101"/>
+              <a:off x="756929" y="3086593"/>
+              <a:ext cx="79004" cy="101955"/>
             </a:xfrm>
             <a:prstGeom prst="rect">
               <a:avLst/>
@@ -4743,7 +4743,7 @@
             <a:p>
               <a:pPr algn="l" marL="0" marR="0" indent="0">
                 <a:lnSpc>
-                  <a:spcPts val="880"/>
+                  <a:spcPts val="1120"/>
                 </a:lnSpc>
                 <a:spcBef>
                   <a:spcPts val="0"/>
@@ -4753,7 +4753,7 @@
                 </a:spcAft>
               </a:pPr>
               <a:r>
-                <a:rPr sz="880">
+                <a:rPr sz="1120">
                   <a:solidFill>
                     <a:srgbClr val="4D4D4D">
                       <a:alpha val="100000"/>
@@ -4775,8 +4775,8 @@
           </p:nvSpPr>
           <p:spPr>
             <a:xfrm>
-              <a:off x="692708" y="2199345"/>
-              <a:ext cx="62179" cy="80101"/>
+              <a:off x="756929" y="2312925"/>
+              <a:ext cx="79004" cy="101955"/>
             </a:xfrm>
             <a:prstGeom prst="rect">
               <a:avLst/>
@@ -4789,7 +4789,7 @@
             <a:p>
               <a:pPr algn="l" marL="0" marR="0" indent="0">
                 <a:lnSpc>
-                  <a:spcPts val="880"/>
+                  <a:spcPts val="1120"/>
                 </a:lnSpc>
                 <a:spcBef>
                   <a:spcPts val="0"/>
@@ -4799,7 +4799,7 @@
                 </a:spcAft>
               </a:pPr>
               <a:r>
-                <a:rPr sz="880">
+                <a:rPr sz="1120">
                   <a:solidFill>
                     <a:srgbClr val="4D4D4D">
                       <a:alpha val="100000"/>
@@ -4821,8 +4821,8 @@
           </p:nvSpPr>
           <p:spPr>
             <a:xfrm>
-              <a:off x="2331636" y="5785772"/>
-              <a:ext cx="161574" cy="80101"/>
+              <a:off x="2383963" y="5693022"/>
+              <a:ext cx="205282" cy="101955"/>
             </a:xfrm>
             <a:prstGeom prst="rect">
               <a:avLst/>
@@ -4835,7 +4835,7 @@
             <a:p>
               <a:pPr algn="l" marL="0" marR="0" indent="0">
                 <a:lnSpc>
-                  <a:spcPts val="880"/>
+                  <a:spcPts val="1120"/>
                 </a:lnSpc>
                 <a:spcBef>
                   <a:spcPts val="0"/>
@@ -4845,7 +4845,7 @@
                 </a:spcAft>
               </a:pPr>
               <a:r>
-                <a:rPr sz="880">
+                <a:rPr sz="1120">
                   <a:solidFill>
                     <a:srgbClr val="4D4D4D">
                       <a:alpha val="100000"/>
@@ -4867,8 +4867,8 @@
           </p:nvSpPr>
           <p:spPr>
             <a:xfrm>
-              <a:off x="4181509" y="5785772"/>
-              <a:ext cx="161574" cy="80101"/>
+              <a:off x="4206062" y="5693022"/>
+              <a:ext cx="205282" cy="101955"/>
             </a:xfrm>
             <a:prstGeom prst="rect">
               <a:avLst/>
@@ -4881,7 +4881,7 @@
             <a:p>
               <a:pPr algn="l" marL="0" marR="0" indent="0">
                 <a:lnSpc>
-                  <a:spcPts val="880"/>
+                  <a:spcPts val="1120"/>
                 </a:lnSpc>
                 <a:spcBef>
                   <a:spcPts val="0"/>
@@ -4891,7 +4891,7 @@
                 </a:spcAft>
               </a:pPr>
               <a:r>
-                <a:rPr sz="880">
+                <a:rPr sz="1120">
                   <a:solidFill>
                     <a:srgbClr val="4D4D4D">
                       <a:alpha val="100000"/>
@@ -4913,8 +4913,8 @@
           </p:nvSpPr>
           <p:spPr>
             <a:xfrm>
-              <a:off x="6081080" y="5785772"/>
-              <a:ext cx="62179" cy="80101"/>
+              <a:off x="6091300" y="5693022"/>
+              <a:ext cx="79004" cy="101955"/>
             </a:xfrm>
             <a:prstGeom prst="rect">
               <a:avLst/>
@@ -4927,7 +4927,7 @@
             <a:p>
               <a:pPr algn="l" marL="0" marR="0" indent="0">
                 <a:lnSpc>
-                  <a:spcPts val="880"/>
+                  <a:spcPts val="1120"/>
                 </a:lnSpc>
                 <a:spcBef>
                   <a:spcPts val="0"/>
@@ -4937,7 +4937,7 @@
                 </a:spcAft>
               </a:pPr>
               <a:r>
-                <a:rPr sz="880">
+                <a:rPr sz="1120">
                   <a:solidFill>
                     <a:srgbClr val="4D4D4D">
                       <a:alpha val="100000"/>
@@ -4959,8 +4959,8 @@
           </p:nvSpPr>
           <p:spPr>
             <a:xfrm>
-              <a:off x="7899863" y="5785772"/>
-              <a:ext cx="124358" cy="80101"/>
+              <a:off x="7873896" y="5693022"/>
+              <a:ext cx="158008" cy="101955"/>
             </a:xfrm>
             <a:prstGeom prst="rect">
               <a:avLst/>
@@ -4973,7 +4973,7 @@
             <a:p>
               <a:pPr algn="l" marL="0" marR="0" indent="0">
                 <a:lnSpc>
-                  <a:spcPts val="880"/>
+                  <a:spcPts val="1120"/>
                 </a:lnSpc>
                 <a:spcBef>
                   <a:spcPts val="0"/>
@@ -4983,7 +4983,7 @@
                 </a:spcAft>
               </a:pPr>
               <a:r>
-                <a:rPr sz="880">
+                <a:rPr sz="1120">
                   <a:solidFill>
                     <a:srgbClr val="4D4D4D">
                       <a:alpha val="100000"/>
@@ -5005,8 +5005,8 @@
           </p:nvSpPr>
           <p:spPr>
             <a:xfrm>
-              <a:off x="3832408" y="5925448"/>
-              <a:ext cx="1769912" cy="100218"/>
+              <a:off x="3630809" y="5870717"/>
+              <a:ext cx="2252258" cy="127558"/>
             </a:xfrm>
             <a:prstGeom prst="rect">
               <a:avLst/>
@@ -5019,7 +5019,7 @@
             <a:p>
               <a:pPr algn="l" marL="0" marR="0" indent="0">
                 <a:lnSpc>
-                  <a:spcPts val="1100"/>
+                  <a:spcPts val="1400"/>
                 </a:lnSpc>
                 <a:spcBef>
                   <a:spcPts val="0"/>
@@ -5029,7 +5029,7 @@
                 </a:spcAft>
               </a:pPr>
               <a:r>
-                <a:rPr sz="1100">
+                <a:rPr sz="1400">
                   <a:solidFill>
                     <a:srgbClr val="000000">
                       <a:alpha val="100000"/>
@@ -5051,8 +5051,8 @@
           </p:nvSpPr>
           <p:spPr>
             <a:xfrm rot="-5400000">
-              <a:off x="68446" y="3848213"/>
-              <a:ext cx="1016904" cy="100218"/>
+              <a:off x="-37527" y="3847460"/>
+              <a:ext cx="1294150" cy="127558"/>
             </a:xfrm>
             <a:prstGeom prst="rect">
               <a:avLst/>
@@ -5065,7 +5065,7 @@
             <a:p>
               <a:pPr algn="l" marL="0" marR="0" indent="0">
                 <a:lnSpc>
-                  <a:spcPts val="1100"/>
+                  <a:spcPts val="1400"/>
                 </a:lnSpc>
                 <a:spcBef>
                   <a:spcPts val="0"/>
@@ -5075,7 +5075,7 @@
                 </a:spcAft>
               </a:pPr>
               <a:r>
-                <a:rPr sz="1100">
+                <a:rPr sz="1400">
                   <a:solidFill>
                     <a:srgbClr val="000000">
                       <a:alpha val="100000"/>
@@ -5097,8 +5097,8 @@
           </p:nvSpPr>
           <p:spPr>
             <a:xfrm>
-              <a:off x="817517" y="1896563"/>
-              <a:ext cx="5413065" cy="82021"/>
+              <a:off x="915645" y="1977589"/>
+              <a:ext cx="7220102" cy="109362"/>
             </a:xfrm>
             <a:prstGeom prst="rect">
               <a:avLst/>
@@ -5111,7 +5111,7 @@
             <a:p>
               <a:pPr algn="l" marL="0" marR="0" indent="0">
                 <a:lnSpc>
-                  <a:spcPts val="900"/>
+                  <a:spcPts val="1200"/>
                 </a:lnSpc>
                 <a:spcBef>
                   <a:spcPts val="0"/>
@@ -5121,7 +5121,7 @@
                 </a:spcAft>
               </a:pPr>
               <a:r>
-                <a:rPr sz="900">
+                <a:rPr sz="1200">
                   <a:solidFill>
                     <a:srgbClr val="404040">
                       <a:alpha val="100000"/>
@@ -5143,8 +5143,8 @@
           </p:nvSpPr>
           <p:spPr>
             <a:xfrm>
-              <a:off x="817517" y="1669789"/>
-              <a:ext cx="1936790" cy="120152"/>
+              <a:off x="915645" y="1688767"/>
+              <a:ext cx="2465771" cy="153070"/>
             </a:xfrm>
             <a:prstGeom prst="rect">
               <a:avLst/>
@@ -5157,7 +5157,7 @@
             <a:p>
               <a:pPr algn="l" marL="0" marR="0" indent="0">
                 <a:lnSpc>
-                  <a:spcPts val="1320"/>
+                  <a:spcPts val="1680"/>
                 </a:lnSpc>
                 <a:spcBef>
                   <a:spcPts val="0"/>
@@ -5167,7 +5167,7 @@
                 </a:spcAft>
               </a:pPr>
               <a:r>
-                <a:rPr sz="1320">
+                <a:rPr sz="1680">
                   <a:solidFill>
                     <a:srgbClr val="000000">
                       <a:alpha val="100000"/>
